--- a/zajecia/robo/robo_w2.pptx
+++ b/zajecia/robo/robo_w2.pptx
@@ -5781,7 +5781,7 @@
         <p:spPr>
           <a:xfrm>
             <a:off x="369180" y="1035872"/>
-            <a:ext cx="7346542" cy="3231654"/>
+            <a:ext cx="7346542" cy="2989088"/>
           </a:xfrm>
           <a:prstGeom prst="rect">
             <a:avLst/>
@@ -5797,11 +5797,11 @@
           <a:p>
             <a:pPr>
               <a:lnSpc>
-                <a:spcPts val="1300"/>
+                <a:spcPts val="1200"/>
               </a:lnSpc>
             </a:pPr>
             <a:r>
-              <a:rPr lang="pl-PL" sz="1200" dirty="0" smtClean="0">
+              <a:rPr lang="pl-PL" sz="1200" dirty="0">
                 <a:solidFill>
                   <a:srgbClr val="C586C0"/>
                 </a:solidFill>
@@ -5810,16 +5810,16 @@
               <a:t>import</a:t>
             </a:r>
             <a:r>
-              <a:rPr lang="pl-PL" sz="1200" dirty="0" smtClean="0">
-                <a:solidFill>
-                  <a:srgbClr val="BBBEBF"/>
+              <a:rPr lang="pl-PL" sz="1200" dirty="0">
+                <a:solidFill>
+                  <a:srgbClr val="CCCCCC"/>
                 </a:solidFill>
                 <a:latin typeface="Consolas" panose="020B0609020204030204" pitchFamily="49" charset="0"/>
               </a:rPr>
               <a:t> </a:t>
             </a:r>
             <a:r>
-              <a:rPr lang="pl-PL" sz="1200" dirty="0" err="1" smtClean="0">
+              <a:rPr lang="pl-PL" sz="1200" dirty="0" err="1">
                 <a:solidFill>
                   <a:srgbClr val="4EC9B0"/>
                 </a:solidFill>
@@ -5828,16 +5828,16 @@
               <a:t>numpy</a:t>
             </a:r>
             <a:r>
-              <a:rPr lang="pl-PL" sz="1200" dirty="0" smtClean="0">
-                <a:solidFill>
-                  <a:srgbClr val="BBBEBF"/>
+              <a:rPr lang="pl-PL" sz="1200" dirty="0">
+                <a:solidFill>
+                  <a:srgbClr val="CCCCCC"/>
                 </a:solidFill>
                 <a:latin typeface="Consolas" panose="020B0609020204030204" pitchFamily="49" charset="0"/>
               </a:rPr>
               <a:t> </a:t>
             </a:r>
             <a:r>
-              <a:rPr lang="pl-PL" sz="1200" dirty="0" smtClean="0">
+              <a:rPr lang="pl-PL" sz="1200" dirty="0">
                 <a:solidFill>
                   <a:srgbClr val="C586C0"/>
                 </a:solidFill>
@@ -5846,16 +5846,16 @@
               <a:t>as</a:t>
             </a:r>
             <a:r>
-              <a:rPr lang="pl-PL" sz="1200" dirty="0" smtClean="0">
-                <a:solidFill>
-                  <a:srgbClr val="BBBEBF"/>
+              <a:rPr lang="pl-PL" sz="1200" dirty="0">
+                <a:solidFill>
+                  <a:srgbClr val="CCCCCC"/>
                 </a:solidFill>
                 <a:latin typeface="Consolas" panose="020B0609020204030204" pitchFamily="49" charset="0"/>
               </a:rPr>
               <a:t> </a:t>
             </a:r>
             <a:r>
-              <a:rPr lang="pl-PL" sz="1200" dirty="0" err="1" smtClean="0">
+              <a:rPr lang="pl-PL" sz="1200" dirty="0" err="1">
                 <a:solidFill>
                   <a:srgbClr val="4EC9B0"/>
                 </a:solidFill>
@@ -5863,9 +5863,9 @@
               </a:rPr>
               <a:t>np</a:t>
             </a:r>
-            <a:endParaRPr lang="pl-PL" sz="1200" dirty="0" smtClean="0">
+            <a:endParaRPr lang="pl-PL" sz="1200" dirty="0">
               <a:solidFill>
-                <a:srgbClr val="BBBEBF"/>
+                <a:srgbClr val="CCCCCC"/>
               </a:solidFill>
               <a:latin typeface="Consolas" panose="020B0609020204030204" pitchFamily="49" charset="0"/>
             </a:endParaRPr>
@@ -5873,46 +5873,46 @@
           <a:p>
             <a:pPr>
               <a:lnSpc>
-                <a:spcPts val="1300"/>
+                <a:spcPts val="1200"/>
               </a:lnSpc>
             </a:pPr>
             <a:r>
-              <a:rPr lang="pl-PL" sz="1200" dirty="0" smtClean="0">
-                <a:solidFill>
-                  <a:srgbClr val="BBBEBF"/>
+              <a:rPr lang="pl-PL" sz="1200" dirty="0">
+                <a:solidFill>
+                  <a:srgbClr val="CCCCCC"/>
                 </a:solidFill>
                 <a:latin typeface="Consolas" panose="020B0609020204030204" pitchFamily="49" charset="0"/>
               </a:rPr>
               <a:t/>
             </a:r>
             <a:br>
-              <a:rPr lang="pl-PL" sz="1200" dirty="0" smtClean="0">
-                <a:solidFill>
-                  <a:srgbClr val="BBBEBF"/>
+              <a:rPr lang="pl-PL" sz="1200" dirty="0">
+                <a:solidFill>
+                  <a:srgbClr val="CCCCCC"/>
                 </a:solidFill>
                 <a:latin typeface="Consolas" panose="020B0609020204030204" pitchFamily="49" charset="0"/>
               </a:rPr>
             </a:br>
             <a:r>
-              <a:rPr lang="pl-PL" sz="1200" dirty="0" err="1" smtClean="0">
-                <a:solidFill>
-                  <a:srgbClr val="FF7B72"/>
+              <a:rPr lang="pl-PL" sz="1200" dirty="0" err="1">
+                <a:solidFill>
+                  <a:srgbClr val="569CD6"/>
                 </a:solidFill>
                 <a:latin typeface="Consolas" panose="020B0609020204030204" pitchFamily="49" charset="0"/>
               </a:rPr>
               <a:t>class</a:t>
             </a:r>
             <a:r>
-              <a:rPr lang="pl-PL" sz="1200" dirty="0" smtClean="0">
-                <a:solidFill>
-                  <a:srgbClr val="BBBEBF"/>
+              <a:rPr lang="pl-PL" sz="1200" dirty="0">
+                <a:solidFill>
+                  <a:srgbClr val="CCCCCC"/>
                 </a:solidFill>
                 <a:latin typeface="Consolas" panose="020B0609020204030204" pitchFamily="49" charset="0"/>
               </a:rPr>
               <a:t> </a:t>
             </a:r>
             <a:r>
-              <a:rPr lang="pl-PL" sz="1200" dirty="0" err="1" smtClean="0">
+              <a:rPr lang="pl-PL" sz="1200" dirty="0" err="1">
                 <a:solidFill>
                   <a:srgbClr val="4EC9B0"/>
                 </a:solidFill>
@@ -5921,9 +5921,9 @@
               <a:t>ImuIntegrator</a:t>
             </a:r>
             <a:r>
-              <a:rPr lang="pl-PL" sz="1200" dirty="0" smtClean="0">
-                <a:solidFill>
-                  <a:srgbClr val="BBBEBF"/>
+              <a:rPr lang="pl-PL" sz="1200" dirty="0">
+                <a:solidFill>
+                  <a:srgbClr val="CCCCCC"/>
                 </a:solidFill>
                 <a:latin typeface="Consolas" panose="020B0609020204030204" pitchFamily="49" charset="0"/>
               </a:rPr>
@@ -5933,38 +5933,38 @@
           <a:p>
             <a:pPr>
               <a:lnSpc>
-                <a:spcPts val="1300"/>
+                <a:spcPts val="1200"/>
               </a:lnSpc>
             </a:pPr>
             <a:r>
-              <a:rPr lang="pl-PL" sz="1200" dirty="0" smtClean="0">
-                <a:solidFill>
-                  <a:srgbClr val="BBBEBF"/>
+              <a:rPr lang="pl-PL" sz="1200" dirty="0">
+                <a:solidFill>
+                  <a:srgbClr val="CCCCCC"/>
                 </a:solidFill>
                 <a:latin typeface="Consolas" panose="020B0609020204030204" pitchFamily="49" charset="0"/>
               </a:rPr>
               <a:t>    </a:t>
             </a:r>
             <a:r>
-              <a:rPr lang="pl-PL" sz="1200" dirty="0" smtClean="0">
-                <a:solidFill>
-                  <a:srgbClr val="FF7B72"/>
+              <a:rPr lang="pl-PL" sz="1200" dirty="0">
+                <a:solidFill>
+                  <a:srgbClr val="569CD6"/>
                 </a:solidFill>
                 <a:latin typeface="Consolas" panose="020B0609020204030204" pitchFamily="49" charset="0"/>
               </a:rPr>
               <a:t>def</a:t>
             </a:r>
             <a:r>
-              <a:rPr lang="pl-PL" sz="1200" dirty="0" smtClean="0">
-                <a:solidFill>
-                  <a:srgbClr val="BBBEBF"/>
+              <a:rPr lang="pl-PL" sz="1200" dirty="0">
+                <a:solidFill>
+                  <a:srgbClr val="CCCCCC"/>
                 </a:solidFill>
                 <a:latin typeface="Consolas" panose="020B0609020204030204" pitchFamily="49" charset="0"/>
               </a:rPr>
               <a:t> </a:t>
             </a:r>
             <a:r>
-              <a:rPr lang="pl-PL" sz="1200" dirty="0" smtClean="0">
+              <a:rPr lang="pl-PL" sz="1200" dirty="0">
                 <a:solidFill>
                   <a:srgbClr val="DCDCAA"/>
                 </a:solidFill>
@@ -5973,7 +5973,7 @@
               <a:t>__</a:t>
             </a:r>
             <a:r>
-              <a:rPr lang="pl-PL" sz="1200" dirty="0" err="1" smtClean="0">
+              <a:rPr lang="pl-PL" sz="1200" dirty="0" err="1">
                 <a:solidFill>
                   <a:srgbClr val="DCDCAA"/>
                 </a:solidFill>
@@ -5982,7 +5982,7 @@
               <a:t>init</a:t>
             </a:r>
             <a:r>
-              <a:rPr lang="pl-PL" sz="1200" dirty="0" smtClean="0">
+              <a:rPr lang="pl-PL" sz="1200" dirty="0">
                 <a:solidFill>
                   <a:srgbClr val="DCDCAA"/>
                 </a:solidFill>
@@ -5991,27 +5991,27 @@
               <a:t>__</a:t>
             </a:r>
             <a:r>
-              <a:rPr lang="pl-PL" sz="1200" dirty="0" smtClean="0">
-                <a:solidFill>
-                  <a:srgbClr val="BBBEBF"/>
+              <a:rPr lang="pl-PL" sz="1200" dirty="0">
+                <a:solidFill>
+                  <a:srgbClr val="CCCCCC"/>
                 </a:solidFill>
                 <a:latin typeface="Consolas" panose="020B0609020204030204" pitchFamily="49" charset="0"/>
               </a:rPr>
               <a:t>(</a:t>
             </a:r>
             <a:r>
-              <a:rPr lang="pl-PL" sz="1200" dirty="0" err="1" smtClean="0">
-                <a:solidFill>
-                  <a:srgbClr val="C9D1D9"/>
+              <a:rPr lang="pl-PL" sz="1200" dirty="0" err="1">
+                <a:solidFill>
+                  <a:srgbClr val="9CDCFE"/>
                 </a:solidFill>
                 <a:latin typeface="Consolas" panose="020B0609020204030204" pitchFamily="49" charset="0"/>
               </a:rPr>
               <a:t>self</a:t>
             </a:r>
             <a:r>
-              <a:rPr lang="pl-PL" sz="1200" dirty="0" smtClean="0">
-                <a:solidFill>
-                  <a:srgbClr val="BBBEBF"/>
+              <a:rPr lang="pl-PL" sz="1200" dirty="0">
+                <a:solidFill>
+                  <a:srgbClr val="CCCCCC"/>
                 </a:solidFill>
                 <a:latin typeface="Consolas" panose="020B0609020204030204" pitchFamily="49" charset="0"/>
               </a:rPr>
@@ -6021,56 +6021,47 @@
           <a:p>
             <a:pPr>
               <a:lnSpc>
-                <a:spcPts val="1300"/>
+                <a:spcPts val="1200"/>
               </a:lnSpc>
             </a:pPr>
             <a:r>
-              <a:rPr lang="pl-PL" sz="1200" dirty="0" smtClean="0">
-                <a:solidFill>
-                  <a:srgbClr val="BBBEBF"/>
+              <a:rPr lang="pl-PL" sz="1200" dirty="0">
+                <a:solidFill>
+                  <a:srgbClr val="CCCCCC"/>
                 </a:solidFill>
                 <a:latin typeface="Consolas" panose="020B0609020204030204" pitchFamily="49" charset="0"/>
               </a:rPr>
               <a:t>        </a:t>
             </a:r>
             <a:r>
-              <a:rPr lang="pl-PL" sz="1200" dirty="0" err="1" smtClean="0">
-                <a:solidFill>
-                  <a:srgbClr val="C9D1D9"/>
+              <a:rPr lang="pl-PL" sz="1200" dirty="0" err="1">
+                <a:solidFill>
+                  <a:srgbClr val="569CD6"/>
                 </a:solidFill>
                 <a:latin typeface="Consolas" panose="020B0609020204030204" pitchFamily="49" charset="0"/>
               </a:rPr>
               <a:t>self</a:t>
             </a:r>
             <a:r>
-              <a:rPr lang="pl-PL" sz="1200" dirty="0" err="1" smtClean="0">
-                <a:solidFill>
-                  <a:srgbClr val="BBBEBF"/>
-                </a:solidFill>
-                <a:latin typeface="Consolas" panose="020B0609020204030204" pitchFamily="49" charset="0"/>
-              </a:rPr>
-              <a:t>.</a:t>
-            </a:r>
-            <a:r>
-              <a:rPr lang="pl-PL" sz="1200" dirty="0" err="1" smtClean="0">
-                <a:solidFill>
-                  <a:srgbClr val="C9D1D9"/>
-                </a:solidFill>
-                <a:latin typeface="Consolas" panose="020B0609020204030204" pitchFamily="49" charset="0"/>
-              </a:rPr>
-              <a:t>yaw</a:t>
-            </a:r>
-            <a:r>
-              <a:rPr lang="pl-PL" sz="1200" dirty="0" smtClean="0">
-                <a:solidFill>
-                  <a:srgbClr val="BBBEBF"/>
+              <a:rPr lang="pl-PL" sz="1200" dirty="0" err="1">
+                <a:solidFill>
+                  <a:srgbClr val="CCCCCC"/>
+                </a:solidFill>
+                <a:latin typeface="Consolas" panose="020B0609020204030204" pitchFamily="49" charset="0"/>
+              </a:rPr>
+              <a:t>.yaw</a:t>
+            </a:r>
+            <a:r>
+              <a:rPr lang="pl-PL" sz="1200" dirty="0">
+                <a:solidFill>
+                  <a:srgbClr val="CCCCCC"/>
                 </a:solidFill>
                 <a:latin typeface="Consolas" panose="020B0609020204030204" pitchFamily="49" charset="0"/>
               </a:rPr>
               <a:t>   </a:t>
             </a:r>
             <a:r>
-              <a:rPr lang="pl-PL" sz="1200" dirty="0" smtClean="0">
+              <a:rPr lang="pl-PL" sz="1200" dirty="0">
                 <a:solidFill>
                   <a:srgbClr val="D4D4D4"/>
                 </a:solidFill>
@@ -6079,16 +6070,16 @@
               <a:t>=</a:t>
             </a:r>
             <a:r>
-              <a:rPr lang="pl-PL" sz="1200" dirty="0" smtClean="0">
-                <a:solidFill>
-                  <a:srgbClr val="BBBEBF"/>
+              <a:rPr lang="pl-PL" sz="1200" dirty="0">
+                <a:solidFill>
+                  <a:srgbClr val="CCCCCC"/>
                 </a:solidFill>
                 <a:latin typeface="Consolas" panose="020B0609020204030204" pitchFamily="49" charset="0"/>
               </a:rPr>
               <a:t> </a:t>
             </a:r>
             <a:r>
-              <a:rPr lang="pl-PL" sz="1200" dirty="0" smtClean="0">
+              <a:rPr lang="pl-PL" sz="1200" dirty="0">
                 <a:solidFill>
                   <a:srgbClr val="B5CEA8"/>
                 </a:solidFill>
@@ -6097,26 +6088,26 @@
               <a:t>0.0</a:t>
             </a:r>
             <a:r>
-              <a:rPr lang="pl-PL" sz="1200" dirty="0" smtClean="0">
-                <a:solidFill>
-                  <a:srgbClr val="BBBEBF"/>
+              <a:rPr lang="pl-PL" sz="1200" dirty="0">
+                <a:solidFill>
+                  <a:srgbClr val="CCCCCC"/>
                 </a:solidFill>
                 <a:latin typeface="Consolas" panose="020B0609020204030204" pitchFamily="49" charset="0"/>
               </a:rPr>
               <a:t>  </a:t>
             </a:r>
             <a:r>
-              <a:rPr lang="pl-PL" sz="1200" dirty="0" smtClean="0">
-                <a:solidFill>
-                  <a:srgbClr val="8B949E"/>
+              <a:rPr lang="pl-PL" sz="1200" dirty="0">
+                <a:solidFill>
+                  <a:srgbClr val="6A9955"/>
                 </a:solidFill>
                 <a:latin typeface="Consolas" panose="020B0609020204030204" pitchFamily="49" charset="0"/>
               </a:rPr>
               <a:t># [rad]</a:t>
             </a:r>
-            <a:endParaRPr lang="pl-PL" sz="1200" dirty="0" smtClean="0">
+            <a:endParaRPr lang="pl-PL" sz="1200" dirty="0">
               <a:solidFill>
-                <a:srgbClr val="BBBEBF"/>
+                <a:srgbClr val="CCCCCC"/>
               </a:solidFill>
               <a:latin typeface="Consolas" panose="020B0609020204030204" pitchFamily="49" charset="0"/>
             </a:endParaRPr>
@@ -6124,56 +6115,47 @@
           <a:p>
             <a:pPr>
               <a:lnSpc>
-                <a:spcPts val="1300"/>
+                <a:spcPts val="1200"/>
               </a:lnSpc>
             </a:pPr>
             <a:r>
-              <a:rPr lang="pl-PL" sz="1200" dirty="0" smtClean="0">
-                <a:solidFill>
-                  <a:srgbClr val="BBBEBF"/>
+              <a:rPr lang="pl-PL" sz="1200" dirty="0">
+                <a:solidFill>
+                  <a:srgbClr val="CCCCCC"/>
                 </a:solidFill>
                 <a:latin typeface="Consolas" panose="020B0609020204030204" pitchFamily="49" charset="0"/>
               </a:rPr>
               <a:t>        </a:t>
             </a:r>
             <a:r>
-              <a:rPr lang="pl-PL" sz="1200" dirty="0" err="1" smtClean="0">
-                <a:solidFill>
-                  <a:srgbClr val="C9D1D9"/>
+              <a:rPr lang="pl-PL" sz="1200" dirty="0" err="1">
+                <a:solidFill>
+                  <a:srgbClr val="569CD6"/>
                 </a:solidFill>
                 <a:latin typeface="Consolas" panose="020B0609020204030204" pitchFamily="49" charset="0"/>
               </a:rPr>
               <a:t>self</a:t>
             </a:r>
             <a:r>
-              <a:rPr lang="pl-PL" sz="1200" dirty="0" err="1" smtClean="0">
-                <a:solidFill>
-                  <a:srgbClr val="BBBEBF"/>
-                </a:solidFill>
-                <a:latin typeface="Consolas" panose="020B0609020204030204" pitchFamily="49" charset="0"/>
-              </a:rPr>
-              <a:t>.</a:t>
-            </a:r>
-            <a:r>
-              <a:rPr lang="pl-PL" sz="1200" dirty="0" err="1" smtClean="0">
-                <a:solidFill>
-                  <a:srgbClr val="C9D1D9"/>
-                </a:solidFill>
-                <a:latin typeface="Consolas" panose="020B0609020204030204" pitchFamily="49" charset="0"/>
-              </a:rPr>
-              <a:t>pitch</a:t>
-            </a:r>
-            <a:r>
-              <a:rPr lang="pl-PL" sz="1200" dirty="0" smtClean="0">
-                <a:solidFill>
-                  <a:srgbClr val="BBBEBF"/>
+              <a:rPr lang="pl-PL" sz="1200" dirty="0" err="1">
+                <a:solidFill>
+                  <a:srgbClr val="CCCCCC"/>
+                </a:solidFill>
+                <a:latin typeface="Consolas" panose="020B0609020204030204" pitchFamily="49" charset="0"/>
+              </a:rPr>
+              <a:t>.pitch</a:t>
+            </a:r>
+            <a:r>
+              <a:rPr lang="pl-PL" sz="1200" dirty="0">
+                <a:solidFill>
+                  <a:srgbClr val="CCCCCC"/>
                 </a:solidFill>
                 <a:latin typeface="Consolas" panose="020B0609020204030204" pitchFamily="49" charset="0"/>
               </a:rPr>
               <a:t> </a:t>
             </a:r>
             <a:r>
-              <a:rPr lang="pl-PL" sz="1200" dirty="0" smtClean="0">
+              <a:rPr lang="pl-PL" sz="1200" dirty="0">
                 <a:solidFill>
                   <a:srgbClr val="D4D4D4"/>
                 </a:solidFill>
@@ -6182,16 +6164,16 @@
               <a:t>=</a:t>
             </a:r>
             <a:r>
-              <a:rPr lang="pl-PL" sz="1200" dirty="0" smtClean="0">
-                <a:solidFill>
-                  <a:srgbClr val="BBBEBF"/>
+              <a:rPr lang="pl-PL" sz="1200" dirty="0">
+                <a:solidFill>
+                  <a:srgbClr val="CCCCCC"/>
                 </a:solidFill>
                 <a:latin typeface="Consolas" panose="020B0609020204030204" pitchFamily="49" charset="0"/>
               </a:rPr>
               <a:t> </a:t>
             </a:r>
             <a:r>
-              <a:rPr lang="pl-PL" sz="1200" dirty="0" smtClean="0">
+              <a:rPr lang="pl-PL" sz="1200" dirty="0">
                 <a:solidFill>
                   <a:srgbClr val="B5CEA8"/>
                 </a:solidFill>
@@ -6200,26 +6182,26 @@
               <a:t>0.0</a:t>
             </a:r>
             <a:r>
-              <a:rPr lang="pl-PL" sz="1200" dirty="0" smtClean="0">
-                <a:solidFill>
-                  <a:srgbClr val="BBBEBF"/>
+              <a:rPr lang="pl-PL" sz="1200" dirty="0">
+                <a:solidFill>
+                  <a:srgbClr val="CCCCCC"/>
                 </a:solidFill>
                 <a:latin typeface="Consolas" panose="020B0609020204030204" pitchFamily="49" charset="0"/>
               </a:rPr>
               <a:t>  </a:t>
             </a:r>
             <a:r>
-              <a:rPr lang="pl-PL" sz="1200" dirty="0" smtClean="0">
-                <a:solidFill>
-                  <a:srgbClr val="8B949E"/>
+              <a:rPr lang="pl-PL" sz="1200" dirty="0">
+                <a:solidFill>
+                  <a:srgbClr val="6A9955"/>
                 </a:solidFill>
                 <a:latin typeface="Consolas" panose="020B0609020204030204" pitchFamily="49" charset="0"/>
               </a:rPr>
               <a:t># [rad]</a:t>
             </a:r>
-            <a:endParaRPr lang="pl-PL" sz="1200" dirty="0" smtClean="0">
+            <a:endParaRPr lang="pl-PL" sz="1200" dirty="0">
               <a:solidFill>
-                <a:srgbClr val="BBBEBF"/>
+                <a:srgbClr val="CCCCCC"/>
               </a:solidFill>
               <a:latin typeface="Consolas" panose="020B0609020204030204" pitchFamily="49" charset="0"/>
             </a:endParaRPr>
@@ -6227,56 +6209,47 @@
           <a:p>
             <a:pPr>
               <a:lnSpc>
-                <a:spcPts val="1300"/>
+                <a:spcPts val="1200"/>
               </a:lnSpc>
             </a:pPr>
             <a:r>
-              <a:rPr lang="pl-PL" sz="1200" dirty="0" smtClean="0">
-                <a:solidFill>
-                  <a:srgbClr val="BBBEBF"/>
+              <a:rPr lang="pl-PL" sz="1200" dirty="0">
+                <a:solidFill>
+                  <a:srgbClr val="CCCCCC"/>
                 </a:solidFill>
                 <a:latin typeface="Consolas" panose="020B0609020204030204" pitchFamily="49" charset="0"/>
               </a:rPr>
               <a:t>        </a:t>
             </a:r>
             <a:r>
-              <a:rPr lang="pl-PL" sz="1200" dirty="0" err="1" smtClean="0">
-                <a:solidFill>
-                  <a:srgbClr val="C9D1D9"/>
+              <a:rPr lang="pl-PL" sz="1200" dirty="0" err="1">
+                <a:solidFill>
+                  <a:srgbClr val="569CD6"/>
                 </a:solidFill>
                 <a:latin typeface="Consolas" panose="020B0609020204030204" pitchFamily="49" charset="0"/>
               </a:rPr>
               <a:t>self</a:t>
             </a:r>
             <a:r>
-              <a:rPr lang="pl-PL" sz="1200" dirty="0" err="1" smtClean="0">
-                <a:solidFill>
-                  <a:srgbClr val="BBBEBF"/>
-                </a:solidFill>
-                <a:latin typeface="Consolas" panose="020B0609020204030204" pitchFamily="49" charset="0"/>
-              </a:rPr>
-              <a:t>.</a:t>
-            </a:r>
-            <a:r>
-              <a:rPr lang="pl-PL" sz="1200" dirty="0" err="1" smtClean="0">
-                <a:solidFill>
-                  <a:srgbClr val="C9D1D9"/>
-                </a:solidFill>
-                <a:latin typeface="Consolas" panose="020B0609020204030204" pitchFamily="49" charset="0"/>
-              </a:rPr>
-              <a:t>roll</a:t>
-            </a:r>
-            <a:r>
-              <a:rPr lang="pl-PL" sz="1200" dirty="0" smtClean="0">
-                <a:solidFill>
-                  <a:srgbClr val="BBBEBF"/>
+              <a:rPr lang="pl-PL" sz="1200" dirty="0" err="1">
+                <a:solidFill>
+                  <a:srgbClr val="CCCCCC"/>
+                </a:solidFill>
+                <a:latin typeface="Consolas" panose="020B0609020204030204" pitchFamily="49" charset="0"/>
+              </a:rPr>
+              <a:t>.roll</a:t>
+            </a:r>
+            <a:r>
+              <a:rPr lang="pl-PL" sz="1200" dirty="0">
+                <a:solidFill>
+                  <a:srgbClr val="CCCCCC"/>
                 </a:solidFill>
                 <a:latin typeface="Consolas" panose="020B0609020204030204" pitchFamily="49" charset="0"/>
               </a:rPr>
               <a:t>  </a:t>
             </a:r>
             <a:r>
-              <a:rPr lang="pl-PL" sz="1200" dirty="0" smtClean="0">
+              <a:rPr lang="pl-PL" sz="1200" dirty="0">
                 <a:solidFill>
                   <a:srgbClr val="D4D4D4"/>
                 </a:solidFill>
@@ -6285,16 +6258,16 @@
               <a:t>=</a:t>
             </a:r>
             <a:r>
-              <a:rPr lang="pl-PL" sz="1200" dirty="0" smtClean="0">
-                <a:solidFill>
-                  <a:srgbClr val="BBBEBF"/>
+              <a:rPr lang="pl-PL" sz="1200" dirty="0">
+                <a:solidFill>
+                  <a:srgbClr val="CCCCCC"/>
                 </a:solidFill>
                 <a:latin typeface="Consolas" panose="020B0609020204030204" pitchFamily="49" charset="0"/>
               </a:rPr>
               <a:t> </a:t>
             </a:r>
             <a:r>
-              <a:rPr lang="pl-PL" sz="1200" dirty="0" smtClean="0">
+              <a:rPr lang="pl-PL" sz="1200" dirty="0">
                 <a:solidFill>
                   <a:srgbClr val="B5CEA8"/>
                 </a:solidFill>
@@ -6303,26 +6276,26 @@
               <a:t>0.0</a:t>
             </a:r>
             <a:r>
-              <a:rPr lang="pl-PL" sz="1200" dirty="0" smtClean="0">
-                <a:solidFill>
-                  <a:srgbClr val="BBBEBF"/>
+              <a:rPr lang="pl-PL" sz="1200" dirty="0">
+                <a:solidFill>
+                  <a:srgbClr val="CCCCCC"/>
                 </a:solidFill>
                 <a:latin typeface="Consolas" panose="020B0609020204030204" pitchFamily="49" charset="0"/>
               </a:rPr>
               <a:t>  </a:t>
             </a:r>
             <a:r>
-              <a:rPr lang="pl-PL" sz="1200" dirty="0" smtClean="0">
-                <a:solidFill>
-                  <a:srgbClr val="8B949E"/>
+              <a:rPr lang="pl-PL" sz="1200" dirty="0">
+                <a:solidFill>
+                  <a:srgbClr val="6A9955"/>
                 </a:solidFill>
                 <a:latin typeface="Consolas" panose="020B0609020204030204" pitchFamily="49" charset="0"/>
               </a:rPr>
               <a:t># [rad]</a:t>
             </a:r>
-            <a:endParaRPr lang="pl-PL" sz="1200" dirty="0" smtClean="0">
+            <a:endParaRPr lang="pl-PL" sz="1200" dirty="0">
               <a:solidFill>
-                <a:srgbClr val="BBBEBF"/>
+                <a:srgbClr val="CCCCCC"/>
               </a:solidFill>
               <a:latin typeface="Consolas" panose="020B0609020204030204" pitchFamily="49" charset="0"/>
             </a:endParaRPr>
@@ -6330,192 +6303,174 @@
           <a:p>
             <a:pPr>
               <a:lnSpc>
-                <a:spcPts val="1300"/>
+                <a:spcPts val="1200"/>
               </a:lnSpc>
             </a:pPr>
             <a:r>
-              <a:rPr lang="pl-PL" sz="1200" dirty="0" smtClean="0">
-                <a:solidFill>
-                  <a:srgbClr val="BBBEBF"/>
+              <a:rPr lang="pl-PL" sz="1200" dirty="0">
+                <a:solidFill>
+                  <a:srgbClr val="CCCCCC"/>
                 </a:solidFill>
                 <a:latin typeface="Consolas" panose="020B0609020204030204" pitchFamily="49" charset="0"/>
               </a:rPr>
               <a:t/>
             </a:r>
             <a:br>
-              <a:rPr lang="pl-PL" sz="1200" dirty="0" smtClean="0">
-                <a:solidFill>
-                  <a:srgbClr val="BBBEBF"/>
+              <a:rPr lang="pl-PL" sz="1200" dirty="0">
+                <a:solidFill>
+                  <a:srgbClr val="CCCCCC"/>
                 </a:solidFill>
                 <a:latin typeface="Consolas" panose="020B0609020204030204" pitchFamily="49" charset="0"/>
               </a:rPr>
             </a:br>
             <a:r>
-              <a:rPr lang="pl-PL" sz="1200" dirty="0" smtClean="0">
-                <a:solidFill>
-                  <a:srgbClr val="BBBEBF"/>
-                </a:solidFill>
-                <a:latin typeface="Consolas" panose="020B0609020204030204" pitchFamily="49" charset="0"/>
-              </a:rPr>
-              <a:t>    </a:t>
-            </a:r>
-            <a:r>
-              <a:rPr lang="pl-PL" sz="1200" dirty="0" smtClean="0">
-                <a:solidFill>
-                  <a:srgbClr val="FF7B72"/>
+              <a:rPr lang="pl-PL" sz="1200" dirty="0">
+                <a:solidFill>
+                  <a:srgbClr val="CCCCCC"/>
+                </a:solidFill>
+                <a:latin typeface="Consolas" panose="020B0609020204030204" pitchFamily="49" charset="0"/>
+              </a:rPr>
+              <a:t>   </a:t>
+            </a:r>
+            <a:r>
+              <a:rPr lang="pl-PL" sz="1200" dirty="0">
+                <a:solidFill>
+                  <a:srgbClr val="569CD6"/>
                 </a:solidFill>
                 <a:latin typeface="Consolas" panose="020B0609020204030204" pitchFamily="49" charset="0"/>
               </a:rPr>
               <a:t>def</a:t>
             </a:r>
             <a:r>
-              <a:rPr lang="pl-PL" sz="1200" dirty="0" smtClean="0">
-                <a:solidFill>
-                  <a:srgbClr val="BBBEBF"/>
+              <a:rPr lang="pl-PL" sz="1200" dirty="0">
+                <a:solidFill>
+                  <a:srgbClr val="CCCCCC"/>
                 </a:solidFill>
                 <a:latin typeface="Consolas" panose="020B0609020204030204" pitchFamily="49" charset="0"/>
               </a:rPr>
               <a:t> </a:t>
             </a:r>
             <a:r>
-              <a:rPr lang="pl-PL" sz="1200" dirty="0" smtClean="0">
-                <a:solidFill>
-                  <a:srgbClr val="D2A8FF"/>
+              <a:rPr lang="pl-PL" sz="1200" dirty="0">
+                <a:solidFill>
+                  <a:srgbClr val="DCDCAA"/>
                 </a:solidFill>
                 <a:latin typeface="Consolas" panose="020B0609020204030204" pitchFamily="49" charset="0"/>
               </a:rPr>
               <a:t>update</a:t>
             </a:r>
             <a:r>
-              <a:rPr lang="pl-PL" sz="1200" dirty="0" smtClean="0">
-                <a:solidFill>
-                  <a:srgbClr val="BBBEBF"/>
+              <a:rPr lang="pl-PL" sz="1200" dirty="0">
+                <a:solidFill>
+                  <a:srgbClr val="CCCCCC"/>
                 </a:solidFill>
                 <a:latin typeface="Consolas" panose="020B0609020204030204" pitchFamily="49" charset="0"/>
               </a:rPr>
               <a:t>(</a:t>
             </a:r>
             <a:r>
-              <a:rPr lang="pl-PL" sz="1200" dirty="0" err="1" smtClean="0">
-                <a:solidFill>
-                  <a:srgbClr val="C9D1D9"/>
+              <a:rPr lang="pl-PL" sz="1200" dirty="0" err="1">
+                <a:solidFill>
+                  <a:srgbClr val="9CDCFE"/>
                 </a:solidFill>
                 <a:latin typeface="Consolas" panose="020B0609020204030204" pitchFamily="49" charset="0"/>
               </a:rPr>
               <a:t>self</a:t>
             </a:r>
             <a:r>
-              <a:rPr lang="pl-PL" sz="1200" dirty="0" smtClean="0">
-                <a:solidFill>
-                  <a:srgbClr val="BBBEBF"/>
+              <a:rPr lang="pl-PL" sz="1200" dirty="0">
+                <a:solidFill>
+                  <a:srgbClr val="CCCCCC"/>
                 </a:solidFill>
                 <a:latin typeface="Consolas" panose="020B0609020204030204" pitchFamily="49" charset="0"/>
               </a:rPr>
               <a:t>, </a:t>
             </a:r>
             <a:r>
-              <a:rPr lang="pl-PL" sz="1200" dirty="0" err="1" smtClean="0">
-                <a:solidFill>
-                  <a:srgbClr val="FFA657"/>
+              <a:rPr lang="pl-PL" sz="1200" dirty="0" err="1">
+                <a:solidFill>
+                  <a:srgbClr val="9CDCFE"/>
                 </a:solidFill>
                 <a:latin typeface="Consolas" panose="020B0609020204030204" pitchFamily="49" charset="0"/>
               </a:rPr>
               <a:t>gyro_xyz</a:t>
             </a:r>
             <a:r>
-              <a:rPr lang="pl-PL" sz="1200" dirty="0" smtClean="0">
-                <a:solidFill>
-                  <a:srgbClr val="BBBEBF"/>
+              <a:rPr lang="pl-PL" sz="1200" dirty="0">
+                <a:solidFill>
+                  <a:srgbClr val="CCCCCC"/>
                 </a:solidFill>
                 <a:latin typeface="Consolas" panose="020B0609020204030204" pitchFamily="49" charset="0"/>
               </a:rPr>
               <a:t>: </a:t>
             </a:r>
             <a:r>
-              <a:rPr lang="pl-PL" sz="1200" dirty="0" err="1" smtClean="0">
+              <a:rPr lang="pl-PL" sz="1200" dirty="0" err="1">
+                <a:solidFill>
+                  <a:srgbClr val="CCCCCC"/>
+                </a:solidFill>
+                <a:latin typeface="Consolas" panose="020B0609020204030204" pitchFamily="49" charset="0"/>
+              </a:rPr>
+              <a:t>np.ndarray</a:t>
+            </a:r>
+            <a:r>
+              <a:rPr lang="pl-PL" sz="1200" dirty="0">
+                <a:solidFill>
+                  <a:srgbClr val="CCCCCC"/>
+                </a:solidFill>
+                <a:latin typeface="Consolas" panose="020B0609020204030204" pitchFamily="49" charset="0"/>
+              </a:rPr>
+              <a:t>, </a:t>
+            </a:r>
+            <a:r>
+              <a:rPr lang="pl-PL" sz="1200" dirty="0" err="1">
+                <a:solidFill>
+                  <a:srgbClr val="9CDCFE"/>
+                </a:solidFill>
+                <a:latin typeface="Consolas" panose="020B0609020204030204" pitchFamily="49" charset="0"/>
+              </a:rPr>
+              <a:t>dt</a:t>
+            </a:r>
+            <a:r>
+              <a:rPr lang="pl-PL" sz="1200" dirty="0">
+                <a:solidFill>
+                  <a:srgbClr val="CCCCCC"/>
+                </a:solidFill>
+                <a:latin typeface="Consolas" panose="020B0609020204030204" pitchFamily="49" charset="0"/>
+              </a:rPr>
+              <a:t>: </a:t>
+            </a:r>
+            <a:r>
+              <a:rPr lang="pl-PL" sz="1200" dirty="0" err="1">
                 <a:solidFill>
                   <a:srgbClr val="4EC9B0"/>
                 </a:solidFill>
                 <a:latin typeface="Consolas" panose="020B0609020204030204" pitchFamily="49" charset="0"/>
               </a:rPr>
-              <a:t>np</a:t>
-            </a:r>
-            <a:r>
-              <a:rPr lang="pl-PL" sz="1200" dirty="0" err="1" smtClean="0">
-                <a:solidFill>
-                  <a:srgbClr val="BBBEBF"/>
-                </a:solidFill>
-                <a:latin typeface="Consolas" panose="020B0609020204030204" pitchFamily="49" charset="0"/>
-              </a:rPr>
-              <a:t>.</a:t>
-            </a:r>
-            <a:r>
-              <a:rPr lang="pl-PL" sz="1200" dirty="0" err="1" smtClean="0">
+              <a:t>float</a:t>
+            </a:r>
+            <a:r>
+              <a:rPr lang="pl-PL" sz="1200" dirty="0">
+                <a:solidFill>
+                  <a:srgbClr val="CCCCCC"/>
+                </a:solidFill>
+                <a:latin typeface="Consolas" panose="020B0609020204030204" pitchFamily="49" charset="0"/>
+              </a:rPr>
+              <a:t>) -&gt; </a:t>
+            </a:r>
+            <a:r>
+              <a:rPr lang="pl-PL" sz="1200" dirty="0" err="1">
                 <a:solidFill>
                   <a:srgbClr val="4EC9B0"/>
                 </a:solidFill>
                 <a:latin typeface="Consolas" panose="020B0609020204030204" pitchFamily="49" charset="0"/>
               </a:rPr>
-              <a:t>ndarray</a:t>
-            </a:r>
-            <a:r>
-              <a:rPr lang="pl-PL" sz="1200" dirty="0" smtClean="0">
-                <a:solidFill>
-                  <a:srgbClr val="BBBEBF"/>
-                </a:solidFill>
-                <a:latin typeface="Consolas" panose="020B0609020204030204" pitchFamily="49" charset="0"/>
-              </a:rPr>
-              <a:t>, </a:t>
-            </a:r>
-            <a:r>
-              <a:rPr lang="pl-PL" sz="1200" dirty="0" err="1" smtClean="0">
-                <a:solidFill>
-                  <a:srgbClr val="FFA657"/>
-                </a:solidFill>
-                <a:latin typeface="Consolas" panose="020B0609020204030204" pitchFamily="49" charset="0"/>
-              </a:rPr>
-              <a:t>dt</a:t>
-            </a:r>
-            <a:r>
-              <a:rPr lang="pl-PL" sz="1200" dirty="0" smtClean="0">
-                <a:solidFill>
-                  <a:srgbClr val="BBBEBF"/>
-                </a:solidFill>
-                <a:latin typeface="Consolas" panose="020B0609020204030204" pitchFamily="49" charset="0"/>
-              </a:rPr>
-              <a:t>: </a:t>
-            </a:r>
-            <a:r>
-              <a:rPr lang="pl-PL" sz="1200" dirty="0" err="1" smtClean="0">
-                <a:solidFill>
-                  <a:srgbClr val="4EC9B0"/>
-                </a:solidFill>
-                <a:latin typeface="Consolas" panose="020B0609020204030204" pitchFamily="49" charset="0"/>
-              </a:rPr>
-              <a:t>float</a:t>
-            </a:r>
-            <a:r>
-              <a:rPr lang="pl-PL" sz="1200" dirty="0" smtClean="0">
-                <a:solidFill>
-                  <a:srgbClr val="BBBEBF"/>
-                </a:solidFill>
-                <a:latin typeface="Consolas" panose="020B0609020204030204" pitchFamily="49" charset="0"/>
-              </a:rPr>
-              <a:t>) -&gt; </a:t>
-            </a:r>
-            <a:r>
-              <a:rPr lang="pl-PL" sz="1200" dirty="0" err="1" smtClean="0">
-                <a:solidFill>
-                  <a:srgbClr val="4EC9B0"/>
-                </a:solidFill>
-                <a:latin typeface="Consolas" panose="020B0609020204030204" pitchFamily="49" charset="0"/>
-              </a:rPr>
               <a:t>tuple</a:t>
             </a:r>
             <a:r>
-              <a:rPr lang="pl-PL" sz="1200" dirty="0" smtClean="0">
-                <a:solidFill>
-                  <a:srgbClr val="BBBEBF"/>
+              <a:rPr lang="pl-PL" sz="1200" dirty="0">
+                <a:solidFill>
+                  <a:srgbClr val="CCCCCC"/>
                 </a:solidFill>
                 <a:latin typeface="Consolas" panose="020B0609020204030204" pitchFamily="49" charset="0"/>
               </a:rPr>
@@ -6525,30 +6480,30 @@
           <a:p>
             <a:pPr>
               <a:lnSpc>
-                <a:spcPts val="1300"/>
+                <a:spcPts val="1200"/>
               </a:lnSpc>
             </a:pPr>
             <a:r>
-              <a:rPr lang="pl-PL" sz="1200" dirty="0" smtClean="0">
-                <a:solidFill>
-                  <a:srgbClr val="BBBEBF"/>
+              <a:rPr lang="pl-PL" sz="1200" dirty="0">
+                <a:solidFill>
+                  <a:srgbClr val="CCCCCC"/>
                 </a:solidFill>
                 <a:latin typeface="Consolas" panose="020B0609020204030204" pitchFamily="49" charset="0"/>
               </a:rPr>
               <a:t>        </a:t>
             </a:r>
             <a:r>
-              <a:rPr lang="pl-PL" sz="1200" dirty="0" smtClean="0">
-                <a:solidFill>
-                  <a:srgbClr val="A5D6FF"/>
+              <a:rPr lang="pl-PL" sz="1200" dirty="0">
+                <a:solidFill>
+                  <a:srgbClr val="CE9178"/>
                 </a:solidFill>
                 <a:latin typeface="Consolas" panose="020B0609020204030204" pitchFamily="49" charset="0"/>
               </a:rPr>
               <a:t>"""Aktualizacja orientacji przez całkowanie żyroskopu"""</a:t>
             </a:r>
-            <a:endParaRPr lang="pl-PL" sz="1200" dirty="0" smtClean="0">
+            <a:endParaRPr lang="pl-PL" sz="1200" dirty="0">
               <a:solidFill>
-                <a:srgbClr val="BBBEBF"/>
+                <a:srgbClr val="CCCCCC"/>
               </a:solidFill>
               <a:latin typeface="Consolas" panose="020B0609020204030204" pitchFamily="49" charset="0"/>
             </a:endParaRPr>
@@ -6556,102 +6511,102 @@
           <a:p>
             <a:pPr>
               <a:lnSpc>
-                <a:spcPts val="1300"/>
+                <a:spcPts val="1200"/>
               </a:lnSpc>
             </a:pPr>
             <a:r>
-              <a:rPr lang="pl-PL" sz="1200" dirty="0" smtClean="0">
-                <a:solidFill>
-                  <a:srgbClr val="BBBEBF"/>
+              <a:rPr lang="pl-PL" sz="1200" dirty="0">
+                <a:solidFill>
+                  <a:srgbClr val="CCCCCC"/>
                 </a:solidFill>
                 <a:latin typeface="Consolas" panose="020B0609020204030204" pitchFamily="49" charset="0"/>
               </a:rPr>
               <a:t>        </a:t>
             </a:r>
             <a:r>
-              <a:rPr lang="pl-PL" sz="1200" dirty="0" smtClean="0">
-                <a:solidFill>
-                  <a:srgbClr val="8B949E"/>
+              <a:rPr lang="pl-PL" sz="1200" dirty="0">
+                <a:solidFill>
+                  <a:srgbClr val="6A9955"/>
                 </a:solidFill>
                 <a:latin typeface="Consolas" panose="020B0609020204030204" pitchFamily="49" charset="0"/>
               </a:rPr>
               <a:t># </a:t>
             </a:r>
             <a:r>
-              <a:rPr lang="pl-PL" sz="1200" dirty="0" err="1" smtClean="0">
-                <a:solidFill>
-                  <a:srgbClr val="8B949E"/>
+              <a:rPr lang="pl-PL" sz="1200" dirty="0" err="1">
+                <a:solidFill>
+                  <a:srgbClr val="6A9955"/>
                 </a:solidFill>
                 <a:latin typeface="Consolas" panose="020B0609020204030204" pitchFamily="49" charset="0"/>
               </a:rPr>
               <a:t>gyro_xyz</a:t>
             </a:r>
             <a:r>
-              <a:rPr lang="pl-PL" sz="1200" dirty="0" smtClean="0">
-                <a:solidFill>
-                  <a:srgbClr val="8B949E"/>
+              <a:rPr lang="pl-PL" sz="1200" dirty="0">
+                <a:solidFill>
+                  <a:srgbClr val="6A9955"/>
                 </a:solidFill>
                 <a:latin typeface="Consolas" panose="020B0609020204030204" pitchFamily="49" charset="0"/>
               </a:rPr>
               <a:t> = [</a:t>
             </a:r>
             <a:r>
-              <a:rPr lang="pl-PL" sz="1200" dirty="0" err="1" smtClean="0">
-                <a:solidFill>
-                  <a:srgbClr val="8B949E"/>
+              <a:rPr lang="pl-PL" sz="1200" dirty="0" err="1">
+                <a:solidFill>
+                  <a:srgbClr val="6A9955"/>
                 </a:solidFill>
                 <a:latin typeface="Consolas" panose="020B0609020204030204" pitchFamily="49" charset="0"/>
               </a:rPr>
               <a:t>omega_x</a:t>
             </a:r>
             <a:r>
-              <a:rPr lang="pl-PL" sz="1200" dirty="0" smtClean="0">
-                <a:solidFill>
-                  <a:srgbClr val="8B949E"/>
+              <a:rPr lang="pl-PL" sz="1200" dirty="0">
+                <a:solidFill>
+                  <a:srgbClr val="6A9955"/>
                 </a:solidFill>
                 <a:latin typeface="Consolas" panose="020B0609020204030204" pitchFamily="49" charset="0"/>
               </a:rPr>
               <a:t>, </a:t>
             </a:r>
             <a:r>
-              <a:rPr lang="pl-PL" sz="1200" dirty="0" err="1" smtClean="0">
-                <a:solidFill>
-                  <a:srgbClr val="8B949E"/>
+              <a:rPr lang="pl-PL" sz="1200" dirty="0" err="1">
+                <a:solidFill>
+                  <a:srgbClr val="6A9955"/>
                 </a:solidFill>
                 <a:latin typeface="Consolas" panose="020B0609020204030204" pitchFamily="49" charset="0"/>
               </a:rPr>
               <a:t>omega_y</a:t>
             </a:r>
             <a:r>
-              <a:rPr lang="pl-PL" sz="1200" dirty="0" smtClean="0">
-                <a:solidFill>
-                  <a:srgbClr val="8B949E"/>
+              <a:rPr lang="pl-PL" sz="1200" dirty="0">
+                <a:solidFill>
+                  <a:srgbClr val="6A9955"/>
                 </a:solidFill>
                 <a:latin typeface="Consolas" panose="020B0609020204030204" pitchFamily="49" charset="0"/>
               </a:rPr>
               <a:t>, </a:t>
             </a:r>
             <a:r>
-              <a:rPr lang="pl-PL" sz="1200" dirty="0" err="1" smtClean="0">
-                <a:solidFill>
-                  <a:srgbClr val="8B949E"/>
+              <a:rPr lang="pl-PL" sz="1200" dirty="0" err="1">
+                <a:solidFill>
+                  <a:srgbClr val="6A9955"/>
                 </a:solidFill>
                 <a:latin typeface="Consolas" panose="020B0609020204030204" pitchFamily="49" charset="0"/>
               </a:rPr>
               <a:t>omega_z</a:t>
             </a:r>
             <a:r>
-              <a:rPr lang="pl-PL" sz="1200" dirty="0" smtClean="0">
-                <a:solidFill>
-                  <a:srgbClr val="8B949E"/>
+              <a:rPr lang="pl-PL" sz="1200" dirty="0">
+                <a:solidFill>
+                  <a:srgbClr val="6A9955"/>
                 </a:solidFill>
                 <a:latin typeface="Consolas" panose="020B0609020204030204" pitchFamily="49" charset="0"/>
               </a:rPr>
               <a:t>] w rad/s</a:t>
             </a:r>
-            <a:endParaRPr lang="pl-PL" sz="1200" dirty="0" smtClean="0">
+            <a:endParaRPr lang="pl-PL" sz="1200" dirty="0">
               <a:solidFill>
-                <a:srgbClr val="BBBEBF"/>
+                <a:srgbClr val="CCCCCC"/>
               </a:solidFill>
               <a:latin typeface="Consolas" panose="020B0609020204030204" pitchFamily="49" charset="0"/>
             </a:endParaRPr>
@@ -6659,56 +6614,47 @@
           <a:p>
             <a:pPr>
               <a:lnSpc>
-                <a:spcPts val="1300"/>
+                <a:spcPts val="1200"/>
               </a:lnSpc>
             </a:pPr>
             <a:r>
-              <a:rPr lang="pl-PL" sz="1200" dirty="0" smtClean="0">
-                <a:solidFill>
-                  <a:srgbClr val="BBBEBF"/>
+              <a:rPr lang="pl-PL" sz="1200" dirty="0">
+                <a:solidFill>
+                  <a:srgbClr val="CCCCCC"/>
                 </a:solidFill>
                 <a:latin typeface="Consolas" panose="020B0609020204030204" pitchFamily="49" charset="0"/>
               </a:rPr>
               <a:t>        </a:t>
             </a:r>
             <a:r>
-              <a:rPr lang="pl-PL" sz="1200" dirty="0" err="1" smtClean="0">
-                <a:solidFill>
-                  <a:srgbClr val="C9D1D9"/>
+              <a:rPr lang="pl-PL" sz="1200" dirty="0" err="1">
+                <a:solidFill>
+                  <a:srgbClr val="569CD6"/>
                 </a:solidFill>
                 <a:latin typeface="Consolas" panose="020B0609020204030204" pitchFamily="49" charset="0"/>
               </a:rPr>
               <a:t>self</a:t>
             </a:r>
             <a:r>
-              <a:rPr lang="pl-PL" sz="1200" dirty="0" err="1" smtClean="0">
-                <a:solidFill>
-                  <a:srgbClr val="BBBEBF"/>
-                </a:solidFill>
-                <a:latin typeface="Consolas" panose="020B0609020204030204" pitchFamily="49" charset="0"/>
-              </a:rPr>
-              <a:t>.</a:t>
-            </a:r>
-            <a:r>
-              <a:rPr lang="pl-PL" sz="1200" dirty="0" err="1" smtClean="0">
-                <a:solidFill>
-                  <a:srgbClr val="C9D1D9"/>
-                </a:solidFill>
-                <a:latin typeface="Consolas" panose="020B0609020204030204" pitchFamily="49" charset="0"/>
-              </a:rPr>
-              <a:t>roll</a:t>
-            </a:r>
-            <a:r>
-              <a:rPr lang="pl-PL" sz="1200" dirty="0" smtClean="0">
-                <a:solidFill>
-                  <a:srgbClr val="BBBEBF"/>
+              <a:rPr lang="pl-PL" sz="1200" dirty="0" err="1">
+                <a:solidFill>
+                  <a:srgbClr val="CCCCCC"/>
+                </a:solidFill>
+                <a:latin typeface="Consolas" panose="020B0609020204030204" pitchFamily="49" charset="0"/>
+              </a:rPr>
+              <a:t>.roll</a:t>
+            </a:r>
+            <a:r>
+              <a:rPr lang="pl-PL" sz="1200" dirty="0">
+                <a:solidFill>
+                  <a:srgbClr val="CCCCCC"/>
                 </a:solidFill>
                 <a:latin typeface="Consolas" panose="020B0609020204030204" pitchFamily="49" charset="0"/>
               </a:rPr>
               <a:t>  </a:t>
             </a:r>
             <a:r>
-              <a:rPr lang="pl-PL" sz="1200" dirty="0" smtClean="0">
+              <a:rPr lang="pl-PL" sz="1200" dirty="0">
                 <a:solidFill>
                   <a:srgbClr val="D4D4D4"/>
                 </a:solidFill>
@@ -6717,34 +6663,34 @@
               <a:t>+=</a:t>
             </a:r>
             <a:r>
-              <a:rPr lang="pl-PL" sz="1200" dirty="0" smtClean="0">
-                <a:solidFill>
-                  <a:srgbClr val="BBBEBF"/>
+              <a:rPr lang="pl-PL" sz="1200" dirty="0">
+                <a:solidFill>
+                  <a:srgbClr val="CCCCCC"/>
                 </a:solidFill>
                 <a:latin typeface="Consolas" panose="020B0609020204030204" pitchFamily="49" charset="0"/>
               </a:rPr>
               <a:t> </a:t>
             </a:r>
             <a:r>
-              <a:rPr lang="pl-PL" sz="1200" dirty="0" err="1" smtClean="0">
-                <a:solidFill>
-                  <a:srgbClr val="FFA657"/>
+              <a:rPr lang="pl-PL" sz="1200" dirty="0" err="1">
+                <a:solidFill>
+                  <a:srgbClr val="CCCCCC"/>
                 </a:solidFill>
                 <a:latin typeface="Consolas" panose="020B0609020204030204" pitchFamily="49" charset="0"/>
               </a:rPr>
               <a:t>gyro_xyz</a:t>
             </a:r>
             <a:r>
-              <a:rPr lang="pl-PL" sz="1200" dirty="0" smtClean="0">
-                <a:solidFill>
-                  <a:srgbClr val="BBBEBF"/>
+              <a:rPr lang="pl-PL" sz="1200" dirty="0">
+                <a:solidFill>
+                  <a:srgbClr val="CCCCCC"/>
                 </a:solidFill>
                 <a:latin typeface="Consolas" panose="020B0609020204030204" pitchFamily="49" charset="0"/>
               </a:rPr>
               <a:t>[</a:t>
             </a:r>
             <a:r>
-              <a:rPr lang="pl-PL" sz="1200" dirty="0" smtClean="0">
+              <a:rPr lang="pl-PL" sz="1200" dirty="0">
                 <a:solidFill>
                   <a:srgbClr val="B5CEA8"/>
                 </a:solidFill>
@@ -6753,16 +6699,16 @@
               <a:t>0</a:t>
             </a:r>
             <a:r>
-              <a:rPr lang="pl-PL" sz="1200" dirty="0" smtClean="0">
-                <a:solidFill>
-                  <a:srgbClr val="BBBEBF"/>
+              <a:rPr lang="pl-PL" sz="1200" dirty="0">
+                <a:solidFill>
+                  <a:srgbClr val="CCCCCC"/>
                 </a:solidFill>
                 <a:latin typeface="Consolas" panose="020B0609020204030204" pitchFamily="49" charset="0"/>
               </a:rPr>
               <a:t>] </a:t>
             </a:r>
             <a:r>
-              <a:rPr lang="pl-PL" sz="1200" dirty="0" smtClean="0">
+              <a:rPr lang="pl-PL" sz="1200" dirty="0">
                 <a:solidFill>
                   <a:srgbClr val="D4D4D4"/>
                 </a:solidFill>
@@ -6771,26 +6717,26 @@
               <a:t>*</a:t>
             </a:r>
             <a:r>
-              <a:rPr lang="pl-PL" sz="1200" dirty="0" smtClean="0">
-                <a:solidFill>
-                  <a:srgbClr val="BBBEBF"/>
+              <a:rPr lang="pl-PL" sz="1200" dirty="0">
+                <a:solidFill>
+                  <a:srgbClr val="CCCCCC"/>
                 </a:solidFill>
                 <a:latin typeface="Consolas" panose="020B0609020204030204" pitchFamily="49" charset="0"/>
               </a:rPr>
               <a:t> </a:t>
             </a:r>
             <a:r>
-              <a:rPr lang="pl-PL" sz="1200" dirty="0" err="1" smtClean="0">
-                <a:solidFill>
-                  <a:srgbClr val="FFA657"/>
+              <a:rPr lang="pl-PL" sz="1200" dirty="0" err="1">
+                <a:solidFill>
+                  <a:srgbClr val="CCCCCC"/>
                 </a:solidFill>
                 <a:latin typeface="Consolas" panose="020B0609020204030204" pitchFamily="49" charset="0"/>
               </a:rPr>
               <a:t>dt</a:t>
             </a:r>
-            <a:endParaRPr lang="pl-PL" sz="1200" dirty="0" smtClean="0">
+            <a:endParaRPr lang="pl-PL" sz="1200" dirty="0">
               <a:solidFill>
-                <a:srgbClr val="BBBEBF"/>
+                <a:srgbClr val="CCCCCC"/>
               </a:solidFill>
               <a:latin typeface="Consolas" panose="020B0609020204030204" pitchFamily="49" charset="0"/>
             </a:endParaRPr>
@@ -6798,56 +6744,47 @@
           <a:p>
             <a:pPr>
               <a:lnSpc>
-                <a:spcPts val="1300"/>
+                <a:spcPts val="1200"/>
               </a:lnSpc>
             </a:pPr>
             <a:r>
-              <a:rPr lang="pl-PL" sz="1200" dirty="0" smtClean="0">
-                <a:solidFill>
-                  <a:srgbClr val="BBBEBF"/>
+              <a:rPr lang="pl-PL" sz="1200" dirty="0">
+                <a:solidFill>
+                  <a:srgbClr val="CCCCCC"/>
                 </a:solidFill>
                 <a:latin typeface="Consolas" panose="020B0609020204030204" pitchFamily="49" charset="0"/>
               </a:rPr>
               <a:t>        </a:t>
             </a:r>
             <a:r>
-              <a:rPr lang="pl-PL" sz="1200" dirty="0" err="1" smtClean="0">
-                <a:solidFill>
-                  <a:srgbClr val="C9D1D9"/>
+              <a:rPr lang="pl-PL" sz="1200" dirty="0" err="1">
+                <a:solidFill>
+                  <a:srgbClr val="569CD6"/>
                 </a:solidFill>
                 <a:latin typeface="Consolas" panose="020B0609020204030204" pitchFamily="49" charset="0"/>
               </a:rPr>
               <a:t>self</a:t>
             </a:r>
             <a:r>
-              <a:rPr lang="pl-PL" sz="1200" dirty="0" err="1" smtClean="0">
-                <a:solidFill>
-                  <a:srgbClr val="BBBEBF"/>
-                </a:solidFill>
-                <a:latin typeface="Consolas" panose="020B0609020204030204" pitchFamily="49" charset="0"/>
-              </a:rPr>
-              <a:t>.</a:t>
-            </a:r>
-            <a:r>
-              <a:rPr lang="pl-PL" sz="1200" dirty="0" err="1" smtClean="0">
-                <a:solidFill>
-                  <a:srgbClr val="C9D1D9"/>
-                </a:solidFill>
-                <a:latin typeface="Consolas" panose="020B0609020204030204" pitchFamily="49" charset="0"/>
-              </a:rPr>
-              <a:t>pitch</a:t>
-            </a:r>
-            <a:r>
-              <a:rPr lang="pl-PL" sz="1200" dirty="0" smtClean="0">
-                <a:solidFill>
-                  <a:srgbClr val="BBBEBF"/>
+              <a:rPr lang="pl-PL" sz="1200" dirty="0" err="1">
+                <a:solidFill>
+                  <a:srgbClr val="CCCCCC"/>
+                </a:solidFill>
+                <a:latin typeface="Consolas" panose="020B0609020204030204" pitchFamily="49" charset="0"/>
+              </a:rPr>
+              <a:t>.pitch</a:t>
+            </a:r>
+            <a:r>
+              <a:rPr lang="pl-PL" sz="1200" dirty="0">
+                <a:solidFill>
+                  <a:srgbClr val="CCCCCC"/>
                 </a:solidFill>
                 <a:latin typeface="Consolas" panose="020B0609020204030204" pitchFamily="49" charset="0"/>
               </a:rPr>
               <a:t> </a:t>
             </a:r>
             <a:r>
-              <a:rPr lang="pl-PL" sz="1200" dirty="0" smtClean="0">
+              <a:rPr lang="pl-PL" sz="1200" dirty="0">
                 <a:solidFill>
                   <a:srgbClr val="D4D4D4"/>
                 </a:solidFill>
@@ -6856,34 +6793,34 @@
               <a:t>+=</a:t>
             </a:r>
             <a:r>
-              <a:rPr lang="pl-PL" sz="1200" dirty="0" smtClean="0">
-                <a:solidFill>
-                  <a:srgbClr val="BBBEBF"/>
+              <a:rPr lang="pl-PL" sz="1200" dirty="0">
+                <a:solidFill>
+                  <a:srgbClr val="CCCCCC"/>
                 </a:solidFill>
                 <a:latin typeface="Consolas" panose="020B0609020204030204" pitchFamily="49" charset="0"/>
               </a:rPr>
               <a:t> </a:t>
             </a:r>
             <a:r>
-              <a:rPr lang="pl-PL" sz="1200" dirty="0" err="1" smtClean="0">
-                <a:solidFill>
-                  <a:srgbClr val="FFA657"/>
+              <a:rPr lang="pl-PL" sz="1200" dirty="0" err="1">
+                <a:solidFill>
+                  <a:srgbClr val="CCCCCC"/>
                 </a:solidFill>
                 <a:latin typeface="Consolas" panose="020B0609020204030204" pitchFamily="49" charset="0"/>
               </a:rPr>
               <a:t>gyro_xyz</a:t>
             </a:r>
             <a:r>
-              <a:rPr lang="pl-PL" sz="1200" dirty="0" smtClean="0">
-                <a:solidFill>
-                  <a:srgbClr val="BBBEBF"/>
+              <a:rPr lang="pl-PL" sz="1200" dirty="0">
+                <a:solidFill>
+                  <a:srgbClr val="CCCCCC"/>
                 </a:solidFill>
                 <a:latin typeface="Consolas" panose="020B0609020204030204" pitchFamily="49" charset="0"/>
               </a:rPr>
               <a:t>[</a:t>
             </a:r>
             <a:r>
-              <a:rPr lang="pl-PL" sz="1200" dirty="0" smtClean="0">
+              <a:rPr lang="pl-PL" sz="1200" dirty="0">
                 <a:solidFill>
                   <a:srgbClr val="B5CEA8"/>
                 </a:solidFill>
@@ -6892,16 +6829,16 @@
               <a:t>1</a:t>
             </a:r>
             <a:r>
-              <a:rPr lang="pl-PL" sz="1200" dirty="0" smtClean="0">
-                <a:solidFill>
-                  <a:srgbClr val="BBBEBF"/>
+              <a:rPr lang="pl-PL" sz="1200" dirty="0">
+                <a:solidFill>
+                  <a:srgbClr val="CCCCCC"/>
                 </a:solidFill>
                 <a:latin typeface="Consolas" panose="020B0609020204030204" pitchFamily="49" charset="0"/>
               </a:rPr>
               <a:t>] </a:t>
             </a:r>
             <a:r>
-              <a:rPr lang="pl-PL" sz="1200" dirty="0" smtClean="0">
+              <a:rPr lang="pl-PL" sz="1200" dirty="0">
                 <a:solidFill>
                   <a:srgbClr val="D4D4D4"/>
                 </a:solidFill>
@@ -6910,26 +6847,26 @@
               <a:t>*</a:t>
             </a:r>
             <a:r>
-              <a:rPr lang="pl-PL" sz="1200" dirty="0" smtClean="0">
-                <a:solidFill>
-                  <a:srgbClr val="BBBEBF"/>
+              <a:rPr lang="pl-PL" sz="1200" dirty="0">
+                <a:solidFill>
+                  <a:srgbClr val="CCCCCC"/>
                 </a:solidFill>
                 <a:latin typeface="Consolas" panose="020B0609020204030204" pitchFamily="49" charset="0"/>
               </a:rPr>
               <a:t> </a:t>
             </a:r>
             <a:r>
-              <a:rPr lang="pl-PL" sz="1200" dirty="0" err="1" smtClean="0">
-                <a:solidFill>
-                  <a:srgbClr val="FFA657"/>
+              <a:rPr lang="pl-PL" sz="1200" dirty="0" err="1">
+                <a:solidFill>
+                  <a:srgbClr val="CCCCCC"/>
                 </a:solidFill>
                 <a:latin typeface="Consolas" panose="020B0609020204030204" pitchFamily="49" charset="0"/>
               </a:rPr>
               <a:t>dt</a:t>
             </a:r>
-            <a:endParaRPr lang="pl-PL" sz="1200" dirty="0" smtClean="0">
+            <a:endParaRPr lang="pl-PL" sz="1200" dirty="0">
               <a:solidFill>
-                <a:srgbClr val="BBBEBF"/>
+                <a:srgbClr val="CCCCCC"/>
               </a:solidFill>
               <a:latin typeface="Consolas" panose="020B0609020204030204" pitchFamily="49" charset="0"/>
             </a:endParaRPr>
@@ -6937,56 +6874,47 @@
           <a:p>
             <a:pPr>
               <a:lnSpc>
-                <a:spcPts val="1300"/>
+                <a:spcPts val="1200"/>
               </a:lnSpc>
             </a:pPr>
             <a:r>
-              <a:rPr lang="pl-PL" sz="1200" dirty="0" smtClean="0">
-                <a:solidFill>
-                  <a:srgbClr val="BBBEBF"/>
+              <a:rPr lang="pl-PL" sz="1200" dirty="0">
+                <a:solidFill>
+                  <a:srgbClr val="CCCCCC"/>
                 </a:solidFill>
                 <a:latin typeface="Consolas" panose="020B0609020204030204" pitchFamily="49" charset="0"/>
               </a:rPr>
               <a:t>        </a:t>
             </a:r>
             <a:r>
-              <a:rPr lang="pl-PL" sz="1200" dirty="0" err="1" smtClean="0">
-                <a:solidFill>
-                  <a:srgbClr val="C9D1D9"/>
+              <a:rPr lang="pl-PL" sz="1200" dirty="0" err="1">
+                <a:solidFill>
+                  <a:srgbClr val="569CD6"/>
                 </a:solidFill>
                 <a:latin typeface="Consolas" panose="020B0609020204030204" pitchFamily="49" charset="0"/>
               </a:rPr>
               <a:t>self</a:t>
             </a:r>
             <a:r>
-              <a:rPr lang="pl-PL" sz="1200" dirty="0" err="1" smtClean="0">
-                <a:solidFill>
-                  <a:srgbClr val="BBBEBF"/>
-                </a:solidFill>
-                <a:latin typeface="Consolas" panose="020B0609020204030204" pitchFamily="49" charset="0"/>
-              </a:rPr>
-              <a:t>.</a:t>
-            </a:r>
-            <a:r>
-              <a:rPr lang="pl-PL" sz="1200" dirty="0" err="1" smtClean="0">
-                <a:solidFill>
-                  <a:srgbClr val="C9D1D9"/>
-                </a:solidFill>
-                <a:latin typeface="Consolas" panose="020B0609020204030204" pitchFamily="49" charset="0"/>
-              </a:rPr>
-              <a:t>yaw</a:t>
-            </a:r>
-            <a:r>
-              <a:rPr lang="pl-PL" sz="1200" dirty="0" smtClean="0">
-                <a:solidFill>
-                  <a:srgbClr val="BBBEBF"/>
+              <a:rPr lang="pl-PL" sz="1200" dirty="0" err="1">
+                <a:solidFill>
+                  <a:srgbClr val="CCCCCC"/>
+                </a:solidFill>
+                <a:latin typeface="Consolas" panose="020B0609020204030204" pitchFamily="49" charset="0"/>
+              </a:rPr>
+              <a:t>.yaw</a:t>
+            </a:r>
+            <a:r>
+              <a:rPr lang="pl-PL" sz="1200" dirty="0">
+                <a:solidFill>
+                  <a:srgbClr val="CCCCCC"/>
                 </a:solidFill>
                 <a:latin typeface="Consolas" panose="020B0609020204030204" pitchFamily="49" charset="0"/>
               </a:rPr>
               <a:t>   </a:t>
             </a:r>
             <a:r>
-              <a:rPr lang="pl-PL" sz="1200" dirty="0" smtClean="0">
+              <a:rPr lang="pl-PL" sz="1200" dirty="0">
                 <a:solidFill>
                   <a:srgbClr val="D4D4D4"/>
                 </a:solidFill>
@@ -6995,34 +6923,34 @@
               <a:t>+=</a:t>
             </a:r>
             <a:r>
-              <a:rPr lang="pl-PL" sz="1200" dirty="0" smtClean="0">
-                <a:solidFill>
-                  <a:srgbClr val="BBBEBF"/>
+              <a:rPr lang="pl-PL" sz="1200" dirty="0">
+                <a:solidFill>
+                  <a:srgbClr val="CCCCCC"/>
                 </a:solidFill>
                 <a:latin typeface="Consolas" panose="020B0609020204030204" pitchFamily="49" charset="0"/>
               </a:rPr>
               <a:t> </a:t>
             </a:r>
             <a:r>
-              <a:rPr lang="pl-PL" sz="1200" dirty="0" err="1" smtClean="0">
-                <a:solidFill>
-                  <a:srgbClr val="FFA657"/>
+              <a:rPr lang="pl-PL" sz="1200" dirty="0" err="1">
+                <a:solidFill>
+                  <a:srgbClr val="CCCCCC"/>
                 </a:solidFill>
                 <a:latin typeface="Consolas" panose="020B0609020204030204" pitchFamily="49" charset="0"/>
               </a:rPr>
               <a:t>gyro_xyz</a:t>
             </a:r>
             <a:r>
-              <a:rPr lang="pl-PL" sz="1200" dirty="0" smtClean="0">
-                <a:solidFill>
-                  <a:srgbClr val="BBBEBF"/>
+              <a:rPr lang="pl-PL" sz="1200" dirty="0">
+                <a:solidFill>
+                  <a:srgbClr val="CCCCCC"/>
                 </a:solidFill>
                 <a:latin typeface="Consolas" panose="020B0609020204030204" pitchFamily="49" charset="0"/>
               </a:rPr>
               <a:t>[</a:t>
             </a:r>
             <a:r>
-              <a:rPr lang="pl-PL" sz="1200" dirty="0" smtClean="0">
+              <a:rPr lang="pl-PL" sz="1200" dirty="0">
                 <a:solidFill>
                   <a:srgbClr val="B5CEA8"/>
                 </a:solidFill>
@@ -7031,16 +6959,16 @@
               <a:t>2</a:t>
             </a:r>
             <a:r>
-              <a:rPr lang="pl-PL" sz="1200" dirty="0" smtClean="0">
-                <a:solidFill>
-                  <a:srgbClr val="BBBEBF"/>
+              <a:rPr lang="pl-PL" sz="1200" dirty="0">
+                <a:solidFill>
+                  <a:srgbClr val="CCCCCC"/>
                 </a:solidFill>
                 <a:latin typeface="Consolas" panose="020B0609020204030204" pitchFamily="49" charset="0"/>
               </a:rPr>
               <a:t>] </a:t>
             </a:r>
             <a:r>
-              <a:rPr lang="pl-PL" sz="1200" dirty="0" smtClean="0">
+              <a:rPr lang="pl-PL" sz="1200" dirty="0">
                 <a:solidFill>
                   <a:srgbClr val="D4D4D4"/>
                 </a:solidFill>
@@ -7049,26 +6977,26 @@
               <a:t>*</a:t>
             </a:r>
             <a:r>
-              <a:rPr lang="pl-PL" sz="1200" dirty="0" smtClean="0">
-                <a:solidFill>
-                  <a:srgbClr val="BBBEBF"/>
+              <a:rPr lang="pl-PL" sz="1200" dirty="0">
+                <a:solidFill>
+                  <a:srgbClr val="CCCCCC"/>
                 </a:solidFill>
                 <a:latin typeface="Consolas" panose="020B0609020204030204" pitchFamily="49" charset="0"/>
               </a:rPr>
               <a:t> </a:t>
             </a:r>
             <a:r>
-              <a:rPr lang="pl-PL" sz="1200" dirty="0" err="1" smtClean="0">
-                <a:solidFill>
-                  <a:srgbClr val="FFA657"/>
+              <a:rPr lang="pl-PL" sz="1200" dirty="0" err="1">
+                <a:solidFill>
+                  <a:srgbClr val="CCCCCC"/>
                 </a:solidFill>
                 <a:latin typeface="Consolas" panose="020B0609020204030204" pitchFamily="49" charset="0"/>
               </a:rPr>
               <a:t>dt</a:t>
             </a:r>
-            <a:endParaRPr lang="pl-PL" sz="1200" dirty="0" smtClean="0">
+            <a:endParaRPr lang="pl-PL" sz="1200" dirty="0">
               <a:solidFill>
-                <a:srgbClr val="BBBEBF"/>
+                <a:srgbClr val="CCCCCC"/>
               </a:solidFill>
               <a:latin typeface="Consolas" panose="020B0609020204030204" pitchFamily="49" charset="0"/>
             </a:endParaRPr>
@@ -7076,20 +7004,20 @@
           <a:p>
             <a:pPr>
               <a:lnSpc>
-                <a:spcPts val="1300"/>
+                <a:spcPts val="1200"/>
               </a:lnSpc>
             </a:pPr>
             <a:r>
-              <a:rPr lang="pl-PL" sz="1200" dirty="0" smtClean="0">
-                <a:solidFill>
-                  <a:srgbClr val="BBBEBF"/>
+              <a:rPr lang="pl-PL" sz="1200" dirty="0">
+                <a:solidFill>
+                  <a:srgbClr val="CCCCCC"/>
                 </a:solidFill>
                 <a:latin typeface="Consolas" panose="020B0609020204030204" pitchFamily="49" charset="0"/>
               </a:rPr>
               <a:t>        </a:t>
             </a:r>
             <a:r>
-              <a:rPr lang="pl-PL" sz="1200" dirty="0" smtClean="0">
+              <a:rPr lang="pl-PL" sz="1200" dirty="0">
                 <a:solidFill>
                   <a:srgbClr val="C586C0"/>
                 </a:solidFill>
@@ -7098,116 +7026,89 @@
               <a:t>return</a:t>
             </a:r>
             <a:r>
-              <a:rPr lang="pl-PL" sz="1200" dirty="0" smtClean="0">
-                <a:solidFill>
-                  <a:srgbClr val="BBBEBF"/>
+              <a:rPr lang="pl-PL" sz="1200" dirty="0">
+                <a:solidFill>
+                  <a:srgbClr val="CCCCCC"/>
                 </a:solidFill>
                 <a:latin typeface="Consolas" panose="020B0609020204030204" pitchFamily="49" charset="0"/>
               </a:rPr>
               <a:t> </a:t>
             </a:r>
             <a:r>
-              <a:rPr lang="pl-PL" sz="1200" dirty="0" err="1" smtClean="0">
-                <a:solidFill>
-                  <a:srgbClr val="C9D1D9"/>
+              <a:rPr lang="pl-PL" sz="1200" dirty="0" err="1">
+                <a:solidFill>
+                  <a:srgbClr val="569CD6"/>
                 </a:solidFill>
                 <a:latin typeface="Consolas" panose="020B0609020204030204" pitchFamily="49" charset="0"/>
               </a:rPr>
               <a:t>self</a:t>
             </a:r>
             <a:r>
-              <a:rPr lang="pl-PL" sz="1200" dirty="0" err="1" smtClean="0">
-                <a:solidFill>
-                  <a:srgbClr val="BBBEBF"/>
-                </a:solidFill>
-                <a:latin typeface="Consolas" panose="020B0609020204030204" pitchFamily="49" charset="0"/>
-              </a:rPr>
-              <a:t>.</a:t>
-            </a:r>
-            <a:r>
-              <a:rPr lang="pl-PL" sz="1200" dirty="0" err="1" smtClean="0">
-                <a:solidFill>
-                  <a:srgbClr val="C9D1D9"/>
-                </a:solidFill>
-                <a:latin typeface="Consolas" panose="020B0609020204030204" pitchFamily="49" charset="0"/>
-              </a:rPr>
-              <a:t>roll</a:t>
-            </a:r>
-            <a:r>
-              <a:rPr lang="pl-PL" sz="1200" dirty="0" smtClean="0">
-                <a:solidFill>
-                  <a:srgbClr val="BBBEBF"/>
+              <a:rPr lang="pl-PL" sz="1200" dirty="0" err="1">
+                <a:solidFill>
+                  <a:srgbClr val="CCCCCC"/>
+                </a:solidFill>
+                <a:latin typeface="Consolas" panose="020B0609020204030204" pitchFamily="49" charset="0"/>
+              </a:rPr>
+              <a:t>.roll</a:t>
+            </a:r>
+            <a:r>
+              <a:rPr lang="pl-PL" sz="1200" dirty="0">
+                <a:solidFill>
+                  <a:srgbClr val="CCCCCC"/>
                 </a:solidFill>
                 <a:latin typeface="Consolas" panose="020B0609020204030204" pitchFamily="49" charset="0"/>
               </a:rPr>
               <a:t>, </a:t>
             </a:r>
             <a:r>
-              <a:rPr lang="pl-PL" sz="1200" dirty="0" err="1" smtClean="0">
-                <a:solidFill>
-                  <a:srgbClr val="C9D1D9"/>
+              <a:rPr lang="pl-PL" sz="1200" dirty="0" err="1">
+                <a:solidFill>
+                  <a:srgbClr val="569CD6"/>
                 </a:solidFill>
                 <a:latin typeface="Consolas" panose="020B0609020204030204" pitchFamily="49" charset="0"/>
               </a:rPr>
               <a:t>self</a:t>
             </a:r>
             <a:r>
-              <a:rPr lang="pl-PL" sz="1200" dirty="0" err="1" smtClean="0">
-                <a:solidFill>
-                  <a:srgbClr val="BBBEBF"/>
-                </a:solidFill>
-                <a:latin typeface="Consolas" panose="020B0609020204030204" pitchFamily="49" charset="0"/>
-              </a:rPr>
-              <a:t>.</a:t>
-            </a:r>
-            <a:r>
-              <a:rPr lang="pl-PL" sz="1200" dirty="0" err="1" smtClean="0">
-                <a:solidFill>
-                  <a:srgbClr val="C9D1D9"/>
-                </a:solidFill>
-                <a:latin typeface="Consolas" panose="020B0609020204030204" pitchFamily="49" charset="0"/>
-              </a:rPr>
-              <a:t>pitch</a:t>
-            </a:r>
-            <a:r>
-              <a:rPr lang="pl-PL" sz="1200" dirty="0" smtClean="0">
-                <a:solidFill>
-                  <a:srgbClr val="BBBEBF"/>
+              <a:rPr lang="pl-PL" sz="1200" dirty="0" err="1">
+                <a:solidFill>
+                  <a:srgbClr val="CCCCCC"/>
+                </a:solidFill>
+                <a:latin typeface="Consolas" panose="020B0609020204030204" pitchFamily="49" charset="0"/>
+              </a:rPr>
+              <a:t>.pitch</a:t>
+            </a:r>
+            <a:r>
+              <a:rPr lang="pl-PL" sz="1200" dirty="0">
+                <a:solidFill>
+                  <a:srgbClr val="CCCCCC"/>
                 </a:solidFill>
                 <a:latin typeface="Consolas" panose="020B0609020204030204" pitchFamily="49" charset="0"/>
               </a:rPr>
               <a:t>, </a:t>
             </a:r>
             <a:r>
-              <a:rPr lang="pl-PL" sz="1200" dirty="0" err="1" smtClean="0">
-                <a:solidFill>
-                  <a:srgbClr val="C9D1D9"/>
+              <a:rPr lang="pl-PL" sz="1200" dirty="0" err="1">
+                <a:solidFill>
+                  <a:srgbClr val="569CD6"/>
                 </a:solidFill>
                 <a:latin typeface="Consolas" panose="020B0609020204030204" pitchFamily="49" charset="0"/>
               </a:rPr>
               <a:t>self</a:t>
             </a:r>
             <a:r>
-              <a:rPr lang="pl-PL" sz="1200" dirty="0" err="1" smtClean="0">
-                <a:solidFill>
-                  <a:srgbClr val="BBBEBF"/>
-                </a:solidFill>
-                <a:latin typeface="Consolas" panose="020B0609020204030204" pitchFamily="49" charset="0"/>
-              </a:rPr>
-              <a:t>.</a:t>
-            </a:r>
-            <a:r>
-              <a:rPr lang="pl-PL" sz="1200" dirty="0" err="1" smtClean="0">
-                <a:solidFill>
-                  <a:srgbClr val="C9D1D9"/>
-                </a:solidFill>
-                <a:latin typeface="Consolas" panose="020B0609020204030204" pitchFamily="49" charset="0"/>
-              </a:rPr>
-              <a:t>yaw</a:t>
-            </a:r>
-            <a:endParaRPr lang="pl-PL" sz="1200" dirty="0" smtClean="0">
+              <a:rPr lang="pl-PL" sz="1200" dirty="0" err="1">
+                <a:solidFill>
+                  <a:srgbClr val="CCCCCC"/>
+                </a:solidFill>
+                <a:latin typeface="Consolas" panose="020B0609020204030204" pitchFamily="49" charset="0"/>
+              </a:rPr>
+              <a:t>.yaw</a:t>
+            </a:r>
+            <a:endParaRPr lang="pl-PL" sz="1200" dirty="0">
               <a:solidFill>
-                <a:srgbClr val="BBBEBF"/>
+                <a:srgbClr val="CCCCCC"/>
               </a:solidFill>
               <a:latin typeface="Consolas" panose="020B0609020204030204" pitchFamily="49" charset="0"/>
             </a:endParaRPr>
@@ -7215,38 +7116,38 @@
           <a:p>
             <a:pPr>
               <a:lnSpc>
-                <a:spcPts val="1300"/>
+                <a:spcPts val="1200"/>
               </a:lnSpc>
             </a:pPr>
             <a:r>
-              <a:rPr lang="pl-PL" sz="1200" dirty="0" smtClean="0">
-                <a:solidFill>
-                  <a:srgbClr val="BBBEBF"/>
+              <a:rPr lang="pl-PL" sz="1200" dirty="0">
+                <a:solidFill>
+                  <a:srgbClr val="CCCCCC"/>
                 </a:solidFill>
                 <a:latin typeface="Consolas" panose="020B0609020204030204" pitchFamily="49" charset="0"/>
               </a:rPr>
               <a:t/>
             </a:r>
             <a:br>
-              <a:rPr lang="pl-PL" sz="1200" dirty="0" smtClean="0">
-                <a:solidFill>
-                  <a:srgbClr val="BBBEBF"/>
+              <a:rPr lang="pl-PL" sz="1200" dirty="0">
+                <a:solidFill>
+                  <a:srgbClr val="CCCCCC"/>
                 </a:solidFill>
                 <a:latin typeface="Consolas" panose="020B0609020204030204" pitchFamily="49" charset="0"/>
               </a:rPr>
             </a:br>
             <a:r>
-              <a:rPr lang="pl-PL" sz="1200" dirty="0" smtClean="0">
-                <a:solidFill>
-                  <a:srgbClr val="8B949E"/>
+              <a:rPr lang="pl-PL" sz="1200" dirty="0">
+                <a:solidFill>
+                  <a:srgbClr val="6A9955"/>
                 </a:solidFill>
                 <a:latin typeface="Consolas" panose="020B0609020204030204" pitchFamily="49" charset="0"/>
               </a:rPr>
               <a:t># Przykład użycia:</a:t>
             </a:r>
-            <a:endParaRPr lang="pl-PL" sz="1200" dirty="0" smtClean="0">
+            <a:endParaRPr lang="pl-PL" sz="1200" dirty="0">
               <a:solidFill>
-                <a:srgbClr val="BBBEBF"/>
+                <a:srgbClr val="CCCCCC"/>
               </a:solidFill>
               <a:latin typeface="Consolas" panose="020B0609020204030204" pitchFamily="49" charset="0"/>
             </a:endParaRPr>
@@ -7254,29 +7155,29 @@
           <a:p>
             <a:pPr>
               <a:lnSpc>
-                <a:spcPts val="1300"/>
+                <a:spcPts val="1200"/>
               </a:lnSpc>
             </a:pPr>
             <a:r>
-              <a:rPr lang="pl-PL" sz="1200" dirty="0" smtClean="0">
-                <a:solidFill>
-                  <a:srgbClr val="C9D1D9"/>
+              <a:rPr lang="pl-PL" sz="1200" dirty="0">
+                <a:solidFill>
+                  <a:srgbClr val="9CDCFE"/>
                 </a:solidFill>
                 <a:latin typeface="Consolas" panose="020B0609020204030204" pitchFamily="49" charset="0"/>
               </a:rPr>
               <a:t>integrator</a:t>
             </a:r>
             <a:r>
-              <a:rPr lang="pl-PL" sz="1200" dirty="0" smtClean="0">
-                <a:solidFill>
-                  <a:srgbClr val="BBBEBF"/>
+              <a:rPr lang="pl-PL" sz="1200" dirty="0">
+                <a:solidFill>
+                  <a:srgbClr val="CCCCCC"/>
                 </a:solidFill>
                 <a:latin typeface="Consolas" panose="020B0609020204030204" pitchFamily="49" charset="0"/>
               </a:rPr>
               <a:t> </a:t>
             </a:r>
             <a:r>
-              <a:rPr lang="pl-PL" sz="1200" dirty="0" smtClean="0">
+              <a:rPr lang="pl-PL" sz="1200" dirty="0">
                 <a:solidFill>
                   <a:srgbClr val="D4D4D4"/>
                 </a:solidFill>
@@ -7285,27 +7186,27 @@
               <a:t>=</a:t>
             </a:r>
             <a:r>
-              <a:rPr lang="pl-PL" sz="1200" dirty="0" smtClean="0">
-                <a:solidFill>
-                  <a:srgbClr val="BBBEBF"/>
+              <a:rPr lang="pl-PL" sz="1200" dirty="0">
+                <a:solidFill>
+                  <a:srgbClr val="CCCCCC"/>
                 </a:solidFill>
                 <a:latin typeface="Consolas" panose="020B0609020204030204" pitchFamily="49" charset="0"/>
               </a:rPr>
               <a:t> </a:t>
             </a:r>
             <a:r>
-              <a:rPr lang="pl-PL" sz="1200" dirty="0" err="1" smtClean="0">
-                <a:solidFill>
-                  <a:srgbClr val="4EC9B0"/>
+              <a:rPr lang="pl-PL" sz="1200" dirty="0" err="1">
+                <a:solidFill>
+                  <a:srgbClr val="CCCCCC"/>
                 </a:solidFill>
                 <a:latin typeface="Consolas" panose="020B0609020204030204" pitchFamily="49" charset="0"/>
               </a:rPr>
               <a:t>ImuIntegrator</a:t>
             </a:r>
             <a:r>
-              <a:rPr lang="pl-PL" sz="1200" dirty="0" smtClean="0">
-                <a:solidFill>
-                  <a:srgbClr val="BBBEBF"/>
+              <a:rPr lang="pl-PL" sz="1200" dirty="0">
+                <a:solidFill>
+                  <a:srgbClr val="CCCCCC"/>
                 </a:solidFill>
                 <a:latin typeface="Consolas" panose="020B0609020204030204" pitchFamily="49" charset="0"/>
               </a:rPr>
@@ -7315,65 +7216,65 @@
           <a:p>
             <a:pPr>
               <a:lnSpc>
-                <a:spcPts val="1300"/>
+                <a:spcPts val="1200"/>
               </a:lnSpc>
             </a:pPr>
             <a:r>
-              <a:rPr lang="pl-PL" sz="1200" dirty="0" err="1" smtClean="0">
-                <a:solidFill>
-                  <a:srgbClr val="C9D1D9"/>
+              <a:rPr lang="pl-PL" sz="1200" dirty="0" err="1">
+                <a:solidFill>
+                  <a:srgbClr val="9CDCFE"/>
                 </a:solidFill>
                 <a:latin typeface="Consolas" panose="020B0609020204030204" pitchFamily="49" charset="0"/>
               </a:rPr>
               <a:t>roll</a:t>
             </a:r>
             <a:r>
-              <a:rPr lang="pl-PL" sz="1200" dirty="0" smtClean="0">
-                <a:solidFill>
-                  <a:srgbClr val="BBBEBF"/>
+              <a:rPr lang="pl-PL" sz="1200" dirty="0">
+                <a:solidFill>
+                  <a:srgbClr val="CCCCCC"/>
                 </a:solidFill>
                 <a:latin typeface="Consolas" panose="020B0609020204030204" pitchFamily="49" charset="0"/>
               </a:rPr>
               <a:t>, </a:t>
             </a:r>
             <a:r>
-              <a:rPr lang="pl-PL" sz="1200" dirty="0" err="1" smtClean="0">
-                <a:solidFill>
-                  <a:srgbClr val="C9D1D9"/>
+              <a:rPr lang="pl-PL" sz="1200" dirty="0" err="1">
+                <a:solidFill>
+                  <a:srgbClr val="9CDCFE"/>
                 </a:solidFill>
                 <a:latin typeface="Consolas" panose="020B0609020204030204" pitchFamily="49" charset="0"/>
               </a:rPr>
               <a:t>pitch</a:t>
             </a:r>
             <a:r>
-              <a:rPr lang="pl-PL" sz="1200" dirty="0" smtClean="0">
-                <a:solidFill>
-                  <a:srgbClr val="BBBEBF"/>
+              <a:rPr lang="pl-PL" sz="1200" dirty="0">
+                <a:solidFill>
+                  <a:srgbClr val="CCCCCC"/>
                 </a:solidFill>
                 <a:latin typeface="Consolas" panose="020B0609020204030204" pitchFamily="49" charset="0"/>
               </a:rPr>
               <a:t>, </a:t>
             </a:r>
             <a:r>
-              <a:rPr lang="pl-PL" sz="1200" dirty="0" err="1" smtClean="0">
-                <a:solidFill>
-                  <a:srgbClr val="C9D1D9"/>
+              <a:rPr lang="pl-PL" sz="1200" dirty="0" err="1">
+                <a:solidFill>
+                  <a:srgbClr val="9CDCFE"/>
                 </a:solidFill>
                 <a:latin typeface="Consolas" panose="020B0609020204030204" pitchFamily="49" charset="0"/>
               </a:rPr>
               <a:t>yaw</a:t>
             </a:r>
             <a:r>
-              <a:rPr lang="pl-PL" sz="1200" dirty="0" smtClean="0">
-                <a:solidFill>
-                  <a:srgbClr val="BBBEBF"/>
+              <a:rPr lang="pl-PL" sz="1200" dirty="0">
+                <a:solidFill>
+                  <a:srgbClr val="CCCCCC"/>
                 </a:solidFill>
                 <a:latin typeface="Consolas" panose="020B0609020204030204" pitchFamily="49" charset="0"/>
               </a:rPr>
               <a:t> </a:t>
             </a:r>
             <a:r>
-              <a:rPr lang="pl-PL" sz="1200" dirty="0" smtClean="0">
+              <a:rPr lang="pl-PL" sz="1200" dirty="0">
                 <a:solidFill>
                   <a:srgbClr val="D4D4D4"/>
                 </a:solidFill>
@@ -7382,88 +7283,79 @@
               <a:t>=</a:t>
             </a:r>
             <a:r>
-              <a:rPr lang="pl-PL" sz="1200" dirty="0" smtClean="0">
-                <a:solidFill>
-                  <a:srgbClr val="BBBEBF"/>
+              <a:rPr lang="pl-PL" sz="1200" dirty="0">
+                <a:solidFill>
+                  <a:srgbClr val="CCCCCC"/>
                 </a:solidFill>
                 <a:latin typeface="Consolas" panose="020B0609020204030204" pitchFamily="49" charset="0"/>
               </a:rPr>
               <a:t> </a:t>
             </a:r>
             <a:r>
-              <a:rPr lang="pl-PL" sz="1200" dirty="0" err="1" smtClean="0">
-                <a:solidFill>
-                  <a:srgbClr val="C9D1D9"/>
+              <a:rPr lang="pl-PL" sz="1200" dirty="0" err="1">
+                <a:solidFill>
+                  <a:srgbClr val="9CDCFE"/>
                 </a:solidFill>
                 <a:latin typeface="Consolas" panose="020B0609020204030204" pitchFamily="49" charset="0"/>
               </a:rPr>
               <a:t>integrator</a:t>
             </a:r>
             <a:r>
-              <a:rPr lang="pl-PL" sz="1200" dirty="0" err="1" smtClean="0">
-                <a:solidFill>
-                  <a:srgbClr val="BBBEBF"/>
+              <a:rPr lang="pl-PL" sz="1200" dirty="0" err="1">
+                <a:solidFill>
+                  <a:srgbClr val="CCCCCC"/>
+                </a:solidFill>
+                <a:latin typeface="Consolas" panose="020B0609020204030204" pitchFamily="49" charset="0"/>
+              </a:rPr>
+              <a:t>.update</a:t>
+            </a:r>
+            <a:r>
+              <a:rPr lang="pl-PL" sz="1200" dirty="0">
+                <a:solidFill>
+                  <a:srgbClr val="CCCCCC"/>
+                </a:solidFill>
+                <a:latin typeface="Consolas" panose="020B0609020204030204" pitchFamily="49" charset="0"/>
+              </a:rPr>
+              <a:t>(</a:t>
+            </a:r>
+            <a:r>
+              <a:rPr lang="pl-PL" sz="1200" dirty="0" err="1">
+                <a:solidFill>
+                  <a:srgbClr val="4EC9B0"/>
+                </a:solidFill>
+                <a:latin typeface="Consolas" panose="020B0609020204030204" pitchFamily="49" charset="0"/>
+              </a:rPr>
+              <a:t>np</a:t>
+            </a:r>
+            <a:r>
+              <a:rPr lang="pl-PL" sz="1200" dirty="0" err="1">
+                <a:solidFill>
+                  <a:srgbClr val="CCCCCC"/>
                 </a:solidFill>
                 <a:latin typeface="Consolas" panose="020B0609020204030204" pitchFamily="49" charset="0"/>
               </a:rPr>
               <a:t>.</a:t>
             </a:r>
             <a:r>
-              <a:rPr lang="pl-PL" sz="1200" dirty="0" err="1" smtClean="0">
-                <a:solidFill>
-                  <a:srgbClr val="D2A8FF"/>
-                </a:solidFill>
-                <a:latin typeface="Consolas" panose="020B0609020204030204" pitchFamily="49" charset="0"/>
-              </a:rPr>
-              <a:t>update</a:t>
-            </a:r>
-            <a:r>
-              <a:rPr lang="pl-PL" sz="1200" dirty="0" smtClean="0">
-                <a:solidFill>
-                  <a:srgbClr val="BBBEBF"/>
-                </a:solidFill>
-                <a:latin typeface="Consolas" panose="020B0609020204030204" pitchFamily="49" charset="0"/>
-              </a:rPr>
-              <a:t>(</a:t>
-            </a:r>
-            <a:r>
-              <a:rPr lang="pl-PL" sz="1200" dirty="0" err="1" smtClean="0">
-                <a:solidFill>
-                  <a:srgbClr val="4EC9B0"/>
-                </a:solidFill>
-                <a:latin typeface="Consolas" panose="020B0609020204030204" pitchFamily="49" charset="0"/>
-              </a:rPr>
-              <a:t>np</a:t>
-            </a:r>
-            <a:r>
-              <a:rPr lang="pl-PL" sz="1200" dirty="0" err="1" smtClean="0">
-                <a:solidFill>
-                  <a:srgbClr val="BBBEBF"/>
-                </a:solidFill>
-                <a:latin typeface="Consolas" panose="020B0609020204030204" pitchFamily="49" charset="0"/>
-              </a:rPr>
-              <a:t>.</a:t>
-            </a:r>
-            <a:r>
-              <a:rPr lang="pl-PL" sz="1200" dirty="0" err="1" smtClean="0">
-                <a:solidFill>
-                  <a:srgbClr val="D2A8FF"/>
+              <a:rPr lang="pl-PL" sz="1200" dirty="0" err="1">
+                <a:solidFill>
+                  <a:srgbClr val="DCDCAA"/>
                 </a:solidFill>
                 <a:latin typeface="Consolas" panose="020B0609020204030204" pitchFamily="49" charset="0"/>
               </a:rPr>
               <a:t>array</a:t>
             </a:r>
             <a:r>
-              <a:rPr lang="pl-PL" sz="1200" dirty="0" smtClean="0">
-                <a:solidFill>
-                  <a:srgbClr val="BBBEBF"/>
+              <a:rPr lang="pl-PL" sz="1200" dirty="0">
+                <a:solidFill>
+                  <a:srgbClr val="CCCCCC"/>
                 </a:solidFill>
                 <a:latin typeface="Consolas" panose="020B0609020204030204" pitchFamily="49" charset="0"/>
               </a:rPr>
               <a:t>([</a:t>
             </a:r>
             <a:r>
-              <a:rPr lang="pl-PL" sz="1200" dirty="0" smtClean="0">
+              <a:rPr lang="pl-PL" sz="1200" dirty="0">
                 <a:solidFill>
                   <a:srgbClr val="B5CEA8"/>
                 </a:solidFill>
@@ -7472,16 +7364,16 @@
               <a:t>0.01</a:t>
             </a:r>
             <a:r>
-              <a:rPr lang="pl-PL" sz="1200" dirty="0" smtClean="0">
-                <a:solidFill>
-                  <a:srgbClr val="BBBEBF"/>
+              <a:rPr lang="pl-PL" sz="1200" dirty="0">
+                <a:solidFill>
+                  <a:srgbClr val="CCCCCC"/>
                 </a:solidFill>
                 <a:latin typeface="Consolas" panose="020B0609020204030204" pitchFamily="49" charset="0"/>
               </a:rPr>
               <a:t>, </a:t>
             </a:r>
             <a:r>
-              <a:rPr lang="pl-PL" sz="1200" dirty="0" smtClean="0">
+              <a:rPr lang="pl-PL" sz="1200" dirty="0">
                 <a:solidFill>
                   <a:srgbClr val="D4D4D4"/>
                 </a:solidFill>
@@ -7490,7 +7382,7 @@
               <a:t>-</a:t>
             </a:r>
             <a:r>
-              <a:rPr lang="pl-PL" sz="1200" dirty="0" smtClean="0">
+              <a:rPr lang="pl-PL" sz="1200" dirty="0">
                 <a:solidFill>
                   <a:srgbClr val="B5CEA8"/>
                 </a:solidFill>
@@ -7499,16 +7391,16 @@
               <a:t>0.02</a:t>
             </a:r>
             <a:r>
-              <a:rPr lang="pl-PL" sz="1200" dirty="0" smtClean="0">
-                <a:solidFill>
-                  <a:srgbClr val="BBBEBF"/>
+              <a:rPr lang="pl-PL" sz="1200" dirty="0">
+                <a:solidFill>
+                  <a:srgbClr val="CCCCCC"/>
                 </a:solidFill>
                 <a:latin typeface="Consolas" panose="020B0609020204030204" pitchFamily="49" charset="0"/>
               </a:rPr>
               <a:t>, </a:t>
             </a:r>
             <a:r>
-              <a:rPr lang="pl-PL" sz="1200" dirty="0" smtClean="0">
+              <a:rPr lang="pl-PL" sz="1200" dirty="0">
                 <a:solidFill>
                   <a:srgbClr val="B5CEA8"/>
                 </a:solidFill>
@@ -7517,25 +7409,25 @@
               <a:t>0.15</a:t>
             </a:r>
             <a:r>
-              <a:rPr lang="pl-PL" sz="1200" dirty="0" smtClean="0">
-                <a:solidFill>
-                  <a:srgbClr val="BBBEBF"/>
+              <a:rPr lang="pl-PL" sz="1200" dirty="0">
+                <a:solidFill>
+                  <a:srgbClr val="CCCCCC"/>
                 </a:solidFill>
                 <a:latin typeface="Consolas" panose="020B0609020204030204" pitchFamily="49" charset="0"/>
               </a:rPr>
               <a:t>]), </a:t>
             </a:r>
             <a:r>
-              <a:rPr lang="pl-PL" sz="1200" dirty="0" err="1" smtClean="0">
-                <a:solidFill>
-                  <a:srgbClr val="FFA657"/>
+              <a:rPr lang="pl-PL" sz="1200" dirty="0" err="1">
+                <a:solidFill>
+                  <a:srgbClr val="9CDCFE"/>
                 </a:solidFill>
                 <a:latin typeface="Consolas" panose="020B0609020204030204" pitchFamily="49" charset="0"/>
               </a:rPr>
               <a:t>dt</a:t>
             </a:r>
             <a:r>
-              <a:rPr lang="pl-PL" sz="1200" dirty="0" smtClean="0">
+              <a:rPr lang="pl-PL" sz="1200" dirty="0">
                 <a:solidFill>
                   <a:srgbClr val="D4D4D4"/>
                 </a:solidFill>
@@ -7544,7 +7436,7 @@
               <a:t>=</a:t>
             </a:r>
             <a:r>
-              <a:rPr lang="pl-PL" sz="1200" dirty="0" smtClean="0">
+              <a:rPr lang="pl-PL" sz="1200" dirty="0">
                 <a:solidFill>
                   <a:srgbClr val="B5CEA8"/>
                 </a:solidFill>
@@ -7553,18 +7445,19 @@
               <a:t>0.005</a:t>
             </a:r>
             <a:r>
-              <a:rPr lang="pl-PL" sz="1200" dirty="0" smtClean="0">
-                <a:solidFill>
-                  <a:srgbClr val="BBBEBF"/>
+              <a:rPr lang="pl-PL" sz="1200" dirty="0">
+                <a:solidFill>
+                  <a:srgbClr val="CCCCCC"/>
                 </a:solidFill>
                 <a:latin typeface="Consolas" panose="020B0609020204030204" pitchFamily="49" charset="0"/>
               </a:rPr>
               <a:t>)</a:t>
             </a:r>
-            <a:endParaRPr lang="pl-PL" sz="1200" dirty="0">
+            <a:endParaRPr lang="pl-PL" sz="1200" b="0" dirty="0">
               <a:solidFill>
-                <a:srgbClr val="BBBEBF"/>
+                <a:srgbClr val="CCCCCC"/>
               </a:solidFill>
+              <a:effectLst/>
               <a:latin typeface="Consolas" panose="020B0609020204030204" pitchFamily="49" charset="0"/>
             </a:endParaRPr>
           </a:p>

--- a/zajecia/robo/robo_w2.pptx
+++ b/zajecia/robo/robo_w2.pptx
@@ -5749,7 +5749,7 @@
         <p:spPr>
           <a:xfrm>
             <a:off x="274320" y="1005840"/>
-            <a:ext cx="8595360" cy="3365438"/>
+            <a:ext cx="8595360" cy="3019120"/>
           </a:xfrm>
           <a:prstGeom prst="rect">
             <a:avLst/>
@@ -7969,7 +7969,7 @@
         <p:spPr>
           <a:xfrm>
             <a:off x="457200" y="1051559"/>
-            <a:ext cx="8321040" cy="3295774"/>
+            <a:ext cx="8321040" cy="3297056"/>
           </a:xfrm>
           <a:prstGeom prst="rect">
             <a:avLst/>
@@ -7989,7 +7989,7 @@
               </a:lnSpc>
             </a:pPr>
             <a:r>
-              <a:rPr lang="pl-PL" sz="1300" dirty="0">
+              <a:rPr lang="pl-PL" sz="1400" dirty="0">
                 <a:solidFill>
                   <a:srgbClr val="C586C0"/>
                 </a:solidFill>
@@ -7998,16 +7998,16 @@
               <a:t>import</a:t>
             </a:r>
             <a:r>
-              <a:rPr lang="pl-PL" sz="1300" dirty="0">
-                <a:solidFill>
-                  <a:srgbClr val="BBBEBF"/>
+              <a:rPr lang="pl-PL" sz="1400" dirty="0">
+                <a:solidFill>
+                  <a:srgbClr val="CCCCCC"/>
                 </a:solidFill>
                 <a:latin typeface="Consolas" panose="020B0609020204030204" pitchFamily="49" charset="0"/>
               </a:rPr>
               <a:t> </a:t>
             </a:r>
             <a:r>
-              <a:rPr lang="pl-PL" sz="1300" dirty="0" err="1">
+              <a:rPr lang="pl-PL" sz="1400" dirty="0" err="1">
                 <a:solidFill>
                   <a:srgbClr val="4EC9B0"/>
                 </a:solidFill>
@@ -8016,16 +8016,16 @@
               <a:t>numpy</a:t>
             </a:r>
             <a:r>
-              <a:rPr lang="pl-PL" sz="1300" dirty="0">
-                <a:solidFill>
-                  <a:srgbClr val="BBBEBF"/>
+              <a:rPr lang="pl-PL" sz="1400" dirty="0">
+                <a:solidFill>
+                  <a:srgbClr val="CCCCCC"/>
                 </a:solidFill>
                 <a:latin typeface="Consolas" panose="020B0609020204030204" pitchFamily="49" charset="0"/>
               </a:rPr>
               <a:t> </a:t>
             </a:r>
             <a:r>
-              <a:rPr lang="pl-PL" sz="1300" dirty="0">
+              <a:rPr lang="pl-PL" sz="1400" dirty="0">
                 <a:solidFill>
                   <a:srgbClr val="C586C0"/>
                 </a:solidFill>
@@ -8034,16 +8034,16 @@
               <a:t>as</a:t>
             </a:r>
             <a:r>
-              <a:rPr lang="pl-PL" sz="1300" dirty="0">
-                <a:solidFill>
-                  <a:srgbClr val="BBBEBF"/>
+              <a:rPr lang="pl-PL" sz="1400" dirty="0">
+                <a:solidFill>
+                  <a:srgbClr val="CCCCCC"/>
                 </a:solidFill>
                 <a:latin typeface="Consolas" panose="020B0609020204030204" pitchFamily="49" charset="0"/>
               </a:rPr>
               <a:t> </a:t>
             </a:r>
             <a:r>
-              <a:rPr lang="pl-PL" sz="1300" dirty="0" err="1">
+              <a:rPr lang="pl-PL" sz="1400" dirty="0" err="1">
                 <a:solidFill>
                   <a:srgbClr val="4EC9B0"/>
                 </a:solidFill>
@@ -8051,9 +8051,9 @@
               </a:rPr>
               <a:t>np</a:t>
             </a:r>
-            <a:endParaRPr lang="pl-PL" sz="1300" dirty="0">
+            <a:endParaRPr lang="pl-PL" sz="1400" dirty="0">
               <a:solidFill>
-                <a:srgbClr val="BBBEBF"/>
+                <a:srgbClr val="CCCCCC"/>
               </a:solidFill>
               <a:latin typeface="Consolas" panose="020B0609020204030204" pitchFamily="49" charset="0"/>
             </a:endParaRPr>
@@ -8065,42 +8065,42 @@
               </a:lnSpc>
             </a:pPr>
             <a:r>
-              <a:rPr lang="pl-PL" sz="1300" dirty="0">
-                <a:solidFill>
-                  <a:srgbClr val="BBBEBF"/>
+              <a:rPr lang="pl-PL" sz="1400" dirty="0">
+                <a:solidFill>
+                  <a:srgbClr val="CCCCCC"/>
                 </a:solidFill>
                 <a:latin typeface="Consolas" panose="020B0609020204030204" pitchFamily="49" charset="0"/>
               </a:rPr>
               <a:t/>
             </a:r>
             <a:br>
-              <a:rPr lang="pl-PL" sz="1300" dirty="0">
-                <a:solidFill>
-                  <a:srgbClr val="BBBEBF"/>
+              <a:rPr lang="pl-PL" sz="1400" dirty="0">
+                <a:solidFill>
+                  <a:srgbClr val="CCCCCC"/>
                 </a:solidFill>
                 <a:latin typeface="Consolas" panose="020B0609020204030204" pitchFamily="49" charset="0"/>
               </a:rPr>
             </a:br>
             <a:r>
-              <a:rPr lang="pl-PL" sz="1300" dirty="0" err="1">
-                <a:solidFill>
-                  <a:srgbClr val="FF7B72"/>
+              <a:rPr lang="pl-PL" sz="1400" dirty="0" err="1">
+                <a:solidFill>
+                  <a:srgbClr val="569CD6"/>
                 </a:solidFill>
                 <a:latin typeface="Consolas" panose="020B0609020204030204" pitchFamily="49" charset="0"/>
               </a:rPr>
               <a:t>class</a:t>
             </a:r>
             <a:r>
-              <a:rPr lang="pl-PL" sz="1300" dirty="0">
-                <a:solidFill>
-                  <a:srgbClr val="BBBEBF"/>
+              <a:rPr lang="pl-PL" sz="1400" dirty="0">
+                <a:solidFill>
+                  <a:srgbClr val="CCCCCC"/>
                 </a:solidFill>
                 <a:latin typeface="Consolas" panose="020B0609020204030204" pitchFamily="49" charset="0"/>
               </a:rPr>
               <a:t> </a:t>
             </a:r>
             <a:r>
-              <a:rPr lang="pl-PL" sz="1300" dirty="0" err="1">
+              <a:rPr lang="pl-PL" sz="1400" dirty="0" err="1">
                 <a:solidFill>
                   <a:srgbClr val="4EC9B0"/>
                 </a:solidFill>
@@ -8109,9 +8109,9 @@
               <a:t>StepOdometry</a:t>
             </a:r>
             <a:r>
-              <a:rPr lang="pl-PL" sz="1300" dirty="0">
-                <a:solidFill>
-                  <a:srgbClr val="BBBEBF"/>
+              <a:rPr lang="pl-PL" sz="1400" dirty="0">
+                <a:solidFill>
+                  <a:srgbClr val="CCCCCC"/>
                 </a:solidFill>
                 <a:latin typeface="Consolas" panose="020B0609020204030204" pitchFamily="49" charset="0"/>
               </a:rPr>
@@ -8125,34 +8125,34 @@
               </a:lnSpc>
             </a:pPr>
             <a:r>
-              <a:rPr lang="pl-PL" sz="1300" dirty="0">
-                <a:solidFill>
-                  <a:srgbClr val="BBBEBF"/>
+              <a:rPr lang="pl-PL" sz="1400" dirty="0">
+                <a:solidFill>
+                  <a:srgbClr val="CCCCCC"/>
                 </a:solidFill>
                 <a:latin typeface="Consolas" panose="020B0609020204030204" pitchFamily="49" charset="0"/>
               </a:rPr>
               <a:t>    </a:t>
             </a:r>
             <a:r>
-              <a:rPr lang="pl-PL" sz="1300" dirty="0">
-                <a:solidFill>
-                  <a:srgbClr val="FF7B72"/>
+              <a:rPr lang="pl-PL" sz="1400" dirty="0">
+                <a:solidFill>
+                  <a:srgbClr val="569CD6"/>
                 </a:solidFill>
                 <a:latin typeface="Consolas" panose="020B0609020204030204" pitchFamily="49" charset="0"/>
               </a:rPr>
               <a:t>def</a:t>
             </a:r>
             <a:r>
-              <a:rPr lang="pl-PL" sz="1300" dirty="0">
-                <a:solidFill>
-                  <a:srgbClr val="BBBEBF"/>
+              <a:rPr lang="pl-PL" sz="1400" dirty="0">
+                <a:solidFill>
+                  <a:srgbClr val="CCCCCC"/>
                 </a:solidFill>
                 <a:latin typeface="Consolas" panose="020B0609020204030204" pitchFamily="49" charset="0"/>
               </a:rPr>
               <a:t> </a:t>
             </a:r>
             <a:r>
-              <a:rPr lang="pl-PL" sz="1300" dirty="0">
+              <a:rPr lang="pl-PL" sz="1400" dirty="0">
                 <a:solidFill>
                   <a:srgbClr val="DCDCAA"/>
                 </a:solidFill>
@@ -8161,7 +8161,7 @@
               <a:t>__</a:t>
             </a:r>
             <a:r>
-              <a:rPr lang="pl-PL" sz="1300" dirty="0" err="1">
+              <a:rPr lang="pl-PL" sz="1400" dirty="0" err="1">
                 <a:solidFill>
                   <a:srgbClr val="DCDCAA"/>
                 </a:solidFill>
@@ -8170,7 +8170,7 @@
               <a:t>init</a:t>
             </a:r>
             <a:r>
-              <a:rPr lang="pl-PL" sz="1300" dirty="0">
+              <a:rPr lang="pl-PL" sz="1400" dirty="0">
                 <a:solidFill>
                   <a:srgbClr val="DCDCAA"/>
                 </a:solidFill>
@@ -8179,27 +8179,27 @@
               <a:t>__</a:t>
             </a:r>
             <a:r>
-              <a:rPr lang="pl-PL" sz="1300" dirty="0">
-                <a:solidFill>
-                  <a:srgbClr val="BBBEBF"/>
+              <a:rPr lang="pl-PL" sz="1400" dirty="0">
+                <a:solidFill>
+                  <a:srgbClr val="CCCCCC"/>
                 </a:solidFill>
                 <a:latin typeface="Consolas" panose="020B0609020204030204" pitchFamily="49" charset="0"/>
               </a:rPr>
               <a:t>(</a:t>
             </a:r>
             <a:r>
-              <a:rPr lang="pl-PL" sz="1300" dirty="0" err="1">
-                <a:solidFill>
-                  <a:srgbClr val="C9D1D9"/>
+              <a:rPr lang="pl-PL" sz="1400" dirty="0" err="1">
+                <a:solidFill>
+                  <a:srgbClr val="9CDCFE"/>
                 </a:solidFill>
                 <a:latin typeface="Consolas" panose="020B0609020204030204" pitchFamily="49" charset="0"/>
               </a:rPr>
               <a:t>self</a:t>
             </a:r>
             <a:r>
-              <a:rPr lang="pl-PL" sz="1300" dirty="0">
-                <a:solidFill>
-                  <a:srgbClr val="BBBEBF"/>
+              <a:rPr lang="pl-PL" sz="1400" dirty="0">
+                <a:solidFill>
+                  <a:srgbClr val="CCCCCC"/>
                 </a:solidFill>
                 <a:latin typeface="Consolas" panose="020B0609020204030204" pitchFamily="49" charset="0"/>
               </a:rPr>
@@ -8213,52 +8213,43 @@
               </a:lnSpc>
             </a:pPr>
             <a:r>
-              <a:rPr lang="pl-PL" sz="1300" dirty="0">
-                <a:solidFill>
-                  <a:srgbClr val="BBBEBF"/>
+              <a:rPr lang="pl-PL" sz="1400" dirty="0">
+                <a:solidFill>
+                  <a:srgbClr val="CCCCCC"/>
                 </a:solidFill>
                 <a:latin typeface="Consolas" panose="020B0609020204030204" pitchFamily="49" charset="0"/>
               </a:rPr>
               <a:t>        </a:t>
             </a:r>
             <a:r>
-              <a:rPr lang="pl-PL" sz="1300" dirty="0" err="1">
-                <a:solidFill>
-                  <a:srgbClr val="C9D1D9"/>
+              <a:rPr lang="pl-PL" sz="1400" dirty="0" err="1">
+                <a:solidFill>
+                  <a:srgbClr val="569CD6"/>
                 </a:solidFill>
                 <a:latin typeface="Consolas" panose="020B0609020204030204" pitchFamily="49" charset="0"/>
               </a:rPr>
               <a:t>self</a:t>
             </a:r>
             <a:r>
-              <a:rPr lang="pl-PL" sz="1300" dirty="0" err="1">
-                <a:solidFill>
-                  <a:srgbClr val="BBBEBF"/>
-                </a:solidFill>
-                <a:latin typeface="Consolas" panose="020B0609020204030204" pitchFamily="49" charset="0"/>
-              </a:rPr>
-              <a:t>.</a:t>
-            </a:r>
-            <a:r>
-              <a:rPr lang="pl-PL" sz="1300" dirty="0" err="1">
-                <a:solidFill>
-                  <a:srgbClr val="C9D1D9"/>
-                </a:solidFill>
-                <a:latin typeface="Consolas" panose="020B0609020204030204" pitchFamily="49" charset="0"/>
-              </a:rPr>
-              <a:t>x</a:t>
-            </a:r>
-            <a:r>
-              <a:rPr lang="pl-PL" sz="1300" dirty="0">
-                <a:solidFill>
-                  <a:srgbClr val="BBBEBF"/>
+              <a:rPr lang="pl-PL" sz="1400" dirty="0" err="1">
+                <a:solidFill>
+                  <a:srgbClr val="CCCCCC"/>
+                </a:solidFill>
+                <a:latin typeface="Consolas" panose="020B0609020204030204" pitchFamily="49" charset="0"/>
+              </a:rPr>
+              <a:t>.x</a:t>
+            </a:r>
+            <a:r>
+              <a:rPr lang="pl-PL" sz="1400" dirty="0">
+                <a:solidFill>
+                  <a:srgbClr val="CCCCCC"/>
                 </a:solidFill>
                 <a:latin typeface="Consolas" panose="020B0609020204030204" pitchFamily="49" charset="0"/>
               </a:rPr>
               <a:t>   </a:t>
             </a:r>
             <a:r>
-              <a:rPr lang="pl-PL" sz="1300" dirty="0">
+              <a:rPr lang="pl-PL" sz="1400" dirty="0">
                 <a:solidFill>
                   <a:srgbClr val="D4D4D4"/>
                 </a:solidFill>
@@ -8267,16 +8258,16 @@
               <a:t>=</a:t>
             </a:r>
             <a:r>
-              <a:rPr lang="pl-PL" sz="1300" dirty="0">
-                <a:solidFill>
-                  <a:srgbClr val="BBBEBF"/>
+              <a:rPr lang="pl-PL" sz="1400" dirty="0">
+                <a:solidFill>
+                  <a:srgbClr val="CCCCCC"/>
                 </a:solidFill>
                 <a:latin typeface="Consolas" panose="020B0609020204030204" pitchFamily="49" charset="0"/>
               </a:rPr>
               <a:t> </a:t>
             </a:r>
             <a:r>
-              <a:rPr lang="pl-PL" sz="1300" dirty="0">
+              <a:rPr lang="pl-PL" sz="1400" dirty="0">
                 <a:solidFill>
                   <a:srgbClr val="B5CEA8"/>
                 </a:solidFill>
@@ -8285,26 +8276,26 @@
               <a:t>0.0</a:t>
             </a:r>
             <a:r>
-              <a:rPr lang="pl-PL" sz="1300" dirty="0">
-                <a:solidFill>
-                  <a:srgbClr val="BBBEBF"/>
+              <a:rPr lang="pl-PL" sz="1400" dirty="0">
+                <a:solidFill>
+                  <a:srgbClr val="CCCCCC"/>
                 </a:solidFill>
                 <a:latin typeface="Consolas" panose="020B0609020204030204" pitchFamily="49" charset="0"/>
               </a:rPr>
               <a:t>  </a:t>
             </a:r>
             <a:r>
-              <a:rPr lang="pl-PL" sz="1300" dirty="0">
-                <a:solidFill>
-                  <a:srgbClr val="8B949E"/>
+              <a:rPr lang="pl-PL" sz="1400" dirty="0">
+                <a:solidFill>
+                  <a:srgbClr val="6A9955"/>
                 </a:solidFill>
                 <a:latin typeface="Consolas" panose="020B0609020204030204" pitchFamily="49" charset="0"/>
               </a:rPr>
               <a:t># [m]</a:t>
             </a:r>
-            <a:endParaRPr lang="pl-PL" sz="1300" dirty="0">
+            <a:endParaRPr lang="pl-PL" sz="1400" dirty="0">
               <a:solidFill>
-                <a:srgbClr val="BBBEBF"/>
+                <a:srgbClr val="CCCCCC"/>
               </a:solidFill>
               <a:latin typeface="Consolas" panose="020B0609020204030204" pitchFamily="49" charset="0"/>
             </a:endParaRPr>
@@ -8316,52 +8307,43 @@
               </a:lnSpc>
             </a:pPr>
             <a:r>
-              <a:rPr lang="pl-PL" sz="1300" dirty="0">
-                <a:solidFill>
-                  <a:srgbClr val="BBBEBF"/>
+              <a:rPr lang="pl-PL" sz="1400" dirty="0">
+                <a:solidFill>
+                  <a:srgbClr val="CCCCCC"/>
                 </a:solidFill>
                 <a:latin typeface="Consolas" panose="020B0609020204030204" pitchFamily="49" charset="0"/>
               </a:rPr>
               <a:t>        </a:t>
             </a:r>
             <a:r>
-              <a:rPr lang="pl-PL" sz="1300" dirty="0" err="1">
-                <a:solidFill>
-                  <a:srgbClr val="C9D1D9"/>
+              <a:rPr lang="pl-PL" sz="1400" dirty="0" err="1">
+                <a:solidFill>
+                  <a:srgbClr val="569CD6"/>
                 </a:solidFill>
                 <a:latin typeface="Consolas" panose="020B0609020204030204" pitchFamily="49" charset="0"/>
               </a:rPr>
               <a:t>self</a:t>
             </a:r>
             <a:r>
-              <a:rPr lang="pl-PL" sz="1300" dirty="0" err="1">
-                <a:solidFill>
-                  <a:srgbClr val="BBBEBF"/>
-                </a:solidFill>
-                <a:latin typeface="Consolas" panose="020B0609020204030204" pitchFamily="49" charset="0"/>
-              </a:rPr>
-              <a:t>.</a:t>
-            </a:r>
-            <a:r>
-              <a:rPr lang="pl-PL" sz="1300" dirty="0" err="1">
-                <a:solidFill>
-                  <a:srgbClr val="C9D1D9"/>
-                </a:solidFill>
-                <a:latin typeface="Consolas" panose="020B0609020204030204" pitchFamily="49" charset="0"/>
-              </a:rPr>
-              <a:t>y</a:t>
-            </a:r>
-            <a:r>
-              <a:rPr lang="pl-PL" sz="1300" dirty="0">
-                <a:solidFill>
-                  <a:srgbClr val="BBBEBF"/>
+              <a:rPr lang="pl-PL" sz="1400" dirty="0" err="1">
+                <a:solidFill>
+                  <a:srgbClr val="CCCCCC"/>
+                </a:solidFill>
+                <a:latin typeface="Consolas" panose="020B0609020204030204" pitchFamily="49" charset="0"/>
+              </a:rPr>
+              <a:t>.y</a:t>
+            </a:r>
+            <a:r>
+              <a:rPr lang="pl-PL" sz="1400" dirty="0">
+                <a:solidFill>
+                  <a:srgbClr val="CCCCCC"/>
                 </a:solidFill>
                 <a:latin typeface="Consolas" panose="020B0609020204030204" pitchFamily="49" charset="0"/>
               </a:rPr>
               <a:t>   </a:t>
             </a:r>
             <a:r>
-              <a:rPr lang="pl-PL" sz="1300" dirty="0">
+              <a:rPr lang="pl-PL" sz="1400" dirty="0">
                 <a:solidFill>
                   <a:srgbClr val="D4D4D4"/>
                 </a:solidFill>
@@ -8370,16 +8352,16 @@
               <a:t>=</a:t>
             </a:r>
             <a:r>
-              <a:rPr lang="pl-PL" sz="1300" dirty="0">
-                <a:solidFill>
-                  <a:srgbClr val="BBBEBF"/>
+              <a:rPr lang="pl-PL" sz="1400" dirty="0">
+                <a:solidFill>
+                  <a:srgbClr val="CCCCCC"/>
                 </a:solidFill>
                 <a:latin typeface="Consolas" panose="020B0609020204030204" pitchFamily="49" charset="0"/>
               </a:rPr>
               <a:t> </a:t>
             </a:r>
             <a:r>
-              <a:rPr lang="pl-PL" sz="1300" dirty="0">
+              <a:rPr lang="pl-PL" sz="1400" dirty="0">
                 <a:solidFill>
                   <a:srgbClr val="B5CEA8"/>
                 </a:solidFill>
@@ -8388,26 +8370,26 @@
               <a:t>0.0</a:t>
             </a:r>
             <a:r>
-              <a:rPr lang="pl-PL" sz="1300" dirty="0">
-                <a:solidFill>
-                  <a:srgbClr val="BBBEBF"/>
+              <a:rPr lang="pl-PL" sz="1400" dirty="0">
+                <a:solidFill>
+                  <a:srgbClr val="CCCCCC"/>
                 </a:solidFill>
                 <a:latin typeface="Consolas" panose="020B0609020204030204" pitchFamily="49" charset="0"/>
               </a:rPr>
               <a:t>  </a:t>
             </a:r>
             <a:r>
-              <a:rPr lang="pl-PL" sz="1300" dirty="0">
-                <a:solidFill>
-                  <a:srgbClr val="8B949E"/>
+              <a:rPr lang="pl-PL" sz="1400" dirty="0">
+                <a:solidFill>
+                  <a:srgbClr val="6A9955"/>
                 </a:solidFill>
                 <a:latin typeface="Consolas" panose="020B0609020204030204" pitchFamily="49" charset="0"/>
               </a:rPr>
               <a:t># [m]</a:t>
             </a:r>
-            <a:endParaRPr lang="pl-PL" sz="1300" dirty="0">
+            <a:endParaRPr lang="pl-PL" sz="1400" dirty="0">
               <a:solidFill>
-                <a:srgbClr val="BBBEBF"/>
+                <a:srgbClr val="CCCCCC"/>
               </a:solidFill>
               <a:latin typeface="Consolas" panose="020B0609020204030204" pitchFamily="49" charset="0"/>
             </a:endParaRPr>
@@ -8419,52 +8401,43 @@
               </a:lnSpc>
             </a:pPr>
             <a:r>
-              <a:rPr lang="pl-PL" sz="1300" dirty="0">
-                <a:solidFill>
-                  <a:srgbClr val="BBBEBF"/>
+              <a:rPr lang="pl-PL" sz="1400" dirty="0">
+                <a:solidFill>
+                  <a:srgbClr val="CCCCCC"/>
                 </a:solidFill>
                 <a:latin typeface="Consolas" panose="020B0609020204030204" pitchFamily="49" charset="0"/>
               </a:rPr>
               <a:t>        </a:t>
             </a:r>
             <a:r>
-              <a:rPr lang="pl-PL" sz="1300" dirty="0" err="1">
-                <a:solidFill>
-                  <a:srgbClr val="C9D1D9"/>
+              <a:rPr lang="pl-PL" sz="1400" dirty="0" err="1">
+                <a:solidFill>
+                  <a:srgbClr val="569CD6"/>
                 </a:solidFill>
                 <a:latin typeface="Consolas" panose="020B0609020204030204" pitchFamily="49" charset="0"/>
               </a:rPr>
               <a:t>self</a:t>
             </a:r>
             <a:r>
-              <a:rPr lang="pl-PL" sz="1300" dirty="0" err="1">
-                <a:solidFill>
-                  <a:srgbClr val="BBBEBF"/>
-                </a:solidFill>
-                <a:latin typeface="Consolas" panose="020B0609020204030204" pitchFamily="49" charset="0"/>
-              </a:rPr>
-              <a:t>.</a:t>
-            </a:r>
-            <a:r>
-              <a:rPr lang="pl-PL" sz="1300" dirty="0" err="1">
-                <a:solidFill>
-                  <a:srgbClr val="C9D1D9"/>
-                </a:solidFill>
-                <a:latin typeface="Consolas" panose="020B0609020204030204" pitchFamily="49" charset="0"/>
-              </a:rPr>
-              <a:t>yaw</a:t>
-            </a:r>
-            <a:r>
-              <a:rPr lang="pl-PL" sz="1300" dirty="0">
-                <a:solidFill>
-                  <a:srgbClr val="BBBEBF"/>
+              <a:rPr lang="pl-PL" sz="1400" dirty="0" err="1">
+                <a:solidFill>
+                  <a:srgbClr val="CCCCCC"/>
+                </a:solidFill>
+                <a:latin typeface="Consolas" panose="020B0609020204030204" pitchFamily="49" charset="0"/>
+              </a:rPr>
+              <a:t>.yaw</a:t>
+            </a:r>
+            <a:r>
+              <a:rPr lang="pl-PL" sz="1400" dirty="0">
+                <a:solidFill>
+                  <a:srgbClr val="CCCCCC"/>
                 </a:solidFill>
                 <a:latin typeface="Consolas" panose="020B0609020204030204" pitchFamily="49" charset="0"/>
               </a:rPr>
               <a:t> </a:t>
             </a:r>
             <a:r>
-              <a:rPr lang="pl-PL" sz="1300" dirty="0">
+              <a:rPr lang="pl-PL" sz="1400" dirty="0">
                 <a:solidFill>
                   <a:srgbClr val="D4D4D4"/>
                 </a:solidFill>
@@ -8473,16 +8446,16 @@
               <a:t>=</a:t>
             </a:r>
             <a:r>
-              <a:rPr lang="pl-PL" sz="1300" dirty="0">
-                <a:solidFill>
-                  <a:srgbClr val="BBBEBF"/>
+              <a:rPr lang="pl-PL" sz="1400" dirty="0">
+                <a:solidFill>
+                  <a:srgbClr val="CCCCCC"/>
                 </a:solidFill>
                 <a:latin typeface="Consolas" panose="020B0609020204030204" pitchFamily="49" charset="0"/>
               </a:rPr>
               <a:t> </a:t>
             </a:r>
             <a:r>
-              <a:rPr lang="pl-PL" sz="1300" dirty="0">
+              <a:rPr lang="pl-PL" sz="1400" dirty="0">
                 <a:solidFill>
                   <a:srgbClr val="B5CEA8"/>
                 </a:solidFill>
@@ -8491,26 +8464,26 @@
               <a:t>0.0</a:t>
             </a:r>
             <a:r>
-              <a:rPr lang="pl-PL" sz="1300" dirty="0">
-                <a:solidFill>
-                  <a:srgbClr val="BBBEBF"/>
+              <a:rPr lang="pl-PL" sz="1400" dirty="0">
+                <a:solidFill>
+                  <a:srgbClr val="CCCCCC"/>
                 </a:solidFill>
                 <a:latin typeface="Consolas" panose="020B0609020204030204" pitchFamily="49" charset="0"/>
               </a:rPr>
               <a:t>  </a:t>
             </a:r>
             <a:r>
-              <a:rPr lang="pl-PL" sz="1300" dirty="0">
-                <a:solidFill>
-                  <a:srgbClr val="8B949E"/>
+              <a:rPr lang="pl-PL" sz="1400" dirty="0">
+                <a:solidFill>
+                  <a:srgbClr val="6A9955"/>
                 </a:solidFill>
                 <a:latin typeface="Consolas" panose="020B0609020204030204" pitchFamily="49" charset="0"/>
               </a:rPr>
               <a:t># [rad]</a:t>
             </a:r>
-            <a:endParaRPr lang="pl-PL" sz="1300" dirty="0">
+            <a:endParaRPr lang="pl-PL" sz="1400" dirty="0">
               <a:solidFill>
-                <a:srgbClr val="BBBEBF"/>
+                <a:srgbClr val="CCCCCC"/>
               </a:solidFill>
               <a:latin typeface="Consolas" panose="020B0609020204030204" pitchFamily="49" charset="0"/>
             </a:endParaRPr>
@@ -8522,105 +8495,105 @@
               </a:lnSpc>
             </a:pPr>
             <a:r>
-              <a:rPr lang="pl-PL" sz="1300" dirty="0">
-                <a:solidFill>
-                  <a:srgbClr val="BBBEBF"/>
+              <a:rPr lang="pl-PL" sz="1400" dirty="0">
+                <a:solidFill>
+                  <a:srgbClr val="CCCCCC"/>
                 </a:solidFill>
                 <a:latin typeface="Consolas" panose="020B0609020204030204" pitchFamily="49" charset="0"/>
               </a:rPr>
               <a:t/>
             </a:r>
             <a:br>
-              <a:rPr lang="pl-PL" sz="1300" dirty="0">
-                <a:solidFill>
-                  <a:srgbClr val="BBBEBF"/>
+              <a:rPr lang="pl-PL" sz="1400" dirty="0">
+                <a:solidFill>
+                  <a:srgbClr val="CCCCCC"/>
                 </a:solidFill>
                 <a:latin typeface="Consolas" panose="020B0609020204030204" pitchFamily="49" charset="0"/>
               </a:rPr>
             </a:br>
             <a:r>
-              <a:rPr lang="pl-PL" sz="1300" dirty="0">
-                <a:solidFill>
-                  <a:srgbClr val="BBBEBF"/>
-                </a:solidFill>
-                <a:latin typeface="Consolas" panose="020B0609020204030204" pitchFamily="49" charset="0"/>
-              </a:rPr>
-              <a:t>    </a:t>
-            </a:r>
-            <a:r>
-              <a:rPr lang="pl-PL" sz="1300" dirty="0">
-                <a:solidFill>
-                  <a:srgbClr val="FF7B72"/>
+              <a:rPr lang="pl-PL" sz="1400" dirty="0">
+                <a:solidFill>
+                  <a:srgbClr val="CCCCCC"/>
+                </a:solidFill>
+                <a:latin typeface="Consolas" panose="020B0609020204030204" pitchFamily="49" charset="0"/>
+              </a:rPr>
+              <a:t>   </a:t>
+            </a:r>
+            <a:r>
+              <a:rPr lang="pl-PL" sz="1400" dirty="0">
+                <a:solidFill>
+                  <a:srgbClr val="569CD6"/>
                 </a:solidFill>
                 <a:latin typeface="Consolas" panose="020B0609020204030204" pitchFamily="49" charset="0"/>
               </a:rPr>
               <a:t>def</a:t>
             </a:r>
             <a:r>
-              <a:rPr lang="pl-PL" sz="1300" dirty="0">
-                <a:solidFill>
-                  <a:srgbClr val="BBBEBF"/>
+              <a:rPr lang="pl-PL" sz="1400" dirty="0">
+                <a:solidFill>
+                  <a:srgbClr val="CCCCCC"/>
                 </a:solidFill>
                 <a:latin typeface="Consolas" panose="020B0609020204030204" pitchFamily="49" charset="0"/>
               </a:rPr>
               <a:t> </a:t>
             </a:r>
             <a:r>
-              <a:rPr lang="pl-PL" sz="1300" dirty="0">
-                <a:solidFill>
-                  <a:srgbClr val="D2A8FF"/>
+              <a:rPr lang="pl-PL" sz="1400" dirty="0">
+                <a:solidFill>
+                  <a:srgbClr val="DCDCAA"/>
                 </a:solidFill>
                 <a:latin typeface="Consolas" panose="020B0609020204030204" pitchFamily="49" charset="0"/>
               </a:rPr>
               <a:t>step</a:t>
             </a:r>
             <a:r>
-              <a:rPr lang="pl-PL" sz="1300" dirty="0">
-                <a:solidFill>
-                  <a:srgbClr val="BBBEBF"/>
+              <a:rPr lang="pl-PL" sz="1400" dirty="0">
+                <a:solidFill>
+                  <a:srgbClr val="CCCCCC"/>
                 </a:solidFill>
                 <a:latin typeface="Consolas" panose="020B0609020204030204" pitchFamily="49" charset="0"/>
               </a:rPr>
               <a:t>(</a:t>
             </a:r>
             <a:r>
-              <a:rPr lang="pl-PL" sz="1300" dirty="0" err="1">
-                <a:solidFill>
-                  <a:srgbClr val="C9D1D9"/>
+              <a:rPr lang="pl-PL" sz="1400" dirty="0" err="1">
+                <a:solidFill>
+                  <a:srgbClr val="9CDCFE"/>
                 </a:solidFill>
                 <a:latin typeface="Consolas" panose="020B0609020204030204" pitchFamily="49" charset="0"/>
               </a:rPr>
               <a:t>self</a:t>
             </a:r>
             <a:r>
-              <a:rPr lang="pl-PL" sz="1300" dirty="0">
-                <a:solidFill>
-                  <a:srgbClr val="BBBEBF"/>
+              <a:rPr lang="pl-PL" sz="1400" dirty="0">
+                <a:solidFill>
+                  <a:srgbClr val="CCCCCC"/>
                 </a:solidFill>
                 <a:latin typeface="Consolas" panose="020B0609020204030204" pitchFamily="49" charset="0"/>
               </a:rPr>
               <a:t>, </a:t>
             </a:r>
             <a:r>
-              <a:rPr lang="pl-PL" sz="1300" dirty="0" err="1">
-                <a:solidFill>
-                  <a:srgbClr val="FFA657"/>
+              <a:rPr lang="pl-PL" sz="1400" dirty="0" err="1">
+                <a:solidFill>
+                  <a:srgbClr val="9CDCFE"/>
                 </a:solidFill>
                 <a:latin typeface="Consolas" panose="020B0609020204030204" pitchFamily="49" charset="0"/>
               </a:rPr>
               <a:t>stride_len</a:t>
             </a:r>
             <a:r>
-              <a:rPr lang="pl-PL" sz="1300" dirty="0">
-                <a:solidFill>
-                  <a:srgbClr val="BBBEBF"/>
+              <a:rPr lang="pl-PL" sz="1400" dirty="0">
+                <a:solidFill>
+                  <a:srgbClr val="CCCCCC"/>
                 </a:solidFill>
                 <a:latin typeface="Consolas" panose="020B0609020204030204" pitchFamily="49" charset="0"/>
               </a:rPr>
               <a:t>: </a:t>
             </a:r>
             <a:r>
-              <a:rPr lang="pl-PL" sz="1300" dirty="0" err="1">
+              <a:rPr lang="pl-PL" sz="1400" dirty="0" err="1">
                 <a:solidFill>
                   <a:srgbClr val="4EC9B0"/>
                 </a:solidFill>
@@ -8629,34 +8602,34 @@
               <a:t>float</a:t>
             </a:r>
             <a:r>
-              <a:rPr lang="pl-PL" sz="1300" dirty="0">
-                <a:solidFill>
-                  <a:srgbClr val="BBBEBF"/>
+              <a:rPr lang="pl-PL" sz="1400" dirty="0">
+                <a:solidFill>
+                  <a:srgbClr val="CCCCCC"/>
                 </a:solidFill>
                 <a:latin typeface="Consolas" panose="020B0609020204030204" pitchFamily="49" charset="0"/>
               </a:rPr>
               <a:t>, </a:t>
             </a:r>
             <a:r>
-              <a:rPr lang="pl-PL" sz="1300" dirty="0" err="1">
-                <a:solidFill>
-                  <a:srgbClr val="FFA657"/>
+              <a:rPr lang="pl-PL" sz="1400" dirty="0" err="1">
+                <a:solidFill>
+                  <a:srgbClr val="9CDCFE"/>
                 </a:solidFill>
                 <a:latin typeface="Consolas" panose="020B0609020204030204" pitchFamily="49" charset="0"/>
               </a:rPr>
               <a:t>delta_yaw</a:t>
             </a:r>
             <a:r>
-              <a:rPr lang="pl-PL" sz="1300" dirty="0">
-                <a:solidFill>
-                  <a:srgbClr val="BBBEBF"/>
+              <a:rPr lang="pl-PL" sz="1400" dirty="0">
+                <a:solidFill>
+                  <a:srgbClr val="CCCCCC"/>
                 </a:solidFill>
                 <a:latin typeface="Consolas" panose="020B0609020204030204" pitchFamily="49" charset="0"/>
               </a:rPr>
               <a:t>: </a:t>
             </a:r>
             <a:r>
-              <a:rPr lang="pl-PL" sz="1300" dirty="0" err="1">
+              <a:rPr lang="pl-PL" sz="1400" dirty="0" err="1">
                 <a:solidFill>
                   <a:srgbClr val="4EC9B0"/>
                 </a:solidFill>
@@ -8665,16 +8638,16 @@
               <a:t>float</a:t>
             </a:r>
             <a:r>
-              <a:rPr lang="pl-PL" sz="1300" dirty="0">
-                <a:solidFill>
-                  <a:srgbClr val="BBBEBF"/>
+              <a:rPr lang="pl-PL" sz="1400" dirty="0">
+                <a:solidFill>
+                  <a:srgbClr val="CCCCCC"/>
                 </a:solidFill>
                 <a:latin typeface="Consolas" panose="020B0609020204030204" pitchFamily="49" charset="0"/>
               </a:rPr>
               <a:t>) -&gt; </a:t>
             </a:r>
             <a:r>
-              <a:rPr lang="pl-PL" sz="1300" dirty="0" err="1">
+              <a:rPr lang="pl-PL" sz="1400" dirty="0" err="1">
                 <a:solidFill>
                   <a:srgbClr val="4EC9B0"/>
                 </a:solidFill>
@@ -8683,9 +8656,9 @@
               <a:t>tuple</a:t>
             </a:r>
             <a:r>
-              <a:rPr lang="pl-PL" sz="1300" dirty="0">
-                <a:solidFill>
-                  <a:srgbClr val="BBBEBF"/>
+              <a:rPr lang="pl-PL" sz="1400" dirty="0">
+                <a:solidFill>
+                  <a:srgbClr val="CCCCCC"/>
                 </a:solidFill>
                 <a:latin typeface="Consolas" panose="020B0609020204030204" pitchFamily="49" charset="0"/>
               </a:rPr>
@@ -8699,44 +8672,44 @@
               </a:lnSpc>
             </a:pPr>
             <a:r>
-              <a:rPr lang="pl-PL" sz="1300" dirty="0">
-                <a:solidFill>
-                  <a:srgbClr val="BBBEBF"/>
+              <a:rPr lang="pl-PL" sz="1400" dirty="0">
+                <a:solidFill>
+                  <a:srgbClr val="CCCCCC"/>
                 </a:solidFill>
                 <a:latin typeface="Consolas" panose="020B0609020204030204" pitchFamily="49" charset="0"/>
               </a:rPr>
               <a:t>        </a:t>
             </a:r>
             <a:r>
-              <a:rPr lang="pl-PL" sz="1300" dirty="0">
-                <a:solidFill>
-                  <a:srgbClr val="A5D6FF"/>
+              <a:rPr lang="pl-PL" sz="1400" dirty="0">
+                <a:solidFill>
+                  <a:srgbClr val="CE9178"/>
                 </a:solidFill>
                 <a:latin typeface="Consolas" panose="020B0609020204030204" pitchFamily="49" charset="0"/>
               </a:rPr>
               <a:t>"""Aktualizacja pozycji po jednym kroku (</a:t>
             </a:r>
             <a:r>
-              <a:rPr lang="pl-PL" sz="1300" dirty="0" err="1">
-                <a:solidFill>
-                  <a:srgbClr val="A5D6FF"/>
+              <a:rPr lang="pl-PL" sz="1400" dirty="0" err="1">
+                <a:solidFill>
+                  <a:srgbClr val="CE9178"/>
                 </a:solidFill>
                 <a:latin typeface="Consolas" panose="020B0609020204030204" pitchFamily="49" charset="0"/>
               </a:rPr>
               <a:t>stride</a:t>
             </a:r>
             <a:r>
-              <a:rPr lang="pl-PL" sz="1300" dirty="0">
-                <a:solidFill>
-                  <a:srgbClr val="A5D6FF"/>
+              <a:rPr lang="pl-PL" sz="1400" dirty="0">
+                <a:solidFill>
+                  <a:srgbClr val="CE9178"/>
                 </a:solidFill>
                 <a:latin typeface="Consolas" panose="020B0609020204030204" pitchFamily="49" charset="0"/>
               </a:rPr>
               <a:t>)."""</a:t>
             </a:r>
-            <a:endParaRPr lang="pl-PL" sz="1300" dirty="0">
+            <a:endParaRPr lang="pl-PL" sz="1400" dirty="0">
               <a:solidFill>
-                <a:srgbClr val="BBBEBF"/>
+                <a:srgbClr val="CCCCCC"/>
               </a:solidFill>
               <a:latin typeface="Consolas" panose="020B0609020204030204" pitchFamily="49" charset="0"/>
             </a:endParaRPr>
@@ -8748,52 +8721,43 @@
               </a:lnSpc>
             </a:pPr>
             <a:r>
-              <a:rPr lang="pl-PL" sz="1300" dirty="0">
-                <a:solidFill>
-                  <a:srgbClr val="BBBEBF"/>
+              <a:rPr lang="pl-PL" sz="1400" dirty="0">
+                <a:solidFill>
+                  <a:srgbClr val="CCCCCC"/>
                 </a:solidFill>
                 <a:latin typeface="Consolas" panose="020B0609020204030204" pitchFamily="49" charset="0"/>
               </a:rPr>
               <a:t>        </a:t>
             </a:r>
             <a:r>
-              <a:rPr lang="pl-PL" sz="1300" dirty="0" err="1">
-                <a:solidFill>
-                  <a:srgbClr val="C9D1D9"/>
+              <a:rPr lang="pl-PL" sz="1400" dirty="0" err="1">
+                <a:solidFill>
+                  <a:srgbClr val="569CD6"/>
                 </a:solidFill>
                 <a:latin typeface="Consolas" panose="020B0609020204030204" pitchFamily="49" charset="0"/>
               </a:rPr>
               <a:t>self</a:t>
             </a:r>
             <a:r>
-              <a:rPr lang="pl-PL" sz="1300" dirty="0" err="1">
-                <a:solidFill>
-                  <a:srgbClr val="BBBEBF"/>
-                </a:solidFill>
-                <a:latin typeface="Consolas" panose="020B0609020204030204" pitchFamily="49" charset="0"/>
-              </a:rPr>
-              <a:t>.</a:t>
-            </a:r>
-            <a:r>
-              <a:rPr lang="pl-PL" sz="1300" dirty="0" err="1">
-                <a:solidFill>
-                  <a:srgbClr val="C9D1D9"/>
-                </a:solidFill>
-                <a:latin typeface="Consolas" panose="020B0609020204030204" pitchFamily="49" charset="0"/>
-              </a:rPr>
-              <a:t>yaw</a:t>
-            </a:r>
-            <a:r>
-              <a:rPr lang="pl-PL" sz="1300" dirty="0">
-                <a:solidFill>
-                  <a:srgbClr val="BBBEBF"/>
+              <a:rPr lang="pl-PL" sz="1400" dirty="0" err="1">
+                <a:solidFill>
+                  <a:srgbClr val="CCCCCC"/>
+                </a:solidFill>
+                <a:latin typeface="Consolas" panose="020B0609020204030204" pitchFamily="49" charset="0"/>
+              </a:rPr>
+              <a:t>.yaw</a:t>
+            </a:r>
+            <a:r>
+              <a:rPr lang="pl-PL" sz="1400" dirty="0">
+                <a:solidFill>
+                  <a:srgbClr val="CCCCCC"/>
                 </a:solidFill>
                 <a:latin typeface="Consolas" panose="020B0609020204030204" pitchFamily="49" charset="0"/>
               </a:rPr>
               <a:t> </a:t>
             </a:r>
             <a:r>
-              <a:rPr lang="pl-PL" sz="1300" dirty="0">
+              <a:rPr lang="pl-PL" sz="1400" dirty="0">
                 <a:solidFill>
                   <a:srgbClr val="D4D4D4"/>
                 </a:solidFill>
@@ -8802,26 +8766,26 @@
               <a:t>+=</a:t>
             </a:r>
             <a:r>
-              <a:rPr lang="pl-PL" sz="1300" dirty="0">
-                <a:solidFill>
-                  <a:srgbClr val="BBBEBF"/>
+              <a:rPr lang="pl-PL" sz="1400" dirty="0">
+                <a:solidFill>
+                  <a:srgbClr val="CCCCCC"/>
                 </a:solidFill>
                 <a:latin typeface="Consolas" panose="020B0609020204030204" pitchFamily="49" charset="0"/>
               </a:rPr>
               <a:t> </a:t>
             </a:r>
             <a:r>
-              <a:rPr lang="pl-PL" sz="1300" dirty="0" err="1">
-                <a:solidFill>
-                  <a:srgbClr val="FFA657"/>
+              <a:rPr lang="pl-PL" sz="1400" dirty="0" err="1">
+                <a:solidFill>
+                  <a:srgbClr val="CCCCCC"/>
                 </a:solidFill>
                 <a:latin typeface="Consolas" panose="020B0609020204030204" pitchFamily="49" charset="0"/>
               </a:rPr>
               <a:t>delta_yaw</a:t>
             </a:r>
-            <a:endParaRPr lang="pl-PL" sz="1300" dirty="0">
+            <a:endParaRPr lang="pl-PL" sz="1400" dirty="0">
               <a:solidFill>
-                <a:srgbClr val="BBBEBF"/>
+                <a:srgbClr val="CCCCCC"/>
               </a:solidFill>
               <a:latin typeface="Consolas" panose="020B0609020204030204" pitchFamily="49" charset="0"/>
             </a:endParaRPr>
@@ -8833,52 +8797,43 @@
               </a:lnSpc>
             </a:pPr>
             <a:r>
-              <a:rPr lang="pl-PL" sz="1300" dirty="0">
-                <a:solidFill>
-                  <a:srgbClr val="BBBEBF"/>
+              <a:rPr lang="pl-PL" sz="1400" dirty="0">
+                <a:solidFill>
+                  <a:srgbClr val="CCCCCC"/>
                 </a:solidFill>
                 <a:latin typeface="Consolas" panose="020B0609020204030204" pitchFamily="49" charset="0"/>
               </a:rPr>
               <a:t>        </a:t>
             </a:r>
             <a:r>
-              <a:rPr lang="pl-PL" sz="1300" dirty="0" err="1">
-                <a:solidFill>
-                  <a:srgbClr val="C9D1D9"/>
+              <a:rPr lang="pl-PL" sz="1400" dirty="0" err="1">
+                <a:solidFill>
+                  <a:srgbClr val="569CD6"/>
                 </a:solidFill>
                 <a:latin typeface="Consolas" panose="020B0609020204030204" pitchFamily="49" charset="0"/>
               </a:rPr>
               <a:t>self</a:t>
             </a:r>
             <a:r>
-              <a:rPr lang="pl-PL" sz="1300" dirty="0" err="1">
-                <a:solidFill>
-                  <a:srgbClr val="BBBEBF"/>
-                </a:solidFill>
-                <a:latin typeface="Consolas" panose="020B0609020204030204" pitchFamily="49" charset="0"/>
-              </a:rPr>
-              <a:t>.</a:t>
-            </a:r>
-            <a:r>
-              <a:rPr lang="pl-PL" sz="1300" dirty="0" err="1">
-                <a:solidFill>
-                  <a:srgbClr val="C9D1D9"/>
-                </a:solidFill>
-                <a:latin typeface="Consolas" panose="020B0609020204030204" pitchFamily="49" charset="0"/>
-              </a:rPr>
-              <a:t>x</a:t>
-            </a:r>
-            <a:r>
-              <a:rPr lang="pl-PL" sz="1300" dirty="0">
-                <a:solidFill>
-                  <a:srgbClr val="BBBEBF"/>
+              <a:rPr lang="pl-PL" sz="1400" dirty="0" err="1">
+                <a:solidFill>
+                  <a:srgbClr val="CCCCCC"/>
+                </a:solidFill>
+                <a:latin typeface="Consolas" panose="020B0609020204030204" pitchFamily="49" charset="0"/>
+              </a:rPr>
+              <a:t>.x</a:t>
+            </a:r>
+            <a:r>
+              <a:rPr lang="pl-PL" sz="1400" dirty="0">
+                <a:solidFill>
+                  <a:srgbClr val="CCCCCC"/>
                 </a:solidFill>
                 <a:latin typeface="Consolas" panose="020B0609020204030204" pitchFamily="49" charset="0"/>
               </a:rPr>
               <a:t>  </a:t>
             </a:r>
             <a:r>
-              <a:rPr lang="pl-PL" sz="1300" dirty="0">
+              <a:rPr lang="pl-PL" sz="1400" dirty="0">
                 <a:solidFill>
                   <a:srgbClr val="D4D4D4"/>
                 </a:solidFill>
@@ -8887,34 +8842,34 @@
               <a:t>+=</a:t>
             </a:r>
             <a:r>
-              <a:rPr lang="pl-PL" sz="1300" dirty="0">
-                <a:solidFill>
-                  <a:srgbClr val="BBBEBF"/>
+              <a:rPr lang="pl-PL" sz="1400" dirty="0">
+                <a:solidFill>
+                  <a:srgbClr val="CCCCCC"/>
                 </a:solidFill>
                 <a:latin typeface="Consolas" panose="020B0609020204030204" pitchFamily="49" charset="0"/>
               </a:rPr>
               <a:t> </a:t>
             </a:r>
             <a:r>
-              <a:rPr lang="pl-PL" sz="1300" dirty="0" err="1">
-                <a:solidFill>
-                  <a:srgbClr val="FFA657"/>
+              <a:rPr lang="pl-PL" sz="1400" dirty="0" err="1">
+                <a:solidFill>
+                  <a:srgbClr val="CCCCCC"/>
                 </a:solidFill>
                 <a:latin typeface="Consolas" panose="020B0609020204030204" pitchFamily="49" charset="0"/>
               </a:rPr>
               <a:t>stride_len</a:t>
             </a:r>
             <a:r>
-              <a:rPr lang="pl-PL" sz="1300" dirty="0">
-                <a:solidFill>
-                  <a:srgbClr val="BBBEBF"/>
+              <a:rPr lang="pl-PL" sz="1400" dirty="0">
+                <a:solidFill>
+                  <a:srgbClr val="CCCCCC"/>
                 </a:solidFill>
                 <a:latin typeface="Consolas" panose="020B0609020204030204" pitchFamily="49" charset="0"/>
               </a:rPr>
               <a:t> </a:t>
             </a:r>
             <a:r>
-              <a:rPr lang="pl-PL" sz="1300" dirty="0">
+              <a:rPr lang="pl-PL" sz="1400" dirty="0">
                 <a:solidFill>
                   <a:srgbClr val="D4D4D4"/>
                 </a:solidFill>
@@ -8923,81 +8878,54 @@
               <a:t>*</a:t>
             </a:r>
             <a:r>
-              <a:rPr lang="pl-PL" sz="1300" dirty="0">
-                <a:solidFill>
-                  <a:srgbClr val="BBBEBF"/>
+              <a:rPr lang="pl-PL" sz="1400" dirty="0">
+                <a:solidFill>
+                  <a:srgbClr val="CCCCCC"/>
                 </a:solidFill>
                 <a:latin typeface="Consolas" panose="020B0609020204030204" pitchFamily="49" charset="0"/>
               </a:rPr>
               <a:t> </a:t>
             </a:r>
             <a:r>
-              <a:rPr lang="pl-PL" sz="1300" dirty="0" err="1">
-                <a:solidFill>
-                  <a:srgbClr val="4EC9B0"/>
-                </a:solidFill>
-                <a:latin typeface="Consolas" panose="020B0609020204030204" pitchFamily="49" charset="0"/>
-              </a:rPr>
-              <a:t>np</a:t>
-            </a:r>
-            <a:r>
-              <a:rPr lang="pl-PL" sz="1300" dirty="0" err="1">
-                <a:solidFill>
-                  <a:srgbClr val="BBBEBF"/>
-                </a:solidFill>
-                <a:latin typeface="Consolas" panose="020B0609020204030204" pitchFamily="49" charset="0"/>
-              </a:rPr>
-              <a:t>.</a:t>
-            </a:r>
-            <a:r>
-              <a:rPr lang="pl-PL" sz="1300" dirty="0" err="1">
-                <a:solidFill>
-                  <a:srgbClr val="C9D1D9"/>
-                </a:solidFill>
-                <a:latin typeface="Consolas" panose="020B0609020204030204" pitchFamily="49" charset="0"/>
-              </a:rPr>
-              <a:t>cos</a:t>
-            </a:r>
-            <a:r>
-              <a:rPr lang="pl-PL" sz="1300" dirty="0">
-                <a:solidFill>
-                  <a:srgbClr val="BBBEBF"/>
+              <a:rPr lang="pl-PL" sz="1400" dirty="0" err="1">
+                <a:solidFill>
+                  <a:srgbClr val="CCCCCC"/>
+                </a:solidFill>
+                <a:latin typeface="Consolas" panose="020B0609020204030204" pitchFamily="49" charset="0"/>
+              </a:rPr>
+              <a:t>np.cos</a:t>
+            </a:r>
+            <a:r>
+              <a:rPr lang="pl-PL" sz="1400" dirty="0">
+                <a:solidFill>
+                  <a:srgbClr val="CCCCCC"/>
                 </a:solidFill>
                 <a:latin typeface="Consolas" panose="020B0609020204030204" pitchFamily="49" charset="0"/>
               </a:rPr>
               <a:t>(</a:t>
             </a:r>
             <a:r>
-              <a:rPr lang="pl-PL" sz="1300" dirty="0" err="1">
-                <a:solidFill>
-                  <a:srgbClr val="C9D1D9"/>
+              <a:rPr lang="pl-PL" sz="1400" dirty="0" err="1">
+                <a:solidFill>
+                  <a:srgbClr val="569CD6"/>
                 </a:solidFill>
                 <a:latin typeface="Consolas" panose="020B0609020204030204" pitchFamily="49" charset="0"/>
               </a:rPr>
               <a:t>self</a:t>
             </a:r>
             <a:r>
-              <a:rPr lang="pl-PL" sz="1300" dirty="0" err="1">
-                <a:solidFill>
-                  <a:srgbClr val="BBBEBF"/>
-                </a:solidFill>
-                <a:latin typeface="Consolas" panose="020B0609020204030204" pitchFamily="49" charset="0"/>
-              </a:rPr>
-              <a:t>.</a:t>
-            </a:r>
-            <a:r>
-              <a:rPr lang="pl-PL" sz="1300" dirty="0" err="1">
-                <a:solidFill>
-                  <a:srgbClr val="C9D1D9"/>
-                </a:solidFill>
-                <a:latin typeface="Consolas" panose="020B0609020204030204" pitchFamily="49" charset="0"/>
-              </a:rPr>
-              <a:t>yaw</a:t>
-            </a:r>
-            <a:r>
-              <a:rPr lang="pl-PL" sz="1300" dirty="0">
-                <a:solidFill>
-                  <a:srgbClr val="BBBEBF"/>
+              <a:rPr lang="pl-PL" sz="1400" dirty="0" err="1">
+                <a:solidFill>
+                  <a:srgbClr val="CCCCCC"/>
+                </a:solidFill>
+                <a:latin typeface="Consolas" panose="020B0609020204030204" pitchFamily="49" charset="0"/>
+              </a:rPr>
+              <a:t>.yaw</a:t>
+            </a:r>
+            <a:r>
+              <a:rPr lang="pl-PL" sz="1400" dirty="0">
+                <a:solidFill>
+                  <a:srgbClr val="CCCCCC"/>
                 </a:solidFill>
                 <a:latin typeface="Consolas" panose="020B0609020204030204" pitchFamily="49" charset="0"/>
               </a:rPr>
@@ -9011,52 +8939,43 @@
               </a:lnSpc>
             </a:pPr>
             <a:r>
-              <a:rPr lang="pl-PL" sz="1300" dirty="0">
-                <a:solidFill>
-                  <a:srgbClr val="BBBEBF"/>
+              <a:rPr lang="pl-PL" sz="1400" dirty="0">
+                <a:solidFill>
+                  <a:srgbClr val="CCCCCC"/>
                 </a:solidFill>
                 <a:latin typeface="Consolas" panose="020B0609020204030204" pitchFamily="49" charset="0"/>
               </a:rPr>
               <a:t>        </a:t>
             </a:r>
             <a:r>
-              <a:rPr lang="pl-PL" sz="1300" dirty="0" err="1">
-                <a:solidFill>
-                  <a:srgbClr val="C9D1D9"/>
+              <a:rPr lang="pl-PL" sz="1400" dirty="0" err="1">
+                <a:solidFill>
+                  <a:srgbClr val="569CD6"/>
                 </a:solidFill>
                 <a:latin typeface="Consolas" panose="020B0609020204030204" pitchFamily="49" charset="0"/>
               </a:rPr>
               <a:t>self</a:t>
             </a:r>
             <a:r>
-              <a:rPr lang="pl-PL" sz="1300" dirty="0" err="1">
-                <a:solidFill>
-                  <a:srgbClr val="BBBEBF"/>
-                </a:solidFill>
-                <a:latin typeface="Consolas" panose="020B0609020204030204" pitchFamily="49" charset="0"/>
-              </a:rPr>
-              <a:t>.</a:t>
-            </a:r>
-            <a:r>
-              <a:rPr lang="pl-PL" sz="1300" dirty="0" err="1">
-                <a:solidFill>
-                  <a:srgbClr val="C9D1D9"/>
-                </a:solidFill>
-                <a:latin typeface="Consolas" panose="020B0609020204030204" pitchFamily="49" charset="0"/>
-              </a:rPr>
-              <a:t>y</a:t>
-            </a:r>
-            <a:r>
-              <a:rPr lang="pl-PL" sz="1300" dirty="0">
-                <a:solidFill>
-                  <a:srgbClr val="BBBEBF"/>
+              <a:rPr lang="pl-PL" sz="1400" dirty="0" err="1">
+                <a:solidFill>
+                  <a:srgbClr val="CCCCCC"/>
+                </a:solidFill>
+                <a:latin typeface="Consolas" panose="020B0609020204030204" pitchFamily="49" charset="0"/>
+              </a:rPr>
+              <a:t>.y</a:t>
+            </a:r>
+            <a:r>
+              <a:rPr lang="pl-PL" sz="1400" dirty="0">
+                <a:solidFill>
+                  <a:srgbClr val="CCCCCC"/>
                 </a:solidFill>
                 <a:latin typeface="Consolas" panose="020B0609020204030204" pitchFamily="49" charset="0"/>
               </a:rPr>
               <a:t>  </a:t>
             </a:r>
             <a:r>
-              <a:rPr lang="pl-PL" sz="1300" dirty="0">
+              <a:rPr lang="pl-PL" sz="1400" dirty="0">
                 <a:solidFill>
                   <a:srgbClr val="D4D4D4"/>
                 </a:solidFill>
@@ -9065,34 +8984,34 @@
               <a:t>+=</a:t>
             </a:r>
             <a:r>
-              <a:rPr lang="pl-PL" sz="1300" dirty="0">
-                <a:solidFill>
-                  <a:srgbClr val="BBBEBF"/>
+              <a:rPr lang="pl-PL" sz="1400" dirty="0">
+                <a:solidFill>
+                  <a:srgbClr val="CCCCCC"/>
                 </a:solidFill>
                 <a:latin typeface="Consolas" panose="020B0609020204030204" pitchFamily="49" charset="0"/>
               </a:rPr>
               <a:t> </a:t>
             </a:r>
             <a:r>
-              <a:rPr lang="pl-PL" sz="1300" dirty="0" err="1">
-                <a:solidFill>
-                  <a:srgbClr val="FFA657"/>
+              <a:rPr lang="pl-PL" sz="1400" dirty="0" err="1">
+                <a:solidFill>
+                  <a:srgbClr val="CCCCCC"/>
                 </a:solidFill>
                 <a:latin typeface="Consolas" panose="020B0609020204030204" pitchFamily="49" charset="0"/>
               </a:rPr>
               <a:t>stride_len</a:t>
             </a:r>
             <a:r>
-              <a:rPr lang="pl-PL" sz="1300" dirty="0">
-                <a:solidFill>
-                  <a:srgbClr val="BBBEBF"/>
+              <a:rPr lang="pl-PL" sz="1400" dirty="0">
+                <a:solidFill>
+                  <a:srgbClr val="CCCCCC"/>
                 </a:solidFill>
                 <a:latin typeface="Consolas" panose="020B0609020204030204" pitchFamily="49" charset="0"/>
               </a:rPr>
               <a:t> </a:t>
             </a:r>
             <a:r>
-              <a:rPr lang="pl-PL" sz="1300" dirty="0">
+              <a:rPr lang="pl-PL" sz="1400" dirty="0">
                 <a:solidFill>
                   <a:srgbClr val="D4D4D4"/>
                 </a:solidFill>
@@ -9101,81 +9020,54 @@
               <a:t>*</a:t>
             </a:r>
             <a:r>
-              <a:rPr lang="pl-PL" sz="1300" dirty="0">
-                <a:solidFill>
-                  <a:srgbClr val="BBBEBF"/>
+              <a:rPr lang="pl-PL" sz="1400" dirty="0">
+                <a:solidFill>
+                  <a:srgbClr val="CCCCCC"/>
                 </a:solidFill>
                 <a:latin typeface="Consolas" panose="020B0609020204030204" pitchFamily="49" charset="0"/>
               </a:rPr>
               <a:t> </a:t>
             </a:r>
             <a:r>
-              <a:rPr lang="pl-PL" sz="1300" dirty="0" err="1">
-                <a:solidFill>
-                  <a:srgbClr val="4EC9B0"/>
-                </a:solidFill>
-                <a:latin typeface="Consolas" panose="020B0609020204030204" pitchFamily="49" charset="0"/>
-              </a:rPr>
-              <a:t>np</a:t>
-            </a:r>
-            <a:r>
-              <a:rPr lang="pl-PL" sz="1300" dirty="0" err="1">
-                <a:solidFill>
-                  <a:srgbClr val="BBBEBF"/>
-                </a:solidFill>
-                <a:latin typeface="Consolas" panose="020B0609020204030204" pitchFamily="49" charset="0"/>
-              </a:rPr>
-              <a:t>.</a:t>
-            </a:r>
-            <a:r>
-              <a:rPr lang="pl-PL" sz="1300" dirty="0" err="1">
-                <a:solidFill>
-                  <a:srgbClr val="C9D1D9"/>
-                </a:solidFill>
-                <a:latin typeface="Consolas" panose="020B0609020204030204" pitchFamily="49" charset="0"/>
-              </a:rPr>
-              <a:t>sin</a:t>
-            </a:r>
-            <a:r>
-              <a:rPr lang="pl-PL" sz="1300" dirty="0">
-                <a:solidFill>
-                  <a:srgbClr val="BBBEBF"/>
+              <a:rPr lang="pl-PL" sz="1400" dirty="0" err="1">
+                <a:solidFill>
+                  <a:srgbClr val="CCCCCC"/>
+                </a:solidFill>
+                <a:latin typeface="Consolas" panose="020B0609020204030204" pitchFamily="49" charset="0"/>
+              </a:rPr>
+              <a:t>np.sin</a:t>
+            </a:r>
+            <a:r>
+              <a:rPr lang="pl-PL" sz="1400" dirty="0">
+                <a:solidFill>
+                  <a:srgbClr val="CCCCCC"/>
                 </a:solidFill>
                 <a:latin typeface="Consolas" panose="020B0609020204030204" pitchFamily="49" charset="0"/>
               </a:rPr>
               <a:t>(</a:t>
             </a:r>
             <a:r>
-              <a:rPr lang="pl-PL" sz="1300" dirty="0" err="1">
-                <a:solidFill>
-                  <a:srgbClr val="C9D1D9"/>
+              <a:rPr lang="pl-PL" sz="1400" dirty="0" err="1">
+                <a:solidFill>
+                  <a:srgbClr val="569CD6"/>
                 </a:solidFill>
                 <a:latin typeface="Consolas" panose="020B0609020204030204" pitchFamily="49" charset="0"/>
               </a:rPr>
               <a:t>self</a:t>
             </a:r>
             <a:r>
-              <a:rPr lang="pl-PL" sz="1300" dirty="0" err="1">
-                <a:solidFill>
-                  <a:srgbClr val="BBBEBF"/>
-                </a:solidFill>
-                <a:latin typeface="Consolas" panose="020B0609020204030204" pitchFamily="49" charset="0"/>
-              </a:rPr>
-              <a:t>.</a:t>
-            </a:r>
-            <a:r>
-              <a:rPr lang="pl-PL" sz="1300" dirty="0" err="1">
-                <a:solidFill>
-                  <a:srgbClr val="C9D1D9"/>
-                </a:solidFill>
-                <a:latin typeface="Consolas" panose="020B0609020204030204" pitchFamily="49" charset="0"/>
-              </a:rPr>
-              <a:t>yaw</a:t>
-            </a:r>
-            <a:r>
-              <a:rPr lang="pl-PL" sz="1300" dirty="0">
-                <a:solidFill>
-                  <a:srgbClr val="BBBEBF"/>
+              <a:rPr lang="pl-PL" sz="1400" dirty="0" err="1">
+                <a:solidFill>
+                  <a:srgbClr val="CCCCCC"/>
+                </a:solidFill>
+                <a:latin typeface="Consolas" panose="020B0609020204030204" pitchFamily="49" charset="0"/>
+              </a:rPr>
+              <a:t>.yaw</a:t>
+            </a:r>
+            <a:r>
+              <a:rPr lang="pl-PL" sz="1400" dirty="0">
+                <a:solidFill>
+                  <a:srgbClr val="CCCCCC"/>
                 </a:solidFill>
                 <a:latin typeface="Consolas" panose="020B0609020204030204" pitchFamily="49" charset="0"/>
               </a:rPr>
@@ -9189,16 +9081,16 @@
               </a:lnSpc>
             </a:pPr>
             <a:r>
-              <a:rPr lang="pl-PL" sz="1300" dirty="0">
-                <a:solidFill>
-                  <a:srgbClr val="BBBEBF"/>
+              <a:rPr lang="pl-PL" sz="1400" dirty="0">
+                <a:solidFill>
+                  <a:srgbClr val="CCCCCC"/>
                 </a:solidFill>
                 <a:latin typeface="Consolas" panose="020B0609020204030204" pitchFamily="49" charset="0"/>
               </a:rPr>
               <a:t>        </a:t>
             </a:r>
             <a:r>
-              <a:rPr lang="pl-PL" sz="1300" dirty="0">
+              <a:rPr lang="pl-PL" sz="1400" dirty="0">
                 <a:solidFill>
                   <a:srgbClr val="C586C0"/>
                 </a:solidFill>
@@ -9207,116 +9099,89 @@
               <a:t>return</a:t>
             </a:r>
             <a:r>
-              <a:rPr lang="pl-PL" sz="1300" dirty="0">
-                <a:solidFill>
-                  <a:srgbClr val="BBBEBF"/>
+              <a:rPr lang="pl-PL" sz="1400" dirty="0">
+                <a:solidFill>
+                  <a:srgbClr val="CCCCCC"/>
                 </a:solidFill>
                 <a:latin typeface="Consolas" panose="020B0609020204030204" pitchFamily="49" charset="0"/>
               </a:rPr>
               <a:t> </a:t>
             </a:r>
             <a:r>
-              <a:rPr lang="pl-PL" sz="1300" dirty="0" err="1">
-                <a:solidFill>
-                  <a:srgbClr val="C9D1D9"/>
+              <a:rPr lang="pl-PL" sz="1400" dirty="0" err="1">
+                <a:solidFill>
+                  <a:srgbClr val="569CD6"/>
                 </a:solidFill>
                 <a:latin typeface="Consolas" panose="020B0609020204030204" pitchFamily="49" charset="0"/>
               </a:rPr>
               <a:t>self</a:t>
             </a:r>
             <a:r>
-              <a:rPr lang="pl-PL" sz="1300" dirty="0" err="1">
-                <a:solidFill>
-                  <a:srgbClr val="BBBEBF"/>
-                </a:solidFill>
-                <a:latin typeface="Consolas" panose="020B0609020204030204" pitchFamily="49" charset="0"/>
-              </a:rPr>
-              <a:t>.</a:t>
-            </a:r>
-            <a:r>
-              <a:rPr lang="pl-PL" sz="1300" dirty="0" err="1">
-                <a:solidFill>
-                  <a:srgbClr val="C9D1D9"/>
-                </a:solidFill>
-                <a:latin typeface="Consolas" panose="020B0609020204030204" pitchFamily="49" charset="0"/>
-              </a:rPr>
-              <a:t>x</a:t>
-            </a:r>
-            <a:r>
-              <a:rPr lang="pl-PL" sz="1300" dirty="0">
-                <a:solidFill>
-                  <a:srgbClr val="BBBEBF"/>
+              <a:rPr lang="pl-PL" sz="1400" dirty="0" err="1">
+                <a:solidFill>
+                  <a:srgbClr val="CCCCCC"/>
+                </a:solidFill>
+                <a:latin typeface="Consolas" panose="020B0609020204030204" pitchFamily="49" charset="0"/>
+              </a:rPr>
+              <a:t>.x</a:t>
+            </a:r>
+            <a:r>
+              <a:rPr lang="pl-PL" sz="1400" dirty="0">
+                <a:solidFill>
+                  <a:srgbClr val="CCCCCC"/>
                 </a:solidFill>
                 <a:latin typeface="Consolas" panose="020B0609020204030204" pitchFamily="49" charset="0"/>
               </a:rPr>
               <a:t>, </a:t>
             </a:r>
             <a:r>
-              <a:rPr lang="pl-PL" sz="1300" dirty="0" err="1">
-                <a:solidFill>
-                  <a:srgbClr val="C9D1D9"/>
+              <a:rPr lang="pl-PL" sz="1400" dirty="0" err="1">
+                <a:solidFill>
+                  <a:srgbClr val="569CD6"/>
                 </a:solidFill>
                 <a:latin typeface="Consolas" panose="020B0609020204030204" pitchFamily="49" charset="0"/>
               </a:rPr>
               <a:t>self</a:t>
             </a:r>
             <a:r>
-              <a:rPr lang="pl-PL" sz="1300" dirty="0" err="1">
-                <a:solidFill>
-                  <a:srgbClr val="BBBEBF"/>
-                </a:solidFill>
-                <a:latin typeface="Consolas" panose="020B0609020204030204" pitchFamily="49" charset="0"/>
-              </a:rPr>
-              <a:t>.</a:t>
-            </a:r>
-            <a:r>
-              <a:rPr lang="pl-PL" sz="1300" dirty="0" err="1">
-                <a:solidFill>
-                  <a:srgbClr val="C9D1D9"/>
-                </a:solidFill>
-                <a:latin typeface="Consolas" panose="020B0609020204030204" pitchFamily="49" charset="0"/>
-              </a:rPr>
-              <a:t>y</a:t>
-            </a:r>
-            <a:r>
-              <a:rPr lang="pl-PL" sz="1300" dirty="0">
-                <a:solidFill>
-                  <a:srgbClr val="BBBEBF"/>
+              <a:rPr lang="pl-PL" sz="1400" dirty="0" err="1">
+                <a:solidFill>
+                  <a:srgbClr val="CCCCCC"/>
+                </a:solidFill>
+                <a:latin typeface="Consolas" panose="020B0609020204030204" pitchFamily="49" charset="0"/>
+              </a:rPr>
+              <a:t>.y</a:t>
+            </a:r>
+            <a:r>
+              <a:rPr lang="pl-PL" sz="1400" dirty="0">
+                <a:solidFill>
+                  <a:srgbClr val="CCCCCC"/>
                 </a:solidFill>
                 <a:latin typeface="Consolas" panose="020B0609020204030204" pitchFamily="49" charset="0"/>
               </a:rPr>
               <a:t>, </a:t>
             </a:r>
             <a:r>
-              <a:rPr lang="pl-PL" sz="1300" dirty="0" err="1">
-                <a:solidFill>
-                  <a:srgbClr val="C9D1D9"/>
+              <a:rPr lang="pl-PL" sz="1400" dirty="0" err="1">
+                <a:solidFill>
+                  <a:srgbClr val="569CD6"/>
                 </a:solidFill>
                 <a:latin typeface="Consolas" panose="020B0609020204030204" pitchFamily="49" charset="0"/>
               </a:rPr>
               <a:t>self</a:t>
             </a:r>
             <a:r>
-              <a:rPr lang="pl-PL" sz="1300" dirty="0" err="1">
-                <a:solidFill>
-                  <a:srgbClr val="BBBEBF"/>
-                </a:solidFill>
-                <a:latin typeface="Consolas" panose="020B0609020204030204" pitchFamily="49" charset="0"/>
-              </a:rPr>
-              <a:t>.</a:t>
-            </a:r>
-            <a:r>
-              <a:rPr lang="pl-PL" sz="1300" dirty="0" err="1">
-                <a:solidFill>
-                  <a:srgbClr val="C9D1D9"/>
-                </a:solidFill>
-                <a:latin typeface="Consolas" panose="020B0609020204030204" pitchFamily="49" charset="0"/>
-              </a:rPr>
-              <a:t>yaw</a:t>
-            </a:r>
-            <a:endParaRPr lang="pl-PL" sz="1300" dirty="0">
+              <a:rPr lang="pl-PL" sz="1400" dirty="0" err="1">
+                <a:solidFill>
+                  <a:srgbClr val="CCCCCC"/>
+                </a:solidFill>
+                <a:latin typeface="Consolas" panose="020B0609020204030204" pitchFamily="49" charset="0"/>
+              </a:rPr>
+              <a:t>.yaw</a:t>
+            </a:r>
+            <a:endParaRPr lang="pl-PL" sz="1400" dirty="0">
               <a:solidFill>
-                <a:srgbClr val="BBBEBF"/>
+                <a:srgbClr val="CCCCCC"/>
               </a:solidFill>
               <a:latin typeface="Consolas" panose="020B0609020204030204" pitchFamily="49" charset="0"/>
             </a:endParaRPr>
@@ -9328,71 +9193,62 @@
               </a:lnSpc>
             </a:pPr>
             <a:r>
-              <a:rPr lang="pl-PL" sz="1300" dirty="0">
-                <a:solidFill>
-                  <a:srgbClr val="BBBEBF"/>
+              <a:rPr lang="pl-PL" sz="1400" dirty="0">
+                <a:solidFill>
+                  <a:srgbClr val="CCCCCC"/>
                 </a:solidFill>
                 <a:latin typeface="Consolas" panose="020B0609020204030204" pitchFamily="49" charset="0"/>
               </a:rPr>
               <a:t/>
             </a:r>
             <a:br>
-              <a:rPr lang="pl-PL" sz="1300" dirty="0">
-                <a:solidFill>
-                  <a:srgbClr val="BBBEBF"/>
+              <a:rPr lang="pl-PL" sz="1400" dirty="0">
+                <a:solidFill>
+                  <a:srgbClr val="CCCCCC"/>
                 </a:solidFill>
                 <a:latin typeface="Consolas" panose="020B0609020204030204" pitchFamily="49" charset="0"/>
               </a:rPr>
             </a:br>
             <a:r>
-              <a:rPr lang="pl-PL" sz="1300" dirty="0">
-                <a:solidFill>
-                  <a:srgbClr val="C9D1D9"/>
+              <a:rPr lang="pl-PL" sz="1400" dirty="0">
+                <a:solidFill>
+                  <a:srgbClr val="CCCCCC"/>
                 </a:solidFill>
                 <a:latin typeface="Consolas" panose="020B0609020204030204" pitchFamily="49" charset="0"/>
               </a:rPr>
               <a:t>odo</a:t>
             </a:r>
             <a:r>
-              <a:rPr lang="pl-PL" sz="1300" dirty="0">
-                <a:solidFill>
-                  <a:srgbClr val="BBBEBF"/>
+              <a:rPr lang="pl-PL" sz="1400" dirty="0">
+                <a:solidFill>
+                  <a:srgbClr val="D4D4D4"/>
+                </a:solidFill>
+                <a:latin typeface="Consolas" panose="020B0609020204030204" pitchFamily="49" charset="0"/>
+              </a:rPr>
+              <a:t>=</a:t>
+            </a:r>
+            <a:r>
+              <a:rPr lang="pl-PL" sz="1400" dirty="0">
+                <a:solidFill>
+                  <a:srgbClr val="CCCCCC"/>
                 </a:solidFill>
                 <a:latin typeface="Consolas" panose="020B0609020204030204" pitchFamily="49" charset="0"/>
               </a:rPr>
               <a:t> </a:t>
             </a:r>
             <a:r>
-              <a:rPr lang="pl-PL" sz="1300" dirty="0">
-                <a:solidFill>
-                  <a:srgbClr val="D4D4D4"/>
-                </a:solidFill>
-                <a:latin typeface="Consolas" panose="020B0609020204030204" pitchFamily="49" charset="0"/>
-              </a:rPr>
-              <a:t>=</a:t>
-            </a:r>
-            <a:r>
-              <a:rPr lang="pl-PL" sz="1300" dirty="0">
-                <a:solidFill>
-                  <a:srgbClr val="BBBEBF"/>
-                </a:solidFill>
-                <a:latin typeface="Consolas" panose="020B0609020204030204" pitchFamily="49" charset="0"/>
-              </a:rPr>
-              <a:t> </a:t>
-            </a:r>
-            <a:r>
-              <a:rPr lang="pl-PL" sz="1300" dirty="0" err="1">
-                <a:solidFill>
-                  <a:srgbClr val="4EC9B0"/>
+              <a:rPr lang="pl-PL" sz="1400" dirty="0" err="1">
+                <a:solidFill>
+                  <a:srgbClr val="CCCCCC"/>
                 </a:solidFill>
                 <a:latin typeface="Consolas" panose="020B0609020204030204" pitchFamily="49" charset="0"/>
               </a:rPr>
               <a:t>StepOdometry</a:t>
             </a:r>
             <a:r>
-              <a:rPr lang="pl-PL" sz="1300" dirty="0">
-                <a:solidFill>
-                  <a:srgbClr val="BBBEBF"/>
+              <a:rPr lang="pl-PL" sz="1400" dirty="0">
+                <a:solidFill>
+                  <a:srgbClr val="CCCCCC"/>
                 </a:solidFill>
                 <a:latin typeface="Consolas" panose="020B0609020204030204" pitchFamily="49" charset="0"/>
               </a:rPr>
@@ -9406,7 +9262,7 @@
               </a:lnSpc>
             </a:pPr>
             <a:r>
-              <a:rPr lang="pl-PL" sz="1300" dirty="0">
+              <a:rPr lang="pl-PL" sz="1400" dirty="0">
                 <a:solidFill>
                   <a:srgbClr val="C586C0"/>
                 </a:solidFill>
@@ -9415,34 +9271,34 @@
               <a:t>for</a:t>
             </a:r>
             <a:r>
-              <a:rPr lang="pl-PL" sz="1300" dirty="0">
-                <a:solidFill>
-                  <a:srgbClr val="BBBEBF"/>
+              <a:rPr lang="pl-PL" sz="1400" dirty="0">
+                <a:solidFill>
+                  <a:srgbClr val="CCCCCC"/>
                 </a:solidFill>
                 <a:latin typeface="Consolas" panose="020B0609020204030204" pitchFamily="49" charset="0"/>
               </a:rPr>
               <a:t> </a:t>
             </a:r>
             <a:r>
-              <a:rPr lang="pl-PL" sz="1300" dirty="0">
-                <a:solidFill>
-                  <a:srgbClr val="C9D1D9"/>
+              <a:rPr lang="pl-PL" sz="1400" dirty="0">
+                <a:solidFill>
+                  <a:srgbClr val="9CDCFE"/>
                 </a:solidFill>
                 <a:latin typeface="Consolas" panose="020B0609020204030204" pitchFamily="49" charset="0"/>
               </a:rPr>
               <a:t>_</a:t>
             </a:r>
             <a:r>
-              <a:rPr lang="pl-PL" sz="1300" dirty="0">
-                <a:solidFill>
-                  <a:srgbClr val="BBBEBF"/>
+              <a:rPr lang="pl-PL" sz="1400" dirty="0">
+                <a:solidFill>
+                  <a:srgbClr val="CCCCCC"/>
                 </a:solidFill>
                 <a:latin typeface="Consolas" panose="020B0609020204030204" pitchFamily="49" charset="0"/>
               </a:rPr>
               <a:t> </a:t>
             </a:r>
             <a:r>
-              <a:rPr lang="pl-PL" sz="1300" dirty="0">
+              <a:rPr lang="pl-PL" sz="1400" dirty="0">
                 <a:solidFill>
                   <a:srgbClr val="C586C0"/>
                 </a:solidFill>
@@ -9451,16 +9307,16 @@
               <a:t>in</a:t>
             </a:r>
             <a:r>
-              <a:rPr lang="pl-PL" sz="1300" dirty="0">
-                <a:solidFill>
-                  <a:srgbClr val="BBBEBF"/>
+              <a:rPr lang="pl-PL" sz="1400" dirty="0">
+                <a:solidFill>
+                  <a:srgbClr val="CCCCCC"/>
                 </a:solidFill>
                 <a:latin typeface="Consolas" panose="020B0609020204030204" pitchFamily="49" charset="0"/>
               </a:rPr>
               <a:t> </a:t>
             </a:r>
             <a:r>
-              <a:rPr lang="pl-PL" sz="1300" dirty="0" err="1">
+              <a:rPr lang="pl-PL" sz="1400" dirty="0" err="1">
                 <a:solidFill>
                   <a:srgbClr val="4EC9B0"/>
                 </a:solidFill>
@@ -9469,16 +9325,16 @@
               <a:t>range</a:t>
             </a:r>
             <a:r>
-              <a:rPr lang="pl-PL" sz="1300" dirty="0">
-                <a:solidFill>
-                  <a:srgbClr val="BBBEBF"/>
+              <a:rPr lang="pl-PL" sz="1400" dirty="0">
+                <a:solidFill>
+                  <a:srgbClr val="CCCCCC"/>
                 </a:solidFill>
                 <a:latin typeface="Consolas" panose="020B0609020204030204" pitchFamily="49" charset="0"/>
               </a:rPr>
               <a:t>(</a:t>
             </a:r>
             <a:r>
-              <a:rPr lang="pl-PL" sz="1300" dirty="0">
+              <a:rPr lang="pl-PL" sz="1400" dirty="0">
                 <a:solidFill>
                   <a:srgbClr val="B5CEA8"/>
                 </a:solidFill>
@@ -9487,9 +9343,9 @@
               <a:t>10</a:t>
             </a:r>
             <a:r>
-              <a:rPr lang="pl-PL" sz="1300" dirty="0">
-                <a:solidFill>
-                  <a:srgbClr val="BBBEBF"/>
+              <a:rPr lang="pl-PL" sz="1400" dirty="0">
+                <a:solidFill>
+                  <a:srgbClr val="CCCCCC"/>
                 </a:solidFill>
                 <a:latin typeface="Consolas" panose="020B0609020204030204" pitchFamily="49" charset="0"/>
               </a:rPr>
@@ -9503,70 +9359,115 @@
               </a:lnSpc>
             </a:pPr>
             <a:r>
-              <a:rPr lang="pl-PL" sz="1300" dirty="0">
-                <a:solidFill>
-                  <a:srgbClr val="BBBEBF"/>
-                </a:solidFill>
-                <a:latin typeface="Consolas" panose="020B0609020204030204" pitchFamily="49" charset="0"/>
-              </a:rPr>
-              <a:t>    </a:t>
-            </a:r>
-            <a:r>
-              <a:rPr lang="pl-PL" sz="1300" dirty="0">
-                <a:solidFill>
-                  <a:srgbClr val="C9D1D9"/>
-                </a:solidFill>
-                <a:latin typeface="Consolas" panose="020B0609020204030204" pitchFamily="49" charset="0"/>
-              </a:rPr>
-              <a:t>x</a:t>
-            </a:r>
-            <a:r>
-              <a:rPr lang="pl-PL" sz="1300" dirty="0">
-                <a:solidFill>
-                  <a:srgbClr val="BBBEBF"/>
+              <a:rPr lang="pl-PL" sz="1400" dirty="0">
+                <a:solidFill>
+                  <a:srgbClr val="CCCCCC"/>
+                </a:solidFill>
+                <a:latin typeface="Consolas" panose="020B0609020204030204" pitchFamily="49" charset="0"/>
+              </a:rPr>
+              <a:t>    x, y, </a:t>
+            </a:r>
+            <a:r>
+              <a:rPr lang="pl-PL" sz="1400" dirty="0" err="1">
+                <a:solidFill>
+                  <a:srgbClr val="CCCCCC"/>
+                </a:solidFill>
+                <a:latin typeface="Consolas" panose="020B0609020204030204" pitchFamily="49" charset="0"/>
+              </a:rPr>
+              <a:t>yaw</a:t>
+            </a:r>
+            <a:r>
+              <a:rPr lang="pl-PL" sz="1400" dirty="0">
+                <a:solidFill>
+                  <a:srgbClr val="CCCCCC"/>
+                </a:solidFill>
+                <a:latin typeface="Consolas" panose="020B0609020204030204" pitchFamily="49" charset="0"/>
+              </a:rPr>
+              <a:t> </a:t>
+            </a:r>
+            <a:r>
+              <a:rPr lang="pl-PL" sz="1400" dirty="0">
+                <a:solidFill>
+                  <a:srgbClr val="D4D4D4"/>
+                </a:solidFill>
+                <a:latin typeface="Consolas" panose="020B0609020204030204" pitchFamily="49" charset="0"/>
+              </a:rPr>
+              <a:t>=</a:t>
+            </a:r>
+            <a:r>
+              <a:rPr lang="pl-PL" sz="1400" dirty="0">
+                <a:solidFill>
+                  <a:srgbClr val="CCCCCC"/>
+                </a:solidFill>
+                <a:latin typeface="Consolas" panose="020B0609020204030204" pitchFamily="49" charset="0"/>
+              </a:rPr>
+              <a:t> </a:t>
+            </a:r>
+            <a:r>
+              <a:rPr lang="pl-PL" sz="1400" dirty="0" err="1">
+                <a:solidFill>
+                  <a:srgbClr val="CCCCCC"/>
+                </a:solidFill>
+                <a:latin typeface="Consolas" panose="020B0609020204030204" pitchFamily="49" charset="0"/>
+              </a:rPr>
+              <a:t>odo.step</a:t>
+            </a:r>
+            <a:r>
+              <a:rPr lang="pl-PL" sz="1400" dirty="0">
+                <a:solidFill>
+                  <a:srgbClr val="CCCCCC"/>
+                </a:solidFill>
+                <a:latin typeface="Consolas" panose="020B0609020204030204" pitchFamily="49" charset="0"/>
+              </a:rPr>
+              <a:t>(</a:t>
+            </a:r>
+            <a:r>
+              <a:rPr lang="pl-PL" sz="1400" dirty="0" err="1">
+                <a:solidFill>
+                  <a:srgbClr val="9CDCFE"/>
+                </a:solidFill>
+                <a:latin typeface="Consolas" panose="020B0609020204030204" pitchFamily="49" charset="0"/>
+              </a:rPr>
+              <a:t>stride_len</a:t>
+            </a:r>
+            <a:r>
+              <a:rPr lang="pl-PL" sz="1400" dirty="0">
+                <a:solidFill>
+                  <a:srgbClr val="D4D4D4"/>
+                </a:solidFill>
+                <a:latin typeface="Consolas" panose="020B0609020204030204" pitchFamily="49" charset="0"/>
+              </a:rPr>
+              <a:t>=</a:t>
+            </a:r>
+            <a:r>
+              <a:rPr lang="pl-PL" sz="1400" dirty="0">
+                <a:solidFill>
+                  <a:srgbClr val="B5CEA8"/>
+                </a:solidFill>
+                <a:latin typeface="Consolas" panose="020B0609020204030204" pitchFamily="49" charset="0"/>
+              </a:rPr>
+              <a:t>0.35</a:t>
+            </a:r>
+            <a:r>
+              <a:rPr lang="pl-PL" sz="1400" dirty="0">
+                <a:solidFill>
+                  <a:srgbClr val="CCCCCC"/>
                 </a:solidFill>
                 <a:latin typeface="Consolas" panose="020B0609020204030204" pitchFamily="49" charset="0"/>
               </a:rPr>
               <a:t>, </a:t>
             </a:r>
             <a:r>
-              <a:rPr lang="pl-PL" sz="1300" dirty="0">
-                <a:solidFill>
-                  <a:srgbClr val="C9D1D9"/>
-                </a:solidFill>
-                <a:latin typeface="Consolas" panose="020B0609020204030204" pitchFamily="49" charset="0"/>
-              </a:rPr>
-              <a:t>y</a:t>
-            </a:r>
-            <a:r>
-              <a:rPr lang="pl-PL" sz="1300" dirty="0">
-                <a:solidFill>
-                  <a:srgbClr val="BBBEBF"/>
-                </a:solidFill>
-                <a:latin typeface="Consolas" panose="020B0609020204030204" pitchFamily="49" charset="0"/>
-              </a:rPr>
-              <a:t>, </a:t>
-            </a:r>
-            <a:r>
-              <a:rPr lang="pl-PL" sz="1300" dirty="0" err="1">
-                <a:solidFill>
-                  <a:srgbClr val="C9D1D9"/>
-                </a:solidFill>
-                <a:latin typeface="Consolas" panose="020B0609020204030204" pitchFamily="49" charset="0"/>
-              </a:rPr>
-              <a:t>yaw</a:t>
-            </a:r>
-            <a:r>
-              <a:rPr lang="pl-PL" sz="1300" dirty="0">
-                <a:solidFill>
-                  <a:srgbClr val="BBBEBF"/>
-                </a:solidFill>
-                <a:latin typeface="Consolas" panose="020B0609020204030204" pitchFamily="49" charset="0"/>
-              </a:rPr>
-              <a:t> </a:t>
-            </a:r>
-            <a:r>
-              <a:rPr lang="pl-PL" sz="1300" dirty="0">
+              <a:rPr lang="pl-PL" sz="1400" dirty="0" err="1">
+                <a:solidFill>
+                  <a:srgbClr val="9CDCFE"/>
+                </a:solidFill>
+                <a:latin typeface="Consolas" panose="020B0609020204030204" pitchFamily="49" charset="0"/>
+              </a:rPr>
+              <a:t>delta_yaw</a:t>
+            </a:r>
+            <a:r>
+              <a:rPr lang="pl-PL" sz="1400" dirty="0">
                 <a:solidFill>
                   <a:srgbClr val="D4D4D4"/>
                 </a:solidFill>
@@ -9575,125 +9476,26 @@
               <a:t>=</a:t>
             </a:r>
             <a:r>
-              <a:rPr lang="pl-PL" sz="1300" dirty="0">
-                <a:solidFill>
-                  <a:srgbClr val="BBBEBF"/>
-                </a:solidFill>
-                <a:latin typeface="Consolas" panose="020B0609020204030204" pitchFamily="49" charset="0"/>
-              </a:rPr>
-              <a:t> </a:t>
-            </a:r>
-            <a:r>
-              <a:rPr lang="pl-PL" sz="1300" dirty="0" err="1">
-                <a:solidFill>
-                  <a:srgbClr val="C9D1D9"/>
-                </a:solidFill>
-                <a:latin typeface="Consolas" panose="020B0609020204030204" pitchFamily="49" charset="0"/>
-              </a:rPr>
-              <a:t>odo</a:t>
-            </a:r>
-            <a:r>
-              <a:rPr lang="pl-PL" sz="1300" dirty="0" err="1">
-                <a:solidFill>
-                  <a:srgbClr val="BBBEBF"/>
-                </a:solidFill>
-                <a:latin typeface="Consolas" panose="020B0609020204030204" pitchFamily="49" charset="0"/>
-              </a:rPr>
-              <a:t>.</a:t>
-            </a:r>
-            <a:r>
-              <a:rPr lang="pl-PL" sz="1300" dirty="0" err="1">
-                <a:solidFill>
-                  <a:srgbClr val="D2A8FF"/>
-                </a:solidFill>
-                <a:latin typeface="Consolas" panose="020B0609020204030204" pitchFamily="49" charset="0"/>
-              </a:rPr>
-              <a:t>step</a:t>
-            </a:r>
-            <a:r>
-              <a:rPr lang="pl-PL" sz="1300" dirty="0">
-                <a:solidFill>
-                  <a:srgbClr val="BBBEBF"/>
-                </a:solidFill>
-                <a:latin typeface="Consolas" panose="020B0609020204030204" pitchFamily="49" charset="0"/>
-              </a:rPr>
-              <a:t>(</a:t>
-            </a:r>
-            <a:r>
-              <a:rPr lang="pl-PL" sz="1300" dirty="0" err="1">
-                <a:solidFill>
-                  <a:srgbClr val="FFA657"/>
-                </a:solidFill>
-                <a:latin typeface="Consolas" panose="020B0609020204030204" pitchFamily="49" charset="0"/>
-              </a:rPr>
-              <a:t>stride_len</a:t>
-            </a:r>
-            <a:r>
-              <a:rPr lang="pl-PL" sz="1300" dirty="0">
-                <a:solidFill>
-                  <a:srgbClr val="D4D4D4"/>
-                </a:solidFill>
-                <a:latin typeface="Consolas" panose="020B0609020204030204" pitchFamily="49" charset="0"/>
-              </a:rPr>
-              <a:t>=</a:t>
-            </a:r>
-            <a:r>
-              <a:rPr lang="pl-PL" sz="1300" dirty="0">
+              <a:rPr lang="pl-PL" sz="1400" dirty="0">
                 <a:solidFill>
                   <a:srgbClr val="B5CEA8"/>
                 </a:solidFill>
                 <a:latin typeface="Consolas" panose="020B0609020204030204" pitchFamily="49" charset="0"/>
               </a:rPr>
-              <a:t>0.35</a:t>
-            </a:r>
-            <a:r>
-              <a:rPr lang="pl-PL" sz="1300" dirty="0">
-                <a:solidFill>
-                  <a:srgbClr val="BBBEBF"/>
-                </a:solidFill>
-                <a:latin typeface="Consolas" panose="020B0609020204030204" pitchFamily="49" charset="0"/>
-              </a:rPr>
-              <a:t>, </a:t>
-            </a:r>
-            <a:r>
-              <a:rPr lang="pl-PL" sz="1300" dirty="0" err="1">
-                <a:solidFill>
-                  <a:srgbClr val="FFA657"/>
-                </a:solidFill>
-                <a:latin typeface="Consolas" panose="020B0609020204030204" pitchFamily="49" charset="0"/>
-              </a:rPr>
-              <a:t>delta_yaw</a:t>
-            </a:r>
-            <a:r>
-              <a:rPr lang="pl-PL" sz="1300" dirty="0">
-                <a:solidFill>
-                  <a:srgbClr val="D4D4D4"/>
-                </a:solidFill>
-                <a:latin typeface="Consolas" panose="020B0609020204030204" pitchFamily="49" charset="0"/>
-              </a:rPr>
-              <a:t>=</a:t>
-            </a:r>
-            <a:r>
-              <a:rPr lang="pl-PL" sz="1300" dirty="0">
-                <a:solidFill>
-                  <a:srgbClr val="B5CEA8"/>
-                </a:solidFill>
-                <a:latin typeface="Consolas" panose="020B0609020204030204" pitchFamily="49" charset="0"/>
-              </a:rPr>
               <a:t>0.02</a:t>
             </a:r>
             <a:r>
-              <a:rPr lang="pl-PL" sz="1300" dirty="0" smtClean="0">
-                <a:solidFill>
-                  <a:srgbClr val="BBBEBF"/>
+              <a:rPr lang="pl-PL" sz="1400" dirty="0" smtClean="0">
+                <a:solidFill>
+                  <a:srgbClr val="CCCCCC"/>
                 </a:solidFill>
                 <a:latin typeface="Consolas" panose="020B0609020204030204" pitchFamily="49" charset="0"/>
               </a:rPr>
               <a:t>)</a:t>
             </a:r>
-            <a:endParaRPr lang="pl-PL" sz="1300" dirty="0">
+            <a:endParaRPr lang="pl-PL" sz="1400" dirty="0">
               <a:solidFill>
-                <a:srgbClr val="BBBEBF"/>
+                <a:srgbClr val="CCCCCC"/>
               </a:solidFill>
               <a:latin typeface="Consolas" panose="020B0609020204030204" pitchFamily="49" charset="0"/>
             </a:endParaRPr>
@@ -12506,7 +12308,25 @@
                 </a:solidFill>
                 <a:latin typeface="Consolas" panose="020B0609020204030204" pitchFamily="49" charset="0"/>
               </a:rPr>
-              <a:t># estymowany kat pochylenia [rad]</a:t>
+              <a:t># estymowany </a:t>
+            </a:r>
+            <a:r>
+              <a:rPr lang="pl-PL" sz="1200" dirty="0" smtClean="0">
+                <a:solidFill>
+                  <a:srgbClr val="6A9955"/>
+                </a:solidFill>
+                <a:latin typeface="Consolas" panose="020B0609020204030204" pitchFamily="49" charset="0"/>
+              </a:rPr>
+              <a:t>kąt </a:t>
+            </a:r>
+            <a:r>
+              <a:rPr lang="pl-PL" sz="1200" dirty="0">
+                <a:solidFill>
+                  <a:srgbClr val="6A9955"/>
+                </a:solidFill>
+                <a:latin typeface="Consolas" panose="020B0609020204030204" pitchFamily="49" charset="0"/>
+              </a:rPr>
+              <a:t>pochylenia [rad]</a:t>
             </a:r>
             <a:endParaRPr lang="pl-PL" sz="1200" dirty="0">
               <a:solidFill>
@@ -16419,7 +16239,7 @@
               </a:lnSpc>
             </a:pPr>
             <a:r>
-              <a:rPr lang="pl-PL" sz="1100" dirty="0">
+              <a:rPr lang="pl-PL" sz="1200" dirty="0">
                 <a:solidFill>
                   <a:srgbClr val="C586C0"/>
                 </a:solidFill>
@@ -16428,16 +16248,16 @@
               <a:t>import</a:t>
             </a:r>
             <a:r>
-              <a:rPr lang="pl-PL" sz="1100" dirty="0">
-                <a:solidFill>
-                  <a:srgbClr val="BBBEBF"/>
+              <a:rPr lang="pl-PL" sz="1200" dirty="0">
+                <a:solidFill>
+                  <a:srgbClr val="CCCCCC"/>
                 </a:solidFill>
                 <a:latin typeface="Consolas" panose="020B0609020204030204" pitchFamily="49" charset="0"/>
               </a:rPr>
               <a:t> </a:t>
             </a:r>
             <a:r>
-              <a:rPr lang="pl-PL" sz="1100" dirty="0" err="1">
+              <a:rPr lang="pl-PL" sz="1200" dirty="0" err="1">
                 <a:solidFill>
                   <a:srgbClr val="4EC9B0"/>
                 </a:solidFill>
@@ -16446,16 +16266,16 @@
               <a:t>numpy</a:t>
             </a:r>
             <a:r>
-              <a:rPr lang="pl-PL" sz="1100" dirty="0">
-                <a:solidFill>
-                  <a:srgbClr val="BBBEBF"/>
+              <a:rPr lang="pl-PL" sz="1200" dirty="0">
+                <a:solidFill>
+                  <a:srgbClr val="CCCCCC"/>
                 </a:solidFill>
                 <a:latin typeface="Consolas" panose="020B0609020204030204" pitchFamily="49" charset="0"/>
               </a:rPr>
               <a:t> </a:t>
             </a:r>
             <a:r>
-              <a:rPr lang="pl-PL" sz="1100" dirty="0">
+              <a:rPr lang="pl-PL" sz="1200" dirty="0">
                 <a:solidFill>
                   <a:srgbClr val="C586C0"/>
                 </a:solidFill>
@@ -16464,16 +16284,16 @@
               <a:t>as</a:t>
             </a:r>
             <a:r>
-              <a:rPr lang="pl-PL" sz="1100" dirty="0">
-                <a:solidFill>
-                  <a:srgbClr val="BBBEBF"/>
+              <a:rPr lang="pl-PL" sz="1200" dirty="0">
+                <a:solidFill>
+                  <a:srgbClr val="CCCCCC"/>
                 </a:solidFill>
                 <a:latin typeface="Consolas" panose="020B0609020204030204" pitchFamily="49" charset="0"/>
               </a:rPr>
               <a:t> </a:t>
             </a:r>
             <a:r>
-              <a:rPr lang="pl-PL" sz="1100" dirty="0" err="1">
+              <a:rPr lang="pl-PL" sz="1200" dirty="0" err="1">
                 <a:solidFill>
                   <a:srgbClr val="4EC9B0"/>
                 </a:solidFill>
@@ -16481,9 +16301,9 @@
               </a:rPr>
               <a:t>np</a:t>
             </a:r>
-            <a:endParaRPr lang="pl-PL" sz="1100" dirty="0">
+            <a:endParaRPr lang="pl-PL" sz="1200" dirty="0">
               <a:solidFill>
-                <a:srgbClr val="BBBEBF"/>
+                <a:srgbClr val="CCCCCC"/>
               </a:solidFill>
               <a:latin typeface="Consolas" panose="020B0609020204030204" pitchFamily="49" charset="0"/>
             </a:endParaRPr>
@@ -16495,42 +16315,42 @@
               </a:lnSpc>
             </a:pPr>
             <a:r>
-              <a:rPr lang="pl-PL" sz="1100" dirty="0">
-                <a:solidFill>
-                  <a:srgbClr val="BBBEBF"/>
+              <a:rPr lang="pl-PL" sz="1200" dirty="0">
+                <a:solidFill>
+                  <a:srgbClr val="CCCCCC"/>
                 </a:solidFill>
                 <a:latin typeface="Consolas" panose="020B0609020204030204" pitchFamily="49" charset="0"/>
               </a:rPr>
               <a:t/>
             </a:r>
             <a:br>
-              <a:rPr lang="pl-PL" sz="1100" dirty="0">
-                <a:solidFill>
-                  <a:srgbClr val="BBBEBF"/>
+              <a:rPr lang="pl-PL" sz="1200" dirty="0">
+                <a:solidFill>
+                  <a:srgbClr val="CCCCCC"/>
                 </a:solidFill>
                 <a:latin typeface="Consolas" panose="020B0609020204030204" pitchFamily="49" charset="0"/>
               </a:rPr>
             </a:br>
             <a:r>
-              <a:rPr lang="pl-PL" sz="1100" dirty="0" err="1">
-                <a:solidFill>
-                  <a:srgbClr val="FF7B72"/>
+              <a:rPr lang="pl-PL" sz="1200" dirty="0" err="1">
+                <a:solidFill>
+                  <a:srgbClr val="569CD6"/>
                 </a:solidFill>
                 <a:latin typeface="Consolas" panose="020B0609020204030204" pitchFamily="49" charset="0"/>
               </a:rPr>
               <a:t>class</a:t>
             </a:r>
             <a:r>
-              <a:rPr lang="pl-PL" sz="1100" dirty="0">
-                <a:solidFill>
-                  <a:srgbClr val="BBBEBF"/>
+              <a:rPr lang="pl-PL" sz="1200" dirty="0">
+                <a:solidFill>
+                  <a:srgbClr val="CCCCCC"/>
                 </a:solidFill>
                 <a:latin typeface="Consolas" panose="020B0609020204030204" pitchFamily="49" charset="0"/>
               </a:rPr>
               <a:t> </a:t>
             </a:r>
             <a:r>
-              <a:rPr lang="pl-PL" sz="1100" dirty="0">
+              <a:rPr lang="pl-PL" sz="1200" dirty="0">
                 <a:solidFill>
                   <a:srgbClr val="4EC9B0"/>
                 </a:solidFill>
@@ -16539,9 +16359,9 @@
               <a:t>EKF2D</a:t>
             </a:r>
             <a:r>
-              <a:rPr lang="pl-PL" sz="1100" dirty="0">
-                <a:solidFill>
-                  <a:srgbClr val="BBBEBF"/>
+              <a:rPr lang="pl-PL" sz="1200" dirty="0">
+                <a:solidFill>
+                  <a:srgbClr val="CCCCCC"/>
                 </a:solidFill>
                 <a:latin typeface="Consolas" panose="020B0609020204030204" pitchFamily="49" charset="0"/>
               </a:rPr>
@@ -16555,34 +16375,34 @@
               </a:lnSpc>
             </a:pPr>
             <a:r>
-              <a:rPr lang="pl-PL" sz="1100" dirty="0">
-                <a:solidFill>
-                  <a:srgbClr val="BBBEBF"/>
+              <a:rPr lang="pl-PL" sz="1200" dirty="0">
+                <a:solidFill>
+                  <a:srgbClr val="CCCCCC"/>
                 </a:solidFill>
                 <a:latin typeface="Consolas" panose="020B0609020204030204" pitchFamily="49" charset="0"/>
               </a:rPr>
               <a:t>    </a:t>
             </a:r>
             <a:r>
-              <a:rPr lang="pl-PL" sz="1100" dirty="0">
-                <a:solidFill>
-                  <a:srgbClr val="FF7B72"/>
+              <a:rPr lang="pl-PL" sz="1200" dirty="0">
+                <a:solidFill>
+                  <a:srgbClr val="569CD6"/>
                 </a:solidFill>
                 <a:latin typeface="Consolas" panose="020B0609020204030204" pitchFamily="49" charset="0"/>
               </a:rPr>
               <a:t>def</a:t>
             </a:r>
             <a:r>
-              <a:rPr lang="pl-PL" sz="1100" dirty="0">
-                <a:solidFill>
-                  <a:srgbClr val="BBBEBF"/>
+              <a:rPr lang="pl-PL" sz="1200" dirty="0">
+                <a:solidFill>
+                  <a:srgbClr val="CCCCCC"/>
                 </a:solidFill>
                 <a:latin typeface="Consolas" panose="020B0609020204030204" pitchFamily="49" charset="0"/>
               </a:rPr>
               <a:t> </a:t>
             </a:r>
             <a:r>
-              <a:rPr lang="pl-PL" sz="1100" dirty="0">
+              <a:rPr lang="pl-PL" sz="1200" dirty="0">
                 <a:solidFill>
                   <a:srgbClr val="DCDCAA"/>
                 </a:solidFill>
@@ -16591,7 +16411,7 @@
               <a:t>__</a:t>
             </a:r>
             <a:r>
-              <a:rPr lang="pl-PL" sz="1100" dirty="0" err="1">
+              <a:rPr lang="pl-PL" sz="1200" dirty="0" err="1">
                 <a:solidFill>
                   <a:srgbClr val="DCDCAA"/>
                 </a:solidFill>
@@ -16600,7 +16420,7 @@
               <a:t>init</a:t>
             </a:r>
             <a:r>
-              <a:rPr lang="pl-PL" sz="1100" dirty="0">
+              <a:rPr lang="pl-PL" sz="1200" dirty="0">
                 <a:solidFill>
                   <a:srgbClr val="DCDCAA"/>
                 </a:solidFill>
@@ -16609,27 +16429,27 @@
               <a:t>__</a:t>
             </a:r>
             <a:r>
-              <a:rPr lang="pl-PL" sz="1100" dirty="0">
-                <a:solidFill>
-                  <a:srgbClr val="BBBEBF"/>
+              <a:rPr lang="pl-PL" sz="1200" dirty="0">
+                <a:solidFill>
+                  <a:srgbClr val="CCCCCC"/>
                 </a:solidFill>
                 <a:latin typeface="Consolas" panose="020B0609020204030204" pitchFamily="49" charset="0"/>
               </a:rPr>
               <a:t>(</a:t>
             </a:r>
             <a:r>
-              <a:rPr lang="pl-PL" sz="1100" dirty="0" err="1">
-                <a:solidFill>
-                  <a:srgbClr val="C9D1D9"/>
+              <a:rPr lang="pl-PL" sz="1200" dirty="0" err="1">
+                <a:solidFill>
+                  <a:srgbClr val="9CDCFE"/>
                 </a:solidFill>
                 <a:latin typeface="Consolas" panose="020B0609020204030204" pitchFamily="49" charset="0"/>
               </a:rPr>
               <a:t>self</a:t>
             </a:r>
             <a:r>
-              <a:rPr lang="pl-PL" sz="1100" dirty="0">
-                <a:solidFill>
-                  <a:srgbClr val="BBBEBF"/>
+              <a:rPr lang="pl-PL" sz="1200" dirty="0">
+                <a:solidFill>
+                  <a:srgbClr val="CCCCCC"/>
                 </a:solidFill>
                 <a:latin typeface="Consolas" panose="020B0609020204030204" pitchFamily="49" charset="0"/>
               </a:rPr>
@@ -16643,52 +16463,43 @@
               </a:lnSpc>
             </a:pPr>
             <a:r>
-              <a:rPr lang="pl-PL" sz="1100" dirty="0">
-                <a:solidFill>
-                  <a:srgbClr val="BBBEBF"/>
+              <a:rPr lang="pl-PL" sz="1200" dirty="0">
+                <a:solidFill>
+                  <a:srgbClr val="CCCCCC"/>
                 </a:solidFill>
                 <a:latin typeface="Consolas" panose="020B0609020204030204" pitchFamily="49" charset="0"/>
               </a:rPr>
               <a:t>        </a:t>
             </a:r>
             <a:r>
-              <a:rPr lang="pl-PL" sz="1100" dirty="0" err="1">
-                <a:solidFill>
-                  <a:srgbClr val="C9D1D9"/>
+              <a:rPr lang="pl-PL" sz="1200" dirty="0" err="1">
+                <a:solidFill>
+                  <a:srgbClr val="569CD6"/>
                 </a:solidFill>
                 <a:latin typeface="Consolas" panose="020B0609020204030204" pitchFamily="49" charset="0"/>
               </a:rPr>
               <a:t>self</a:t>
             </a:r>
             <a:r>
-              <a:rPr lang="pl-PL" sz="1100" dirty="0" err="1">
-                <a:solidFill>
-                  <a:srgbClr val="BBBEBF"/>
-                </a:solidFill>
-                <a:latin typeface="Consolas" panose="020B0609020204030204" pitchFamily="49" charset="0"/>
-              </a:rPr>
-              <a:t>.</a:t>
-            </a:r>
-            <a:r>
-              <a:rPr lang="pl-PL" sz="1100" dirty="0" err="1">
-                <a:solidFill>
-                  <a:srgbClr val="C9D1D9"/>
-                </a:solidFill>
-                <a:latin typeface="Consolas" panose="020B0609020204030204" pitchFamily="49" charset="0"/>
-              </a:rPr>
-              <a:t>x</a:t>
-            </a:r>
-            <a:r>
-              <a:rPr lang="pl-PL" sz="1100" dirty="0">
-                <a:solidFill>
-                  <a:srgbClr val="BBBEBF"/>
+              <a:rPr lang="pl-PL" sz="1200" dirty="0" err="1">
+                <a:solidFill>
+                  <a:srgbClr val="CCCCCC"/>
+                </a:solidFill>
+                <a:latin typeface="Consolas" panose="020B0609020204030204" pitchFamily="49" charset="0"/>
+              </a:rPr>
+              <a:t>.x</a:t>
+            </a:r>
+            <a:r>
+              <a:rPr lang="pl-PL" sz="1200" dirty="0">
+                <a:solidFill>
+                  <a:srgbClr val="CCCCCC"/>
                 </a:solidFill>
                 <a:latin typeface="Consolas" panose="020B0609020204030204" pitchFamily="49" charset="0"/>
               </a:rPr>
               <a:t> </a:t>
             </a:r>
             <a:r>
-              <a:rPr lang="pl-PL" sz="1100" dirty="0">
+              <a:rPr lang="pl-PL" sz="1200" dirty="0">
                 <a:solidFill>
                   <a:srgbClr val="D4D4D4"/>
                 </a:solidFill>
@@ -16697,52 +16508,34 @@
               <a:t>=</a:t>
             </a:r>
             <a:r>
-              <a:rPr lang="pl-PL" sz="1100" dirty="0">
-                <a:solidFill>
-                  <a:srgbClr val="BBBEBF"/>
+              <a:rPr lang="pl-PL" sz="1200" dirty="0">
+                <a:solidFill>
+                  <a:srgbClr val="CCCCCC"/>
                 </a:solidFill>
                 <a:latin typeface="Consolas" panose="020B0609020204030204" pitchFamily="49" charset="0"/>
               </a:rPr>
               <a:t> </a:t>
             </a:r>
             <a:r>
-              <a:rPr lang="pl-PL" sz="1100" dirty="0" err="1">
-                <a:solidFill>
-                  <a:srgbClr val="4EC9B0"/>
-                </a:solidFill>
-                <a:latin typeface="Consolas" panose="020B0609020204030204" pitchFamily="49" charset="0"/>
-              </a:rPr>
-              <a:t>np</a:t>
-            </a:r>
-            <a:r>
-              <a:rPr lang="pl-PL" sz="1100" dirty="0" err="1">
-                <a:solidFill>
-                  <a:srgbClr val="BBBEBF"/>
-                </a:solidFill>
-                <a:latin typeface="Consolas" panose="020B0609020204030204" pitchFamily="49" charset="0"/>
-              </a:rPr>
-              <a:t>.</a:t>
-            </a:r>
-            <a:r>
-              <a:rPr lang="pl-PL" sz="1100" dirty="0" err="1">
-                <a:solidFill>
-                  <a:srgbClr val="D2A8FF"/>
-                </a:solidFill>
-                <a:latin typeface="Consolas" panose="020B0609020204030204" pitchFamily="49" charset="0"/>
-              </a:rPr>
-              <a:t>zeros</a:t>
-            </a:r>
-            <a:r>
-              <a:rPr lang="pl-PL" sz="1100" dirty="0">
-                <a:solidFill>
-                  <a:srgbClr val="BBBEBF"/>
+              <a:rPr lang="pl-PL" sz="1200" dirty="0" err="1">
+                <a:solidFill>
+                  <a:srgbClr val="CCCCCC"/>
+                </a:solidFill>
+                <a:latin typeface="Consolas" panose="020B0609020204030204" pitchFamily="49" charset="0"/>
+              </a:rPr>
+              <a:t>np.zeros</a:t>
+            </a:r>
+            <a:r>
+              <a:rPr lang="pl-PL" sz="1200" dirty="0">
+                <a:solidFill>
+                  <a:srgbClr val="CCCCCC"/>
                 </a:solidFill>
                 <a:latin typeface="Consolas" panose="020B0609020204030204" pitchFamily="49" charset="0"/>
               </a:rPr>
               <a:t>(</a:t>
             </a:r>
             <a:r>
-              <a:rPr lang="pl-PL" sz="1100" dirty="0">
+              <a:rPr lang="pl-PL" sz="1200" dirty="0">
                 <a:solidFill>
                   <a:srgbClr val="B5CEA8"/>
                 </a:solidFill>
@@ -16751,44 +16544,44 @@
               <a:t>3</a:t>
             </a:r>
             <a:r>
-              <a:rPr lang="pl-PL" sz="1100" dirty="0">
-                <a:solidFill>
-                  <a:srgbClr val="BBBEBF"/>
+              <a:rPr lang="pl-PL" sz="1200" dirty="0">
+                <a:solidFill>
+                  <a:srgbClr val="CCCCCC"/>
                 </a:solidFill>
                 <a:latin typeface="Consolas" panose="020B0609020204030204" pitchFamily="49" charset="0"/>
               </a:rPr>
               <a:t>)          </a:t>
             </a:r>
             <a:r>
-              <a:rPr lang="pl-PL" sz="1100" dirty="0">
-                <a:solidFill>
-                  <a:srgbClr val="8B949E"/>
+              <a:rPr lang="pl-PL" sz="1200" dirty="0">
+                <a:solidFill>
+                  <a:srgbClr val="6A9955"/>
                 </a:solidFill>
                 <a:latin typeface="Consolas" panose="020B0609020204030204" pitchFamily="49" charset="0"/>
               </a:rPr>
               <a:t># [x, y, </a:t>
             </a:r>
             <a:r>
-              <a:rPr lang="pl-PL" sz="1100" dirty="0" err="1">
-                <a:solidFill>
-                  <a:srgbClr val="8B949E"/>
+              <a:rPr lang="pl-PL" sz="1200" dirty="0" err="1">
+                <a:solidFill>
+                  <a:srgbClr val="6A9955"/>
                 </a:solidFill>
                 <a:latin typeface="Consolas" panose="020B0609020204030204" pitchFamily="49" charset="0"/>
               </a:rPr>
               <a:t>yaw</a:t>
             </a:r>
             <a:r>
-              <a:rPr lang="pl-PL" sz="1100" dirty="0">
-                <a:solidFill>
-                  <a:srgbClr val="8B949E"/>
+              <a:rPr lang="pl-PL" sz="1200" dirty="0">
+                <a:solidFill>
+                  <a:srgbClr val="6A9955"/>
                 </a:solidFill>
                 <a:latin typeface="Consolas" panose="020B0609020204030204" pitchFamily="49" charset="0"/>
               </a:rPr>
               <a:t>]</a:t>
             </a:r>
-            <a:endParaRPr lang="pl-PL" sz="1100" dirty="0">
+            <a:endParaRPr lang="pl-PL" sz="1200" dirty="0">
               <a:solidFill>
-                <a:srgbClr val="BBBEBF"/>
+                <a:srgbClr val="CCCCCC"/>
               </a:solidFill>
               <a:latin typeface="Consolas" panose="020B0609020204030204" pitchFamily="49" charset="0"/>
             </a:endParaRPr>
@@ -16800,52 +16593,43 @@
               </a:lnSpc>
             </a:pPr>
             <a:r>
-              <a:rPr lang="pl-PL" sz="1100" dirty="0">
-                <a:solidFill>
-                  <a:srgbClr val="BBBEBF"/>
+              <a:rPr lang="pl-PL" sz="1200" dirty="0">
+                <a:solidFill>
+                  <a:srgbClr val="CCCCCC"/>
                 </a:solidFill>
                 <a:latin typeface="Consolas" panose="020B0609020204030204" pitchFamily="49" charset="0"/>
               </a:rPr>
               <a:t>        </a:t>
             </a:r>
             <a:r>
-              <a:rPr lang="pl-PL" sz="1100" dirty="0" err="1">
-                <a:solidFill>
-                  <a:srgbClr val="C9D1D9"/>
+              <a:rPr lang="pl-PL" sz="1200" dirty="0" err="1">
+                <a:solidFill>
+                  <a:srgbClr val="569CD6"/>
                 </a:solidFill>
                 <a:latin typeface="Consolas" panose="020B0609020204030204" pitchFamily="49" charset="0"/>
               </a:rPr>
               <a:t>self</a:t>
             </a:r>
             <a:r>
-              <a:rPr lang="pl-PL" sz="1100" dirty="0" err="1">
-                <a:solidFill>
-                  <a:srgbClr val="BBBEBF"/>
-                </a:solidFill>
-                <a:latin typeface="Consolas" panose="020B0609020204030204" pitchFamily="49" charset="0"/>
-              </a:rPr>
-              <a:t>.</a:t>
-            </a:r>
-            <a:r>
-              <a:rPr lang="pl-PL" sz="1100" dirty="0" err="1">
-                <a:solidFill>
-                  <a:srgbClr val="C9D1D9"/>
-                </a:solidFill>
-                <a:latin typeface="Consolas" panose="020B0609020204030204" pitchFamily="49" charset="0"/>
-              </a:rPr>
-              <a:t>P</a:t>
-            </a:r>
-            <a:r>
-              <a:rPr lang="pl-PL" sz="1100" dirty="0">
-                <a:solidFill>
-                  <a:srgbClr val="BBBEBF"/>
+              <a:rPr lang="pl-PL" sz="1200" dirty="0" err="1">
+                <a:solidFill>
+                  <a:srgbClr val="CCCCCC"/>
+                </a:solidFill>
+                <a:latin typeface="Consolas" panose="020B0609020204030204" pitchFamily="49" charset="0"/>
+              </a:rPr>
+              <a:t>.P</a:t>
+            </a:r>
+            <a:r>
+              <a:rPr lang="pl-PL" sz="1200" dirty="0">
+                <a:solidFill>
+                  <a:srgbClr val="CCCCCC"/>
                 </a:solidFill>
                 <a:latin typeface="Consolas" panose="020B0609020204030204" pitchFamily="49" charset="0"/>
               </a:rPr>
               <a:t> </a:t>
             </a:r>
             <a:r>
-              <a:rPr lang="pl-PL" sz="1100" dirty="0">
+              <a:rPr lang="pl-PL" sz="1200" dirty="0">
                 <a:solidFill>
                   <a:srgbClr val="D4D4D4"/>
                 </a:solidFill>
@@ -16854,52 +16638,34 @@
               <a:t>=</a:t>
             </a:r>
             <a:r>
-              <a:rPr lang="pl-PL" sz="1100" dirty="0">
-                <a:solidFill>
-                  <a:srgbClr val="BBBEBF"/>
+              <a:rPr lang="pl-PL" sz="1200" dirty="0">
+                <a:solidFill>
+                  <a:srgbClr val="CCCCCC"/>
                 </a:solidFill>
                 <a:latin typeface="Consolas" panose="020B0609020204030204" pitchFamily="49" charset="0"/>
               </a:rPr>
               <a:t> </a:t>
             </a:r>
             <a:r>
-              <a:rPr lang="pl-PL" sz="1100" dirty="0" err="1">
-                <a:solidFill>
-                  <a:srgbClr val="4EC9B0"/>
-                </a:solidFill>
-                <a:latin typeface="Consolas" panose="020B0609020204030204" pitchFamily="49" charset="0"/>
-              </a:rPr>
-              <a:t>np</a:t>
-            </a:r>
-            <a:r>
-              <a:rPr lang="pl-PL" sz="1100" dirty="0" err="1">
-                <a:solidFill>
-                  <a:srgbClr val="BBBEBF"/>
-                </a:solidFill>
-                <a:latin typeface="Consolas" panose="020B0609020204030204" pitchFamily="49" charset="0"/>
-              </a:rPr>
-              <a:t>.</a:t>
-            </a:r>
-            <a:r>
-              <a:rPr lang="pl-PL" sz="1100" dirty="0" err="1">
-                <a:solidFill>
-                  <a:srgbClr val="D2A8FF"/>
-                </a:solidFill>
-                <a:latin typeface="Consolas" panose="020B0609020204030204" pitchFamily="49" charset="0"/>
-              </a:rPr>
-              <a:t>eye</a:t>
-            </a:r>
-            <a:r>
-              <a:rPr lang="pl-PL" sz="1100" dirty="0">
-                <a:solidFill>
-                  <a:srgbClr val="BBBEBF"/>
+              <a:rPr lang="pl-PL" sz="1200" dirty="0" err="1">
+                <a:solidFill>
+                  <a:srgbClr val="CCCCCC"/>
+                </a:solidFill>
+                <a:latin typeface="Consolas" panose="020B0609020204030204" pitchFamily="49" charset="0"/>
+              </a:rPr>
+              <a:t>np.eye</a:t>
+            </a:r>
+            <a:r>
+              <a:rPr lang="pl-PL" sz="1200" dirty="0">
+                <a:solidFill>
+                  <a:srgbClr val="CCCCCC"/>
                 </a:solidFill>
                 <a:latin typeface="Consolas" panose="020B0609020204030204" pitchFamily="49" charset="0"/>
               </a:rPr>
               <a:t>(</a:t>
             </a:r>
             <a:r>
-              <a:rPr lang="pl-PL" sz="1100" dirty="0">
+              <a:rPr lang="pl-PL" sz="1200" dirty="0">
                 <a:solidFill>
                   <a:srgbClr val="B5CEA8"/>
                 </a:solidFill>
@@ -16908,34 +16674,34 @@
               <a:t>3</a:t>
             </a:r>
             <a:r>
-              <a:rPr lang="pl-PL" sz="1100" dirty="0">
-                <a:solidFill>
-                  <a:srgbClr val="BBBEBF"/>
+              <a:rPr lang="pl-PL" sz="1200" dirty="0">
+                <a:solidFill>
+                  <a:srgbClr val="CCCCCC"/>
                 </a:solidFill>
                 <a:latin typeface="Consolas" panose="020B0609020204030204" pitchFamily="49" charset="0"/>
               </a:rPr>
               <a:t>) </a:t>
             </a:r>
             <a:r>
-              <a:rPr lang="pl-PL" sz="1100" dirty="0">
-                <a:solidFill>
-                  <a:srgbClr val="DCDCAA"/>
+              <a:rPr lang="pl-PL" sz="1200" dirty="0">
+                <a:solidFill>
+                  <a:srgbClr val="D4D4D4"/>
                 </a:solidFill>
                 <a:latin typeface="Consolas" panose="020B0609020204030204" pitchFamily="49" charset="0"/>
               </a:rPr>
               <a:t>*</a:t>
             </a:r>
             <a:r>
-              <a:rPr lang="pl-PL" sz="1100" dirty="0">
-                <a:solidFill>
-                  <a:srgbClr val="BBBEBF"/>
+              <a:rPr lang="pl-PL" sz="1200" dirty="0">
+                <a:solidFill>
+                  <a:srgbClr val="CCCCCC"/>
                 </a:solidFill>
                 <a:latin typeface="Consolas" panose="020B0609020204030204" pitchFamily="49" charset="0"/>
               </a:rPr>
               <a:t> </a:t>
             </a:r>
             <a:r>
-              <a:rPr lang="pl-PL" sz="1100" dirty="0">
+              <a:rPr lang="pl-PL" sz="1200" dirty="0">
                 <a:solidFill>
                   <a:srgbClr val="B5CEA8"/>
                 </a:solidFill>
@@ -16944,35 +16710,26 @@
               <a:t>0.5</a:t>
             </a:r>
             <a:r>
-              <a:rPr lang="pl-PL" sz="1100" dirty="0">
-                <a:solidFill>
-                  <a:srgbClr val="BBBEBF"/>
+              <a:rPr lang="pl-PL" sz="1200" dirty="0">
+                <a:solidFill>
+                  <a:srgbClr val="CCCCCC"/>
                 </a:solidFill>
                 <a:latin typeface="Consolas" panose="020B0609020204030204" pitchFamily="49" charset="0"/>
               </a:rPr>
               <a:t>      </a:t>
             </a:r>
             <a:r>
-              <a:rPr lang="pl-PL" sz="1100" dirty="0">
-                <a:solidFill>
-                  <a:srgbClr val="8B949E"/>
-                </a:solidFill>
-                <a:latin typeface="Consolas" panose="020B0609020204030204" pitchFamily="49" charset="0"/>
-              </a:rPr>
-              <a:t># kowariancja </a:t>
-            </a:r>
-            <a:r>
-              <a:rPr lang="pl-PL" sz="1100" dirty="0" smtClean="0">
-                <a:solidFill>
-                  <a:srgbClr val="8B949E"/>
-                </a:solidFill>
-                <a:latin typeface="Consolas" panose="020B0609020204030204" pitchFamily="49" charset="0"/>
-              </a:rPr>
-              <a:t>początkowa</a:t>
-            </a:r>
-            <a:endParaRPr lang="pl-PL" sz="1100" dirty="0">
+              <a:rPr lang="pl-PL" sz="1200" dirty="0">
+                <a:solidFill>
+                  <a:srgbClr val="6A9955"/>
+                </a:solidFill>
+                <a:latin typeface="Consolas" panose="020B0609020204030204" pitchFamily="49" charset="0"/>
+              </a:rPr>
+              <a:t># kowariancja początkowa</a:t>
+            </a:r>
+            <a:endParaRPr lang="pl-PL" sz="1200" dirty="0">
               <a:solidFill>
-                <a:srgbClr val="BBBEBF"/>
+                <a:srgbClr val="CCCCCC"/>
               </a:solidFill>
               <a:latin typeface="Consolas" panose="020B0609020204030204" pitchFamily="49" charset="0"/>
             </a:endParaRPr>
@@ -16984,52 +16741,43 @@
               </a:lnSpc>
             </a:pPr>
             <a:r>
-              <a:rPr lang="pl-PL" sz="1100" dirty="0">
-                <a:solidFill>
-                  <a:srgbClr val="BBBEBF"/>
+              <a:rPr lang="pl-PL" sz="1200" dirty="0">
+                <a:solidFill>
+                  <a:srgbClr val="CCCCCC"/>
                 </a:solidFill>
                 <a:latin typeface="Consolas" panose="020B0609020204030204" pitchFamily="49" charset="0"/>
               </a:rPr>
               <a:t>        </a:t>
             </a:r>
             <a:r>
-              <a:rPr lang="pl-PL" sz="1100" dirty="0" err="1">
-                <a:solidFill>
-                  <a:srgbClr val="C9D1D9"/>
+              <a:rPr lang="pl-PL" sz="1200" dirty="0" err="1">
+                <a:solidFill>
+                  <a:srgbClr val="569CD6"/>
                 </a:solidFill>
                 <a:latin typeface="Consolas" panose="020B0609020204030204" pitchFamily="49" charset="0"/>
               </a:rPr>
               <a:t>self</a:t>
             </a:r>
             <a:r>
-              <a:rPr lang="pl-PL" sz="1100" dirty="0" err="1">
-                <a:solidFill>
-                  <a:srgbClr val="BBBEBF"/>
-                </a:solidFill>
-                <a:latin typeface="Consolas" panose="020B0609020204030204" pitchFamily="49" charset="0"/>
-              </a:rPr>
-              <a:t>.</a:t>
-            </a:r>
-            <a:r>
-              <a:rPr lang="pl-PL" sz="1100" dirty="0" err="1">
-                <a:solidFill>
-                  <a:srgbClr val="C9D1D9"/>
-                </a:solidFill>
-                <a:latin typeface="Consolas" panose="020B0609020204030204" pitchFamily="49" charset="0"/>
-              </a:rPr>
-              <a:t>Q</a:t>
-            </a:r>
-            <a:r>
-              <a:rPr lang="pl-PL" sz="1100" dirty="0">
-                <a:solidFill>
-                  <a:srgbClr val="BBBEBF"/>
+              <a:rPr lang="pl-PL" sz="1200" dirty="0" err="1">
+                <a:solidFill>
+                  <a:srgbClr val="CCCCCC"/>
+                </a:solidFill>
+                <a:latin typeface="Consolas" panose="020B0609020204030204" pitchFamily="49" charset="0"/>
+              </a:rPr>
+              <a:t>.Q</a:t>
+            </a:r>
+            <a:r>
+              <a:rPr lang="pl-PL" sz="1200" dirty="0">
+                <a:solidFill>
+                  <a:srgbClr val="CCCCCC"/>
                 </a:solidFill>
                 <a:latin typeface="Consolas" panose="020B0609020204030204" pitchFamily="49" charset="0"/>
               </a:rPr>
               <a:t> </a:t>
             </a:r>
             <a:r>
-              <a:rPr lang="pl-PL" sz="1100" dirty="0">
+              <a:rPr lang="pl-PL" sz="1200" dirty="0">
                 <a:solidFill>
                   <a:srgbClr val="D4D4D4"/>
                 </a:solidFill>
@@ -17038,52 +16786,34 @@
               <a:t>=</a:t>
             </a:r>
             <a:r>
-              <a:rPr lang="pl-PL" sz="1100" dirty="0">
-                <a:solidFill>
-                  <a:srgbClr val="BBBEBF"/>
+              <a:rPr lang="pl-PL" sz="1200" dirty="0">
+                <a:solidFill>
+                  <a:srgbClr val="CCCCCC"/>
                 </a:solidFill>
                 <a:latin typeface="Consolas" panose="020B0609020204030204" pitchFamily="49" charset="0"/>
               </a:rPr>
               <a:t> </a:t>
             </a:r>
             <a:r>
-              <a:rPr lang="pl-PL" sz="1100" dirty="0" err="1">
-                <a:solidFill>
-                  <a:srgbClr val="4EC9B0"/>
-                </a:solidFill>
-                <a:latin typeface="Consolas" panose="020B0609020204030204" pitchFamily="49" charset="0"/>
-              </a:rPr>
-              <a:t>np</a:t>
-            </a:r>
-            <a:r>
-              <a:rPr lang="pl-PL" sz="1100" dirty="0" err="1">
-                <a:solidFill>
-                  <a:srgbClr val="BBBEBF"/>
-                </a:solidFill>
-                <a:latin typeface="Consolas" panose="020B0609020204030204" pitchFamily="49" charset="0"/>
-              </a:rPr>
-              <a:t>.</a:t>
-            </a:r>
-            <a:r>
-              <a:rPr lang="pl-PL" sz="1100" dirty="0" err="1">
-                <a:solidFill>
-                  <a:srgbClr val="D2A8FF"/>
-                </a:solidFill>
-                <a:latin typeface="Consolas" panose="020B0609020204030204" pitchFamily="49" charset="0"/>
-              </a:rPr>
-              <a:t>diag</a:t>
-            </a:r>
-            <a:r>
-              <a:rPr lang="pl-PL" sz="1100" dirty="0">
-                <a:solidFill>
-                  <a:srgbClr val="BBBEBF"/>
+              <a:rPr lang="pl-PL" sz="1200" dirty="0" err="1">
+                <a:solidFill>
+                  <a:srgbClr val="CCCCCC"/>
+                </a:solidFill>
+                <a:latin typeface="Consolas" panose="020B0609020204030204" pitchFamily="49" charset="0"/>
+              </a:rPr>
+              <a:t>np.diag</a:t>
+            </a:r>
+            <a:r>
+              <a:rPr lang="pl-PL" sz="1200" dirty="0">
+                <a:solidFill>
+                  <a:srgbClr val="CCCCCC"/>
                 </a:solidFill>
                 <a:latin typeface="Consolas" panose="020B0609020204030204" pitchFamily="49" charset="0"/>
               </a:rPr>
               <a:t>([</a:t>
             </a:r>
             <a:r>
-              <a:rPr lang="pl-PL" sz="1100" dirty="0">
+              <a:rPr lang="pl-PL" sz="1200" dirty="0">
                 <a:solidFill>
                   <a:srgbClr val="B5CEA8"/>
                 </a:solidFill>
@@ -17092,16 +16822,16 @@
               <a:t>0.01</a:t>
             </a:r>
             <a:r>
-              <a:rPr lang="pl-PL" sz="1100" dirty="0">
-                <a:solidFill>
-                  <a:srgbClr val="BBBEBF"/>
+              <a:rPr lang="pl-PL" sz="1200" dirty="0">
+                <a:solidFill>
+                  <a:srgbClr val="CCCCCC"/>
                 </a:solidFill>
                 <a:latin typeface="Consolas" panose="020B0609020204030204" pitchFamily="49" charset="0"/>
               </a:rPr>
               <a:t>, </a:t>
             </a:r>
             <a:r>
-              <a:rPr lang="pl-PL" sz="1100" dirty="0">
+              <a:rPr lang="pl-PL" sz="1200" dirty="0">
                 <a:solidFill>
                   <a:srgbClr val="B5CEA8"/>
                 </a:solidFill>
@@ -17110,16 +16840,16 @@
               <a:t>0.01</a:t>
             </a:r>
             <a:r>
-              <a:rPr lang="pl-PL" sz="1100" dirty="0">
-                <a:solidFill>
-                  <a:srgbClr val="BBBEBF"/>
+              <a:rPr lang="pl-PL" sz="1200" dirty="0">
+                <a:solidFill>
+                  <a:srgbClr val="CCCCCC"/>
                 </a:solidFill>
                 <a:latin typeface="Consolas" panose="020B0609020204030204" pitchFamily="49" charset="0"/>
               </a:rPr>
               <a:t>, </a:t>
             </a:r>
             <a:r>
-              <a:rPr lang="pl-PL" sz="1100" dirty="0">
+              <a:rPr lang="pl-PL" sz="1200" dirty="0">
                 <a:solidFill>
                   <a:srgbClr val="B5CEA8"/>
                 </a:solidFill>
@@ -17128,26 +16858,26 @@
               <a:t>0.005</a:t>
             </a:r>
             <a:r>
-              <a:rPr lang="pl-PL" sz="1100" dirty="0">
-                <a:solidFill>
-                  <a:srgbClr val="BBBEBF"/>
+              <a:rPr lang="pl-PL" sz="1200" dirty="0">
+                <a:solidFill>
+                  <a:srgbClr val="CCCCCC"/>
                 </a:solidFill>
                 <a:latin typeface="Consolas" panose="020B0609020204030204" pitchFamily="49" charset="0"/>
               </a:rPr>
               <a:t>])  </a:t>
             </a:r>
             <a:r>
-              <a:rPr lang="pl-PL" sz="1100" dirty="0">
-                <a:solidFill>
-                  <a:srgbClr val="8B949E"/>
+              <a:rPr lang="pl-PL" sz="1200" dirty="0">
+                <a:solidFill>
+                  <a:srgbClr val="6A9955"/>
                 </a:solidFill>
                 <a:latin typeface="Consolas" panose="020B0609020204030204" pitchFamily="49" charset="0"/>
               </a:rPr>
               <a:t># szum procesu</a:t>
             </a:r>
-            <a:endParaRPr lang="pl-PL" sz="1100" dirty="0">
+            <a:endParaRPr lang="pl-PL" sz="1200" dirty="0">
               <a:solidFill>
-                <a:srgbClr val="BBBEBF"/>
+                <a:srgbClr val="CCCCCC"/>
               </a:solidFill>
               <a:latin typeface="Consolas" panose="020B0609020204030204" pitchFamily="49" charset="0"/>
             </a:endParaRPr>
@@ -17159,52 +16889,43 @@
               </a:lnSpc>
             </a:pPr>
             <a:r>
-              <a:rPr lang="pl-PL" sz="1100" dirty="0">
-                <a:solidFill>
-                  <a:srgbClr val="BBBEBF"/>
+              <a:rPr lang="pl-PL" sz="1200" dirty="0">
+                <a:solidFill>
+                  <a:srgbClr val="CCCCCC"/>
                 </a:solidFill>
                 <a:latin typeface="Consolas" panose="020B0609020204030204" pitchFamily="49" charset="0"/>
               </a:rPr>
               <a:t>        </a:t>
             </a:r>
             <a:r>
-              <a:rPr lang="pl-PL" sz="1100" dirty="0" err="1">
-                <a:solidFill>
-                  <a:srgbClr val="C9D1D9"/>
+              <a:rPr lang="pl-PL" sz="1200" dirty="0" err="1">
+                <a:solidFill>
+                  <a:srgbClr val="569CD6"/>
                 </a:solidFill>
                 <a:latin typeface="Consolas" panose="020B0609020204030204" pitchFamily="49" charset="0"/>
               </a:rPr>
               <a:t>self</a:t>
             </a:r>
             <a:r>
-              <a:rPr lang="pl-PL" sz="1100" dirty="0" err="1">
-                <a:solidFill>
-                  <a:srgbClr val="BBBEBF"/>
-                </a:solidFill>
-                <a:latin typeface="Consolas" panose="020B0609020204030204" pitchFamily="49" charset="0"/>
-              </a:rPr>
-              <a:t>.</a:t>
-            </a:r>
-            <a:r>
-              <a:rPr lang="pl-PL" sz="1100" dirty="0" err="1">
-                <a:solidFill>
-                  <a:srgbClr val="C9D1D9"/>
-                </a:solidFill>
-                <a:latin typeface="Consolas" panose="020B0609020204030204" pitchFamily="49" charset="0"/>
-              </a:rPr>
-              <a:t>R</a:t>
-            </a:r>
-            <a:r>
-              <a:rPr lang="pl-PL" sz="1100" dirty="0">
-                <a:solidFill>
-                  <a:srgbClr val="BBBEBF"/>
+              <a:rPr lang="pl-PL" sz="1200" dirty="0" err="1">
+                <a:solidFill>
+                  <a:srgbClr val="CCCCCC"/>
+                </a:solidFill>
+                <a:latin typeface="Consolas" panose="020B0609020204030204" pitchFamily="49" charset="0"/>
+              </a:rPr>
+              <a:t>.R</a:t>
+            </a:r>
+            <a:r>
+              <a:rPr lang="pl-PL" sz="1200" dirty="0">
+                <a:solidFill>
+                  <a:srgbClr val="CCCCCC"/>
                 </a:solidFill>
                 <a:latin typeface="Consolas" panose="020B0609020204030204" pitchFamily="49" charset="0"/>
               </a:rPr>
               <a:t> </a:t>
             </a:r>
             <a:r>
-              <a:rPr lang="pl-PL" sz="1100" dirty="0">
+              <a:rPr lang="pl-PL" sz="1200" dirty="0">
                 <a:solidFill>
                   <a:srgbClr val="D4D4D4"/>
                 </a:solidFill>
@@ -17213,52 +16934,34 @@
               <a:t>=</a:t>
             </a:r>
             <a:r>
-              <a:rPr lang="pl-PL" sz="1100" dirty="0">
-                <a:solidFill>
-                  <a:srgbClr val="BBBEBF"/>
+              <a:rPr lang="pl-PL" sz="1200" dirty="0">
+                <a:solidFill>
+                  <a:srgbClr val="CCCCCC"/>
                 </a:solidFill>
                 <a:latin typeface="Consolas" panose="020B0609020204030204" pitchFamily="49" charset="0"/>
               </a:rPr>
               <a:t> </a:t>
             </a:r>
             <a:r>
-              <a:rPr lang="pl-PL" sz="1100" dirty="0" err="1">
-                <a:solidFill>
-                  <a:srgbClr val="4EC9B0"/>
-                </a:solidFill>
-                <a:latin typeface="Consolas" panose="020B0609020204030204" pitchFamily="49" charset="0"/>
-              </a:rPr>
-              <a:t>np</a:t>
-            </a:r>
-            <a:r>
-              <a:rPr lang="pl-PL" sz="1100" dirty="0" err="1">
-                <a:solidFill>
-                  <a:srgbClr val="BBBEBF"/>
-                </a:solidFill>
-                <a:latin typeface="Consolas" panose="020B0609020204030204" pitchFamily="49" charset="0"/>
-              </a:rPr>
-              <a:t>.</a:t>
-            </a:r>
-            <a:r>
-              <a:rPr lang="pl-PL" sz="1100" dirty="0" err="1">
-                <a:solidFill>
-                  <a:srgbClr val="D2A8FF"/>
-                </a:solidFill>
-                <a:latin typeface="Consolas" panose="020B0609020204030204" pitchFamily="49" charset="0"/>
-              </a:rPr>
-              <a:t>diag</a:t>
-            </a:r>
-            <a:r>
-              <a:rPr lang="pl-PL" sz="1100" dirty="0">
-                <a:solidFill>
-                  <a:srgbClr val="BBBEBF"/>
+              <a:rPr lang="pl-PL" sz="1200" dirty="0" err="1">
+                <a:solidFill>
+                  <a:srgbClr val="CCCCCC"/>
+                </a:solidFill>
+                <a:latin typeface="Consolas" panose="020B0609020204030204" pitchFamily="49" charset="0"/>
+              </a:rPr>
+              <a:t>np.diag</a:t>
+            </a:r>
+            <a:r>
+              <a:rPr lang="pl-PL" sz="1200" dirty="0">
+                <a:solidFill>
+                  <a:srgbClr val="CCCCCC"/>
                 </a:solidFill>
                 <a:latin typeface="Consolas" panose="020B0609020204030204" pitchFamily="49" charset="0"/>
               </a:rPr>
               <a:t>([</a:t>
             </a:r>
             <a:r>
-              <a:rPr lang="pl-PL" sz="1100" dirty="0">
+              <a:rPr lang="pl-PL" sz="1200" dirty="0">
                 <a:solidFill>
                   <a:srgbClr val="B5CEA8"/>
                 </a:solidFill>
@@ -17267,16 +16970,16 @@
               <a:t>0.1</a:t>
             </a:r>
             <a:r>
-              <a:rPr lang="pl-PL" sz="1100" dirty="0">
-                <a:solidFill>
-                  <a:srgbClr val="BBBEBF"/>
+              <a:rPr lang="pl-PL" sz="1200" dirty="0">
+                <a:solidFill>
+                  <a:srgbClr val="CCCCCC"/>
                 </a:solidFill>
                 <a:latin typeface="Consolas" panose="020B0609020204030204" pitchFamily="49" charset="0"/>
               </a:rPr>
               <a:t>, </a:t>
             </a:r>
             <a:r>
-              <a:rPr lang="pl-PL" sz="1100" dirty="0">
+              <a:rPr lang="pl-PL" sz="1200" dirty="0">
                 <a:solidFill>
                   <a:srgbClr val="B5CEA8"/>
                 </a:solidFill>
@@ -17285,26 +16988,26 @@
               <a:t>0.1</a:t>
             </a:r>
             <a:r>
-              <a:rPr lang="pl-PL" sz="1100" dirty="0">
-                <a:solidFill>
-                  <a:srgbClr val="BBBEBF"/>
+              <a:rPr lang="pl-PL" sz="1200" dirty="0">
+                <a:solidFill>
+                  <a:srgbClr val="CCCCCC"/>
                 </a:solidFill>
                 <a:latin typeface="Consolas" panose="020B0609020204030204" pitchFamily="49" charset="0"/>
               </a:rPr>
               <a:t>])  </a:t>
             </a:r>
             <a:r>
-              <a:rPr lang="pl-PL" sz="1100" dirty="0">
-                <a:solidFill>
-                  <a:srgbClr val="8B949E"/>
+              <a:rPr lang="pl-PL" sz="1200" dirty="0">
+                <a:solidFill>
+                  <a:srgbClr val="6A9955"/>
                 </a:solidFill>
                 <a:latin typeface="Consolas" panose="020B0609020204030204" pitchFamily="49" charset="0"/>
               </a:rPr>
               <a:t># szum pomiaru (x, y)</a:t>
             </a:r>
-            <a:endParaRPr lang="pl-PL" sz="1100" dirty="0">
+            <a:endParaRPr lang="pl-PL" sz="1200" dirty="0">
               <a:solidFill>
-                <a:srgbClr val="BBBEBF"/>
+                <a:srgbClr val="CCCCCC"/>
               </a:solidFill>
               <a:latin typeface="Consolas" panose="020B0609020204030204" pitchFamily="49" charset="0"/>
             </a:endParaRPr>
@@ -17316,105 +17019,105 @@
               </a:lnSpc>
             </a:pPr>
             <a:r>
-              <a:rPr lang="pl-PL" sz="1100" dirty="0">
-                <a:solidFill>
-                  <a:srgbClr val="BBBEBF"/>
+              <a:rPr lang="pl-PL" sz="1200" dirty="0">
+                <a:solidFill>
+                  <a:srgbClr val="CCCCCC"/>
                 </a:solidFill>
                 <a:latin typeface="Consolas" panose="020B0609020204030204" pitchFamily="49" charset="0"/>
               </a:rPr>
               <a:t/>
             </a:r>
             <a:br>
-              <a:rPr lang="pl-PL" sz="1100" dirty="0">
-                <a:solidFill>
-                  <a:srgbClr val="BBBEBF"/>
+              <a:rPr lang="pl-PL" sz="1200" dirty="0">
+                <a:solidFill>
+                  <a:srgbClr val="CCCCCC"/>
                 </a:solidFill>
                 <a:latin typeface="Consolas" panose="020B0609020204030204" pitchFamily="49" charset="0"/>
               </a:rPr>
             </a:br>
             <a:r>
-              <a:rPr lang="pl-PL" sz="1100" dirty="0">
-                <a:solidFill>
-                  <a:srgbClr val="BBBEBF"/>
-                </a:solidFill>
-                <a:latin typeface="Consolas" panose="020B0609020204030204" pitchFamily="49" charset="0"/>
-              </a:rPr>
-              <a:t>    </a:t>
-            </a:r>
-            <a:r>
-              <a:rPr lang="pl-PL" sz="1100" dirty="0">
-                <a:solidFill>
-                  <a:srgbClr val="FF7B72"/>
+              <a:rPr lang="pl-PL" sz="1200" dirty="0">
+                <a:solidFill>
+                  <a:srgbClr val="CCCCCC"/>
+                </a:solidFill>
+                <a:latin typeface="Consolas" panose="020B0609020204030204" pitchFamily="49" charset="0"/>
+              </a:rPr>
+              <a:t>   </a:t>
+            </a:r>
+            <a:r>
+              <a:rPr lang="pl-PL" sz="1200" dirty="0">
+                <a:solidFill>
+                  <a:srgbClr val="569CD6"/>
                 </a:solidFill>
                 <a:latin typeface="Consolas" panose="020B0609020204030204" pitchFamily="49" charset="0"/>
               </a:rPr>
               <a:t>def</a:t>
             </a:r>
             <a:r>
-              <a:rPr lang="pl-PL" sz="1100" dirty="0">
-                <a:solidFill>
-                  <a:srgbClr val="BBBEBF"/>
+              <a:rPr lang="pl-PL" sz="1200" dirty="0">
+                <a:solidFill>
+                  <a:srgbClr val="CCCCCC"/>
                 </a:solidFill>
                 <a:latin typeface="Consolas" panose="020B0609020204030204" pitchFamily="49" charset="0"/>
               </a:rPr>
               <a:t> </a:t>
             </a:r>
             <a:r>
-              <a:rPr lang="pl-PL" sz="1100" dirty="0" err="1">
-                <a:solidFill>
-                  <a:srgbClr val="D2A8FF"/>
+              <a:rPr lang="pl-PL" sz="1200" dirty="0" err="1">
+                <a:solidFill>
+                  <a:srgbClr val="DCDCAA"/>
                 </a:solidFill>
                 <a:latin typeface="Consolas" panose="020B0609020204030204" pitchFamily="49" charset="0"/>
               </a:rPr>
               <a:t>predict</a:t>
             </a:r>
             <a:r>
-              <a:rPr lang="pl-PL" sz="1100" dirty="0">
-                <a:solidFill>
-                  <a:srgbClr val="BBBEBF"/>
+              <a:rPr lang="pl-PL" sz="1200" dirty="0">
+                <a:solidFill>
+                  <a:srgbClr val="CCCCCC"/>
                 </a:solidFill>
                 <a:latin typeface="Consolas" panose="020B0609020204030204" pitchFamily="49" charset="0"/>
               </a:rPr>
               <a:t>(</a:t>
             </a:r>
             <a:r>
-              <a:rPr lang="pl-PL" sz="1100" dirty="0" err="1">
-                <a:solidFill>
-                  <a:srgbClr val="C9D1D9"/>
+              <a:rPr lang="pl-PL" sz="1200" dirty="0" err="1">
+                <a:solidFill>
+                  <a:srgbClr val="9CDCFE"/>
                 </a:solidFill>
                 <a:latin typeface="Consolas" panose="020B0609020204030204" pitchFamily="49" charset="0"/>
               </a:rPr>
               <a:t>self</a:t>
             </a:r>
             <a:r>
-              <a:rPr lang="pl-PL" sz="1100" dirty="0">
-                <a:solidFill>
-                  <a:srgbClr val="BBBEBF"/>
+              <a:rPr lang="pl-PL" sz="1200" dirty="0">
+                <a:solidFill>
+                  <a:srgbClr val="CCCCCC"/>
                 </a:solidFill>
                 <a:latin typeface="Consolas" panose="020B0609020204030204" pitchFamily="49" charset="0"/>
               </a:rPr>
               <a:t>, </a:t>
             </a:r>
             <a:r>
-              <a:rPr lang="pl-PL" sz="1100" dirty="0">
-                <a:solidFill>
-                  <a:srgbClr val="FFA657"/>
+              <a:rPr lang="pl-PL" sz="1200" dirty="0">
+                <a:solidFill>
+                  <a:srgbClr val="9CDCFE"/>
                 </a:solidFill>
                 <a:latin typeface="Consolas" panose="020B0609020204030204" pitchFamily="49" charset="0"/>
               </a:rPr>
               <a:t>v</a:t>
             </a:r>
             <a:r>
-              <a:rPr lang="pl-PL" sz="1100" dirty="0">
-                <a:solidFill>
-                  <a:srgbClr val="BBBEBF"/>
+              <a:rPr lang="pl-PL" sz="1200" dirty="0">
+                <a:solidFill>
+                  <a:srgbClr val="CCCCCC"/>
                 </a:solidFill>
                 <a:latin typeface="Consolas" panose="020B0609020204030204" pitchFamily="49" charset="0"/>
               </a:rPr>
               <a:t>: </a:t>
             </a:r>
             <a:r>
-              <a:rPr lang="pl-PL" sz="1100" dirty="0" err="1">
+              <a:rPr lang="pl-PL" sz="1200" dirty="0" err="1">
                 <a:solidFill>
                   <a:srgbClr val="4EC9B0"/>
                 </a:solidFill>
@@ -17423,34 +17126,34 @@
               <a:t>float</a:t>
             </a:r>
             <a:r>
-              <a:rPr lang="pl-PL" sz="1100" dirty="0">
-                <a:solidFill>
-                  <a:srgbClr val="BBBEBF"/>
+              <a:rPr lang="pl-PL" sz="1200" dirty="0">
+                <a:solidFill>
+                  <a:srgbClr val="CCCCCC"/>
                 </a:solidFill>
                 <a:latin typeface="Consolas" panose="020B0609020204030204" pitchFamily="49" charset="0"/>
               </a:rPr>
               <a:t>, </a:t>
             </a:r>
             <a:r>
-              <a:rPr lang="pl-PL" sz="1100" dirty="0">
-                <a:solidFill>
-                  <a:srgbClr val="FFA657"/>
+              <a:rPr lang="pl-PL" sz="1200" dirty="0">
+                <a:solidFill>
+                  <a:srgbClr val="9CDCFE"/>
                 </a:solidFill>
                 <a:latin typeface="Consolas" panose="020B0609020204030204" pitchFamily="49" charset="0"/>
               </a:rPr>
               <a:t>omega</a:t>
             </a:r>
             <a:r>
-              <a:rPr lang="pl-PL" sz="1100" dirty="0">
-                <a:solidFill>
-                  <a:srgbClr val="BBBEBF"/>
+              <a:rPr lang="pl-PL" sz="1200" dirty="0">
+                <a:solidFill>
+                  <a:srgbClr val="CCCCCC"/>
                 </a:solidFill>
                 <a:latin typeface="Consolas" panose="020B0609020204030204" pitchFamily="49" charset="0"/>
               </a:rPr>
               <a:t>: </a:t>
             </a:r>
             <a:r>
-              <a:rPr lang="pl-PL" sz="1100" dirty="0" err="1">
+              <a:rPr lang="pl-PL" sz="1200" dirty="0" err="1">
                 <a:solidFill>
                   <a:srgbClr val="4EC9B0"/>
                 </a:solidFill>
@@ -17459,34 +17162,34 @@
               <a:t>float</a:t>
             </a:r>
             <a:r>
-              <a:rPr lang="pl-PL" sz="1100" dirty="0">
-                <a:solidFill>
-                  <a:srgbClr val="BBBEBF"/>
+              <a:rPr lang="pl-PL" sz="1200" dirty="0">
+                <a:solidFill>
+                  <a:srgbClr val="CCCCCC"/>
                 </a:solidFill>
                 <a:latin typeface="Consolas" panose="020B0609020204030204" pitchFamily="49" charset="0"/>
               </a:rPr>
               <a:t>, </a:t>
             </a:r>
             <a:r>
-              <a:rPr lang="pl-PL" sz="1100" dirty="0" err="1">
-                <a:solidFill>
-                  <a:srgbClr val="FFA657"/>
+              <a:rPr lang="pl-PL" sz="1200" dirty="0" err="1">
+                <a:solidFill>
+                  <a:srgbClr val="9CDCFE"/>
                 </a:solidFill>
                 <a:latin typeface="Consolas" panose="020B0609020204030204" pitchFamily="49" charset="0"/>
               </a:rPr>
               <a:t>dt</a:t>
             </a:r>
             <a:r>
-              <a:rPr lang="pl-PL" sz="1100" dirty="0">
-                <a:solidFill>
-                  <a:srgbClr val="BBBEBF"/>
+              <a:rPr lang="pl-PL" sz="1200" dirty="0">
+                <a:solidFill>
+                  <a:srgbClr val="CCCCCC"/>
                 </a:solidFill>
                 <a:latin typeface="Consolas" panose="020B0609020204030204" pitchFamily="49" charset="0"/>
               </a:rPr>
               <a:t>: </a:t>
             </a:r>
             <a:r>
-              <a:rPr lang="pl-PL" sz="1100" dirty="0" err="1">
+              <a:rPr lang="pl-PL" sz="1200" dirty="0" err="1">
                 <a:solidFill>
                   <a:srgbClr val="4EC9B0"/>
                 </a:solidFill>
@@ -17495,9 +17198,9 @@
               <a:t>float</a:t>
             </a:r>
             <a:r>
-              <a:rPr lang="pl-PL" sz="1100" dirty="0">
-                <a:solidFill>
-                  <a:srgbClr val="BBBEBF"/>
+              <a:rPr lang="pl-PL" sz="1200" dirty="0">
+                <a:solidFill>
+                  <a:srgbClr val="CCCCCC"/>
                 </a:solidFill>
                 <a:latin typeface="Consolas" panose="020B0609020204030204" pitchFamily="49" charset="0"/>
               </a:rPr>
@@ -17511,34 +17214,34 @@
               </a:lnSpc>
             </a:pPr>
             <a:r>
-              <a:rPr lang="pl-PL" sz="1100" dirty="0">
-                <a:solidFill>
-                  <a:srgbClr val="BBBEBF"/>
+              <a:rPr lang="pl-PL" sz="1200" dirty="0">
+                <a:solidFill>
+                  <a:srgbClr val="CCCCCC"/>
                 </a:solidFill>
                 <a:latin typeface="Consolas" panose="020B0609020204030204" pitchFamily="49" charset="0"/>
               </a:rPr>
               <a:t>        </a:t>
             </a:r>
             <a:r>
-              <a:rPr lang="pl-PL" sz="1100" dirty="0" err="1">
-                <a:solidFill>
-                  <a:srgbClr val="C9D1D9"/>
+              <a:rPr lang="pl-PL" sz="1200" dirty="0" err="1">
+                <a:solidFill>
+                  <a:srgbClr val="CCCCCC"/>
                 </a:solidFill>
                 <a:latin typeface="Consolas" panose="020B0609020204030204" pitchFamily="49" charset="0"/>
               </a:rPr>
               <a:t>yaw</a:t>
             </a:r>
             <a:r>
-              <a:rPr lang="pl-PL" sz="1100" dirty="0">
-                <a:solidFill>
-                  <a:srgbClr val="BBBEBF"/>
+              <a:rPr lang="pl-PL" sz="1200" dirty="0">
+                <a:solidFill>
+                  <a:srgbClr val="CCCCCC"/>
                 </a:solidFill>
                 <a:latin typeface="Consolas" panose="020B0609020204030204" pitchFamily="49" charset="0"/>
               </a:rPr>
               <a:t> </a:t>
             </a:r>
             <a:r>
-              <a:rPr lang="pl-PL" sz="1100" dirty="0">
+              <a:rPr lang="pl-PL" sz="1200" dirty="0">
                 <a:solidFill>
                   <a:srgbClr val="D4D4D4"/>
                 </a:solidFill>
@@ -17547,52 +17250,43 @@
               <a:t>=</a:t>
             </a:r>
             <a:r>
-              <a:rPr lang="pl-PL" sz="1100" dirty="0">
-                <a:solidFill>
-                  <a:srgbClr val="BBBEBF"/>
+              <a:rPr lang="pl-PL" sz="1200" dirty="0">
+                <a:solidFill>
+                  <a:srgbClr val="CCCCCC"/>
                 </a:solidFill>
                 <a:latin typeface="Consolas" panose="020B0609020204030204" pitchFamily="49" charset="0"/>
               </a:rPr>
               <a:t> </a:t>
             </a:r>
             <a:r>
-              <a:rPr lang="pl-PL" sz="1100" dirty="0" err="1">
-                <a:solidFill>
-                  <a:srgbClr val="C9D1D9"/>
+              <a:rPr lang="pl-PL" sz="1200" dirty="0" err="1">
+                <a:solidFill>
+                  <a:srgbClr val="569CD6"/>
                 </a:solidFill>
                 <a:latin typeface="Consolas" panose="020B0609020204030204" pitchFamily="49" charset="0"/>
               </a:rPr>
               <a:t>self</a:t>
             </a:r>
             <a:r>
-              <a:rPr lang="pl-PL" sz="1100" dirty="0" err="1">
-                <a:solidFill>
-                  <a:srgbClr val="BBBEBF"/>
-                </a:solidFill>
-                <a:latin typeface="Consolas" panose="020B0609020204030204" pitchFamily="49" charset="0"/>
-              </a:rPr>
-              <a:t>.</a:t>
-            </a:r>
-            <a:r>
-              <a:rPr lang="pl-PL" sz="1100" dirty="0" err="1">
-                <a:solidFill>
-                  <a:srgbClr val="C9D1D9"/>
-                </a:solidFill>
-                <a:latin typeface="Consolas" panose="020B0609020204030204" pitchFamily="49" charset="0"/>
-              </a:rPr>
-              <a:t>x</a:t>
-            </a:r>
-            <a:r>
-              <a:rPr lang="pl-PL" sz="1100" dirty="0">
-                <a:solidFill>
-                  <a:srgbClr val="BBBEBF"/>
+              <a:rPr lang="pl-PL" sz="1200" dirty="0" err="1">
+                <a:solidFill>
+                  <a:srgbClr val="CCCCCC"/>
+                </a:solidFill>
+                <a:latin typeface="Consolas" panose="020B0609020204030204" pitchFamily="49" charset="0"/>
+              </a:rPr>
+              <a:t>.x</a:t>
+            </a:r>
+            <a:r>
+              <a:rPr lang="pl-PL" sz="1200" dirty="0">
+                <a:solidFill>
+                  <a:srgbClr val="CCCCCC"/>
                 </a:solidFill>
                 <a:latin typeface="Consolas" panose="020B0609020204030204" pitchFamily="49" charset="0"/>
               </a:rPr>
               <a:t>[</a:t>
             </a:r>
             <a:r>
-              <a:rPr lang="pl-PL" sz="1100" dirty="0">
+              <a:rPr lang="pl-PL" sz="1200" dirty="0">
                 <a:solidFill>
                   <a:srgbClr val="B5CEA8"/>
                 </a:solidFill>
@@ -17601,9 +17295,9 @@
               <a:t>2</a:t>
             </a:r>
             <a:r>
-              <a:rPr lang="pl-PL" sz="1100" dirty="0">
-                <a:solidFill>
-                  <a:srgbClr val="BBBEBF"/>
+              <a:rPr lang="pl-PL" sz="1200" dirty="0">
+                <a:solidFill>
+                  <a:srgbClr val="CCCCCC"/>
                 </a:solidFill>
                 <a:latin typeface="Consolas" panose="020B0609020204030204" pitchFamily="49" charset="0"/>
               </a:rPr>
@@ -17617,115 +17311,79 @@
               </a:lnSpc>
             </a:pPr>
             <a:r>
-              <a:rPr lang="pl-PL" sz="1100" dirty="0">
-                <a:solidFill>
-                  <a:srgbClr val="BBBEBF"/>
+              <a:rPr lang="pl-PL" sz="1200" dirty="0">
+                <a:solidFill>
+                  <a:srgbClr val="CCCCCC"/>
                 </a:solidFill>
                 <a:latin typeface="Consolas" panose="020B0609020204030204" pitchFamily="49" charset="0"/>
               </a:rPr>
               <a:t>        </a:t>
             </a:r>
             <a:r>
-              <a:rPr lang="pl-PL" sz="1100" dirty="0" err="1">
-                <a:solidFill>
-                  <a:srgbClr val="C9D1D9"/>
+              <a:rPr lang="pl-PL" sz="1200" dirty="0" err="1">
+                <a:solidFill>
+                  <a:srgbClr val="569CD6"/>
                 </a:solidFill>
                 <a:latin typeface="Consolas" panose="020B0609020204030204" pitchFamily="49" charset="0"/>
               </a:rPr>
               <a:t>self</a:t>
             </a:r>
             <a:r>
-              <a:rPr lang="pl-PL" sz="1100" dirty="0" err="1">
-                <a:solidFill>
-                  <a:srgbClr val="BBBEBF"/>
-                </a:solidFill>
-                <a:latin typeface="Consolas" panose="020B0609020204030204" pitchFamily="49" charset="0"/>
-              </a:rPr>
-              <a:t>.</a:t>
-            </a:r>
-            <a:r>
-              <a:rPr lang="pl-PL" sz="1100" dirty="0" err="1">
-                <a:solidFill>
-                  <a:srgbClr val="C9D1D9"/>
-                </a:solidFill>
-                <a:latin typeface="Consolas" panose="020B0609020204030204" pitchFamily="49" charset="0"/>
-              </a:rPr>
-              <a:t>x</a:t>
-            </a:r>
-            <a:r>
-              <a:rPr lang="pl-PL" sz="1100" dirty="0">
-                <a:solidFill>
-                  <a:srgbClr val="BBBEBF"/>
+              <a:rPr lang="pl-PL" sz="1200" dirty="0" err="1">
+                <a:solidFill>
+                  <a:srgbClr val="CCCCCC"/>
+                </a:solidFill>
+                <a:latin typeface="Consolas" panose="020B0609020204030204" pitchFamily="49" charset="0"/>
+              </a:rPr>
+              <a:t>.x</a:t>
+            </a:r>
+            <a:r>
+              <a:rPr lang="pl-PL" sz="1200" dirty="0">
+                <a:solidFill>
+                  <a:srgbClr val="CCCCCC"/>
                 </a:solidFill>
                 <a:latin typeface="Consolas" panose="020B0609020204030204" pitchFamily="49" charset="0"/>
               </a:rPr>
               <a:t> </a:t>
             </a:r>
             <a:r>
-              <a:rPr lang="pl-PL" sz="1100" dirty="0">
-                <a:solidFill>
-                  <a:srgbClr val="DCDCAA"/>
+              <a:rPr lang="pl-PL" sz="1200" dirty="0">
+                <a:solidFill>
+                  <a:srgbClr val="D4D4D4"/>
                 </a:solidFill>
                 <a:latin typeface="Consolas" panose="020B0609020204030204" pitchFamily="49" charset="0"/>
               </a:rPr>
               <a:t>+=</a:t>
             </a:r>
             <a:r>
-              <a:rPr lang="pl-PL" sz="1100" dirty="0">
-                <a:solidFill>
-                  <a:srgbClr val="BBBEBF"/>
+              <a:rPr lang="pl-PL" sz="1200" dirty="0">
+                <a:solidFill>
+                  <a:srgbClr val="CCCCCC"/>
                 </a:solidFill>
                 <a:latin typeface="Consolas" panose="020B0609020204030204" pitchFamily="49" charset="0"/>
               </a:rPr>
               <a:t> </a:t>
             </a:r>
             <a:r>
-              <a:rPr lang="pl-PL" sz="1100" dirty="0" err="1">
-                <a:solidFill>
-                  <a:srgbClr val="4EC9B0"/>
-                </a:solidFill>
-                <a:latin typeface="Consolas" panose="020B0609020204030204" pitchFamily="49" charset="0"/>
-              </a:rPr>
-              <a:t>np</a:t>
-            </a:r>
-            <a:r>
-              <a:rPr lang="pl-PL" sz="1100" dirty="0" err="1">
-                <a:solidFill>
-                  <a:srgbClr val="BBBEBF"/>
-                </a:solidFill>
-                <a:latin typeface="Consolas" panose="020B0609020204030204" pitchFamily="49" charset="0"/>
-              </a:rPr>
-              <a:t>.</a:t>
-            </a:r>
-            <a:r>
-              <a:rPr lang="pl-PL" sz="1100" dirty="0" err="1">
-                <a:solidFill>
-                  <a:srgbClr val="D2A8FF"/>
-                </a:solidFill>
-                <a:latin typeface="Consolas" panose="020B0609020204030204" pitchFamily="49" charset="0"/>
-              </a:rPr>
-              <a:t>array</a:t>
-            </a:r>
-            <a:r>
-              <a:rPr lang="pl-PL" sz="1100" dirty="0">
-                <a:solidFill>
-                  <a:srgbClr val="BBBEBF"/>
-                </a:solidFill>
-                <a:latin typeface="Consolas" panose="020B0609020204030204" pitchFamily="49" charset="0"/>
-              </a:rPr>
-              <a:t>([</a:t>
-            </a:r>
-            <a:r>
-              <a:rPr lang="pl-PL" sz="1100" dirty="0">
-                <a:solidFill>
-                  <a:srgbClr val="FFA657"/>
-                </a:solidFill>
-                <a:latin typeface="Consolas" panose="020B0609020204030204" pitchFamily="49" charset="0"/>
-              </a:rPr>
-              <a:t>v</a:t>
-            </a:r>
-            <a:r>
-              <a:rPr lang="pl-PL" sz="1100" dirty="0">
+              <a:rPr lang="pl-PL" sz="1200" dirty="0" err="1">
+                <a:solidFill>
+                  <a:srgbClr val="CCCCCC"/>
+                </a:solidFill>
+                <a:latin typeface="Consolas" panose="020B0609020204030204" pitchFamily="49" charset="0"/>
+              </a:rPr>
+              <a:t>np.array</a:t>
+            </a:r>
+            <a:r>
+              <a:rPr lang="pl-PL" sz="1200" dirty="0">
+                <a:solidFill>
+                  <a:srgbClr val="CCCCCC"/>
+                </a:solidFill>
+                <a:latin typeface="Consolas" panose="020B0609020204030204" pitchFamily="49" charset="0"/>
+              </a:rPr>
+              <a:t>([v</a:t>
+            </a:r>
+            <a:r>
+              <a:rPr lang="pl-PL" sz="1200" dirty="0">
                 <a:solidFill>
                   <a:srgbClr val="D4D4D4"/>
                 </a:solidFill>
@@ -17734,61 +17392,43 @@
               <a:t>*</a:t>
             </a:r>
             <a:r>
-              <a:rPr lang="pl-PL" sz="1100" dirty="0" err="1">
-                <a:solidFill>
-                  <a:srgbClr val="4EC9B0"/>
-                </a:solidFill>
-                <a:latin typeface="Consolas" panose="020B0609020204030204" pitchFamily="49" charset="0"/>
-              </a:rPr>
-              <a:t>np</a:t>
-            </a:r>
-            <a:r>
-              <a:rPr lang="pl-PL" sz="1100" dirty="0" err="1">
-                <a:solidFill>
-                  <a:srgbClr val="BBBEBF"/>
-                </a:solidFill>
-                <a:latin typeface="Consolas" panose="020B0609020204030204" pitchFamily="49" charset="0"/>
-              </a:rPr>
-              <a:t>.</a:t>
-            </a:r>
-            <a:r>
-              <a:rPr lang="pl-PL" sz="1100" dirty="0" err="1">
-                <a:solidFill>
-                  <a:srgbClr val="C9D1D9"/>
-                </a:solidFill>
-                <a:latin typeface="Consolas" panose="020B0609020204030204" pitchFamily="49" charset="0"/>
-              </a:rPr>
-              <a:t>cos</a:t>
-            </a:r>
-            <a:r>
-              <a:rPr lang="pl-PL" sz="1100" dirty="0">
-                <a:solidFill>
-                  <a:srgbClr val="BBBEBF"/>
+              <a:rPr lang="pl-PL" sz="1200" dirty="0" err="1">
+                <a:solidFill>
+                  <a:srgbClr val="CCCCCC"/>
+                </a:solidFill>
+                <a:latin typeface="Consolas" panose="020B0609020204030204" pitchFamily="49" charset="0"/>
+              </a:rPr>
+              <a:t>np.cos</a:t>
+            </a:r>
+            <a:r>
+              <a:rPr lang="pl-PL" sz="1200" dirty="0">
+                <a:solidFill>
+                  <a:srgbClr val="CCCCCC"/>
                 </a:solidFill>
                 <a:latin typeface="Consolas" panose="020B0609020204030204" pitchFamily="49" charset="0"/>
               </a:rPr>
               <a:t>(</a:t>
             </a:r>
             <a:r>
-              <a:rPr lang="pl-PL" sz="1100" dirty="0" err="1">
-                <a:solidFill>
-                  <a:srgbClr val="C9D1D9"/>
+              <a:rPr lang="pl-PL" sz="1200" dirty="0" err="1">
+                <a:solidFill>
+                  <a:srgbClr val="CCCCCC"/>
                 </a:solidFill>
                 <a:latin typeface="Consolas" panose="020B0609020204030204" pitchFamily="49" charset="0"/>
               </a:rPr>
               <a:t>yaw</a:t>
             </a:r>
             <a:r>
-              <a:rPr lang="pl-PL" sz="1100" dirty="0">
-                <a:solidFill>
-                  <a:srgbClr val="BBBEBF"/>
+              <a:rPr lang="pl-PL" sz="1200" dirty="0">
+                <a:solidFill>
+                  <a:srgbClr val="CCCCCC"/>
                 </a:solidFill>
                 <a:latin typeface="Consolas" panose="020B0609020204030204" pitchFamily="49" charset="0"/>
               </a:rPr>
               <a:t>)</a:t>
             </a:r>
             <a:r>
-              <a:rPr lang="pl-PL" sz="1100" dirty="0">
+              <a:rPr lang="pl-PL" sz="1200" dirty="0">
                 <a:solidFill>
                   <a:srgbClr val="D4D4D4"/>
                 </a:solidFill>
@@ -17797,34 +17437,25 @@
               <a:t>*</a:t>
             </a:r>
             <a:r>
-              <a:rPr lang="pl-PL" sz="1100" dirty="0" err="1">
-                <a:solidFill>
-                  <a:srgbClr val="FFA657"/>
+              <a:rPr lang="pl-PL" sz="1200" dirty="0" err="1">
+                <a:solidFill>
+                  <a:srgbClr val="CCCCCC"/>
                 </a:solidFill>
                 <a:latin typeface="Consolas" panose="020B0609020204030204" pitchFamily="49" charset="0"/>
               </a:rPr>
               <a:t>dt</a:t>
             </a:r>
             <a:r>
-              <a:rPr lang="pl-PL" sz="1100" dirty="0">
-                <a:solidFill>
-                  <a:srgbClr val="BBBEBF"/>
-                </a:solidFill>
-                <a:latin typeface="Consolas" panose="020B0609020204030204" pitchFamily="49" charset="0"/>
-              </a:rPr>
-              <a:t>, </a:t>
-            </a:r>
-            <a:r>
-              <a:rPr lang="pl-PL" sz="1100" dirty="0">
-                <a:solidFill>
-                  <a:srgbClr val="FFA657"/>
-                </a:solidFill>
-                <a:latin typeface="Consolas" panose="020B0609020204030204" pitchFamily="49" charset="0"/>
-              </a:rPr>
-              <a:t>v</a:t>
-            </a:r>
-            <a:r>
-              <a:rPr lang="pl-PL" sz="1100" dirty="0">
+              <a:rPr lang="pl-PL" sz="1200" dirty="0">
+                <a:solidFill>
+                  <a:srgbClr val="CCCCCC"/>
+                </a:solidFill>
+                <a:latin typeface="Consolas" panose="020B0609020204030204" pitchFamily="49" charset="0"/>
+              </a:rPr>
+              <a:t>, v</a:t>
+            </a:r>
+            <a:r>
+              <a:rPr lang="pl-PL" sz="1200" dirty="0">
                 <a:solidFill>
                   <a:srgbClr val="D4D4D4"/>
                 </a:solidFill>
@@ -17833,61 +17464,43 @@
               <a:t>*</a:t>
             </a:r>
             <a:r>
-              <a:rPr lang="pl-PL" sz="1100" dirty="0" err="1">
-                <a:solidFill>
-                  <a:srgbClr val="4EC9B0"/>
-                </a:solidFill>
-                <a:latin typeface="Consolas" panose="020B0609020204030204" pitchFamily="49" charset="0"/>
-              </a:rPr>
-              <a:t>np</a:t>
-            </a:r>
-            <a:r>
-              <a:rPr lang="pl-PL" sz="1100" dirty="0" err="1">
-                <a:solidFill>
-                  <a:srgbClr val="BBBEBF"/>
-                </a:solidFill>
-                <a:latin typeface="Consolas" panose="020B0609020204030204" pitchFamily="49" charset="0"/>
-              </a:rPr>
-              <a:t>.</a:t>
-            </a:r>
-            <a:r>
-              <a:rPr lang="pl-PL" sz="1100" dirty="0" err="1">
-                <a:solidFill>
-                  <a:srgbClr val="C9D1D9"/>
-                </a:solidFill>
-                <a:latin typeface="Consolas" panose="020B0609020204030204" pitchFamily="49" charset="0"/>
-              </a:rPr>
-              <a:t>sin</a:t>
-            </a:r>
-            <a:r>
-              <a:rPr lang="pl-PL" sz="1100" dirty="0">
-                <a:solidFill>
-                  <a:srgbClr val="BBBEBF"/>
+              <a:rPr lang="pl-PL" sz="1200" dirty="0" err="1">
+                <a:solidFill>
+                  <a:srgbClr val="CCCCCC"/>
+                </a:solidFill>
+                <a:latin typeface="Consolas" panose="020B0609020204030204" pitchFamily="49" charset="0"/>
+              </a:rPr>
+              <a:t>np.sin</a:t>
+            </a:r>
+            <a:r>
+              <a:rPr lang="pl-PL" sz="1200" dirty="0">
+                <a:solidFill>
+                  <a:srgbClr val="CCCCCC"/>
                 </a:solidFill>
                 <a:latin typeface="Consolas" panose="020B0609020204030204" pitchFamily="49" charset="0"/>
               </a:rPr>
               <a:t>(</a:t>
             </a:r>
             <a:r>
-              <a:rPr lang="pl-PL" sz="1100" dirty="0" err="1">
-                <a:solidFill>
-                  <a:srgbClr val="C9D1D9"/>
+              <a:rPr lang="pl-PL" sz="1200" dirty="0" err="1">
+                <a:solidFill>
+                  <a:srgbClr val="CCCCCC"/>
                 </a:solidFill>
                 <a:latin typeface="Consolas" panose="020B0609020204030204" pitchFamily="49" charset="0"/>
               </a:rPr>
               <a:t>yaw</a:t>
             </a:r>
             <a:r>
-              <a:rPr lang="pl-PL" sz="1100" dirty="0">
-                <a:solidFill>
-                  <a:srgbClr val="BBBEBF"/>
+              <a:rPr lang="pl-PL" sz="1200" dirty="0">
+                <a:solidFill>
+                  <a:srgbClr val="CCCCCC"/>
                 </a:solidFill>
                 <a:latin typeface="Consolas" panose="020B0609020204030204" pitchFamily="49" charset="0"/>
               </a:rPr>
               <a:t>)</a:t>
             </a:r>
             <a:r>
-              <a:rPr lang="pl-PL" sz="1100" dirty="0">
+              <a:rPr lang="pl-PL" sz="1200" dirty="0">
                 <a:solidFill>
                   <a:srgbClr val="D4D4D4"/>
                 </a:solidFill>
@@ -17896,34 +17509,25 @@
               <a:t>*</a:t>
             </a:r>
             <a:r>
-              <a:rPr lang="pl-PL" sz="1100" dirty="0" err="1">
-                <a:solidFill>
-                  <a:srgbClr val="FFA657"/>
+              <a:rPr lang="pl-PL" sz="1200" dirty="0" err="1">
+                <a:solidFill>
+                  <a:srgbClr val="CCCCCC"/>
                 </a:solidFill>
                 <a:latin typeface="Consolas" panose="020B0609020204030204" pitchFamily="49" charset="0"/>
               </a:rPr>
               <a:t>dt</a:t>
             </a:r>
             <a:r>
-              <a:rPr lang="pl-PL" sz="1100" dirty="0">
-                <a:solidFill>
-                  <a:srgbClr val="BBBEBF"/>
-                </a:solidFill>
-                <a:latin typeface="Consolas" panose="020B0609020204030204" pitchFamily="49" charset="0"/>
-              </a:rPr>
-              <a:t>, </a:t>
-            </a:r>
-            <a:r>
-              <a:rPr lang="pl-PL" sz="1100" dirty="0">
-                <a:solidFill>
-                  <a:srgbClr val="FFA657"/>
-                </a:solidFill>
-                <a:latin typeface="Consolas" panose="020B0609020204030204" pitchFamily="49" charset="0"/>
-              </a:rPr>
-              <a:t>omega</a:t>
-            </a:r>
-            <a:r>
-              <a:rPr lang="pl-PL" sz="1100" dirty="0">
+              <a:rPr lang="pl-PL" sz="1200" dirty="0">
+                <a:solidFill>
+                  <a:srgbClr val="CCCCCC"/>
+                </a:solidFill>
+                <a:latin typeface="Consolas" panose="020B0609020204030204" pitchFamily="49" charset="0"/>
+              </a:rPr>
+              <a:t>, omega</a:t>
+            </a:r>
+            <a:r>
+              <a:rPr lang="pl-PL" sz="1200" dirty="0">
                 <a:solidFill>
                   <a:srgbClr val="D4D4D4"/>
                 </a:solidFill>
@@ -17932,18 +17536,18 @@
               <a:t>*</a:t>
             </a:r>
             <a:r>
-              <a:rPr lang="pl-PL" sz="1100" dirty="0" err="1">
-                <a:solidFill>
-                  <a:srgbClr val="FFA657"/>
+              <a:rPr lang="pl-PL" sz="1200" dirty="0" err="1">
+                <a:solidFill>
+                  <a:srgbClr val="CCCCCC"/>
                 </a:solidFill>
                 <a:latin typeface="Consolas" panose="020B0609020204030204" pitchFamily="49" charset="0"/>
               </a:rPr>
               <a:t>dt</a:t>
             </a:r>
             <a:r>
-              <a:rPr lang="pl-PL" sz="1100" dirty="0">
-                <a:solidFill>
-                  <a:srgbClr val="BBBEBF"/>
+              <a:rPr lang="pl-PL" sz="1200" dirty="0">
+                <a:solidFill>
+                  <a:srgbClr val="CCCCCC"/>
                 </a:solidFill>
                 <a:latin typeface="Consolas" panose="020B0609020204030204" pitchFamily="49" charset="0"/>
               </a:rPr>
@@ -17957,422 +17561,314 @@
               </a:lnSpc>
             </a:pPr>
             <a:r>
-              <a:rPr lang="pl-PL" sz="1100" dirty="0">
-                <a:solidFill>
-                  <a:srgbClr val="BBBEBF"/>
-                </a:solidFill>
-                <a:latin typeface="Consolas" panose="020B0609020204030204" pitchFamily="49" charset="0"/>
-              </a:rPr>
-              <a:t>        </a:t>
-            </a:r>
-            <a:r>
-              <a:rPr lang="pl-PL" sz="1100" dirty="0">
-                <a:solidFill>
-                  <a:srgbClr val="79C0FF"/>
-                </a:solidFill>
-                <a:latin typeface="Consolas" panose="020B0609020204030204" pitchFamily="49" charset="0"/>
-              </a:rPr>
-              <a:t>F</a:t>
-            </a:r>
-            <a:r>
-              <a:rPr lang="pl-PL" sz="1100" dirty="0">
-                <a:solidFill>
-                  <a:srgbClr val="BBBEBF"/>
+              <a:rPr lang="pl-PL" sz="1200" dirty="0">
+                <a:solidFill>
+                  <a:srgbClr val="CCCCCC"/>
+                </a:solidFill>
+                <a:latin typeface="Consolas" panose="020B0609020204030204" pitchFamily="49" charset="0"/>
+              </a:rPr>
+              <a:t>        F </a:t>
+            </a:r>
+            <a:r>
+              <a:rPr lang="pl-PL" sz="1200" dirty="0">
+                <a:solidFill>
+                  <a:srgbClr val="D4D4D4"/>
+                </a:solidFill>
+                <a:latin typeface="Consolas" panose="020B0609020204030204" pitchFamily="49" charset="0"/>
+              </a:rPr>
+              <a:t>=</a:t>
+            </a:r>
+            <a:r>
+              <a:rPr lang="pl-PL" sz="1200" dirty="0">
+                <a:solidFill>
+                  <a:srgbClr val="CCCCCC"/>
                 </a:solidFill>
                 <a:latin typeface="Consolas" panose="020B0609020204030204" pitchFamily="49" charset="0"/>
               </a:rPr>
               <a:t> </a:t>
             </a:r>
             <a:r>
-              <a:rPr lang="pl-PL" sz="1100" dirty="0">
+              <a:rPr lang="pl-PL" sz="1200" dirty="0" err="1">
+                <a:solidFill>
+                  <a:srgbClr val="CCCCCC"/>
+                </a:solidFill>
+                <a:latin typeface="Consolas" panose="020B0609020204030204" pitchFamily="49" charset="0"/>
+              </a:rPr>
+              <a:t>np.eye</a:t>
+            </a:r>
+            <a:r>
+              <a:rPr lang="pl-PL" sz="1200" dirty="0">
+                <a:solidFill>
+                  <a:srgbClr val="CCCCCC"/>
+                </a:solidFill>
+                <a:latin typeface="Consolas" panose="020B0609020204030204" pitchFamily="49" charset="0"/>
+              </a:rPr>
+              <a:t>(</a:t>
+            </a:r>
+            <a:r>
+              <a:rPr lang="pl-PL" sz="1200" dirty="0">
+                <a:solidFill>
+                  <a:srgbClr val="B5CEA8"/>
+                </a:solidFill>
+                <a:latin typeface="Consolas" panose="020B0609020204030204" pitchFamily="49" charset="0"/>
+              </a:rPr>
+              <a:t>3</a:t>
+            </a:r>
+            <a:r>
+              <a:rPr lang="pl-PL" sz="1200" dirty="0">
+                <a:solidFill>
+                  <a:srgbClr val="CCCCCC"/>
+                </a:solidFill>
+                <a:latin typeface="Consolas" panose="020B0609020204030204" pitchFamily="49" charset="0"/>
+              </a:rPr>
+              <a:t>); F[</a:t>
+            </a:r>
+            <a:r>
+              <a:rPr lang="pl-PL" sz="1200" dirty="0">
+                <a:solidFill>
+                  <a:srgbClr val="B5CEA8"/>
+                </a:solidFill>
+                <a:latin typeface="Consolas" panose="020B0609020204030204" pitchFamily="49" charset="0"/>
+              </a:rPr>
+              <a:t>0</a:t>
+            </a:r>
+            <a:r>
+              <a:rPr lang="pl-PL" sz="1200" dirty="0">
+                <a:solidFill>
+                  <a:srgbClr val="CCCCCC"/>
+                </a:solidFill>
+                <a:latin typeface="Consolas" panose="020B0609020204030204" pitchFamily="49" charset="0"/>
+              </a:rPr>
+              <a:t>,</a:t>
+            </a:r>
+            <a:r>
+              <a:rPr lang="pl-PL" sz="1200" dirty="0">
+                <a:solidFill>
+                  <a:srgbClr val="B5CEA8"/>
+                </a:solidFill>
+                <a:latin typeface="Consolas" panose="020B0609020204030204" pitchFamily="49" charset="0"/>
+              </a:rPr>
+              <a:t>2</a:t>
+            </a:r>
+            <a:r>
+              <a:rPr lang="pl-PL" sz="1200" dirty="0">
+                <a:solidFill>
+                  <a:srgbClr val="CCCCCC"/>
+                </a:solidFill>
+                <a:latin typeface="Consolas" panose="020B0609020204030204" pitchFamily="49" charset="0"/>
+              </a:rPr>
+              <a:t>]</a:t>
+            </a:r>
+            <a:r>
+              <a:rPr lang="pl-PL" sz="1200" dirty="0">
                 <a:solidFill>
                   <a:srgbClr val="D4D4D4"/>
                 </a:solidFill>
                 <a:latin typeface="Consolas" panose="020B0609020204030204" pitchFamily="49" charset="0"/>
               </a:rPr>
+              <a:t>=-</a:t>
+            </a:r>
+            <a:r>
+              <a:rPr lang="pl-PL" sz="1200" dirty="0">
+                <a:solidFill>
+                  <a:srgbClr val="CCCCCC"/>
+                </a:solidFill>
+                <a:latin typeface="Consolas" panose="020B0609020204030204" pitchFamily="49" charset="0"/>
+              </a:rPr>
+              <a:t>v</a:t>
+            </a:r>
+            <a:r>
+              <a:rPr lang="pl-PL" sz="1200" dirty="0">
+                <a:solidFill>
+                  <a:srgbClr val="D4D4D4"/>
+                </a:solidFill>
+                <a:latin typeface="Consolas" panose="020B0609020204030204" pitchFamily="49" charset="0"/>
+              </a:rPr>
+              <a:t>*</a:t>
+            </a:r>
+            <a:r>
+              <a:rPr lang="pl-PL" sz="1200" dirty="0" err="1">
+                <a:solidFill>
+                  <a:srgbClr val="CCCCCC"/>
+                </a:solidFill>
+                <a:latin typeface="Consolas" panose="020B0609020204030204" pitchFamily="49" charset="0"/>
+              </a:rPr>
+              <a:t>np.sin</a:t>
+            </a:r>
+            <a:r>
+              <a:rPr lang="pl-PL" sz="1200" dirty="0">
+                <a:solidFill>
+                  <a:srgbClr val="CCCCCC"/>
+                </a:solidFill>
+                <a:latin typeface="Consolas" panose="020B0609020204030204" pitchFamily="49" charset="0"/>
+              </a:rPr>
+              <a:t>(</a:t>
+            </a:r>
+            <a:r>
+              <a:rPr lang="pl-PL" sz="1200" dirty="0" err="1">
+                <a:solidFill>
+                  <a:srgbClr val="CCCCCC"/>
+                </a:solidFill>
+                <a:latin typeface="Consolas" panose="020B0609020204030204" pitchFamily="49" charset="0"/>
+              </a:rPr>
+              <a:t>yaw</a:t>
+            </a:r>
+            <a:r>
+              <a:rPr lang="pl-PL" sz="1200" dirty="0">
+                <a:solidFill>
+                  <a:srgbClr val="CCCCCC"/>
+                </a:solidFill>
+                <a:latin typeface="Consolas" panose="020B0609020204030204" pitchFamily="49" charset="0"/>
+              </a:rPr>
+              <a:t>)</a:t>
+            </a:r>
+            <a:r>
+              <a:rPr lang="pl-PL" sz="1200" dirty="0">
+                <a:solidFill>
+                  <a:srgbClr val="D4D4D4"/>
+                </a:solidFill>
+                <a:latin typeface="Consolas" panose="020B0609020204030204" pitchFamily="49" charset="0"/>
+              </a:rPr>
+              <a:t>*</a:t>
+            </a:r>
+            <a:r>
+              <a:rPr lang="pl-PL" sz="1200" dirty="0" err="1">
+                <a:solidFill>
+                  <a:srgbClr val="CCCCCC"/>
+                </a:solidFill>
+                <a:latin typeface="Consolas" panose="020B0609020204030204" pitchFamily="49" charset="0"/>
+              </a:rPr>
+              <a:t>dt</a:t>
+            </a:r>
+            <a:r>
+              <a:rPr lang="pl-PL" sz="1200" dirty="0">
+                <a:solidFill>
+                  <a:srgbClr val="CCCCCC"/>
+                </a:solidFill>
+                <a:latin typeface="Consolas" panose="020B0609020204030204" pitchFamily="49" charset="0"/>
+              </a:rPr>
+              <a:t>; F[</a:t>
+            </a:r>
+            <a:r>
+              <a:rPr lang="pl-PL" sz="1200" dirty="0">
+                <a:solidFill>
+                  <a:srgbClr val="B5CEA8"/>
+                </a:solidFill>
+                <a:latin typeface="Consolas" panose="020B0609020204030204" pitchFamily="49" charset="0"/>
+              </a:rPr>
+              <a:t>1</a:t>
+            </a:r>
+            <a:r>
+              <a:rPr lang="pl-PL" sz="1200" dirty="0">
+                <a:solidFill>
+                  <a:srgbClr val="CCCCCC"/>
+                </a:solidFill>
+                <a:latin typeface="Consolas" panose="020B0609020204030204" pitchFamily="49" charset="0"/>
+              </a:rPr>
+              <a:t>,</a:t>
+            </a:r>
+            <a:r>
+              <a:rPr lang="pl-PL" sz="1200" dirty="0">
+                <a:solidFill>
+                  <a:srgbClr val="B5CEA8"/>
+                </a:solidFill>
+                <a:latin typeface="Consolas" panose="020B0609020204030204" pitchFamily="49" charset="0"/>
+              </a:rPr>
+              <a:t>2</a:t>
+            </a:r>
+            <a:r>
+              <a:rPr lang="pl-PL" sz="1200" dirty="0">
+                <a:solidFill>
+                  <a:srgbClr val="CCCCCC"/>
+                </a:solidFill>
+                <a:latin typeface="Consolas" panose="020B0609020204030204" pitchFamily="49" charset="0"/>
+              </a:rPr>
+              <a:t>]</a:t>
+            </a:r>
+            <a:r>
+              <a:rPr lang="pl-PL" sz="1200" dirty="0">
+                <a:solidFill>
+                  <a:srgbClr val="D4D4D4"/>
+                </a:solidFill>
+                <a:latin typeface="Consolas" panose="020B0609020204030204" pitchFamily="49" charset="0"/>
+              </a:rPr>
               <a:t>=</a:t>
             </a:r>
             <a:r>
-              <a:rPr lang="pl-PL" sz="1100" dirty="0">
-                <a:solidFill>
-                  <a:srgbClr val="BBBEBF"/>
-                </a:solidFill>
-                <a:latin typeface="Consolas" panose="020B0609020204030204" pitchFamily="49" charset="0"/>
-              </a:rPr>
-              <a:t> </a:t>
-            </a:r>
-            <a:r>
-              <a:rPr lang="pl-PL" sz="1100" dirty="0" err="1">
-                <a:solidFill>
-                  <a:srgbClr val="4EC9B0"/>
-                </a:solidFill>
-                <a:latin typeface="Consolas" panose="020B0609020204030204" pitchFamily="49" charset="0"/>
-              </a:rPr>
-              <a:t>np</a:t>
-            </a:r>
-            <a:r>
-              <a:rPr lang="pl-PL" sz="1100" dirty="0" err="1">
-                <a:solidFill>
-                  <a:srgbClr val="BBBEBF"/>
-                </a:solidFill>
-                <a:latin typeface="Consolas" panose="020B0609020204030204" pitchFamily="49" charset="0"/>
-              </a:rPr>
-              <a:t>.</a:t>
-            </a:r>
-            <a:r>
-              <a:rPr lang="pl-PL" sz="1100" dirty="0" err="1">
-                <a:solidFill>
-                  <a:srgbClr val="D2A8FF"/>
-                </a:solidFill>
-                <a:latin typeface="Consolas" panose="020B0609020204030204" pitchFamily="49" charset="0"/>
-              </a:rPr>
-              <a:t>eye</a:t>
-            </a:r>
-            <a:r>
-              <a:rPr lang="pl-PL" sz="1100" dirty="0">
-                <a:solidFill>
-                  <a:srgbClr val="BBBEBF"/>
+              <a:rPr lang="pl-PL" sz="1200" dirty="0">
+                <a:solidFill>
+                  <a:srgbClr val="CCCCCC"/>
+                </a:solidFill>
+                <a:latin typeface="Consolas" panose="020B0609020204030204" pitchFamily="49" charset="0"/>
+              </a:rPr>
+              <a:t>v</a:t>
+            </a:r>
+            <a:r>
+              <a:rPr lang="pl-PL" sz="1200" dirty="0">
+                <a:solidFill>
+                  <a:srgbClr val="D4D4D4"/>
+                </a:solidFill>
+                <a:latin typeface="Consolas" panose="020B0609020204030204" pitchFamily="49" charset="0"/>
+              </a:rPr>
+              <a:t>*</a:t>
+            </a:r>
+            <a:r>
+              <a:rPr lang="pl-PL" sz="1200" dirty="0" err="1">
+                <a:solidFill>
+                  <a:srgbClr val="CCCCCC"/>
+                </a:solidFill>
+                <a:latin typeface="Consolas" panose="020B0609020204030204" pitchFamily="49" charset="0"/>
+              </a:rPr>
+              <a:t>np.cos</a:t>
+            </a:r>
+            <a:r>
+              <a:rPr lang="pl-PL" sz="1200" dirty="0">
+                <a:solidFill>
+                  <a:srgbClr val="CCCCCC"/>
                 </a:solidFill>
                 <a:latin typeface="Consolas" panose="020B0609020204030204" pitchFamily="49" charset="0"/>
               </a:rPr>
               <a:t>(</a:t>
             </a:r>
             <a:r>
-              <a:rPr lang="pl-PL" sz="1100" dirty="0">
-                <a:solidFill>
-                  <a:srgbClr val="B5CEA8"/>
-                </a:solidFill>
-                <a:latin typeface="Consolas" panose="020B0609020204030204" pitchFamily="49" charset="0"/>
-              </a:rPr>
-              <a:t>3</a:t>
-            </a:r>
-            <a:r>
-              <a:rPr lang="pl-PL" sz="1100" dirty="0">
-                <a:solidFill>
-                  <a:srgbClr val="BBBEBF"/>
-                </a:solidFill>
-                <a:latin typeface="Consolas" panose="020B0609020204030204" pitchFamily="49" charset="0"/>
-              </a:rPr>
-              <a:t>); </a:t>
-            </a:r>
-            <a:r>
-              <a:rPr lang="pl-PL" sz="1100" dirty="0">
-                <a:solidFill>
-                  <a:srgbClr val="79C0FF"/>
-                </a:solidFill>
-                <a:latin typeface="Consolas" panose="020B0609020204030204" pitchFamily="49" charset="0"/>
-              </a:rPr>
-              <a:t>F</a:t>
-            </a:r>
-            <a:r>
-              <a:rPr lang="pl-PL" sz="1100" dirty="0">
-                <a:solidFill>
-                  <a:srgbClr val="BBBEBF"/>
-                </a:solidFill>
-                <a:latin typeface="Consolas" panose="020B0609020204030204" pitchFamily="49" charset="0"/>
-              </a:rPr>
-              <a:t>[</a:t>
-            </a:r>
-            <a:r>
-              <a:rPr lang="pl-PL" sz="1100" dirty="0">
-                <a:solidFill>
-                  <a:srgbClr val="B5CEA8"/>
-                </a:solidFill>
-                <a:latin typeface="Consolas" panose="020B0609020204030204" pitchFamily="49" charset="0"/>
-              </a:rPr>
-              <a:t>0</a:t>
-            </a:r>
-            <a:r>
-              <a:rPr lang="pl-PL" sz="1100" dirty="0">
-                <a:solidFill>
-                  <a:srgbClr val="BBBEBF"/>
-                </a:solidFill>
-                <a:latin typeface="Consolas" panose="020B0609020204030204" pitchFamily="49" charset="0"/>
-              </a:rPr>
-              <a:t>,</a:t>
-            </a:r>
-            <a:r>
-              <a:rPr lang="pl-PL" sz="1100" dirty="0">
-                <a:solidFill>
-                  <a:srgbClr val="B5CEA8"/>
-                </a:solidFill>
-                <a:latin typeface="Consolas" panose="020B0609020204030204" pitchFamily="49" charset="0"/>
-              </a:rPr>
-              <a:t>2</a:t>
-            </a:r>
-            <a:r>
-              <a:rPr lang="pl-PL" sz="1100" dirty="0">
-                <a:solidFill>
-                  <a:srgbClr val="BBBEBF"/>
-                </a:solidFill>
-                <a:latin typeface="Consolas" panose="020B0609020204030204" pitchFamily="49" charset="0"/>
-              </a:rPr>
-              <a:t>]</a:t>
-            </a:r>
-            <a:r>
-              <a:rPr lang="pl-PL" sz="1100" dirty="0">
+              <a:rPr lang="pl-PL" sz="1200" dirty="0" err="1">
+                <a:solidFill>
+                  <a:srgbClr val="CCCCCC"/>
+                </a:solidFill>
+                <a:latin typeface="Consolas" panose="020B0609020204030204" pitchFamily="49" charset="0"/>
+              </a:rPr>
+              <a:t>yaw</a:t>
+            </a:r>
+            <a:r>
+              <a:rPr lang="pl-PL" sz="1200" dirty="0">
+                <a:solidFill>
+                  <a:srgbClr val="CCCCCC"/>
+                </a:solidFill>
+                <a:latin typeface="Consolas" panose="020B0609020204030204" pitchFamily="49" charset="0"/>
+              </a:rPr>
+              <a:t>)</a:t>
+            </a:r>
+            <a:r>
+              <a:rPr lang="pl-PL" sz="1200" dirty="0">
                 <a:solidFill>
                   <a:srgbClr val="D4D4D4"/>
                 </a:solidFill>
                 <a:latin typeface="Consolas" panose="020B0609020204030204" pitchFamily="49" charset="0"/>
               </a:rPr>
-              <a:t>=-</a:t>
-            </a:r>
-            <a:r>
-              <a:rPr lang="pl-PL" sz="1100" dirty="0">
-                <a:solidFill>
-                  <a:srgbClr val="FFA657"/>
-                </a:solidFill>
-                <a:latin typeface="Consolas" panose="020B0609020204030204" pitchFamily="49" charset="0"/>
-              </a:rPr>
-              <a:t>v</a:t>
-            </a:r>
-            <a:r>
-              <a:rPr lang="pl-PL" sz="1100" dirty="0">
-                <a:solidFill>
-                  <a:srgbClr val="D4D4D4"/>
-                </a:solidFill>
-                <a:latin typeface="Consolas" panose="020B0609020204030204" pitchFamily="49" charset="0"/>
-              </a:rPr>
               <a:t>*</a:t>
             </a:r>
             <a:r>
-              <a:rPr lang="pl-PL" sz="1100" dirty="0" err="1">
-                <a:solidFill>
-                  <a:srgbClr val="4EC9B0"/>
-                </a:solidFill>
-                <a:latin typeface="Consolas" panose="020B0609020204030204" pitchFamily="49" charset="0"/>
-              </a:rPr>
-              <a:t>np</a:t>
-            </a:r>
-            <a:r>
-              <a:rPr lang="pl-PL" sz="1100" dirty="0" err="1">
-                <a:solidFill>
-                  <a:srgbClr val="BBBEBF"/>
-                </a:solidFill>
-                <a:latin typeface="Consolas" panose="020B0609020204030204" pitchFamily="49" charset="0"/>
-              </a:rPr>
-              <a:t>.</a:t>
-            </a:r>
-            <a:r>
-              <a:rPr lang="pl-PL" sz="1100" dirty="0" err="1">
-                <a:solidFill>
-                  <a:srgbClr val="C9D1D9"/>
-                </a:solidFill>
-                <a:latin typeface="Consolas" panose="020B0609020204030204" pitchFamily="49" charset="0"/>
-              </a:rPr>
-              <a:t>sin</a:t>
-            </a:r>
-            <a:r>
-              <a:rPr lang="pl-PL" sz="1100" dirty="0">
-                <a:solidFill>
-                  <a:srgbClr val="BBBEBF"/>
-                </a:solidFill>
-                <a:latin typeface="Consolas" panose="020B0609020204030204" pitchFamily="49" charset="0"/>
-              </a:rPr>
-              <a:t>(</a:t>
-            </a:r>
-            <a:r>
-              <a:rPr lang="pl-PL" sz="1100" dirty="0" err="1">
-                <a:solidFill>
-                  <a:srgbClr val="C9D1D9"/>
-                </a:solidFill>
-                <a:latin typeface="Consolas" panose="020B0609020204030204" pitchFamily="49" charset="0"/>
-              </a:rPr>
-              <a:t>yaw</a:t>
-            </a:r>
-            <a:r>
-              <a:rPr lang="pl-PL" sz="1100" dirty="0">
-                <a:solidFill>
-                  <a:srgbClr val="BBBEBF"/>
-                </a:solidFill>
-                <a:latin typeface="Consolas" panose="020B0609020204030204" pitchFamily="49" charset="0"/>
-              </a:rPr>
-              <a:t>)</a:t>
-            </a:r>
-            <a:r>
-              <a:rPr lang="pl-PL" sz="1100" dirty="0">
-                <a:solidFill>
-                  <a:srgbClr val="D4D4D4"/>
-                </a:solidFill>
-                <a:latin typeface="Consolas" panose="020B0609020204030204" pitchFamily="49" charset="0"/>
-              </a:rPr>
-              <a:t>*</a:t>
-            </a:r>
-            <a:r>
-              <a:rPr lang="pl-PL" sz="1100" dirty="0" err="1">
-                <a:solidFill>
-                  <a:srgbClr val="FFA657"/>
+              <a:rPr lang="pl-PL" sz="1200" dirty="0" err="1">
+                <a:solidFill>
+                  <a:srgbClr val="CCCCCC"/>
                 </a:solidFill>
                 <a:latin typeface="Consolas" panose="020B0609020204030204" pitchFamily="49" charset="0"/>
               </a:rPr>
               <a:t>dt</a:t>
             </a:r>
-            <a:r>
-              <a:rPr lang="pl-PL" sz="1100" dirty="0">
-                <a:solidFill>
-                  <a:srgbClr val="BBBEBF"/>
-                </a:solidFill>
-                <a:latin typeface="Consolas" panose="020B0609020204030204" pitchFamily="49" charset="0"/>
-              </a:rPr>
-              <a:t>; </a:t>
-            </a:r>
-            <a:r>
-              <a:rPr lang="pl-PL" sz="1100" dirty="0">
-                <a:solidFill>
-                  <a:srgbClr val="79C0FF"/>
-                </a:solidFill>
-                <a:latin typeface="Consolas" panose="020B0609020204030204" pitchFamily="49" charset="0"/>
-              </a:rPr>
-              <a:t>F</a:t>
-            </a:r>
-            <a:r>
-              <a:rPr lang="pl-PL" sz="1100" dirty="0">
-                <a:solidFill>
-                  <a:srgbClr val="BBBEBF"/>
-                </a:solidFill>
-                <a:latin typeface="Consolas" panose="020B0609020204030204" pitchFamily="49" charset="0"/>
-              </a:rPr>
-              <a:t>[</a:t>
-            </a:r>
-            <a:r>
-              <a:rPr lang="pl-PL" sz="1100" dirty="0">
-                <a:solidFill>
-                  <a:srgbClr val="B5CEA8"/>
-                </a:solidFill>
-                <a:latin typeface="Consolas" panose="020B0609020204030204" pitchFamily="49" charset="0"/>
-              </a:rPr>
-              <a:t>1</a:t>
-            </a:r>
-            <a:r>
-              <a:rPr lang="pl-PL" sz="1100" dirty="0">
-                <a:solidFill>
-                  <a:srgbClr val="BBBEBF"/>
-                </a:solidFill>
-                <a:latin typeface="Consolas" panose="020B0609020204030204" pitchFamily="49" charset="0"/>
-              </a:rPr>
-              <a:t>,</a:t>
-            </a:r>
-            <a:r>
-              <a:rPr lang="pl-PL" sz="1100" dirty="0">
-                <a:solidFill>
-                  <a:srgbClr val="B5CEA8"/>
-                </a:solidFill>
-                <a:latin typeface="Consolas" panose="020B0609020204030204" pitchFamily="49" charset="0"/>
-              </a:rPr>
-              <a:t>2</a:t>
-            </a:r>
-            <a:r>
-              <a:rPr lang="pl-PL" sz="1100" dirty="0">
-                <a:solidFill>
-                  <a:srgbClr val="BBBEBF"/>
-                </a:solidFill>
-                <a:latin typeface="Consolas" panose="020B0609020204030204" pitchFamily="49" charset="0"/>
-              </a:rPr>
-              <a:t>]</a:t>
-            </a:r>
-            <a:r>
-              <a:rPr lang="pl-PL" sz="1100" dirty="0">
-                <a:solidFill>
-                  <a:srgbClr val="D4D4D4"/>
-                </a:solidFill>
-                <a:latin typeface="Consolas" panose="020B0609020204030204" pitchFamily="49" charset="0"/>
-              </a:rPr>
-              <a:t>=</a:t>
-            </a:r>
-            <a:r>
-              <a:rPr lang="pl-PL" sz="1100" dirty="0">
-                <a:solidFill>
-                  <a:srgbClr val="FFA657"/>
-                </a:solidFill>
-                <a:latin typeface="Consolas" panose="020B0609020204030204" pitchFamily="49" charset="0"/>
-              </a:rPr>
-              <a:t>v</a:t>
-            </a:r>
-            <a:r>
-              <a:rPr lang="pl-PL" sz="1100" dirty="0">
-                <a:solidFill>
-                  <a:srgbClr val="D4D4D4"/>
-                </a:solidFill>
-                <a:latin typeface="Consolas" panose="020B0609020204030204" pitchFamily="49" charset="0"/>
-              </a:rPr>
-              <a:t>*</a:t>
-            </a:r>
-            <a:r>
-              <a:rPr lang="pl-PL" sz="1100" dirty="0" err="1">
-                <a:solidFill>
-                  <a:srgbClr val="4EC9B0"/>
-                </a:solidFill>
-                <a:latin typeface="Consolas" panose="020B0609020204030204" pitchFamily="49" charset="0"/>
-              </a:rPr>
-              <a:t>np</a:t>
-            </a:r>
-            <a:r>
-              <a:rPr lang="pl-PL" sz="1100" dirty="0" err="1">
-                <a:solidFill>
-                  <a:srgbClr val="BBBEBF"/>
-                </a:solidFill>
-                <a:latin typeface="Consolas" panose="020B0609020204030204" pitchFamily="49" charset="0"/>
-              </a:rPr>
-              <a:t>.</a:t>
-            </a:r>
-            <a:r>
-              <a:rPr lang="pl-PL" sz="1100" dirty="0" err="1">
-                <a:solidFill>
-                  <a:srgbClr val="C9D1D9"/>
-                </a:solidFill>
-                <a:latin typeface="Consolas" panose="020B0609020204030204" pitchFamily="49" charset="0"/>
-              </a:rPr>
-              <a:t>cos</a:t>
-            </a:r>
-            <a:r>
-              <a:rPr lang="pl-PL" sz="1100" dirty="0">
-                <a:solidFill>
-                  <a:srgbClr val="BBBEBF"/>
-                </a:solidFill>
-                <a:latin typeface="Consolas" panose="020B0609020204030204" pitchFamily="49" charset="0"/>
-              </a:rPr>
-              <a:t>(</a:t>
-            </a:r>
-            <a:r>
-              <a:rPr lang="pl-PL" sz="1100" dirty="0" err="1">
-                <a:solidFill>
-                  <a:srgbClr val="C9D1D9"/>
-                </a:solidFill>
-                <a:latin typeface="Consolas" panose="020B0609020204030204" pitchFamily="49" charset="0"/>
-              </a:rPr>
-              <a:t>yaw</a:t>
-            </a:r>
-            <a:r>
-              <a:rPr lang="pl-PL" sz="1100" dirty="0">
-                <a:solidFill>
-                  <a:srgbClr val="BBBEBF"/>
-                </a:solidFill>
-                <a:latin typeface="Consolas" panose="020B0609020204030204" pitchFamily="49" charset="0"/>
-              </a:rPr>
-              <a:t>)</a:t>
-            </a:r>
-            <a:r>
-              <a:rPr lang="pl-PL" sz="1100" dirty="0">
-                <a:solidFill>
-                  <a:srgbClr val="D4D4D4"/>
-                </a:solidFill>
-                <a:latin typeface="Consolas" panose="020B0609020204030204" pitchFamily="49" charset="0"/>
-              </a:rPr>
-              <a:t>*</a:t>
-            </a:r>
-            <a:r>
-              <a:rPr lang="pl-PL" sz="1100" dirty="0" err="1">
-                <a:solidFill>
-                  <a:srgbClr val="FFA657"/>
-                </a:solidFill>
-                <a:latin typeface="Consolas" panose="020B0609020204030204" pitchFamily="49" charset="0"/>
-              </a:rPr>
-              <a:t>dt</a:t>
-            </a:r>
-            <a:endParaRPr lang="pl-PL" sz="1100" dirty="0">
+            <a:endParaRPr lang="pl-PL" sz="1200" dirty="0">
               <a:solidFill>
-                <a:srgbClr val="BBBEBF"/>
+                <a:srgbClr val="CCCCCC"/>
               </a:solidFill>
               <a:latin typeface="Consolas" panose="020B0609020204030204" pitchFamily="49" charset="0"/>
             </a:endParaRPr>
@@ -18384,52 +17880,43 @@
               </a:lnSpc>
             </a:pPr>
             <a:r>
-              <a:rPr lang="pl-PL" sz="1100" dirty="0">
-                <a:solidFill>
-                  <a:srgbClr val="BBBEBF"/>
+              <a:rPr lang="pl-PL" sz="1200" dirty="0">
+                <a:solidFill>
+                  <a:srgbClr val="CCCCCC"/>
                 </a:solidFill>
                 <a:latin typeface="Consolas" panose="020B0609020204030204" pitchFamily="49" charset="0"/>
               </a:rPr>
               <a:t>        </a:t>
             </a:r>
             <a:r>
-              <a:rPr lang="pl-PL" sz="1100" dirty="0" err="1">
-                <a:solidFill>
-                  <a:srgbClr val="C9D1D9"/>
+              <a:rPr lang="pl-PL" sz="1200" dirty="0" err="1">
+                <a:solidFill>
+                  <a:srgbClr val="569CD6"/>
                 </a:solidFill>
                 <a:latin typeface="Consolas" panose="020B0609020204030204" pitchFamily="49" charset="0"/>
               </a:rPr>
               <a:t>self</a:t>
             </a:r>
             <a:r>
-              <a:rPr lang="pl-PL" sz="1100" dirty="0" err="1">
-                <a:solidFill>
-                  <a:srgbClr val="BBBEBF"/>
-                </a:solidFill>
-                <a:latin typeface="Consolas" panose="020B0609020204030204" pitchFamily="49" charset="0"/>
-              </a:rPr>
-              <a:t>.</a:t>
-            </a:r>
-            <a:r>
-              <a:rPr lang="pl-PL" sz="1100" dirty="0" err="1">
-                <a:solidFill>
-                  <a:srgbClr val="C9D1D9"/>
-                </a:solidFill>
-                <a:latin typeface="Consolas" panose="020B0609020204030204" pitchFamily="49" charset="0"/>
-              </a:rPr>
-              <a:t>P</a:t>
-            </a:r>
-            <a:r>
-              <a:rPr lang="pl-PL" sz="1100" dirty="0">
-                <a:solidFill>
-                  <a:srgbClr val="BBBEBF"/>
+              <a:rPr lang="pl-PL" sz="1200" dirty="0" err="1">
+                <a:solidFill>
+                  <a:srgbClr val="CCCCCC"/>
+                </a:solidFill>
+                <a:latin typeface="Consolas" panose="020B0609020204030204" pitchFamily="49" charset="0"/>
+              </a:rPr>
+              <a:t>.P</a:t>
+            </a:r>
+            <a:r>
+              <a:rPr lang="pl-PL" sz="1200" dirty="0">
+                <a:solidFill>
+                  <a:srgbClr val="CCCCCC"/>
                 </a:solidFill>
                 <a:latin typeface="Consolas" panose="020B0609020204030204" pitchFamily="49" charset="0"/>
               </a:rPr>
               <a:t> </a:t>
             </a:r>
             <a:r>
-              <a:rPr lang="pl-PL" sz="1100" dirty="0">
+              <a:rPr lang="pl-PL" sz="1200" dirty="0">
                 <a:solidFill>
                   <a:srgbClr val="D4D4D4"/>
                 </a:solidFill>
@@ -18438,188 +17925,116 @@
               <a:t>=</a:t>
             </a:r>
             <a:r>
-              <a:rPr lang="pl-PL" sz="1100" dirty="0">
-                <a:solidFill>
-                  <a:srgbClr val="BBBEBF"/>
+              <a:rPr lang="pl-PL" sz="1200" dirty="0">
+                <a:solidFill>
+                  <a:srgbClr val="CCCCCC"/>
+                </a:solidFill>
+                <a:latin typeface="Consolas" panose="020B0609020204030204" pitchFamily="49" charset="0"/>
+              </a:rPr>
+              <a:t> F </a:t>
+            </a:r>
+            <a:r>
+              <a:rPr lang="pl-PL" sz="1200" dirty="0">
+                <a:solidFill>
+                  <a:srgbClr val="D4D4D4"/>
+                </a:solidFill>
+                <a:latin typeface="Consolas" panose="020B0609020204030204" pitchFamily="49" charset="0"/>
+              </a:rPr>
+              <a:t>@</a:t>
+            </a:r>
+            <a:r>
+              <a:rPr lang="pl-PL" sz="1200" dirty="0">
+                <a:solidFill>
+                  <a:srgbClr val="CCCCCC"/>
                 </a:solidFill>
                 <a:latin typeface="Consolas" panose="020B0609020204030204" pitchFamily="49" charset="0"/>
               </a:rPr>
               <a:t> </a:t>
             </a:r>
             <a:r>
-              <a:rPr lang="pl-PL" sz="1100" dirty="0">
-                <a:solidFill>
-                  <a:srgbClr val="79C0FF"/>
-                </a:solidFill>
-                <a:latin typeface="Consolas" panose="020B0609020204030204" pitchFamily="49" charset="0"/>
-              </a:rPr>
-              <a:t>F</a:t>
-            </a:r>
-            <a:r>
-              <a:rPr lang="pl-PL" sz="1100" dirty="0">
-                <a:solidFill>
-                  <a:srgbClr val="BBBEBF"/>
+              <a:rPr lang="pl-PL" sz="1200" dirty="0" err="1">
+                <a:solidFill>
+                  <a:srgbClr val="569CD6"/>
+                </a:solidFill>
+                <a:latin typeface="Consolas" panose="020B0609020204030204" pitchFamily="49" charset="0"/>
+              </a:rPr>
+              <a:t>self</a:t>
+            </a:r>
+            <a:r>
+              <a:rPr lang="pl-PL" sz="1200" dirty="0" err="1">
+                <a:solidFill>
+                  <a:srgbClr val="CCCCCC"/>
+                </a:solidFill>
+                <a:latin typeface="Consolas" panose="020B0609020204030204" pitchFamily="49" charset="0"/>
+              </a:rPr>
+              <a:t>.P</a:t>
+            </a:r>
+            <a:r>
+              <a:rPr lang="pl-PL" sz="1200" dirty="0">
+                <a:solidFill>
+                  <a:srgbClr val="CCCCCC"/>
                 </a:solidFill>
                 <a:latin typeface="Consolas" panose="020B0609020204030204" pitchFamily="49" charset="0"/>
               </a:rPr>
               <a:t> </a:t>
             </a:r>
             <a:r>
-              <a:rPr lang="pl-PL" sz="1100" dirty="0">
-                <a:solidFill>
-                  <a:srgbClr val="DCDCAA"/>
+              <a:rPr lang="pl-PL" sz="1200" dirty="0">
+                <a:solidFill>
+                  <a:srgbClr val="D4D4D4"/>
                 </a:solidFill>
                 <a:latin typeface="Consolas" panose="020B0609020204030204" pitchFamily="49" charset="0"/>
               </a:rPr>
               <a:t>@</a:t>
             </a:r>
             <a:r>
-              <a:rPr lang="pl-PL" sz="1100" dirty="0">
-                <a:solidFill>
-                  <a:srgbClr val="BBBEBF"/>
+              <a:rPr lang="pl-PL" sz="1200" dirty="0">
+                <a:solidFill>
+                  <a:srgbClr val="CCCCCC"/>
+                </a:solidFill>
+                <a:latin typeface="Consolas" panose="020B0609020204030204" pitchFamily="49" charset="0"/>
+              </a:rPr>
+              <a:t> F.T </a:t>
+            </a:r>
+            <a:r>
+              <a:rPr lang="pl-PL" sz="1200" dirty="0">
+                <a:solidFill>
+                  <a:srgbClr val="D4D4D4"/>
+                </a:solidFill>
+                <a:latin typeface="Consolas" panose="020B0609020204030204" pitchFamily="49" charset="0"/>
+              </a:rPr>
+              <a:t>+</a:t>
+            </a:r>
+            <a:r>
+              <a:rPr lang="pl-PL" sz="1200" dirty="0">
+                <a:solidFill>
+                  <a:srgbClr val="CCCCCC"/>
                 </a:solidFill>
                 <a:latin typeface="Consolas" panose="020B0609020204030204" pitchFamily="49" charset="0"/>
               </a:rPr>
               <a:t> </a:t>
             </a:r>
             <a:r>
-              <a:rPr lang="pl-PL" sz="1100" dirty="0" err="1">
-                <a:solidFill>
-                  <a:srgbClr val="C9D1D9"/>
+              <a:rPr lang="pl-PL" sz="1200" dirty="0" err="1">
+                <a:solidFill>
+                  <a:srgbClr val="569CD6"/>
                 </a:solidFill>
                 <a:latin typeface="Consolas" panose="020B0609020204030204" pitchFamily="49" charset="0"/>
               </a:rPr>
               <a:t>self</a:t>
             </a:r>
             <a:r>
-              <a:rPr lang="pl-PL" sz="1100" dirty="0" err="1">
-                <a:solidFill>
-                  <a:srgbClr val="BBBEBF"/>
-                </a:solidFill>
-                <a:latin typeface="Consolas" panose="020B0609020204030204" pitchFamily="49" charset="0"/>
-              </a:rPr>
-              <a:t>.</a:t>
-            </a:r>
-            <a:r>
-              <a:rPr lang="pl-PL" sz="1100" dirty="0" err="1">
-                <a:solidFill>
-                  <a:srgbClr val="C9D1D9"/>
-                </a:solidFill>
-                <a:latin typeface="Consolas" panose="020B0609020204030204" pitchFamily="49" charset="0"/>
-              </a:rPr>
-              <a:t>P</a:t>
-            </a:r>
-            <a:r>
-              <a:rPr lang="pl-PL" sz="1100" dirty="0">
-                <a:solidFill>
-                  <a:srgbClr val="BBBEBF"/>
-                </a:solidFill>
-                <a:latin typeface="Consolas" panose="020B0609020204030204" pitchFamily="49" charset="0"/>
-              </a:rPr>
-              <a:t> </a:t>
-            </a:r>
-            <a:r>
-              <a:rPr lang="pl-PL" sz="1100" dirty="0">
-                <a:solidFill>
-                  <a:srgbClr val="DCDCAA"/>
-                </a:solidFill>
-                <a:latin typeface="Consolas" panose="020B0609020204030204" pitchFamily="49" charset="0"/>
-              </a:rPr>
-              <a:t>@</a:t>
-            </a:r>
-            <a:r>
-              <a:rPr lang="pl-PL" sz="1100" dirty="0">
-                <a:solidFill>
-                  <a:srgbClr val="BBBEBF"/>
-                </a:solidFill>
-                <a:latin typeface="Consolas" panose="020B0609020204030204" pitchFamily="49" charset="0"/>
-              </a:rPr>
-              <a:t> </a:t>
-            </a:r>
-            <a:r>
-              <a:rPr lang="pl-PL" sz="1100" dirty="0">
-                <a:solidFill>
-                  <a:srgbClr val="79C0FF"/>
-                </a:solidFill>
-                <a:latin typeface="Consolas" panose="020B0609020204030204" pitchFamily="49" charset="0"/>
-              </a:rPr>
-              <a:t>F</a:t>
-            </a:r>
-            <a:r>
-              <a:rPr lang="pl-PL" sz="1100" dirty="0">
-                <a:solidFill>
-                  <a:srgbClr val="BBBEBF"/>
-                </a:solidFill>
-                <a:latin typeface="Consolas" panose="020B0609020204030204" pitchFamily="49" charset="0"/>
-              </a:rPr>
-              <a:t>.</a:t>
-            </a:r>
-            <a:r>
-              <a:rPr lang="pl-PL" sz="1100" dirty="0">
-                <a:solidFill>
-                  <a:srgbClr val="C9D1D9"/>
-                </a:solidFill>
-                <a:latin typeface="Consolas" panose="020B0609020204030204" pitchFamily="49" charset="0"/>
-              </a:rPr>
-              <a:t>T</a:t>
-            </a:r>
-            <a:r>
-              <a:rPr lang="pl-PL" sz="1100" dirty="0">
-                <a:solidFill>
-                  <a:srgbClr val="BBBEBF"/>
-                </a:solidFill>
-                <a:latin typeface="Consolas" panose="020B0609020204030204" pitchFamily="49" charset="0"/>
-              </a:rPr>
-              <a:t> </a:t>
-            </a:r>
-            <a:r>
-              <a:rPr lang="pl-PL" sz="1100" dirty="0">
-                <a:solidFill>
-                  <a:srgbClr val="DCDCAA"/>
-                </a:solidFill>
-                <a:latin typeface="Consolas" panose="020B0609020204030204" pitchFamily="49" charset="0"/>
-              </a:rPr>
-              <a:t>+</a:t>
-            </a:r>
-            <a:r>
-              <a:rPr lang="pl-PL" sz="1100" dirty="0">
-                <a:solidFill>
-                  <a:srgbClr val="BBBEBF"/>
-                </a:solidFill>
-                <a:latin typeface="Consolas" panose="020B0609020204030204" pitchFamily="49" charset="0"/>
-              </a:rPr>
-              <a:t> </a:t>
-            </a:r>
-            <a:r>
-              <a:rPr lang="pl-PL" sz="1100" dirty="0" err="1">
-                <a:solidFill>
-                  <a:srgbClr val="C9D1D9"/>
-                </a:solidFill>
-                <a:latin typeface="Consolas" panose="020B0609020204030204" pitchFamily="49" charset="0"/>
-              </a:rPr>
-              <a:t>self</a:t>
-            </a:r>
-            <a:r>
-              <a:rPr lang="pl-PL" sz="1100" dirty="0" err="1">
-                <a:solidFill>
-                  <a:srgbClr val="BBBEBF"/>
-                </a:solidFill>
-                <a:latin typeface="Consolas" panose="020B0609020204030204" pitchFamily="49" charset="0"/>
-              </a:rPr>
-              <a:t>.</a:t>
-            </a:r>
-            <a:r>
-              <a:rPr lang="pl-PL" sz="1100" dirty="0" err="1">
-                <a:solidFill>
-                  <a:srgbClr val="C9D1D9"/>
-                </a:solidFill>
-                <a:latin typeface="Consolas" panose="020B0609020204030204" pitchFamily="49" charset="0"/>
-              </a:rPr>
-              <a:t>Q</a:t>
-            </a:r>
-            <a:endParaRPr lang="pl-PL" sz="1100" dirty="0">
+              <a:rPr lang="pl-PL" sz="1200" dirty="0" err="1">
+                <a:solidFill>
+                  <a:srgbClr val="CCCCCC"/>
+                </a:solidFill>
+                <a:latin typeface="Consolas" panose="020B0609020204030204" pitchFamily="49" charset="0"/>
+              </a:rPr>
+              <a:t>.Q</a:t>
+            </a:r>
+            <a:endParaRPr lang="pl-PL" sz="1200" dirty="0">
               <a:solidFill>
-                <a:srgbClr val="BBBEBF"/>
+                <a:srgbClr val="CCCCCC"/>
               </a:solidFill>
               <a:latin typeface="Consolas" panose="020B0609020204030204" pitchFamily="49" charset="0"/>
             </a:endParaRPr>
@@ -18631,134 +18046,116 @@
               </a:lnSpc>
             </a:pPr>
             <a:r>
-              <a:rPr lang="pl-PL" sz="1100" dirty="0">
-                <a:solidFill>
-                  <a:srgbClr val="BBBEBF"/>
+              <a:rPr lang="pl-PL" sz="1200" dirty="0">
+                <a:solidFill>
+                  <a:srgbClr val="CCCCCC"/>
                 </a:solidFill>
                 <a:latin typeface="Consolas" panose="020B0609020204030204" pitchFamily="49" charset="0"/>
               </a:rPr>
               <a:t/>
             </a:r>
             <a:br>
-              <a:rPr lang="pl-PL" sz="1100" dirty="0">
-                <a:solidFill>
-                  <a:srgbClr val="BBBEBF"/>
+              <a:rPr lang="pl-PL" sz="1200" dirty="0">
+                <a:solidFill>
+                  <a:srgbClr val="CCCCCC"/>
                 </a:solidFill>
                 <a:latin typeface="Consolas" panose="020B0609020204030204" pitchFamily="49" charset="0"/>
               </a:rPr>
             </a:br>
             <a:r>
-              <a:rPr lang="pl-PL" sz="1100" dirty="0">
-                <a:solidFill>
-                  <a:srgbClr val="BBBEBF"/>
-                </a:solidFill>
-                <a:latin typeface="Consolas" panose="020B0609020204030204" pitchFamily="49" charset="0"/>
-              </a:rPr>
-              <a:t>    </a:t>
-            </a:r>
-            <a:r>
-              <a:rPr lang="pl-PL" sz="1100" dirty="0">
-                <a:solidFill>
-                  <a:srgbClr val="FF7B72"/>
+              <a:rPr lang="pl-PL" sz="1200" dirty="0">
+                <a:solidFill>
+                  <a:srgbClr val="CCCCCC"/>
+                </a:solidFill>
+                <a:latin typeface="Consolas" panose="020B0609020204030204" pitchFamily="49" charset="0"/>
+              </a:rPr>
+              <a:t>   </a:t>
+            </a:r>
+            <a:r>
+              <a:rPr lang="pl-PL" sz="1200" dirty="0">
+                <a:solidFill>
+                  <a:srgbClr val="569CD6"/>
                 </a:solidFill>
                 <a:latin typeface="Consolas" panose="020B0609020204030204" pitchFamily="49" charset="0"/>
               </a:rPr>
               <a:t>def</a:t>
             </a:r>
             <a:r>
-              <a:rPr lang="pl-PL" sz="1100" dirty="0">
-                <a:solidFill>
-                  <a:srgbClr val="BBBEBF"/>
+              <a:rPr lang="pl-PL" sz="1200" dirty="0">
+                <a:solidFill>
+                  <a:srgbClr val="CCCCCC"/>
                 </a:solidFill>
                 <a:latin typeface="Consolas" panose="020B0609020204030204" pitchFamily="49" charset="0"/>
               </a:rPr>
               <a:t> </a:t>
             </a:r>
             <a:r>
-              <a:rPr lang="pl-PL" sz="1100" dirty="0" err="1">
-                <a:solidFill>
-                  <a:srgbClr val="D2A8FF"/>
+              <a:rPr lang="pl-PL" sz="1200" dirty="0" err="1">
+                <a:solidFill>
+                  <a:srgbClr val="DCDCAA"/>
                 </a:solidFill>
                 <a:latin typeface="Consolas" panose="020B0609020204030204" pitchFamily="49" charset="0"/>
               </a:rPr>
               <a:t>correct</a:t>
             </a:r>
             <a:r>
-              <a:rPr lang="pl-PL" sz="1100" dirty="0">
-                <a:solidFill>
-                  <a:srgbClr val="BBBEBF"/>
+              <a:rPr lang="pl-PL" sz="1200" dirty="0">
+                <a:solidFill>
+                  <a:srgbClr val="CCCCCC"/>
                 </a:solidFill>
                 <a:latin typeface="Consolas" panose="020B0609020204030204" pitchFamily="49" charset="0"/>
               </a:rPr>
               <a:t>(</a:t>
             </a:r>
             <a:r>
-              <a:rPr lang="pl-PL" sz="1100" dirty="0" err="1">
-                <a:solidFill>
-                  <a:srgbClr val="C9D1D9"/>
+              <a:rPr lang="pl-PL" sz="1200" dirty="0" err="1">
+                <a:solidFill>
+                  <a:srgbClr val="9CDCFE"/>
                 </a:solidFill>
                 <a:latin typeface="Consolas" panose="020B0609020204030204" pitchFamily="49" charset="0"/>
               </a:rPr>
               <a:t>self</a:t>
             </a:r>
             <a:r>
-              <a:rPr lang="pl-PL" sz="1100" dirty="0">
-                <a:solidFill>
-                  <a:srgbClr val="BBBEBF"/>
+              <a:rPr lang="pl-PL" sz="1200" dirty="0">
+                <a:solidFill>
+                  <a:srgbClr val="CCCCCC"/>
                 </a:solidFill>
                 <a:latin typeface="Consolas" panose="020B0609020204030204" pitchFamily="49" charset="0"/>
               </a:rPr>
               <a:t>, </a:t>
             </a:r>
             <a:r>
-              <a:rPr lang="pl-PL" sz="1100" dirty="0" err="1">
-                <a:solidFill>
-                  <a:srgbClr val="FFA657"/>
+              <a:rPr lang="pl-PL" sz="1200" dirty="0" err="1">
+                <a:solidFill>
+                  <a:srgbClr val="9CDCFE"/>
                 </a:solidFill>
                 <a:latin typeface="Consolas" panose="020B0609020204030204" pitchFamily="49" charset="0"/>
               </a:rPr>
               <a:t>z_xy</a:t>
             </a:r>
             <a:r>
-              <a:rPr lang="pl-PL" sz="1100" dirty="0">
-                <a:solidFill>
-                  <a:srgbClr val="BBBEBF"/>
+              <a:rPr lang="pl-PL" sz="1200" dirty="0">
+                <a:solidFill>
+                  <a:srgbClr val="CCCCCC"/>
                 </a:solidFill>
                 <a:latin typeface="Consolas" panose="020B0609020204030204" pitchFamily="49" charset="0"/>
               </a:rPr>
               <a:t>: </a:t>
             </a:r>
             <a:r>
-              <a:rPr lang="pl-PL" sz="1100" dirty="0" err="1">
-                <a:solidFill>
-                  <a:srgbClr val="4EC9B0"/>
-                </a:solidFill>
-                <a:latin typeface="Consolas" panose="020B0609020204030204" pitchFamily="49" charset="0"/>
-              </a:rPr>
-              <a:t>np</a:t>
-            </a:r>
-            <a:r>
-              <a:rPr lang="pl-PL" sz="1100" dirty="0" err="1">
-                <a:solidFill>
-                  <a:srgbClr val="BBBEBF"/>
-                </a:solidFill>
-                <a:latin typeface="Consolas" panose="020B0609020204030204" pitchFamily="49" charset="0"/>
-              </a:rPr>
-              <a:t>.</a:t>
-            </a:r>
-            <a:r>
-              <a:rPr lang="pl-PL" sz="1100" dirty="0" err="1">
-                <a:solidFill>
-                  <a:srgbClr val="4EC9B0"/>
-                </a:solidFill>
-                <a:latin typeface="Consolas" panose="020B0609020204030204" pitchFamily="49" charset="0"/>
-              </a:rPr>
-              <a:t>ndarray</a:t>
-            </a:r>
-            <a:r>
-              <a:rPr lang="pl-PL" sz="1100" dirty="0">
-                <a:solidFill>
-                  <a:srgbClr val="BBBEBF"/>
+              <a:rPr lang="pl-PL" sz="1200" dirty="0" err="1">
+                <a:solidFill>
+                  <a:srgbClr val="CCCCCC"/>
+                </a:solidFill>
+                <a:latin typeface="Consolas" panose="020B0609020204030204" pitchFamily="49" charset="0"/>
+              </a:rPr>
+              <a:t>np.ndarray</a:t>
+            </a:r>
+            <a:r>
+              <a:rPr lang="pl-PL" sz="1200" dirty="0">
+                <a:solidFill>
+                  <a:srgbClr val="CCCCCC"/>
                 </a:solidFill>
                 <a:latin typeface="Consolas" panose="020B0609020204030204" pitchFamily="49" charset="0"/>
               </a:rPr>
@@ -18772,88 +18169,52 @@
               </a:lnSpc>
             </a:pPr>
             <a:r>
-              <a:rPr lang="pl-PL" sz="1100" dirty="0">
-                <a:solidFill>
-                  <a:srgbClr val="BBBEBF"/>
-                </a:solidFill>
-                <a:latin typeface="Consolas" panose="020B0609020204030204" pitchFamily="49" charset="0"/>
-              </a:rPr>
-              <a:t>        </a:t>
-            </a:r>
-            <a:r>
-              <a:rPr lang="pl-PL" sz="1100" dirty="0">
-                <a:solidFill>
-                  <a:srgbClr val="79C0FF"/>
-                </a:solidFill>
-                <a:latin typeface="Consolas" panose="020B0609020204030204" pitchFamily="49" charset="0"/>
-              </a:rPr>
-              <a:t>H</a:t>
-            </a:r>
-            <a:r>
-              <a:rPr lang="pl-PL" sz="1100" dirty="0">
-                <a:solidFill>
-                  <a:srgbClr val="BBBEBF"/>
+              <a:rPr lang="pl-PL" sz="1200" dirty="0">
+                <a:solidFill>
+                  <a:srgbClr val="CCCCCC"/>
+                </a:solidFill>
+                <a:latin typeface="Consolas" panose="020B0609020204030204" pitchFamily="49" charset="0"/>
+              </a:rPr>
+              <a:t>        H </a:t>
+            </a:r>
+            <a:r>
+              <a:rPr lang="pl-PL" sz="1200" dirty="0">
+                <a:solidFill>
+                  <a:srgbClr val="D4D4D4"/>
+                </a:solidFill>
+                <a:latin typeface="Consolas" panose="020B0609020204030204" pitchFamily="49" charset="0"/>
+              </a:rPr>
+              <a:t>=</a:t>
+            </a:r>
+            <a:r>
+              <a:rPr lang="pl-PL" sz="1200" dirty="0">
+                <a:solidFill>
+                  <a:srgbClr val="CCCCCC"/>
                 </a:solidFill>
                 <a:latin typeface="Consolas" panose="020B0609020204030204" pitchFamily="49" charset="0"/>
               </a:rPr>
               <a:t> </a:t>
             </a:r>
             <a:r>
-              <a:rPr lang="pl-PL" sz="1100" dirty="0">
-                <a:solidFill>
-                  <a:srgbClr val="D4D4D4"/>
-                </a:solidFill>
-                <a:latin typeface="Consolas" panose="020B0609020204030204" pitchFamily="49" charset="0"/>
-              </a:rPr>
-              <a:t>=</a:t>
-            </a:r>
-            <a:r>
-              <a:rPr lang="pl-PL" sz="1100" dirty="0">
-                <a:solidFill>
-                  <a:srgbClr val="BBBEBF"/>
-                </a:solidFill>
-                <a:latin typeface="Consolas" panose="020B0609020204030204" pitchFamily="49" charset="0"/>
-              </a:rPr>
-              <a:t> </a:t>
-            </a:r>
-            <a:r>
-              <a:rPr lang="pl-PL" sz="1100" dirty="0" err="1">
-                <a:solidFill>
-                  <a:srgbClr val="4EC9B0"/>
-                </a:solidFill>
-                <a:latin typeface="Consolas" panose="020B0609020204030204" pitchFamily="49" charset="0"/>
-              </a:rPr>
-              <a:t>np</a:t>
-            </a:r>
-            <a:r>
-              <a:rPr lang="pl-PL" sz="1100" dirty="0" err="1">
-                <a:solidFill>
-                  <a:srgbClr val="BBBEBF"/>
-                </a:solidFill>
-                <a:latin typeface="Consolas" panose="020B0609020204030204" pitchFamily="49" charset="0"/>
-              </a:rPr>
-              <a:t>.</a:t>
-            </a:r>
-            <a:r>
-              <a:rPr lang="pl-PL" sz="1100" dirty="0" err="1">
-                <a:solidFill>
-                  <a:srgbClr val="D2A8FF"/>
-                </a:solidFill>
-                <a:latin typeface="Consolas" panose="020B0609020204030204" pitchFamily="49" charset="0"/>
-              </a:rPr>
-              <a:t>array</a:t>
-            </a:r>
-            <a:r>
-              <a:rPr lang="pl-PL" sz="1100" dirty="0">
-                <a:solidFill>
-                  <a:srgbClr val="BBBEBF"/>
+              <a:rPr lang="pl-PL" sz="1200" dirty="0" err="1">
+                <a:solidFill>
+                  <a:srgbClr val="CCCCCC"/>
+                </a:solidFill>
+                <a:latin typeface="Consolas" panose="020B0609020204030204" pitchFamily="49" charset="0"/>
+              </a:rPr>
+              <a:t>np.array</a:t>
+            </a:r>
+            <a:r>
+              <a:rPr lang="pl-PL" sz="1200" dirty="0">
+                <a:solidFill>
+                  <a:srgbClr val="CCCCCC"/>
                 </a:solidFill>
                 <a:latin typeface="Consolas" panose="020B0609020204030204" pitchFamily="49" charset="0"/>
               </a:rPr>
               <a:t>([[</a:t>
             </a:r>
             <a:r>
-              <a:rPr lang="pl-PL" sz="1100" dirty="0">
+              <a:rPr lang="pl-PL" sz="1200" dirty="0">
                 <a:solidFill>
                   <a:srgbClr val="B5CEA8"/>
                 </a:solidFill>
@@ -18862,16 +18223,16 @@
               <a:t>1</a:t>
             </a:r>
             <a:r>
-              <a:rPr lang="pl-PL" sz="1100" dirty="0">
-                <a:solidFill>
-                  <a:srgbClr val="BBBEBF"/>
+              <a:rPr lang="pl-PL" sz="1200" dirty="0">
+                <a:solidFill>
+                  <a:srgbClr val="CCCCCC"/>
                 </a:solidFill>
                 <a:latin typeface="Consolas" panose="020B0609020204030204" pitchFamily="49" charset="0"/>
               </a:rPr>
               <a:t>,</a:t>
             </a:r>
             <a:r>
-              <a:rPr lang="pl-PL" sz="1100" dirty="0">
+              <a:rPr lang="pl-PL" sz="1200" dirty="0">
                 <a:solidFill>
                   <a:srgbClr val="B5CEA8"/>
                 </a:solidFill>
@@ -18880,16 +18241,16 @@
               <a:t>0</a:t>
             </a:r>
             <a:r>
-              <a:rPr lang="pl-PL" sz="1100" dirty="0">
-                <a:solidFill>
-                  <a:srgbClr val="BBBEBF"/>
+              <a:rPr lang="pl-PL" sz="1200" dirty="0">
+                <a:solidFill>
+                  <a:srgbClr val="CCCCCC"/>
                 </a:solidFill>
                 <a:latin typeface="Consolas" panose="020B0609020204030204" pitchFamily="49" charset="0"/>
               </a:rPr>
               <a:t>,</a:t>
             </a:r>
             <a:r>
-              <a:rPr lang="pl-PL" sz="1100" dirty="0">
+              <a:rPr lang="pl-PL" sz="1200" dirty="0">
                 <a:solidFill>
                   <a:srgbClr val="B5CEA8"/>
                 </a:solidFill>
@@ -18898,16 +18259,16 @@
               <a:t>0</a:t>
             </a:r>
             <a:r>
-              <a:rPr lang="pl-PL" sz="1100" dirty="0">
-                <a:solidFill>
-                  <a:srgbClr val="BBBEBF"/>
+              <a:rPr lang="pl-PL" sz="1200" dirty="0">
+                <a:solidFill>
+                  <a:srgbClr val="CCCCCC"/>
                 </a:solidFill>
                 <a:latin typeface="Consolas" panose="020B0609020204030204" pitchFamily="49" charset="0"/>
               </a:rPr>
               <a:t>],[</a:t>
             </a:r>
             <a:r>
-              <a:rPr lang="pl-PL" sz="1100" dirty="0">
+              <a:rPr lang="pl-PL" sz="1200" dirty="0">
                 <a:solidFill>
                   <a:srgbClr val="B5CEA8"/>
                 </a:solidFill>
@@ -18916,16 +18277,16 @@
               <a:t>0</a:t>
             </a:r>
             <a:r>
-              <a:rPr lang="pl-PL" sz="1100" dirty="0">
-                <a:solidFill>
-                  <a:srgbClr val="BBBEBF"/>
+              <a:rPr lang="pl-PL" sz="1200" dirty="0">
+                <a:solidFill>
+                  <a:srgbClr val="CCCCCC"/>
                 </a:solidFill>
                 <a:latin typeface="Consolas" panose="020B0609020204030204" pitchFamily="49" charset="0"/>
               </a:rPr>
               <a:t>,</a:t>
             </a:r>
             <a:r>
-              <a:rPr lang="pl-PL" sz="1100" dirty="0">
+              <a:rPr lang="pl-PL" sz="1200" dirty="0">
                 <a:solidFill>
                   <a:srgbClr val="B5CEA8"/>
                 </a:solidFill>
@@ -18934,16 +18295,16 @@
               <a:t>1</a:t>
             </a:r>
             <a:r>
-              <a:rPr lang="pl-PL" sz="1100" dirty="0">
-                <a:solidFill>
-                  <a:srgbClr val="BBBEBF"/>
+              <a:rPr lang="pl-PL" sz="1200" dirty="0">
+                <a:solidFill>
+                  <a:srgbClr val="CCCCCC"/>
                 </a:solidFill>
                 <a:latin typeface="Consolas" panose="020B0609020204030204" pitchFamily="49" charset="0"/>
               </a:rPr>
               <a:t>,</a:t>
             </a:r>
             <a:r>
-              <a:rPr lang="pl-PL" sz="1100" dirty="0">
+              <a:rPr lang="pl-PL" sz="1200" dirty="0">
                 <a:solidFill>
                   <a:srgbClr val="B5CEA8"/>
                 </a:solidFill>
@@ -18952,9 +18313,9 @@
               <a:t>0</a:t>
             </a:r>
             <a:r>
-              <a:rPr lang="pl-PL" sz="1100" dirty="0">
-                <a:solidFill>
-                  <a:srgbClr val="BBBEBF"/>
+              <a:rPr lang="pl-PL" sz="1200" dirty="0">
+                <a:solidFill>
+                  <a:srgbClr val="CCCCCC"/>
                 </a:solidFill>
                 <a:latin typeface="Consolas" panose="020B0609020204030204" pitchFamily="49" charset="0"/>
               </a:rPr>
@@ -18968,224 +18329,134 @@
               </a:lnSpc>
             </a:pPr>
             <a:r>
-              <a:rPr lang="pl-PL" sz="1100" dirty="0">
-                <a:solidFill>
-                  <a:srgbClr val="BBBEBF"/>
-                </a:solidFill>
-                <a:latin typeface="Consolas" panose="020B0609020204030204" pitchFamily="49" charset="0"/>
-              </a:rPr>
-              <a:t>        </a:t>
-            </a:r>
-            <a:r>
-              <a:rPr lang="pl-PL" sz="1100" dirty="0">
-                <a:solidFill>
-                  <a:srgbClr val="79C0FF"/>
-                </a:solidFill>
-                <a:latin typeface="Consolas" panose="020B0609020204030204" pitchFamily="49" charset="0"/>
-              </a:rPr>
-              <a:t>S</a:t>
-            </a:r>
-            <a:r>
-              <a:rPr lang="pl-PL" sz="1100" dirty="0">
-                <a:solidFill>
-                  <a:srgbClr val="BBBEBF"/>
+              <a:rPr lang="pl-PL" sz="1200" dirty="0">
+                <a:solidFill>
+                  <a:srgbClr val="CCCCCC"/>
+                </a:solidFill>
+                <a:latin typeface="Consolas" panose="020B0609020204030204" pitchFamily="49" charset="0"/>
+              </a:rPr>
+              <a:t>        S </a:t>
+            </a:r>
+            <a:r>
+              <a:rPr lang="pl-PL" sz="1200" dirty="0">
+                <a:solidFill>
+                  <a:srgbClr val="D4D4D4"/>
+                </a:solidFill>
+                <a:latin typeface="Consolas" panose="020B0609020204030204" pitchFamily="49" charset="0"/>
+              </a:rPr>
+              <a:t>=</a:t>
+            </a:r>
+            <a:r>
+              <a:rPr lang="pl-PL" sz="1200" dirty="0">
+                <a:solidFill>
+                  <a:srgbClr val="CCCCCC"/>
+                </a:solidFill>
+                <a:latin typeface="Consolas" panose="020B0609020204030204" pitchFamily="49" charset="0"/>
+              </a:rPr>
+              <a:t> H </a:t>
+            </a:r>
+            <a:r>
+              <a:rPr lang="pl-PL" sz="1200" dirty="0">
+                <a:solidFill>
+                  <a:srgbClr val="D4D4D4"/>
+                </a:solidFill>
+                <a:latin typeface="Consolas" panose="020B0609020204030204" pitchFamily="49" charset="0"/>
+              </a:rPr>
+              <a:t>@</a:t>
+            </a:r>
+            <a:r>
+              <a:rPr lang="pl-PL" sz="1200" dirty="0">
+                <a:solidFill>
+                  <a:srgbClr val="CCCCCC"/>
                 </a:solidFill>
                 <a:latin typeface="Consolas" panose="020B0609020204030204" pitchFamily="49" charset="0"/>
               </a:rPr>
               <a:t> </a:t>
             </a:r>
             <a:r>
-              <a:rPr lang="pl-PL" sz="1100" dirty="0">
+              <a:rPr lang="pl-PL" sz="1200" dirty="0" err="1">
+                <a:solidFill>
+                  <a:srgbClr val="569CD6"/>
+                </a:solidFill>
+                <a:latin typeface="Consolas" panose="020B0609020204030204" pitchFamily="49" charset="0"/>
+              </a:rPr>
+              <a:t>self</a:t>
+            </a:r>
+            <a:r>
+              <a:rPr lang="pl-PL" sz="1200" dirty="0" err="1">
+                <a:solidFill>
+                  <a:srgbClr val="CCCCCC"/>
+                </a:solidFill>
+                <a:latin typeface="Consolas" panose="020B0609020204030204" pitchFamily="49" charset="0"/>
+              </a:rPr>
+              <a:t>.P</a:t>
+            </a:r>
+            <a:r>
+              <a:rPr lang="pl-PL" sz="1200" dirty="0">
+                <a:solidFill>
+                  <a:srgbClr val="CCCCCC"/>
+                </a:solidFill>
+                <a:latin typeface="Consolas" panose="020B0609020204030204" pitchFamily="49" charset="0"/>
+              </a:rPr>
+              <a:t> </a:t>
+            </a:r>
+            <a:r>
+              <a:rPr lang="pl-PL" sz="1200" dirty="0">
                 <a:solidFill>
                   <a:srgbClr val="D4D4D4"/>
                 </a:solidFill>
                 <a:latin typeface="Consolas" panose="020B0609020204030204" pitchFamily="49" charset="0"/>
               </a:rPr>
-              <a:t>=</a:t>
-            </a:r>
-            <a:r>
-              <a:rPr lang="pl-PL" sz="1100" dirty="0">
-                <a:solidFill>
-                  <a:srgbClr val="BBBEBF"/>
+              <a:t>@</a:t>
+            </a:r>
+            <a:r>
+              <a:rPr lang="pl-PL" sz="1200" dirty="0">
+                <a:solidFill>
+                  <a:srgbClr val="CCCCCC"/>
+                </a:solidFill>
+                <a:latin typeface="Consolas" panose="020B0609020204030204" pitchFamily="49" charset="0"/>
+              </a:rPr>
+              <a:t> H.T </a:t>
+            </a:r>
+            <a:r>
+              <a:rPr lang="pl-PL" sz="1200" dirty="0">
+                <a:solidFill>
+                  <a:srgbClr val="D4D4D4"/>
+                </a:solidFill>
+                <a:latin typeface="Consolas" panose="020B0609020204030204" pitchFamily="49" charset="0"/>
+              </a:rPr>
+              <a:t>+</a:t>
+            </a:r>
+            <a:r>
+              <a:rPr lang="pl-PL" sz="1200" dirty="0">
+                <a:solidFill>
+                  <a:srgbClr val="CCCCCC"/>
                 </a:solidFill>
                 <a:latin typeface="Consolas" panose="020B0609020204030204" pitchFamily="49" charset="0"/>
               </a:rPr>
               <a:t> </a:t>
             </a:r>
             <a:r>
-              <a:rPr lang="pl-PL" sz="1100" dirty="0">
-                <a:solidFill>
-                  <a:srgbClr val="79C0FF"/>
-                </a:solidFill>
-                <a:latin typeface="Consolas" panose="020B0609020204030204" pitchFamily="49" charset="0"/>
-              </a:rPr>
-              <a:t>H</a:t>
-            </a:r>
-            <a:r>
-              <a:rPr lang="pl-PL" sz="1100" dirty="0">
-                <a:solidFill>
-                  <a:srgbClr val="BBBEBF"/>
-                </a:solidFill>
-                <a:latin typeface="Consolas" panose="020B0609020204030204" pitchFamily="49" charset="0"/>
-              </a:rPr>
-              <a:t> </a:t>
-            </a:r>
-            <a:r>
-              <a:rPr lang="pl-PL" sz="1100" dirty="0">
-                <a:solidFill>
-                  <a:srgbClr val="DCDCAA"/>
-                </a:solidFill>
-                <a:latin typeface="Consolas" panose="020B0609020204030204" pitchFamily="49" charset="0"/>
-              </a:rPr>
-              <a:t>@</a:t>
-            </a:r>
-            <a:r>
-              <a:rPr lang="pl-PL" sz="1100" dirty="0">
-                <a:solidFill>
-                  <a:srgbClr val="BBBEBF"/>
-                </a:solidFill>
-                <a:latin typeface="Consolas" panose="020B0609020204030204" pitchFamily="49" charset="0"/>
-              </a:rPr>
-              <a:t> </a:t>
-            </a:r>
-            <a:r>
-              <a:rPr lang="pl-PL" sz="1100" dirty="0" err="1">
-                <a:solidFill>
-                  <a:srgbClr val="C9D1D9"/>
+              <a:rPr lang="pl-PL" sz="1200" dirty="0" err="1">
+                <a:solidFill>
+                  <a:srgbClr val="569CD6"/>
                 </a:solidFill>
                 <a:latin typeface="Consolas" panose="020B0609020204030204" pitchFamily="49" charset="0"/>
               </a:rPr>
               <a:t>self</a:t>
             </a:r>
             <a:r>
-              <a:rPr lang="pl-PL" sz="1100" dirty="0" err="1">
-                <a:solidFill>
-                  <a:srgbClr val="BBBEBF"/>
-                </a:solidFill>
-                <a:latin typeface="Consolas" panose="020B0609020204030204" pitchFamily="49" charset="0"/>
-              </a:rPr>
-              <a:t>.</a:t>
-            </a:r>
-            <a:r>
-              <a:rPr lang="pl-PL" sz="1100" dirty="0" err="1">
-                <a:solidFill>
-                  <a:srgbClr val="C9D1D9"/>
-                </a:solidFill>
-                <a:latin typeface="Consolas" panose="020B0609020204030204" pitchFamily="49" charset="0"/>
-              </a:rPr>
-              <a:t>P</a:t>
-            </a:r>
-            <a:r>
-              <a:rPr lang="pl-PL" sz="1100" dirty="0">
-                <a:solidFill>
-                  <a:srgbClr val="BBBEBF"/>
-                </a:solidFill>
-                <a:latin typeface="Consolas" panose="020B0609020204030204" pitchFamily="49" charset="0"/>
-              </a:rPr>
-              <a:t> </a:t>
-            </a:r>
-            <a:r>
-              <a:rPr lang="pl-PL" sz="1100" dirty="0">
-                <a:solidFill>
-                  <a:srgbClr val="DCDCAA"/>
-                </a:solidFill>
-                <a:latin typeface="Consolas" panose="020B0609020204030204" pitchFamily="49" charset="0"/>
-              </a:rPr>
-              <a:t>@</a:t>
-            </a:r>
-            <a:r>
-              <a:rPr lang="pl-PL" sz="1100" dirty="0">
-                <a:solidFill>
-                  <a:srgbClr val="BBBEBF"/>
-                </a:solidFill>
-                <a:latin typeface="Consolas" panose="020B0609020204030204" pitchFamily="49" charset="0"/>
-              </a:rPr>
-              <a:t> </a:t>
-            </a:r>
-            <a:r>
-              <a:rPr lang="pl-PL" sz="1100" dirty="0">
-                <a:solidFill>
-                  <a:srgbClr val="79C0FF"/>
-                </a:solidFill>
-                <a:latin typeface="Consolas" panose="020B0609020204030204" pitchFamily="49" charset="0"/>
-              </a:rPr>
-              <a:t>H</a:t>
-            </a:r>
-            <a:r>
-              <a:rPr lang="pl-PL" sz="1100" dirty="0">
-                <a:solidFill>
-                  <a:srgbClr val="BBBEBF"/>
-                </a:solidFill>
-                <a:latin typeface="Consolas" panose="020B0609020204030204" pitchFamily="49" charset="0"/>
-              </a:rPr>
-              <a:t>.</a:t>
-            </a:r>
-            <a:r>
-              <a:rPr lang="pl-PL" sz="1100" dirty="0">
-                <a:solidFill>
-                  <a:srgbClr val="C9D1D9"/>
-                </a:solidFill>
-                <a:latin typeface="Consolas" panose="020B0609020204030204" pitchFamily="49" charset="0"/>
-              </a:rPr>
-              <a:t>T</a:t>
-            </a:r>
-            <a:r>
-              <a:rPr lang="pl-PL" sz="1100" dirty="0">
-                <a:solidFill>
-                  <a:srgbClr val="BBBEBF"/>
-                </a:solidFill>
-                <a:latin typeface="Consolas" panose="020B0609020204030204" pitchFamily="49" charset="0"/>
-              </a:rPr>
-              <a:t> </a:t>
-            </a:r>
-            <a:r>
-              <a:rPr lang="pl-PL" sz="1100" dirty="0">
-                <a:solidFill>
-                  <a:srgbClr val="DCDCAA"/>
-                </a:solidFill>
-                <a:latin typeface="Consolas" panose="020B0609020204030204" pitchFamily="49" charset="0"/>
-              </a:rPr>
-              <a:t>+</a:t>
-            </a:r>
-            <a:r>
-              <a:rPr lang="pl-PL" sz="1100" dirty="0">
-                <a:solidFill>
-                  <a:srgbClr val="BBBEBF"/>
-                </a:solidFill>
-                <a:latin typeface="Consolas" panose="020B0609020204030204" pitchFamily="49" charset="0"/>
-              </a:rPr>
-              <a:t> </a:t>
-            </a:r>
-            <a:r>
-              <a:rPr lang="pl-PL" sz="1100" dirty="0" err="1">
-                <a:solidFill>
-                  <a:srgbClr val="C9D1D9"/>
-                </a:solidFill>
-                <a:latin typeface="Consolas" panose="020B0609020204030204" pitchFamily="49" charset="0"/>
-              </a:rPr>
-              <a:t>self</a:t>
-            </a:r>
-            <a:r>
-              <a:rPr lang="pl-PL" sz="1100" dirty="0" err="1">
-                <a:solidFill>
-                  <a:srgbClr val="BBBEBF"/>
-                </a:solidFill>
-                <a:latin typeface="Consolas" panose="020B0609020204030204" pitchFamily="49" charset="0"/>
-              </a:rPr>
-              <a:t>.</a:t>
-            </a:r>
-            <a:r>
-              <a:rPr lang="pl-PL" sz="1100" dirty="0" err="1">
-                <a:solidFill>
-                  <a:srgbClr val="C9D1D9"/>
-                </a:solidFill>
-                <a:latin typeface="Consolas" panose="020B0609020204030204" pitchFamily="49" charset="0"/>
-              </a:rPr>
-              <a:t>R</a:t>
-            </a:r>
-            <a:endParaRPr lang="pl-PL" sz="1100" dirty="0">
+              <a:rPr lang="pl-PL" sz="1200" dirty="0" err="1">
+                <a:solidFill>
+                  <a:srgbClr val="CCCCCC"/>
+                </a:solidFill>
+                <a:latin typeface="Consolas" panose="020B0609020204030204" pitchFamily="49" charset="0"/>
+              </a:rPr>
+              <a:t>.R</a:t>
+            </a:r>
+            <a:endParaRPr lang="pl-PL" sz="1200" dirty="0">
               <a:solidFill>
-                <a:srgbClr val="BBBEBF"/>
+                <a:srgbClr val="CCCCCC"/>
               </a:solidFill>
               <a:latin typeface="Consolas" panose="020B0609020204030204" pitchFamily="49" charset="0"/>
             </a:endParaRPr>
@@ -19197,229 +18468,112 @@
               </a:lnSpc>
             </a:pPr>
             <a:r>
-              <a:rPr lang="pl-PL" sz="1100" dirty="0">
-                <a:solidFill>
-                  <a:srgbClr val="BBBEBF"/>
-                </a:solidFill>
-                <a:latin typeface="Consolas" panose="020B0609020204030204" pitchFamily="49" charset="0"/>
-              </a:rPr>
-              <a:t>        </a:t>
-            </a:r>
-            <a:r>
-              <a:rPr lang="pl-PL" sz="1100" dirty="0">
-                <a:solidFill>
-                  <a:srgbClr val="79C0FF"/>
-                </a:solidFill>
-                <a:latin typeface="Consolas" panose="020B0609020204030204" pitchFamily="49" charset="0"/>
-              </a:rPr>
-              <a:t>K</a:t>
-            </a:r>
-            <a:r>
-              <a:rPr lang="pl-PL" sz="1100" dirty="0">
-                <a:solidFill>
-                  <a:srgbClr val="BBBEBF"/>
+              <a:rPr lang="pl-PL" sz="1200" dirty="0">
+                <a:solidFill>
+                  <a:srgbClr val="CCCCCC"/>
+                </a:solidFill>
+                <a:latin typeface="Consolas" panose="020B0609020204030204" pitchFamily="49" charset="0"/>
+              </a:rPr>
+              <a:t>        K </a:t>
+            </a:r>
+            <a:r>
+              <a:rPr lang="pl-PL" sz="1200" dirty="0">
+                <a:solidFill>
+                  <a:srgbClr val="D4D4D4"/>
+                </a:solidFill>
+                <a:latin typeface="Consolas" panose="020B0609020204030204" pitchFamily="49" charset="0"/>
+              </a:rPr>
+              <a:t>=</a:t>
+            </a:r>
+            <a:r>
+              <a:rPr lang="pl-PL" sz="1200" dirty="0">
+                <a:solidFill>
+                  <a:srgbClr val="CCCCCC"/>
                 </a:solidFill>
                 <a:latin typeface="Consolas" panose="020B0609020204030204" pitchFamily="49" charset="0"/>
               </a:rPr>
               <a:t> </a:t>
             </a:r>
             <a:r>
-              <a:rPr lang="pl-PL" sz="1100" dirty="0">
+              <a:rPr lang="pl-PL" sz="1200" dirty="0" err="1">
+                <a:solidFill>
+                  <a:srgbClr val="569CD6"/>
+                </a:solidFill>
+                <a:latin typeface="Consolas" panose="020B0609020204030204" pitchFamily="49" charset="0"/>
+              </a:rPr>
+              <a:t>self</a:t>
+            </a:r>
+            <a:r>
+              <a:rPr lang="pl-PL" sz="1200" dirty="0" err="1">
+                <a:solidFill>
+                  <a:srgbClr val="CCCCCC"/>
+                </a:solidFill>
+                <a:latin typeface="Consolas" panose="020B0609020204030204" pitchFamily="49" charset="0"/>
+              </a:rPr>
+              <a:t>.P</a:t>
+            </a:r>
+            <a:r>
+              <a:rPr lang="pl-PL" sz="1200" dirty="0">
+                <a:solidFill>
+                  <a:srgbClr val="CCCCCC"/>
+                </a:solidFill>
+                <a:latin typeface="Consolas" panose="020B0609020204030204" pitchFamily="49" charset="0"/>
+              </a:rPr>
+              <a:t> </a:t>
+            </a:r>
+            <a:r>
+              <a:rPr lang="pl-PL" sz="1200" dirty="0">
                 <a:solidFill>
                   <a:srgbClr val="D4D4D4"/>
                 </a:solidFill>
                 <a:latin typeface="Consolas" panose="020B0609020204030204" pitchFamily="49" charset="0"/>
               </a:rPr>
-              <a:t>=</a:t>
-            </a:r>
-            <a:r>
-              <a:rPr lang="pl-PL" sz="1100" dirty="0">
-                <a:solidFill>
-                  <a:srgbClr val="BBBEBF"/>
+              <a:t>@</a:t>
+            </a:r>
+            <a:r>
+              <a:rPr lang="pl-PL" sz="1200" dirty="0">
+                <a:solidFill>
+                  <a:srgbClr val="CCCCCC"/>
+                </a:solidFill>
+                <a:latin typeface="Consolas" panose="020B0609020204030204" pitchFamily="49" charset="0"/>
+              </a:rPr>
+              <a:t> H.T </a:t>
+            </a:r>
+            <a:r>
+              <a:rPr lang="pl-PL" sz="1200" dirty="0">
+                <a:solidFill>
+                  <a:srgbClr val="D4D4D4"/>
+                </a:solidFill>
+                <a:latin typeface="Consolas" panose="020B0609020204030204" pitchFamily="49" charset="0"/>
+              </a:rPr>
+              <a:t>@</a:t>
+            </a:r>
+            <a:r>
+              <a:rPr lang="pl-PL" sz="1200" dirty="0">
+                <a:solidFill>
+                  <a:srgbClr val="CCCCCC"/>
                 </a:solidFill>
                 <a:latin typeface="Consolas" panose="020B0609020204030204" pitchFamily="49" charset="0"/>
               </a:rPr>
               <a:t> </a:t>
             </a:r>
             <a:r>
-              <a:rPr lang="pl-PL" sz="1100" dirty="0" err="1">
-                <a:solidFill>
-                  <a:srgbClr val="C9D1D9"/>
-                </a:solidFill>
-                <a:latin typeface="Consolas" panose="020B0609020204030204" pitchFamily="49" charset="0"/>
-              </a:rPr>
-              <a:t>self</a:t>
-            </a:r>
-            <a:r>
-              <a:rPr lang="pl-PL" sz="1100" dirty="0" err="1">
-                <a:solidFill>
-                  <a:srgbClr val="BBBEBF"/>
-                </a:solidFill>
-                <a:latin typeface="Consolas" panose="020B0609020204030204" pitchFamily="49" charset="0"/>
-              </a:rPr>
-              <a:t>.</a:t>
-            </a:r>
-            <a:r>
-              <a:rPr lang="pl-PL" sz="1100" dirty="0" err="1">
-                <a:solidFill>
-                  <a:srgbClr val="C9D1D9"/>
-                </a:solidFill>
-                <a:latin typeface="Consolas" panose="020B0609020204030204" pitchFamily="49" charset="0"/>
-              </a:rPr>
-              <a:t>P</a:t>
-            </a:r>
-            <a:r>
-              <a:rPr lang="pl-PL" sz="1100" dirty="0">
-                <a:solidFill>
-                  <a:srgbClr val="BBBEBF"/>
-                </a:solidFill>
-                <a:latin typeface="Consolas" panose="020B0609020204030204" pitchFamily="49" charset="0"/>
-              </a:rPr>
-              <a:t> </a:t>
-            </a:r>
-            <a:r>
-              <a:rPr lang="pl-PL" sz="1100" dirty="0">
-                <a:solidFill>
-                  <a:srgbClr val="DCDCAA"/>
-                </a:solidFill>
-                <a:latin typeface="Consolas" panose="020B0609020204030204" pitchFamily="49" charset="0"/>
-              </a:rPr>
-              <a:t>@</a:t>
-            </a:r>
-            <a:r>
-              <a:rPr lang="pl-PL" sz="1100" dirty="0">
-                <a:solidFill>
-                  <a:srgbClr val="BBBEBF"/>
-                </a:solidFill>
-                <a:latin typeface="Consolas" panose="020B0609020204030204" pitchFamily="49" charset="0"/>
-              </a:rPr>
-              <a:t> </a:t>
-            </a:r>
-            <a:r>
-              <a:rPr lang="pl-PL" sz="1100" dirty="0">
-                <a:solidFill>
-                  <a:srgbClr val="79C0FF"/>
-                </a:solidFill>
-                <a:latin typeface="Consolas" panose="020B0609020204030204" pitchFamily="49" charset="0"/>
-              </a:rPr>
-              <a:t>H</a:t>
-            </a:r>
-            <a:r>
-              <a:rPr lang="pl-PL" sz="1100" dirty="0">
-                <a:solidFill>
-                  <a:srgbClr val="BBBEBF"/>
-                </a:solidFill>
-                <a:latin typeface="Consolas" panose="020B0609020204030204" pitchFamily="49" charset="0"/>
-              </a:rPr>
-              <a:t>.</a:t>
-            </a:r>
-            <a:r>
-              <a:rPr lang="pl-PL" sz="1100" dirty="0">
-                <a:solidFill>
-                  <a:srgbClr val="C9D1D9"/>
-                </a:solidFill>
-                <a:latin typeface="Consolas" panose="020B0609020204030204" pitchFamily="49" charset="0"/>
-              </a:rPr>
-              <a:t>T</a:t>
-            </a:r>
-            <a:r>
-              <a:rPr lang="pl-PL" sz="1100" dirty="0">
-                <a:solidFill>
-                  <a:srgbClr val="BBBEBF"/>
-                </a:solidFill>
-                <a:latin typeface="Consolas" panose="020B0609020204030204" pitchFamily="49" charset="0"/>
-              </a:rPr>
-              <a:t> </a:t>
-            </a:r>
-            <a:r>
-              <a:rPr lang="pl-PL" sz="1100" dirty="0">
-                <a:solidFill>
-                  <a:srgbClr val="DCDCAA"/>
-                </a:solidFill>
-                <a:latin typeface="Consolas" panose="020B0609020204030204" pitchFamily="49" charset="0"/>
-              </a:rPr>
-              <a:t>@</a:t>
-            </a:r>
-            <a:r>
-              <a:rPr lang="pl-PL" sz="1100" dirty="0">
-                <a:solidFill>
-                  <a:srgbClr val="BBBEBF"/>
-                </a:solidFill>
-                <a:latin typeface="Consolas" panose="020B0609020204030204" pitchFamily="49" charset="0"/>
-              </a:rPr>
-              <a:t> </a:t>
-            </a:r>
-            <a:r>
-              <a:rPr lang="pl-PL" sz="1100" dirty="0" err="1">
-                <a:solidFill>
-                  <a:srgbClr val="4EC9B0"/>
-                </a:solidFill>
-                <a:latin typeface="Consolas" panose="020B0609020204030204" pitchFamily="49" charset="0"/>
-              </a:rPr>
-              <a:t>np</a:t>
-            </a:r>
-            <a:r>
-              <a:rPr lang="pl-PL" sz="1100" dirty="0" err="1">
-                <a:solidFill>
-                  <a:srgbClr val="BBBEBF"/>
-                </a:solidFill>
-                <a:latin typeface="Consolas" panose="020B0609020204030204" pitchFamily="49" charset="0"/>
-              </a:rPr>
-              <a:t>.</a:t>
-            </a:r>
-            <a:r>
-              <a:rPr lang="pl-PL" sz="1100" dirty="0" err="1">
-                <a:solidFill>
-                  <a:srgbClr val="4EC9B0"/>
-                </a:solidFill>
-                <a:latin typeface="Consolas" panose="020B0609020204030204" pitchFamily="49" charset="0"/>
-              </a:rPr>
-              <a:t>linalg</a:t>
-            </a:r>
-            <a:r>
-              <a:rPr lang="pl-PL" sz="1100" dirty="0" err="1">
-                <a:solidFill>
-                  <a:srgbClr val="BBBEBF"/>
-                </a:solidFill>
-                <a:latin typeface="Consolas" panose="020B0609020204030204" pitchFamily="49" charset="0"/>
-              </a:rPr>
-              <a:t>.</a:t>
-            </a:r>
-            <a:r>
-              <a:rPr lang="pl-PL" sz="1100" dirty="0" err="1">
-                <a:solidFill>
-                  <a:srgbClr val="D2A8FF"/>
-                </a:solidFill>
-                <a:latin typeface="Consolas" panose="020B0609020204030204" pitchFamily="49" charset="0"/>
-              </a:rPr>
-              <a:t>inv</a:t>
-            </a:r>
-            <a:r>
-              <a:rPr lang="pl-PL" sz="1100" dirty="0">
-                <a:solidFill>
-                  <a:srgbClr val="BBBEBF"/>
-                </a:solidFill>
-                <a:latin typeface="Consolas" panose="020B0609020204030204" pitchFamily="49" charset="0"/>
-              </a:rPr>
-              <a:t>(</a:t>
-            </a:r>
-            <a:r>
-              <a:rPr lang="pl-PL" sz="1100" dirty="0">
-                <a:solidFill>
-                  <a:srgbClr val="79C0FF"/>
-                </a:solidFill>
-                <a:latin typeface="Consolas" panose="020B0609020204030204" pitchFamily="49" charset="0"/>
-              </a:rPr>
-              <a:t>S</a:t>
-            </a:r>
-            <a:r>
-              <a:rPr lang="pl-PL" sz="1100" dirty="0">
-                <a:solidFill>
-                  <a:srgbClr val="BBBEBF"/>
-                </a:solidFill>
-                <a:latin typeface="Consolas" panose="020B0609020204030204" pitchFamily="49" charset="0"/>
-              </a:rPr>
-              <a:t>)</a:t>
+              <a:rPr lang="pl-PL" sz="1200" dirty="0" err="1">
+                <a:solidFill>
+                  <a:srgbClr val="CCCCCC"/>
+                </a:solidFill>
+                <a:latin typeface="Consolas" panose="020B0609020204030204" pitchFamily="49" charset="0"/>
+              </a:rPr>
+              <a:t>np.linalg.inv</a:t>
+            </a:r>
+            <a:r>
+              <a:rPr lang="pl-PL" sz="1200" dirty="0">
+                <a:solidFill>
+                  <a:srgbClr val="CCCCCC"/>
+                </a:solidFill>
+                <a:latin typeface="Consolas" panose="020B0609020204030204" pitchFamily="49" charset="0"/>
+              </a:rPr>
+              <a:t>(S)</a:t>
             </a:r>
           </a:p>
           <a:p>
@@ -19429,178 +18583,142 @@
               </a:lnSpc>
             </a:pPr>
             <a:r>
-              <a:rPr lang="pl-PL" sz="1100" dirty="0">
-                <a:solidFill>
-                  <a:srgbClr val="BBBEBF"/>
+              <a:rPr lang="pl-PL" sz="1200" dirty="0">
+                <a:solidFill>
+                  <a:srgbClr val="CCCCCC"/>
                 </a:solidFill>
                 <a:latin typeface="Consolas" panose="020B0609020204030204" pitchFamily="49" charset="0"/>
               </a:rPr>
               <a:t>        </a:t>
             </a:r>
             <a:r>
-              <a:rPr lang="pl-PL" sz="1100" dirty="0" err="1">
-                <a:solidFill>
-                  <a:srgbClr val="C9D1D9"/>
+              <a:rPr lang="pl-PL" sz="1200" dirty="0" err="1">
+                <a:solidFill>
+                  <a:srgbClr val="569CD6"/>
                 </a:solidFill>
                 <a:latin typeface="Consolas" panose="020B0609020204030204" pitchFamily="49" charset="0"/>
               </a:rPr>
               <a:t>self</a:t>
             </a:r>
             <a:r>
-              <a:rPr lang="pl-PL" sz="1100" dirty="0" err="1">
-                <a:solidFill>
-                  <a:srgbClr val="BBBEBF"/>
-                </a:solidFill>
-                <a:latin typeface="Consolas" panose="020B0609020204030204" pitchFamily="49" charset="0"/>
-              </a:rPr>
-              <a:t>.</a:t>
-            </a:r>
-            <a:r>
-              <a:rPr lang="pl-PL" sz="1100" dirty="0" err="1">
-                <a:solidFill>
-                  <a:srgbClr val="C9D1D9"/>
-                </a:solidFill>
-                <a:latin typeface="Consolas" panose="020B0609020204030204" pitchFamily="49" charset="0"/>
-              </a:rPr>
-              <a:t>x</a:t>
-            </a:r>
-            <a:r>
-              <a:rPr lang="pl-PL" sz="1100" dirty="0">
-                <a:solidFill>
-                  <a:srgbClr val="BBBEBF"/>
+              <a:rPr lang="pl-PL" sz="1200" dirty="0" err="1">
+                <a:solidFill>
+                  <a:srgbClr val="CCCCCC"/>
+                </a:solidFill>
+                <a:latin typeface="Consolas" panose="020B0609020204030204" pitchFamily="49" charset="0"/>
+              </a:rPr>
+              <a:t>.x</a:t>
+            </a:r>
+            <a:r>
+              <a:rPr lang="pl-PL" sz="1200" dirty="0">
+                <a:solidFill>
+                  <a:srgbClr val="CCCCCC"/>
                 </a:solidFill>
                 <a:latin typeface="Consolas" panose="020B0609020204030204" pitchFamily="49" charset="0"/>
               </a:rPr>
               <a:t> </a:t>
             </a:r>
             <a:r>
-              <a:rPr lang="pl-PL" sz="1100" dirty="0">
-                <a:solidFill>
-                  <a:srgbClr val="DCDCAA"/>
+              <a:rPr lang="pl-PL" sz="1200" dirty="0">
+                <a:solidFill>
+                  <a:srgbClr val="D4D4D4"/>
                 </a:solidFill>
                 <a:latin typeface="Consolas" panose="020B0609020204030204" pitchFamily="49" charset="0"/>
               </a:rPr>
               <a:t>+=</a:t>
             </a:r>
             <a:r>
-              <a:rPr lang="pl-PL" sz="1100" dirty="0">
-                <a:solidFill>
-                  <a:srgbClr val="BBBEBF"/>
+              <a:rPr lang="pl-PL" sz="1200" dirty="0">
+                <a:solidFill>
+                  <a:srgbClr val="CCCCCC"/>
+                </a:solidFill>
+                <a:latin typeface="Consolas" panose="020B0609020204030204" pitchFamily="49" charset="0"/>
+              </a:rPr>
+              <a:t> K </a:t>
+            </a:r>
+            <a:r>
+              <a:rPr lang="pl-PL" sz="1200" dirty="0">
+                <a:solidFill>
+                  <a:srgbClr val="D4D4D4"/>
+                </a:solidFill>
+                <a:latin typeface="Consolas" panose="020B0609020204030204" pitchFamily="49" charset="0"/>
+              </a:rPr>
+              <a:t>@</a:t>
+            </a:r>
+            <a:r>
+              <a:rPr lang="pl-PL" sz="1200" dirty="0">
+                <a:solidFill>
+                  <a:srgbClr val="CCCCCC"/>
+                </a:solidFill>
+                <a:latin typeface="Consolas" panose="020B0609020204030204" pitchFamily="49" charset="0"/>
+              </a:rPr>
+              <a:t> (</a:t>
+            </a:r>
+            <a:r>
+              <a:rPr lang="pl-PL" sz="1200" dirty="0" err="1">
+                <a:solidFill>
+                  <a:srgbClr val="CCCCCC"/>
+                </a:solidFill>
+                <a:latin typeface="Consolas" panose="020B0609020204030204" pitchFamily="49" charset="0"/>
+              </a:rPr>
+              <a:t>z_xy</a:t>
+            </a:r>
+            <a:r>
+              <a:rPr lang="pl-PL" sz="1200" dirty="0">
+                <a:solidFill>
+                  <a:srgbClr val="CCCCCC"/>
                 </a:solidFill>
                 <a:latin typeface="Consolas" panose="020B0609020204030204" pitchFamily="49" charset="0"/>
               </a:rPr>
               <a:t> </a:t>
             </a:r>
             <a:r>
-              <a:rPr lang="pl-PL" sz="1100" dirty="0">
-                <a:solidFill>
-                  <a:srgbClr val="79C0FF"/>
-                </a:solidFill>
-                <a:latin typeface="Consolas" panose="020B0609020204030204" pitchFamily="49" charset="0"/>
-              </a:rPr>
-              <a:t>K</a:t>
-            </a:r>
-            <a:r>
-              <a:rPr lang="pl-PL" sz="1100" dirty="0">
-                <a:solidFill>
-                  <a:srgbClr val="BBBEBF"/>
+              <a:rPr lang="pl-PL" sz="1200" dirty="0">
+                <a:solidFill>
+                  <a:srgbClr val="D4D4D4"/>
+                </a:solidFill>
+                <a:latin typeface="Consolas" panose="020B0609020204030204" pitchFamily="49" charset="0"/>
+              </a:rPr>
+              <a:t>-</a:t>
+            </a:r>
+            <a:r>
+              <a:rPr lang="pl-PL" sz="1200" dirty="0">
+                <a:solidFill>
+                  <a:srgbClr val="CCCCCC"/>
                 </a:solidFill>
                 <a:latin typeface="Consolas" panose="020B0609020204030204" pitchFamily="49" charset="0"/>
               </a:rPr>
               <a:t> </a:t>
             </a:r>
             <a:r>
-              <a:rPr lang="pl-PL" sz="1100" dirty="0">
-                <a:solidFill>
-                  <a:srgbClr val="DCDCAA"/>
-                </a:solidFill>
-                <a:latin typeface="Consolas" panose="020B0609020204030204" pitchFamily="49" charset="0"/>
-              </a:rPr>
-              <a:t>@</a:t>
-            </a:r>
-            <a:r>
-              <a:rPr lang="pl-PL" sz="1100" dirty="0">
-                <a:solidFill>
-                  <a:srgbClr val="BBBEBF"/>
-                </a:solidFill>
-                <a:latin typeface="Consolas" panose="020B0609020204030204" pitchFamily="49" charset="0"/>
-              </a:rPr>
-              <a:t> (</a:t>
-            </a:r>
-            <a:r>
-              <a:rPr lang="pl-PL" sz="1100" dirty="0" err="1">
-                <a:solidFill>
-                  <a:srgbClr val="FFA657"/>
-                </a:solidFill>
-                <a:latin typeface="Consolas" panose="020B0609020204030204" pitchFamily="49" charset="0"/>
-              </a:rPr>
-              <a:t>z_xy</a:t>
-            </a:r>
-            <a:r>
-              <a:rPr lang="pl-PL" sz="1100" dirty="0">
-                <a:solidFill>
-                  <a:srgbClr val="BBBEBF"/>
-                </a:solidFill>
-                <a:latin typeface="Consolas" panose="020B0609020204030204" pitchFamily="49" charset="0"/>
-              </a:rPr>
-              <a:t> </a:t>
-            </a:r>
-            <a:r>
-              <a:rPr lang="pl-PL" sz="1100" dirty="0">
-                <a:solidFill>
-                  <a:srgbClr val="DCDCAA"/>
-                </a:solidFill>
-                <a:latin typeface="Consolas" panose="020B0609020204030204" pitchFamily="49" charset="0"/>
-              </a:rPr>
-              <a:t>-</a:t>
-            </a:r>
-            <a:r>
-              <a:rPr lang="pl-PL" sz="1100" dirty="0">
-                <a:solidFill>
-                  <a:srgbClr val="BBBEBF"/>
-                </a:solidFill>
-                <a:latin typeface="Consolas" panose="020B0609020204030204" pitchFamily="49" charset="0"/>
-              </a:rPr>
-              <a:t> </a:t>
-            </a:r>
-            <a:r>
-              <a:rPr lang="pl-PL" sz="1100" dirty="0" err="1">
-                <a:solidFill>
-                  <a:srgbClr val="C9D1D9"/>
+              <a:rPr lang="pl-PL" sz="1200" dirty="0" err="1">
+                <a:solidFill>
+                  <a:srgbClr val="569CD6"/>
                 </a:solidFill>
                 <a:latin typeface="Consolas" panose="020B0609020204030204" pitchFamily="49" charset="0"/>
               </a:rPr>
               <a:t>self</a:t>
             </a:r>
             <a:r>
-              <a:rPr lang="pl-PL" sz="1100" dirty="0" err="1">
-                <a:solidFill>
-                  <a:srgbClr val="BBBEBF"/>
-                </a:solidFill>
-                <a:latin typeface="Consolas" panose="020B0609020204030204" pitchFamily="49" charset="0"/>
-              </a:rPr>
-              <a:t>.</a:t>
-            </a:r>
-            <a:r>
-              <a:rPr lang="pl-PL" sz="1100" dirty="0" err="1">
-                <a:solidFill>
-                  <a:srgbClr val="C9D1D9"/>
-                </a:solidFill>
-                <a:latin typeface="Consolas" panose="020B0609020204030204" pitchFamily="49" charset="0"/>
-              </a:rPr>
-              <a:t>x</a:t>
-            </a:r>
-            <a:r>
-              <a:rPr lang="pl-PL" sz="1100" dirty="0">
-                <a:solidFill>
-                  <a:srgbClr val="BBBEBF"/>
+              <a:rPr lang="pl-PL" sz="1200" dirty="0" err="1">
+                <a:solidFill>
+                  <a:srgbClr val="CCCCCC"/>
+                </a:solidFill>
+                <a:latin typeface="Consolas" panose="020B0609020204030204" pitchFamily="49" charset="0"/>
+              </a:rPr>
+              <a:t>.x</a:t>
+            </a:r>
+            <a:r>
+              <a:rPr lang="pl-PL" sz="1200" dirty="0">
+                <a:solidFill>
+                  <a:srgbClr val="CCCCCC"/>
                 </a:solidFill>
                 <a:latin typeface="Consolas" panose="020B0609020204030204" pitchFamily="49" charset="0"/>
               </a:rPr>
               <a:t>[:</a:t>
             </a:r>
             <a:r>
-              <a:rPr lang="pl-PL" sz="1100" dirty="0">
+              <a:rPr lang="pl-PL" sz="1200" dirty="0">
                 <a:solidFill>
                   <a:srgbClr val="B5CEA8"/>
                 </a:solidFill>
@@ -19609,9 +18727,9 @@
               <a:t>2</a:t>
             </a:r>
             <a:r>
-              <a:rPr lang="pl-PL" sz="1100" dirty="0">
-                <a:solidFill>
-                  <a:srgbClr val="BBBEBF"/>
+              <a:rPr lang="pl-PL" sz="1200" dirty="0">
+                <a:solidFill>
+                  <a:srgbClr val="CCCCCC"/>
                 </a:solidFill>
                 <a:latin typeface="Consolas" panose="020B0609020204030204" pitchFamily="49" charset="0"/>
               </a:rPr>
@@ -19625,52 +18743,43 @@
               </a:lnSpc>
             </a:pPr>
             <a:r>
-              <a:rPr lang="pl-PL" sz="1100" dirty="0">
-                <a:solidFill>
-                  <a:srgbClr val="BBBEBF"/>
+              <a:rPr lang="pl-PL" sz="1200" dirty="0">
+                <a:solidFill>
+                  <a:srgbClr val="CCCCCC"/>
                 </a:solidFill>
                 <a:latin typeface="Consolas" panose="020B0609020204030204" pitchFamily="49" charset="0"/>
               </a:rPr>
               <a:t>        </a:t>
             </a:r>
             <a:r>
-              <a:rPr lang="pl-PL" sz="1100" dirty="0" err="1">
-                <a:solidFill>
-                  <a:srgbClr val="C9D1D9"/>
+              <a:rPr lang="pl-PL" sz="1200" dirty="0" err="1">
+                <a:solidFill>
+                  <a:srgbClr val="569CD6"/>
                 </a:solidFill>
                 <a:latin typeface="Consolas" panose="020B0609020204030204" pitchFamily="49" charset="0"/>
               </a:rPr>
               <a:t>self</a:t>
             </a:r>
             <a:r>
-              <a:rPr lang="pl-PL" sz="1100" dirty="0" err="1">
-                <a:solidFill>
-                  <a:srgbClr val="BBBEBF"/>
-                </a:solidFill>
-                <a:latin typeface="Consolas" panose="020B0609020204030204" pitchFamily="49" charset="0"/>
-              </a:rPr>
-              <a:t>.</a:t>
-            </a:r>
-            <a:r>
-              <a:rPr lang="pl-PL" sz="1100" dirty="0" err="1">
-                <a:solidFill>
-                  <a:srgbClr val="C9D1D9"/>
-                </a:solidFill>
-                <a:latin typeface="Consolas" panose="020B0609020204030204" pitchFamily="49" charset="0"/>
-              </a:rPr>
-              <a:t>P</a:t>
-            </a:r>
-            <a:r>
-              <a:rPr lang="pl-PL" sz="1100" dirty="0">
-                <a:solidFill>
-                  <a:srgbClr val="BBBEBF"/>
+              <a:rPr lang="pl-PL" sz="1200" dirty="0" err="1">
+                <a:solidFill>
+                  <a:srgbClr val="CCCCCC"/>
+                </a:solidFill>
+                <a:latin typeface="Consolas" panose="020B0609020204030204" pitchFamily="49" charset="0"/>
+              </a:rPr>
+              <a:t>.P</a:t>
+            </a:r>
+            <a:r>
+              <a:rPr lang="pl-PL" sz="1200" dirty="0">
+                <a:solidFill>
+                  <a:srgbClr val="CCCCCC"/>
                 </a:solidFill>
                 <a:latin typeface="Consolas" panose="020B0609020204030204" pitchFamily="49" charset="0"/>
               </a:rPr>
               <a:t> </a:t>
             </a:r>
             <a:r>
-              <a:rPr lang="pl-PL" sz="1100" dirty="0">
+              <a:rPr lang="pl-PL" sz="1200" dirty="0">
                 <a:solidFill>
                   <a:srgbClr val="D4D4D4"/>
                 </a:solidFill>
@@ -19679,52 +18788,34 @@
               <a:t>=</a:t>
             </a:r>
             <a:r>
-              <a:rPr lang="pl-PL" sz="1100" dirty="0">
-                <a:solidFill>
-                  <a:srgbClr val="BBBEBF"/>
+              <a:rPr lang="pl-PL" sz="1200" dirty="0">
+                <a:solidFill>
+                  <a:srgbClr val="CCCCCC"/>
                 </a:solidFill>
                 <a:latin typeface="Consolas" panose="020B0609020204030204" pitchFamily="49" charset="0"/>
               </a:rPr>
               <a:t> (</a:t>
             </a:r>
             <a:r>
-              <a:rPr lang="pl-PL" sz="1100" dirty="0" err="1">
-                <a:solidFill>
-                  <a:srgbClr val="4EC9B0"/>
-                </a:solidFill>
-                <a:latin typeface="Consolas" panose="020B0609020204030204" pitchFamily="49" charset="0"/>
-              </a:rPr>
-              <a:t>np</a:t>
-            </a:r>
-            <a:r>
-              <a:rPr lang="pl-PL" sz="1100" dirty="0" err="1">
-                <a:solidFill>
-                  <a:srgbClr val="BBBEBF"/>
-                </a:solidFill>
-                <a:latin typeface="Consolas" panose="020B0609020204030204" pitchFamily="49" charset="0"/>
-              </a:rPr>
-              <a:t>.</a:t>
-            </a:r>
-            <a:r>
-              <a:rPr lang="pl-PL" sz="1100" dirty="0" err="1">
-                <a:solidFill>
-                  <a:srgbClr val="D2A8FF"/>
-                </a:solidFill>
-                <a:latin typeface="Consolas" panose="020B0609020204030204" pitchFamily="49" charset="0"/>
-              </a:rPr>
-              <a:t>eye</a:t>
-            </a:r>
-            <a:r>
-              <a:rPr lang="pl-PL" sz="1100" dirty="0">
-                <a:solidFill>
-                  <a:srgbClr val="BBBEBF"/>
+              <a:rPr lang="pl-PL" sz="1200" dirty="0" err="1">
+                <a:solidFill>
+                  <a:srgbClr val="CCCCCC"/>
+                </a:solidFill>
+                <a:latin typeface="Consolas" panose="020B0609020204030204" pitchFamily="49" charset="0"/>
+              </a:rPr>
+              <a:t>np.eye</a:t>
+            </a:r>
+            <a:r>
+              <a:rPr lang="pl-PL" sz="1200" dirty="0">
+                <a:solidFill>
+                  <a:srgbClr val="CCCCCC"/>
                 </a:solidFill>
                 <a:latin typeface="Consolas" panose="020B0609020204030204" pitchFamily="49" charset="0"/>
               </a:rPr>
               <a:t>(</a:t>
             </a:r>
             <a:r>
-              <a:rPr lang="pl-PL" sz="1100" dirty="0">
+              <a:rPr lang="pl-PL" sz="1200" dirty="0">
                 <a:solidFill>
                   <a:srgbClr val="B5CEA8"/>
                 </a:solidFill>
@@ -19733,134 +18824,89 @@
               <a:t>3</a:t>
             </a:r>
             <a:r>
-              <a:rPr lang="pl-PL" sz="1100" dirty="0">
-                <a:solidFill>
-                  <a:srgbClr val="BBBEBF"/>
+              <a:rPr lang="pl-PL" sz="1200" dirty="0">
+                <a:solidFill>
+                  <a:srgbClr val="CCCCCC"/>
                 </a:solidFill>
                 <a:latin typeface="Consolas" panose="020B0609020204030204" pitchFamily="49" charset="0"/>
               </a:rPr>
               <a:t>) </a:t>
             </a:r>
             <a:r>
-              <a:rPr lang="pl-PL" sz="1100" dirty="0">
-                <a:solidFill>
-                  <a:srgbClr val="DCDCAA"/>
+              <a:rPr lang="pl-PL" sz="1200" dirty="0">
+                <a:solidFill>
+                  <a:srgbClr val="D4D4D4"/>
                 </a:solidFill>
                 <a:latin typeface="Consolas" panose="020B0609020204030204" pitchFamily="49" charset="0"/>
               </a:rPr>
               <a:t>-</a:t>
             </a:r>
             <a:r>
-              <a:rPr lang="pl-PL" sz="1100" dirty="0">
-                <a:solidFill>
-                  <a:srgbClr val="BBBEBF"/>
+              <a:rPr lang="pl-PL" sz="1200" dirty="0">
+                <a:solidFill>
+                  <a:srgbClr val="CCCCCC"/>
+                </a:solidFill>
+                <a:latin typeface="Consolas" panose="020B0609020204030204" pitchFamily="49" charset="0"/>
+              </a:rPr>
+              <a:t> K </a:t>
+            </a:r>
+            <a:r>
+              <a:rPr lang="pl-PL" sz="1200" dirty="0">
+                <a:solidFill>
+                  <a:srgbClr val="D4D4D4"/>
+                </a:solidFill>
+                <a:latin typeface="Consolas" panose="020B0609020204030204" pitchFamily="49" charset="0"/>
+              </a:rPr>
+              <a:t>@</a:t>
+            </a:r>
+            <a:r>
+              <a:rPr lang="pl-PL" sz="1200" dirty="0">
+                <a:solidFill>
+                  <a:srgbClr val="CCCCCC"/>
+                </a:solidFill>
+                <a:latin typeface="Consolas" panose="020B0609020204030204" pitchFamily="49" charset="0"/>
+              </a:rPr>
+              <a:t> H) </a:t>
+            </a:r>
+            <a:r>
+              <a:rPr lang="pl-PL" sz="1200" dirty="0">
+                <a:solidFill>
+                  <a:srgbClr val="D4D4D4"/>
+                </a:solidFill>
+                <a:latin typeface="Consolas" panose="020B0609020204030204" pitchFamily="49" charset="0"/>
+              </a:rPr>
+              <a:t>@</a:t>
+            </a:r>
+            <a:r>
+              <a:rPr lang="pl-PL" sz="1200" dirty="0">
+                <a:solidFill>
+                  <a:srgbClr val="CCCCCC"/>
                 </a:solidFill>
                 <a:latin typeface="Consolas" panose="020B0609020204030204" pitchFamily="49" charset="0"/>
               </a:rPr>
               <a:t> </a:t>
             </a:r>
             <a:r>
-              <a:rPr lang="pl-PL" sz="1100" dirty="0">
-                <a:solidFill>
-                  <a:srgbClr val="79C0FF"/>
-                </a:solidFill>
-                <a:latin typeface="Consolas" panose="020B0609020204030204" pitchFamily="49" charset="0"/>
-              </a:rPr>
-              <a:t>K</a:t>
-            </a:r>
-            <a:r>
-              <a:rPr lang="pl-PL" sz="1100" dirty="0">
-                <a:solidFill>
-                  <a:srgbClr val="BBBEBF"/>
-                </a:solidFill>
-                <a:latin typeface="Consolas" panose="020B0609020204030204" pitchFamily="49" charset="0"/>
-              </a:rPr>
-              <a:t> </a:t>
-            </a:r>
-            <a:r>
-              <a:rPr lang="pl-PL" sz="1100" dirty="0">
-                <a:solidFill>
-                  <a:srgbClr val="DCDCAA"/>
-                </a:solidFill>
-                <a:latin typeface="Consolas" panose="020B0609020204030204" pitchFamily="49" charset="0"/>
-              </a:rPr>
-              <a:t>@</a:t>
-            </a:r>
-            <a:r>
-              <a:rPr lang="pl-PL" sz="1100" dirty="0">
-                <a:solidFill>
-                  <a:srgbClr val="BBBEBF"/>
-                </a:solidFill>
-                <a:latin typeface="Consolas" panose="020B0609020204030204" pitchFamily="49" charset="0"/>
-              </a:rPr>
-              <a:t> </a:t>
-            </a:r>
-            <a:r>
-              <a:rPr lang="pl-PL" sz="1100" dirty="0">
-                <a:solidFill>
-                  <a:srgbClr val="79C0FF"/>
-                </a:solidFill>
-                <a:latin typeface="Consolas" panose="020B0609020204030204" pitchFamily="49" charset="0"/>
-              </a:rPr>
-              <a:t>H</a:t>
-            </a:r>
-            <a:r>
-              <a:rPr lang="pl-PL" sz="1100" dirty="0">
-                <a:solidFill>
-                  <a:srgbClr val="BBBEBF"/>
-                </a:solidFill>
-                <a:latin typeface="Consolas" panose="020B0609020204030204" pitchFamily="49" charset="0"/>
-              </a:rPr>
-              <a:t>) </a:t>
-            </a:r>
-            <a:r>
-              <a:rPr lang="pl-PL" sz="1100" dirty="0">
-                <a:solidFill>
-                  <a:srgbClr val="DCDCAA"/>
-                </a:solidFill>
-                <a:latin typeface="Consolas" panose="020B0609020204030204" pitchFamily="49" charset="0"/>
-              </a:rPr>
-              <a:t>@</a:t>
-            </a:r>
-            <a:r>
-              <a:rPr lang="pl-PL" sz="1100" dirty="0">
-                <a:solidFill>
-                  <a:srgbClr val="BBBEBF"/>
-                </a:solidFill>
-                <a:latin typeface="Consolas" panose="020B0609020204030204" pitchFamily="49" charset="0"/>
-              </a:rPr>
-              <a:t> </a:t>
-            </a:r>
-            <a:r>
-              <a:rPr lang="pl-PL" sz="1100" dirty="0" err="1" smtClean="0">
-                <a:solidFill>
-                  <a:srgbClr val="C9D1D9"/>
+              <a:rPr lang="pl-PL" sz="1200" dirty="0" err="1" smtClean="0">
+                <a:solidFill>
+                  <a:srgbClr val="569CD6"/>
                 </a:solidFill>
                 <a:latin typeface="Consolas" panose="020B0609020204030204" pitchFamily="49" charset="0"/>
               </a:rPr>
               <a:t>self</a:t>
             </a:r>
             <a:r>
-              <a:rPr lang="pl-PL" sz="1100" dirty="0" err="1" smtClean="0">
-                <a:solidFill>
-                  <a:srgbClr val="BBBEBF"/>
-                </a:solidFill>
-                <a:latin typeface="Consolas" panose="020B0609020204030204" pitchFamily="49" charset="0"/>
-              </a:rPr>
-              <a:t>.</a:t>
-            </a:r>
-            <a:r>
-              <a:rPr lang="pl-PL" sz="1100" dirty="0" err="1" smtClean="0">
-                <a:solidFill>
-                  <a:srgbClr val="C9D1D9"/>
-                </a:solidFill>
-                <a:latin typeface="Consolas" panose="020B0609020204030204" pitchFamily="49" charset="0"/>
-              </a:rPr>
-              <a:t>P</a:t>
-            </a:r>
-            <a:endParaRPr lang="pl-PL" sz="1100" dirty="0">
+              <a:rPr lang="pl-PL" sz="1200" dirty="0" err="1" smtClean="0">
+                <a:solidFill>
+                  <a:srgbClr val="CCCCCC"/>
+                </a:solidFill>
+                <a:latin typeface="Consolas" panose="020B0609020204030204" pitchFamily="49" charset="0"/>
+              </a:rPr>
+              <a:t>.P</a:t>
+            </a:r>
+            <a:endParaRPr lang="pl-PL" sz="1200" dirty="0">
               <a:solidFill>
-                <a:srgbClr val="BBBEBF"/>
+                <a:srgbClr val="CCCCCC"/>
               </a:solidFill>
               <a:latin typeface="Consolas" panose="020B0609020204030204" pitchFamily="49" charset="0"/>
             </a:endParaRPr>
@@ -27466,7 +26512,7 @@
             <a:r>
               <a:rPr lang="pl-PL" sz="1200" dirty="0">
                 <a:solidFill>
-                  <a:srgbClr val="BBBEBF"/>
+                  <a:srgbClr val="CCCCCC"/>
                 </a:solidFill>
                 <a:latin typeface="Consolas" panose="020B0609020204030204" pitchFamily="49" charset="0"/>
               </a:rPr>
@@ -27484,7 +26530,7 @@
             <a:r>
               <a:rPr lang="pl-PL" sz="1200" dirty="0">
                 <a:solidFill>
-                  <a:srgbClr val="BBBEBF"/>
+                  <a:srgbClr val="CCCCCC"/>
                 </a:solidFill>
                 <a:latin typeface="Consolas" panose="020B0609020204030204" pitchFamily="49" charset="0"/>
               </a:rPr>
@@ -27502,7 +26548,7 @@
             <a:r>
               <a:rPr lang="pl-PL" sz="1200" dirty="0">
                 <a:solidFill>
-                  <a:srgbClr val="BBBEBF"/>
+                  <a:srgbClr val="CCCCCC"/>
                 </a:solidFill>
                 <a:latin typeface="Consolas" panose="020B0609020204030204" pitchFamily="49" charset="0"/>
               </a:rPr>
@@ -27519,7 +26565,7 @@
             </a:r>
             <a:endParaRPr lang="pl-PL" sz="1200" dirty="0">
               <a:solidFill>
-                <a:srgbClr val="BBBEBF"/>
+                <a:srgbClr val="CCCCCC"/>
               </a:solidFill>
               <a:latin typeface="Consolas" panose="020B0609020204030204" pitchFamily="49" charset="0"/>
             </a:endParaRPr>
@@ -27528,7 +26574,7 @@
             <a:r>
               <a:rPr lang="pl-PL" sz="1200" dirty="0">
                 <a:solidFill>
-                  <a:srgbClr val="BBBEBF"/>
+                  <a:srgbClr val="CCCCCC"/>
                 </a:solidFill>
                 <a:latin typeface="Consolas" panose="020B0609020204030204" pitchFamily="49" charset="0"/>
               </a:rPr>
@@ -27537,7 +26583,7 @@
             <a:br>
               <a:rPr lang="pl-PL" sz="1200" dirty="0">
                 <a:solidFill>
-                  <a:srgbClr val="BBBEBF"/>
+                  <a:srgbClr val="CCCCCC"/>
                 </a:solidFill>
                 <a:latin typeface="Consolas" panose="020B0609020204030204" pitchFamily="49" charset="0"/>
               </a:rPr>
@@ -27545,7 +26591,7 @@
             <a:r>
               <a:rPr lang="pl-PL" sz="1200" dirty="0">
                 <a:solidFill>
-                  <a:srgbClr val="FF7B72"/>
+                  <a:srgbClr val="569CD6"/>
                 </a:solidFill>
                 <a:latin typeface="Consolas" panose="020B0609020204030204" pitchFamily="49" charset="0"/>
               </a:rPr>
@@ -27554,7 +26600,7 @@
             <a:r>
               <a:rPr lang="pl-PL" sz="1200" dirty="0">
                 <a:solidFill>
-                  <a:srgbClr val="BBBEBF"/>
+                  <a:srgbClr val="CCCCCC"/>
                 </a:solidFill>
                 <a:latin typeface="Consolas" panose="020B0609020204030204" pitchFamily="49" charset="0"/>
               </a:rPr>
@@ -27563,7 +26609,7 @@
             <a:r>
               <a:rPr lang="pl-PL" sz="1200" dirty="0" err="1">
                 <a:solidFill>
-                  <a:srgbClr val="D2A8FF"/>
+                  <a:srgbClr val="DCDCAA"/>
                 </a:solidFill>
                 <a:latin typeface="Consolas" panose="020B0609020204030204" pitchFamily="49" charset="0"/>
               </a:rPr>
@@ -27572,7 +26618,7 @@
             <a:r>
               <a:rPr lang="pl-PL" sz="1200" dirty="0">
                 <a:solidFill>
-                  <a:srgbClr val="BBBEBF"/>
+                  <a:srgbClr val="CCCCCC"/>
                 </a:solidFill>
                 <a:latin typeface="Consolas" panose="020B0609020204030204" pitchFamily="49" charset="0"/>
               </a:rPr>
@@ -27581,7 +26627,7 @@
             <a:r>
               <a:rPr lang="pl-PL" sz="1200" dirty="0" err="1">
                 <a:solidFill>
-                  <a:srgbClr val="FFA657"/>
+                  <a:srgbClr val="9CDCFE"/>
                 </a:solidFill>
                 <a:latin typeface="Consolas" panose="020B0609020204030204" pitchFamily="49" charset="0"/>
               </a:rPr>
@@ -27590,7 +26636,7 @@
             <a:r>
               <a:rPr lang="pl-PL" sz="1200" dirty="0">
                 <a:solidFill>
-                  <a:srgbClr val="BBBEBF"/>
+                  <a:srgbClr val="CCCCCC"/>
                 </a:solidFill>
                 <a:latin typeface="Consolas" panose="020B0609020204030204" pitchFamily="49" charset="0"/>
               </a:rPr>
@@ -27599,312 +26645,222 @@
             <a:r>
               <a:rPr lang="pl-PL" sz="1200" dirty="0" err="1">
                 <a:solidFill>
+                  <a:srgbClr val="CCCCCC"/>
+                </a:solidFill>
+                <a:latin typeface="Consolas" panose="020B0609020204030204" pitchFamily="49" charset="0"/>
+              </a:rPr>
+              <a:t>np.ndarray</a:t>
+            </a:r>
+            <a:r>
+              <a:rPr lang="pl-PL" sz="1200" dirty="0">
+                <a:solidFill>
+                  <a:srgbClr val="CCCCCC"/>
+                </a:solidFill>
+                <a:latin typeface="Consolas" panose="020B0609020204030204" pitchFamily="49" charset="0"/>
+              </a:rPr>
+              <a:t>,</a:t>
+            </a:r>
+          </a:p>
+          <a:p>
+            <a:r>
+              <a:rPr lang="pl-PL" sz="1200" dirty="0">
+                <a:solidFill>
+                  <a:srgbClr val="CCCCCC"/>
+                </a:solidFill>
+                <a:latin typeface="Consolas" panose="020B0609020204030204" pitchFamily="49" charset="0"/>
+              </a:rPr>
+              <a:t>                          </a:t>
+            </a:r>
+            <a:r>
+              <a:rPr lang="pl-PL" sz="1200" dirty="0">
+                <a:solidFill>
+                  <a:srgbClr val="9CDCFE"/>
+                </a:solidFill>
+                <a:latin typeface="Consolas" panose="020B0609020204030204" pitchFamily="49" charset="0"/>
+              </a:rPr>
+              <a:t>P</a:t>
+            </a:r>
+            <a:r>
+              <a:rPr lang="pl-PL" sz="1200" dirty="0">
+                <a:solidFill>
+                  <a:srgbClr val="CCCCCC"/>
+                </a:solidFill>
+                <a:latin typeface="Consolas" panose="020B0609020204030204" pitchFamily="49" charset="0"/>
+              </a:rPr>
+              <a:t>: </a:t>
+            </a:r>
+            <a:r>
+              <a:rPr lang="pl-PL" sz="1200" dirty="0" err="1">
+                <a:solidFill>
+                  <a:srgbClr val="CCCCCC"/>
+                </a:solidFill>
+                <a:latin typeface="Consolas" panose="020B0609020204030204" pitchFamily="49" charset="0"/>
+              </a:rPr>
+              <a:t>np.ndarray</a:t>
+            </a:r>
+            <a:r>
+              <a:rPr lang="pl-PL" sz="1200" dirty="0">
+                <a:solidFill>
+                  <a:srgbClr val="CCCCCC"/>
+                </a:solidFill>
+                <a:latin typeface="Consolas" panose="020B0609020204030204" pitchFamily="49" charset="0"/>
+              </a:rPr>
+              <a:t>,</a:t>
+            </a:r>
+          </a:p>
+          <a:p>
+            <a:r>
+              <a:rPr lang="pl-PL" sz="1200" dirty="0">
+                <a:solidFill>
+                  <a:srgbClr val="CCCCCC"/>
+                </a:solidFill>
+                <a:latin typeface="Consolas" panose="020B0609020204030204" pitchFamily="49" charset="0"/>
+              </a:rPr>
+              <a:t>                          </a:t>
+            </a:r>
+            <a:r>
+              <a:rPr lang="pl-PL" sz="1200" dirty="0" err="1">
+                <a:solidFill>
+                  <a:srgbClr val="9CDCFE"/>
+                </a:solidFill>
+                <a:latin typeface="Consolas" panose="020B0609020204030204" pitchFamily="49" charset="0"/>
+              </a:rPr>
+              <a:t>landmark_pos</a:t>
+            </a:r>
+            <a:r>
+              <a:rPr lang="pl-PL" sz="1200" dirty="0">
+                <a:solidFill>
+                  <a:srgbClr val="CCCCCC"/>
+                </a:solidFill>
+                <a:latin typeface="Consolas" panose="020B0609020204030204" pitchFamily="49" charset="0"/>
+              </a:rPr>
+              <a:t>: </a:t>
+            </a:r>
+            <a:r>
+              <a:rPr lang="pl-PL" sz="1200" dirty="0" err="1">
+                <a:solidFill>
+                  <a:srgbClr val="CCCCCC"/>
+                </a:solidFill>
+                <a:latin typeface="Consolas" panose="020B0609020204030204" pitchFamily="49" charset="0"/>
+              </a:rPr>
+              <a:t>np.ndarray</a:t>
+            </a:r>
+            <a:r>
+              <a:rPr lang="pl-PL" sz="1200" dirty="0">
+                <a:solidFill>
+                  <a:srgbClr val="CCCCCC"/>
+                </a:solidFill>
+                <a:latin typeface="Consolas" panose="020B0609020204030204" pitchFamily="49" charset="0"/>
+              </a:rPr>
+              <a:t>,</a:t>
+            </a:r>
+          </a:p>
+          <a:p>
+            <a:r>
+              <a:rPr lang="pl-PL" sz="1200" dirty="0">
+                <a:solidFill>
+                  <a:srgbClr val="CCCCCC"/>
+                </a:solidFill>
+                <a:latin typeface="Consolas" panose="020B0609020204030204" pitchFamily="49" charset="0"/>
+              </a:rPr>
+              <a:t>                          </a:t>
+            </a:r>
+            <a:r>
+              <a:rPr lang="pl-PL" sz="1200" dirty="0" err="1">
+                <a:solidFill>
+                  <a:srgbClr val="9CDCFE"/>
+                </a:solidFill>
+                <a:latin typeface="Consolas" panose="020B0609020204030204" pitchFamily="49" charset="0"/>
+              </a:rPr>
+              <a:t>measured_pos</a:t>
+            </a:r>
+            <a:r>
+              <a:rPr lang="pl-PL" sz="1200" dirty="0">
+                <a:solidFill>
+                  <a:srgbClr val="CCCCCC"/>
+                </a:solidFill>
+                <a:latin typeface="Consolas" panose="020B0609020204030204" pitchFamily="49" charset="0"/>
+              </a:rPr>
+              <a:t>: </a:t>
+            </a:r>
+            <a:r>
+              <a:rPr lang="pl-PL" sz="1200" dirty="0" err="1">
+                <a:solidFill>
+                  <a:srgbClr val="CCCCCC"/>
+                </a:solidFill>
+                <a:latin typeface="Consolas" panose="020B0609020204030204" pitchFamily="49" charset="0"/>
+              </a:rPr>
+              <a:t>np.ndarray</a:t>
+            </a:r>
+            <a:r>
+              <a:rPr lang="pl-PL" sz="1200" dirty="0">
+                <a:solidFill>
+                  <a:srgbClr val="CCCCCC"/>
+                </a:solidFill>
+                <a:latin typeface="Consolas" panose="020B0609020204030204" pitchFamily="49" charset="0"/>
+              </a:rPr>
+              <a:t>,</a:t>
+            </a:r>
+          </a:p>
+          <a:p>
+            <a:r>
+              <a:rPr lang="pl-PL" sz="1200" dirty="0">
+                <a:solidFill>
+                  <a:srgbClr val="CCCCCC"/>
+                </a:solidFill>
+                <a:latin typeface="Consolas" panose="020B0609020204030204" pitchFamily="49" charset="0"/>
+              </a:rPr>
+              <a:t>                          </a:t>
+            </a:r>
+            <a:r>
+              <a:rPr lang="pl-PL" sz="1200" dirty="0" err="1">
+                <a:solidFill>
+                  <a:srgbClr val="9CDCFE"/>
+                </a:solidFill>
+                <a:latin typeface="Consolas" panose="020B0609020204030204" pitchFamily="49" charset="0"/>
+              </a:rPr>
+              <a:t>R_meas</a:t>
+            </a:r>
+            <a:r>
+              <a:rPr lang="pl-PL" sz="1200" dirty="0">
+                <a:solidFill>
+                  <a:srgbClr val="CCCCCC"/>
+                </a:solidFill>
+                <a:latin typeface="Consolas" panose="020B0609020204030204" pitchFamily="49" charset="0"/>
+              </a:rPr>
+              <a:t>: </a:t>
+            </a:r>
+            <a:r>
+              <a:rPr lang="pl-PL" sz="1200" dirty="0" err="1">
+                <a:solidFill>
+                  <a:srgbClr val="CCCCCC"/>
+                </a:solidFill>
+                <a:latin typeface="Consolas" panose="020B0609020204030204" pitchFamily="49" charset="0"/>
+              </a:rPr>
+              <a:t>np.ndarray</a:t>
+            </a:r>
+            <a:r>
+              <a:rPr lang="pl-PL" sz="1200" dirty="0">
+                <a:solidFill>
+                  <a:srgbClr val="CCCCCC"/>
+                </a:solidFill>
+                <a:latin typeface="Consolas" panose="020B0609020204030204" pitchFamily="49" charset="0"/>
+              </a:rPr>
+              <a:t>) -&gt; </a:t>
+            </a:r>
+            <a:r>
+              <a:rPr lang="pl-PL" sz="1200" dirty="0" err="1">
+                <a:solidFill>
                   <a:srgbClr val="4EC9B0"/>
                 </a:solidFill>
                 <a:latin typeface="Consolas" panose="020B0609020204030204" pitchFamily="49" charset="0"/>
               </a:rPr>
-              <a:t>np</a:t>
-            </a:r>
-            <a:r>
-              <a:rPr lang="pl-PL" sz="1200" dirty="0" err="1">
-                <a:solidFill>
-                  <a:srgbClr val="BBBEBF"/>
-                </a:solidFill>
-                <a:latin typeface="Consolas" panose="020B0609020204030204" pitchFamily="49" charset="0"/>
-              </a:rPr>
-              <a:t>.</a:t>
-            </a:r>
-            <a:r>
-              <a:rPr lang="pl-PL" sz="1200" dirty="0" err="1">
-                <a:solidFill>
-                  <a:srgbClr val="4EC9B0"/>
-                </a:solidFill>
-                <a:latin typeface="Consolas" panose="020B0609020204030204" pitchFamily="49" charset="0"/>
-              </a:rPr>
-              <a:t>ndarray</a:t>
-            </a:r>
-            <a:r>
-              <a:rPr lang="pl-PL" sz="1200" dirty="0">
-                <a:solidFill>
-                  <a:srgbClr val="BBBEBF"/>
-                </a:solidFill>
-                <a:latin typeface="Consolas" panose="020B0609020204030204" pitchFamily="49" charset="0"/>
-              </a:rPr>
-              <a:t>,</a:t>
-            </a:r>
-          </a:p>
-          <a:p>
-            <a:r>
-              <a:rPr lang="pl-PL" sz="1200" dirty="0">
-                <a:solidFill>
-                  <a:srgbClr val="BBBEBF"/>
-                </a:solidFill>
-                <a:latin typeface="Consolas" panose="020B0609020204030204" pitchFamily="49" charset="0"/>
-              </a:rPr>
-              <a:t>                          </a:t>
-            </a:r>
-            <a:r>
-              <a:rPr lang="pl-PL" sz="1200" dirty="0">
-                <a:solidFill>
-                  <a:srgbClr val="FFA657"/>
-                </a:solidFill>
-                <a:latin typeface="Consolas" panose="020B0609020204030204" pitchFamily="49" charset="0"/>
-              </a:rPr>
-              <a:t>P</a:t>
-            </a:r>
-            <a:r>
-              <a:rPr lang="pl-PL" sz="1200" dirty="0">
-                <a:solidFill>
-                  <a:srgbClr val="BBBEBF"/>
-                </a:solidFill>
-                <a:latin typeface="Consolas" panose="020B0609020204030204" pitchFamily="49" charset="0"/>
-              </a:rPr>
-              <a:t>: </a:t>
-            </a:r>
-            <a:r>
-              <a:rPr lang="pl-PL" sz="1200" dirty="0" err="1">
-                <a:solidFill>
-                  <a:srgbClr val="4EC9B0"/>
-                </a:solidFill>
-                <a:latin typeface="Consolas" panose="020B0609020204030204" pitchFamily="49" charset="0"/>
-              </a:rPr>
-              <a:t>np</a:t>
-            </a:r>
-            <a:r>
-              <a:rPr lang="pl-PL" sz="1200" dirty="0" err="1">
-                <a:solidFill>
-                  <a:srgbClr val="BBBEBF"/>
-                </a:solidFill>
-                <a:latin typeface="Consolas" panose="020B0609020204030204" pitchFamily="49" charset="0"/>
-              </a:rPr>
-              <a:t>.</a:t>
-            </a:r>
-            <a:r>
-              <a:rPr lang="pl-PL" sz="1200" dirty="0" err="1">
-                <a:solidFill>
-                  <a:srgbClr val="4EC9B0"/>
-                </a:solidFill>
-                <a:latin typeface="Consolas" panose="020B0609020204030204" pitchFamily="49" charset="0"/>
-              </a:rPr>
-              <a:t>ndarray</a:t>
-            </a:r>
-            <a:r>
-              <a:rPr lang="pl-PL" sz="1200" dirty="0">
-                <a:solidFill>
-                  <a:srgbClr val="BBBEBF"/>
-                </a:solidFill>
-                <a:latin typeface="Consolas" panose="020B0609020204030204" pitchFamily="49" charset="0"/>
-              </a:rPr>
-              <a:t>,</a:t>
-            </a:r>
-          </a:p>
-          <a:p>
-            <a:r>
-              <a:rPr lang="pl-PL" sz="1200" dirty="0">
-                <a:solidFill>
-                  <a:srgbClr val="BBBEBF"/>
-                </a:solidFill>
-                <a:latin typeface="Consolas" panose="020B0609020204030204" pitchFamily="49" charset="0"/>
-              </a:rPr>
-              <a:t>                          </a:t>
-            </a:r>
-            <a:r>
-              <a:rPr lang="pl-PL" sz="1200" dirty="0" err="1">
-                <a:solidFill>
-                  <a:srgbClr val="FFA657"/>
-                </a:solidFill>
-                <a:latin typeface="Consolas" panose="020B0609020204030204" pitchFamily="49" charset="0"/>
-              </a:rPr>
-              <a:t>landmark_pos</a:t>
-            </a:r>
-            <a:r>
-              <a:rPr lang="pl-PL" sz="1200" dirty="0">
-                <a:solidFill>
-                  <a:srgbClr val="BBBEBF"/>
-                </a:solidFill>
-                <a:latin typeface="Consolas" panose="020B0609020204030204" pitchFamily="49" charset="0"/>
-              </a:rPr>
-              <a:t>: </a:t>
-            </a:r>
-            <a:r>
-              <a:rPr lang="pl-PL" sz="1200" dirty="0" err="1">
-                <a:solidFill>
-                  <a:srgbClr val="4EC9B0"/>
-                </a:solidFill>
-                <a:latin typeface="Consolas" panose="020B0609020204030204" pitchFamily="49" charset="0"/>
-              </a:rPr>
-              <a:t>np</a:t>
-            </a:r>
-            <a:r>
-              <a:rPr lang="pl-PL" sz="1200" dirty="0" err="1">
-                <a:solidFill>
-                  <a:srgbClr val="BBBEBF"/>
-                </a:solidFill>
-                <a:latin typeface="Consolas" panose="020B0609020204030204" pitchFamily="49" charset="0"/>
-              </a:rPr>
-              <a:t>.</a:t>
-            </a:r>
-            <a:r>
-              <a:rPr lang="pl-PL" sz="1200" dirty="0" err="1">
-                <a:solidFill>
-                  <a:srgbClr val="4EC9B0"/>
-                </a:solidFill>
-                <a:latin typeface="Consolas" panose="020B0609020204030204" pitchFamily="49" charset="0"/>
-              </a:rPr>
-              <a:t>ndarray</a:t>
-            </a:r>
-            <a:r>
-              <a:rPr lang="pl-PL" sz="1200" dirty="0">
-                <a:solidFill>
-                  <a:srgbClr val="BBBEBF"/>
-                </a:solidFill>
-                <a:latin typeface="Consolas" panose="020B0609020204030204" pitchFamily="49" charset="0"/>
-              </a:rPr>
-              <a:t>,</a:t>
-            </a:r>
-          </a:p>
-          <a:p>
-            <a:r>
-              <a:rPr lang="pl-PL" sz="1200" dirty="0">
-                <a:solidFill>
-                  <a:srgbClr val="BBBEBF"/>
-                </a:solidFill>
-                <a:latin typeface="Consolas" panose="020B0609020204030204" pitchFamily="49" charset="0"/>
-              </a:rPr>
-              <a:t>                          </a:t>
-            </a:r>
-            <a:r>
-              <a:rPr lang="pl-PL" sz="1200" dirty="0" err="1">
-                <a:solidFill>
-                  <a:srgbClr val="FFA657"/>
-                </a:solidFill>
-                <a:latin typeface="Consolas" panose="020B0609020204030204" pitchFamily="49" charset="0"/>
-              </a:rPr>
-              <a:t>measured_pos</a:t>
-            </a:r>
-            <a:r>
-              <a:rPr lang="pl-PL" sz="1200" dirty="0">
-                <a:solidFill>
-                  <a:srgbClr val="BBBEBF"/>
-                </a:solidFill>
-                <a:latin typeface="Consolas" panose="020B0609020204030204" pitchFamily="49" charset="0"/>
-              </a:rPr>
-              <a:t>: </a:t>
-            </a:r>
-            <a:r>
-              <a:rPr lang="pl-PL" sz="1200" dirty="0" err="1">
-                <a:solidFill>
-                  <a:srgbClr val="4EC9B0"/>
-                </a:solidFill>
-                <a:latin typeface="Consolas" panose="020B0609020204030204" pitchFamily="49" charset="0"/>
-              </a:rPr>
-              <a:t>np</a:t>
-            </a:r>
-            <a:r>
-              <a:rPr lang="pl-PL" sz="1200" dirty="0" err="1">
-                <a:solidFill>
-                  <a:srgbClr val="BBBEBF"/>
-                </a:solidFill>
-                <a:latin typeface="Consolas" panose="020B0609020204030204" pitchFamily="49" charset="0"/>
-              </a:rPr>
-              <a:t>.</a:t>
-            </a:r>
-            <a:r>
-              <a:rPr lang="pl-PL" sz="1200" dirty="0" err="1">
-                <a:solidFill>
-                  <a:srgbClr val="4EC9B0"/>
-                </a:solidFill>
-                <a:latin typeface="Consolas" panose="020B0609020204030204" pitchFamily="49" charset="0"/>
-              </a:rPr>
-              <a:t>ndarray</a:t>
-            </a:r>
-            <a:r>
-              <a:rPr lang="pl-PL" sz="1200" dirty="0">
-                <a:solidFill>
-                  <a:srgbClr val="BBBEBF"/>
-                </a:solidFill>
-                <a:latin typeface="Consolas" panose="020B0609020204030204" pitchFamily="49" charset="0"/>
-              </a:rPr>
-              <a:t>,</a:t>
-            </a:r>
-          </a:p>
-          <a:p>
-            <a:r>
-              <a:rPr lang="pl-PL" sz="1200" dirty="0">
-                <a:solidFill>
-                  <a:srgbClr val="BBBEBF"/>
-                </a:solidFill>
-                <a:latin typeface="Consolas" panose="020B0609020204030204" pitchFamily="49" charset="0"/>
-              </a:rPr>
-              <a:t>                          </a:t>
-            </a:r>
-            <a:r>
-              <a:rPr lang="pl-PL" sz="1200" dirty="0" err="1">
-                <a:solidFill>
-                  <a:srgbClr val="FFA657"/>
-                </a:solidFill>
-                <a:latin typeface="Consolas" panose="020B0609020204030204" pitchFamily="49" charset="0"/>
-              </a:rPr>
-              <a:t>R_meas</a:t>
-            </a:r>
-            <a:r>
-              <a:rPr lang="pl-PL" sz="1200" dirty="0">
-                <a:solidFill>
-                  <a:srgbClr val="BBBEBF"/>
-                </a:solidFill>
-                <a:latin typeface="Consolas" panose="020B0609020204030204" pitchFamily="49" charset="0"/>
-              </a:rPr>
-              <a:t>: </a:t>
-            </a:r>
-            <a:r>
-              <a:rPr lang="pl-PL" sz="1200" dirty="0" err="1">
-                <a:solidFill>
-                  <a:srgbClr val="4EC9B0"/>
-                </a:solidFill>
-                <a:latin typeface="Consolas" panose="020B0609020204030204" pitchFamily="49" charset="0"/>
-              </a:rPr>
-              <a:t>np</a:t>
-            </a:r>
-            <a:r>
-              <a:rPr lang="pl-PL" sz="1200" dirty="0" err="1">
-                <a:solidFill>
-                  <a:srgbClr val="BBBEBF"/>
-                </a:solidFill>
-                <a:latin typeface="Consolas" panose="020B0609020204030204" pitchFamily="49" charset="0"/>
-              </a:rPr>
-              <a:t>.</a:t>
-            </a:r>
-            <a:r>
-              <a:rPr lang="pl-PL" sz="1200" dirty="0" err="1">
-                <a:solidFill>
-                  <a:srgbClr val="4EC9B0"/>
-                </a:solidFill>
-                <a:latin typeface="Consolas" panose="020B0609020204030204" pitchFamily="49" charset="0"/>
-              </a:rPr>
-              <a:t>ndarray</a:t>
-            </a:r>
-            <a:r>
-              <a:rPr lang="pl-PL" sz="1200" dirty="0">
-                <a:solidFill>
-                  <a:srgbClr val="BBBEBF"/>
-                </a:solidFill>
-                <a:latin typeface="Consolas" panose="020B0609020204030204" pitchFamily="49" charset="0"/>
-              </a:rPr>
-              <a:t>) -&gt; </a:t>
-            </a:r>
-            <a:r>
-              <a:rPr lang="pl-PL" sz="1200" dirty="0" err="1">
-                <a:solidFill>
-                  <a:srgbClr val="4EC9B0"/>
-                </a:solidFill>
-                <a:latin typeface="Consolas" panose="020B0609020204030204" pitchFamily="49" charset="0"/>
-              </a:rPr>
               <a:t>tuple</a:t>
             </a:r>
             <a:r>
               <a:rPr lang="pl-PL" sz="1200" dirty="0">
                 <a:solidFill>
-                  <a:srgbClr val="BBBEBF"/>
+                  <a:srgbClr val="CCCCCC"/>
                 </a:solidFill>
                 <a:latin typeface="Consolas" panose="020B0609020204030204" pitchFamily="49" charset="0"/>
               </a:rPr>
@@ -27915,7 +26871,7 @@
             <a:r>
               <a:rPr lang="pl-PL" sz="1200" dirty="0">
                 <a:solidFill>
-                  <a:srgbClr val="BBBEBF"/>
+                  <a:srgbClr val="CCCCCC"/>
                 </a:solidFill>
                 <a:latin typeface="Consolas" panose="020B0609020204030204" pitchFamily="49" charset="0"/>
               </a:rPr>
@@ -27924,7 +26880,7 @@
             <a:r>
               <a:rPr lang="pl-PL" sz="1200" dirty="0">
                 <a:solidFill>
-                  <a:srgbClr val="A5D6FF"/>
+                  <a:srgbClr val="CE9178"/>
                 </a:solidFill>
                 <a:latin typeface="Consolas" panose="020B0609020204030204" pitchFamily="49" charset="0"/>
               </a:rPr>
@@ -27932,7 +26888,7 @@
             </a:r>
             <a:endParaRPr lang="pl-PL" sz="1200" dirty="0">
               <a:solidFill>
-                <a:srgbClr val="BBBEBF"/>
+                <a:srgbClr val="CCCCCC"/>
               </a:solidFill>
               <a:latin typeface="Consolas" panose="020B0609020204030204" pitchFamily="49" charset="0"/>
             </a:endParaRPr>
@@ -27941,79 +26897,43 @@
             <a:r>
               <a:rPr lang="pl-PL" sz="1200" dirty="0">
                 <a:solidFill>
-                  <a:srgbClr val="BBBEBF"/>
-                </a:solidFill>
-                <a:latin typeface="Consolas" panose="020B0609020204030204" pitchFamily="49" charset="0"/>
-              </a:rPr>
-              <a:t>    </a:t>
-            </a:r>
-            <a:r>
-              <a:rPr lang="pl-PL" sz="1200" dirty="0">
-                <a:solidFill>
-                  <a:srgbClr val="79C0FF"/>
-                </a:solidFill>
-                <a:latin typeface="Consolas" panose="020B0609020204030204" pitchFamily="49" charset="0"/>
-              </a:rPr>
-              <a:t>H</a:t>
-            </a:r>
-            <a:r>
-              <a:rPr lang="pl-PL" sz="1200" dirty="0">
-                <a:solidFill>
-                  <a:srgbClr val="BBBEBF"/>
+                  <a:srgbClr val="CCCCCC"/>
+                </a:solidFill>
+                <a:latin typeface="Consolas" panose="020B0609020204030204" pitchFamily="49" charset="0"/>
+              </a:rPr>
+              <a:t>    H </a:t>
+            </a:r>
+            <a:r>
+              <a:rPr lang="pl-PL" sz="1200" dirty="0">
+                <a:solidFill>
+                  <a:srgbClr val="D4D4D4"/>
+                </a:solidFill>
+                <a:latin typeface="Consolas" panose="020B0609020204030204" pitchFamily="49" charset="0"/>
+              </a:rPr>
+              <a:t>=</a:t>
+            </a:r>
+            <a:r>
+              <a:rPr lang="pl-PL" sz="1200" dirty="0">
+                <a:solidFill>
+                  <a:srgbClr val="CCCCCC"/>
                 </a:solidFill>
                 <a:latin typeface="Consolas" panose="020B0609020204030204" pitchFamily="49" charset="0"/>
               </a:rPr>
               <a:t> </a:t>
             </a:r>
             <a:r>
-              <a:rPr lang="pl-PL" sz="1200" dirty="0">
-                <a:solidFill>
-                  <a:srgbClr val="D4D4D4"/>
-                </a:solidFill>
-                <a:latin typeface="Consolas" panose="020B0609020204030204" pitchFamily="49" charset="0"/>
-              </a:rPr>
-              <a:t>=</a:t>
-            </a:r>
-            <a:r>
-              <a:rPr lang="pl-PL" sz="1200" dirty="0">
-                <a:solidFill>
-                  <a:srgbClr val="BBBEBF"/>
-                </a:solidFill>
-                <a:latin typeface="Consolas" panose="020B0609020204030204" pitchFamily="49" charset="0"/>
-              </a:rPr>
-              <a:t> </a:t>
-            </a:r>
-            <a:r>
               <a:rPr lang="pl-PL" sz="1200" dirty="0" err="1">
                 <a:solidFill>
-                  <a:srgbClr val="4EC9B0"/>
-                </a:solidFill>
-                <a:latin typeface="Consolas" panose="020B0609020204030204" pitchFamily="49" charset="0"/>
-              </a:rPr>
-              <a:t>np</a:t>
-            </a:r>
-            <a:r>
-              <a:rPr lang="pl-PL" sz="1200" dirty="0" err="1">
-                <a:solidFill>
-                  <a:srgbClr val="BBBEBF"/>
-                </a:solidFill>
-                <a:latin typeface="Consolas" panose="020B0609020204030204" pitchFamily="49" charset="0"/>
-              </a:rPr>
-              <a:t>.</a:t>
-            </a:r>
-            <a:r>
-              <a:rPr lang="pl-PL" sz="1200" dirty="0" err="1">
-                <a:solidFill>
-                  <a:srgbClr val="D2A8FF"/>
-                </a:solidFill>
-                <a:latin typeface="Consolas" panose="020B0609020204030204" pitchFamily="49" charset="0"/>
-              </a:rPr>
-              <a:t>eye</a:t>
-            </a:r>
-            <a:r>
-              <a:rPr lang="pl-PL" sz="1200" dirty="0">
-                <a:solidFill>
-                  <a:srgbClr val="BBBEBF"/>
+                  <a:srgbClr val="CCCCCC"/>
+                </a:solidFill>
+                <a:latin typeface="Consolas" panose="020B0609020204030204" pitchFamily="49" charset="0"/>
+              </a:rPr>
+              <a:t>np.eye</a:t>
+            </a:r>
+            <a:r>
+              <a:rPr lang="pl-PL" sz="1200" dirty="0">
+                <a:solidFill>
+                  <a:srgbClr val="CCCCCC"/>
                 </a:solidFill>
                 <a:latin typeface="Consolas" panose="020B0609020204030204" pitchFamily="49" charset="0"/>
               </a:rPr>
@@ -28031,7 +26951,7 @@
             <a:r>
               <a:rPr lang="pl-PL" sz="1200" dirty="0">
                 <a:solidFill>
-                  <a:srgbClr val="BBBEBF"/>
+                  <a:srgbClr val="CCCCCC"/>
                 </a:solidFill>
                 <a:latin typeface="Consolas" panose="020B0609020204030204" pitchFamily="49" charset="0"/>
               </a:rPr>
@@ -28049,42 +26969,24 @@
             <a:r>
               <a:rPr lang="pl-PL" sz="1200" dirty="0">
                 <a:solidFill>
-                  <a:srgbClr val="BBBEBF"/>
-                </a:solidFill>
-                <a:latin typeface="Consolas" panose="020B0609020204030204" pitchFamily="49" charset="0"/>
-              </a:rPr>
-              <a:t>)              </a:t>
-            </a:r>
-            <a:r>
-              <a:rPr lang="pl-PL" sz="1200" dirty="0" smtClean="0">
-                <a:solidFill>
-                  <a:srgbClr val="BBBEBF"/>
-                </a:solidFill>
-                <a:latin typeface="Consolas" panose="020B0609020204030204" pitchFamily="49" charset="0"/>
-              </a:rPr>
-              <a:t>                       </a:t>
-            </a:r>
-            <a:r>
-              <a:rPr lang="pl-PL" sz="1200" dirty="0" smtClean="0">
-                <a:solidFill>
-                  <a:srgbClr val="8B949E"/>
-                </a:solidFill>
-                <a:latin typeface="Consolas" panose="020B0609020204030204" pitchFamily="49" charset="0"/>
-              </a:rPr>
-              <a:t># </a:t>
-            </a:r>
-            <a:r>
-              <a:rPr lang="pl-PL" sz="1200" dirty="0">
-                <a:solidFill>
-                  <a:srgbClr val="8B949E"/>
-                </a:solidFill>
-                <a:latin typeface="Consolas" panose="020B0609020204030204" pitchFamily="49" charset="0"/>
-              </a:rPr>
-              <a:t>obserwujemy tylko x, y</a:t>
+                  <a:srgbClr val="CCCCCC"/>
+                </a:solidFill>
+                <a:latin typeface="Consolas" panose="020B0609020204030204" pitchFamily="49" charset="0"/>
+              </a:rPr>
+              <a:t>)                                     </a:t>
+            </a:r>
+            <a:r>
+              <a:rPr lang="pl-PL" sz="1200" dirty="0">
+                <a:solidFill>
+                  <a:srgbClr val="6A9955"/>
+                </a:solidFill>
+                <a:latin typeface="Consolas" panose="020B0609020204030204" pitchFamily="49" charset="0"/>
+              </a:rPr>
+              <a:t># obserwujemy tylko x, y</a:t>
             </a:r>
             <a:endParaRPr lang="pl-PL" sz="1200" dirty="0">
               <a:solidFill>
-                <a:srgbClr val="BBBEBF"/>
+                <a:srgbClr val="CCCCCC"/>
               </a:solidFill>
               <a:latin typeface="Consolas" panose="020B0609020204030204" pitchFamily="49" charset="0"/>
             </a:endParaRPr>
@@ -28093,7 +26995,7 @@
             <a:r>
               <a:rPr lang="pl-PL" sz="1200" dirty="0">
                 <a:solidFill>
-                  <a:srgbClr val="BBBEBF"/>
+                  <a:srgbClr val="CCCCCC"/>
                 </a:solidFill>
                 <a:latin typeface="Consolas" panose="020B0609020204030204" pitchFamily="49" charset="0"/>
               </a:rPr>
@@ -28102,7 +27004,7 @@
             <a:r>
               <a:rPr lang="pl-PL" sz="1200" dirty="0" err="1">
                 <a:solidFill>
-                  <a:srgbClr val="C9D1D9"/>
+                  <a:srgbClr val="CCCCCC"/>
                 </a:solidFill>
                 <a:latin typeface="Consolas" panose="020B0609020204030204" pitchFamily="49" charset="0"/>
               </a:rPr>
@@ -28111,7 +27013,7 @@
             <a:r>
               <a:rPr lang="pl-PL" sz="1200" dirty="0">
                 <a:solidFill>
-                  <a:srgbClr val="BBBEBF"/>
+                  <a:srgbClr val="CCCCCC"/>
                 </a:solidFill>
                 <a:latin typeface="Consolas" panose="020B0609020204030204" pitchFamily="49" charset="0"/>
               </a:rPr>
@@ -28129,7 +27031,7 @@
             <a:r>
               <a:rPr lang="pl-PL" sz="1200" dirty="0">
                 <a:solidFill>
-                  <a:srgbClr val="BBBEBF"/>
+                  <a:srgbClr val="CCCCCC"/>
                 </a:solidFill>
                 <a:latin typeface="Consolas" panose="020B0609020204030204" pitchFamily="49" charset="0"/>
               </a:rPr>
@@ -28138,7 +27040,7 @@
             <a:r>
               <a:rPr lang="pl-PL" sz="1200" dirty="0" err="1">
                 <a:solidFill>
-                  <a:srgbClr val="FFA657"/>
+                  <a:srgbClr val="CCCCCC"/>
                 </a:solidFill>
                 <a:latin typeface="Consolas" panose="020B0609020204030204" pitchFamily="49" charset="0"/>
               </a:rPr>
@@ -28147,7 +27049,7 @@
             <a:r>
               <a:rPr lang="pl-PL" sz="1200" dirty="0">
                 <a:solidFill>
-                  <a:srgbClr val="BBBEBF"/>
+                  <a:srgbClr val="CCCCCC"/>
                 </a:solidFill>
                 <a:latin typeface="Consolas" panose="020B0609020204030204" pitchFamily="49" charset="0"/>
               </a:rPr>
@@ -28165,7 +27067,7 @@
             <a:r>
               <a:rPr lang="pl-PL" sz="1200" dirty="0">
                 <a:solidFill>
-                  <a:srgbClr val="BBBEBF"/>
+                  <a:srgbClr val="CCCCCC"/>
                 </a:solidFill>
                 <a:latin typeface="Consolas" panose="020B0609020204030204" pitchFamily="49" charset="0"/>
               </a:rPr>
@@ -28176,7 +27078,7 @@
             <a:r>
               <a:rPr lang="pl-PL" sz="1200" dirty="0">
                 <a:solidFill>
-                  <a:srgbClr val="BBBEBF"/>
+                  <a:srgbClr val="CCCCCC"/>
                 </a:solidFill>
                 <a:latin typeface="Consolas" panose="020B0609020204030204" pitchFamily="49" charset="0"/>
               </a:rPr>
@@ -28185,7 +27087,7 @@
             <a:r>
               <a:rPr lang="pl-PL" sz="1200" dirty="0" err="1">
                 <a:solidFill>
-                  <a:srgbClr val="C9D1D9"/>
+                  <a:srgbClr val="CCCCCC"/>
                 </a:solidFill>
                 <a:latin typeface="Consolas" panose="020B0609020204030204" pitchFamily="49" charset="0"/>
               </a:rPr>
@@ -28194,7 +27096,7 @@
             <a:r>
               <a:rPr lang="pl-PL" sz="1200" dirty="0">
                 <a:solidFill>
-                  <a:srgbClr val="BBBEBF"/>
+                  <a:srgbClr val="CCCCCC"/>
                 </a:solidFill>
                 <a:latin typeface="Consolas" panose="020B0609020204030204" pitchFamily="49" charset="0"/>
               </a:rPr>
@@ -28212,7 +27114,7 @@
             <a:r>
               <a:rPr lang="pl-PL" sz="1200" dirty="0">
                 <a:solidFill>
-                  <a:srgbClr val="BBBEBF"/>
+                  <a:srgbClr val="CCCCCC"/>
                 </a:solidFill>
                 <a:latin typeface="Consolas" panose="020B0609020204030204" pitchFamily="49" charset="0"/>
               </a:rPr>
@@ -28221,7 +27123,7 @@
             <a:r>
               <a:rPr lang="pl-PL" sz="1200" dirty="0" err="1">
                 <a:solidFill>
-                  <a:srgbClr val="FFA657"/>
+                  <a:srgbClr val="CCCCCC"/>
                 </a:solidFill>
                 <a:latin typeface="Consolas" panose="020B0609020204030204" pitchFamily="49" charset="0"/>
               </a:rPr>
@@ -28230,7 +27132,7 @@
             <a:r>
               <a:rPr lang="pl-PL" sz="1200" dirty="0">
                 <a:solidFill>
-                  <a:srgbClr val="BBBEBF"/>
+                  <a:srgbClr val="CCCCCC"/>
                 </a:solidFill>
                 <a:latin typeface="Consolas" panose="020B0609020204030204" pitchFamily="49" charset="0"/>
               </a:rPr>
@@ -28239,7 +27141,7 @@
             <a:r>
               <a:rPr lang="pl-PL" sz="1200" dirty="0">
                 <a:solidFill>
-                  <a:srgbClr val="DCDCAA"/>
+                  <a:srgbClr val="D4D4D4"/>
                 </a:solidFill>
                 <a:latin typeface="Consolas" panose="020B0609020204030204" pitchFamily="49" charset="0"/>
               </a:rPr>
@@ -28248,7 +27150,7 @@
             <a:r>
               <a:rPr lang="pl-PL" sz="1200" dirty="0">
                 <a:solidFill>
-                  <a:srgbClr val="BBBEBF"/>
+                  <a:srgbClr val="CCCCCC"/>
                 </a:solidFill>
                 <a:latin typeface="Consolas" panose="020B0609020204030204" pitchFamily="49" charset="0"/>
               </a:rPr>
@@ -28257,7 +27159,7 @@
             <a:r>
               <a:rPr lang="pl-PL" sz="1200" dirty="0" err="1">
                 <a:solidFill>
-                  <a:srgbClr val="C9D1D9"/>
+                  <a:srgbClr val="CCCCCC"/>
                 </a:solidFill>
                 <a:latin typeface="Consolas" panose="020B0609020204030204" pitchFamily="49" charset="0"/>
               </a:rPr>
@@ -28265,7 +27167,7 @@
             </a:r>
             <a:endParaRPr lang="pl-PL" sz="1200" dirty="0">
               <a:solidFill>
-                <a:srgbClr val="BBBEBF"/>
+                <a:srgbClr val="CCCCCC"/>
               </a:solidFill>
               <a:latin typeface="Consolas" panose="020B0609020204030204" pitchFamily="49" charset="0"/>
             </a:endParaRPr>
@@ -28274,178 +27176,88 @@
             <a:r>
               <a:rPr lang="pl-PL" sz="1200" dirty="0">
                 <a:solidFill>
-                  <a:srgbClr val="BBBEBF"/>
-                </a:solidFill>
-                <a:latin typeface="Consolas" panose="020B0609020204030204" pitchFamily="49" charset="0"/>
-              </a:rPr>
-              <a:t>    </a:t>
-            </a:r>
-            <a:r>
-              <a:rPr lang="pl-PL" sz="1200" dirty="0">
-                <a:solidFill>
-                  <a:srgbClr val="79C0FF"/>
-                </a:solidFill>
-                <a:latin typeface="Consolas" panose="020B0609020204030204" pitchFamily="49" charset="0"/>
-              </a:rPr>
-              <a:t>S</a:t>
-            </a:r>
-            <a:r>
-              <a:rPr lang="pl-PL" sz="1200" dirty="0">
-                <a:solidFill>
-                  <a:srgbClr val="BBBEBF"/>
+                  <a:srgbClr val="CCCCCC"/>
+                </a:solidFill>
+                <a:latin typeface="Consolas" panose="020B0609020204030204" pitchFamily="49" charset="0"/>
+              </a:rPr>
+              <a:t>    S </a:t>
+            </a:r>
+            <a:r>
+              <a:rPr lang="pl-PL" sz="1200" dirty="0">
+                <a:solidFill>
+                  <a:srgbClr val="D4D4D4"/>
+                </a:solidFill>
+                <a:latin typeface="Consolas" panose="020B0609020204030204" pitchFamily="49" charset="0"/>
+              </a:rPr>
+              <a:t>=</a:t>
+            </a:r>
+            <a:r>
+              <a:rPr lang="pl-PL" sz="1200" dirty="0">
+                <a:solidFill>
+                  <a:srgbClr val="CCCCCC"/>
+                </a:solidFill>
+                <a:latin typeface="Consolas" panose="020B0609020204030204" pitchFamily="49" charset="0"/>
+              </a:rPr>
+              <a:t> H </a:t>
+            </a:r>
+            <a:r>
+              <a:rPr lang="pl-PL" sz="1200" dirty="0">
+                <a:solidFill>
+                  <a:srgbClr val="D4D4D4"/>
+                </a:solidFill>
+                <a:latin typeface="Consolas" panose="020B0609020204030204" pitchFamily="49" charset="0"/>
+              </a:rPr>
+              <a:t>@</a:t>
+            </a:r>
+            <a:r>
+              <a:rPr lang="pl-PL" sz="1200" dirty="0">
+                <a:solidFill>
+                  <a:srgbClr val="CCCCCC"/>
+                </a:solidFill>
+                <a:latin typeface="Consolas" panose="020B0609020204030204" pitchFamily="49" charset="0"/>
+              </a:rPr>
+              <a:t> P </a:t>
+            </a:r>
+            <a:r>
+              <a:rPr lang="pl-PL" sz="1200" dirty="0">
+                <a:solidFill>
+                  <a:srgbClr val="D4D4D4"/>
+                </a:solidFill>
+                <a:latin typeface="Consolas" panose="020B0609020204030204" pitchFamily="49" charset="0"/>
+              </a:rPr>
+              <a:t>@</a:t>
+            </a:r>
+            <a:r>
+              <a:rPr lang="pl-PL" sz="1200" dirty="0">
+                <a:solidFill>
+                  <a:srgbClr val="CCCCCC"/>
+                </a:solidFill>
+                <a:latin typeface="Consolas" panose="020B0609020204030204" pitchFamily="49" charset="0"/>
+              </a:rPr>
+              <a:t> H.T </a:t>
+            </a:r>
+            <a:r>
+              <a:rPr lang="pl-PL" sz="1200" dirty="0">
+                <a:solidFill>
+                  <a:srgbClr val="D4D4D4"/>
+                </a:solidFill>
+                <a:latin typeface="Consolas" panose="020B0609020204030204" pitchFamily="49" charset="0"/>
+              </a:rPr>
+              <a:t>+</a:t>
+            </a:r>
+            <a:r>
+              <a:rPr lang="pl-PL" sz="1200" dirty="0">
+                <a:solidFill>
+                  <a:srgbClr val="CCCCCC"/>
                 </a:solidFill>
                 <a:latin typeface="Consolas" panose="020B0609020204030204" pitchFamily="49" charset="0"/>
               </a:rPr>
               <a:t> </a:t>
             </a:r>
             <a:r>
-              <a:rPr lang="pl-PL" sz="1200" dirty="0">
-                <a:solidFill>
-                  <a:srgbClr val="D4D4D4"/>
-                </a:solidFill>
-                <a:latin typeface="Consolas" panose="020B0609020204030204" pitchFamily="49" charset="0"/>
-              </a:rPr>
-              <a:t>=</a:t>
-            </a:r>
-            <a:r>
-              <a:rPr lang="pl-PL" sz="1200" dirty="0">
-                <a:solidFill>
-                  <a:srgbClr val="BBBEBF"/>
-                </a:solidFill>
-                <a:latin typeface="Consolas" panose="020B0609020204030204" pitchFamily="49" charset="0"/>
-              </a:rPr>
-              <a:t> </a:t>
-            </a:r>
-            <a:r>
-              <a:rPr lang="pl-PL" sz="1200" dirty="0">
-                <a:solidFill>
-                  <a:srgbClr val="79C0FF"/>
-                </a:solidFill>
-                <a:latin typeface="Consolas" panose="020B0609020204030204" pitchFamily="49" charset="0"/>
-              </a:rPr>
-              <a:t>H</a:t>
-            </a:r>
-            <a:r>
-              <a:rPr lang="pl-PL" sz="1200" dirty="0">
-                <a:solidFill>
-                  <a:srgbClr val="BBBEBF"/>
-                </a:solidFill>
-                <a:latin typeface="Consolas" panose="020B0609020204030204" pitchFamily="49" charset="0"/>
-              </a:rPr>
-              <a:t> </a:t>
-            </a:r>
-            <a:r>
-              <a:rPr lang="pl-PL" sz="1200" dirty="0">
-                <a:solidFill>
-                  <a:srgbClr val="DCDCAA"/>
-                </a:solidFill>
-                <a:latin typeface="Consolas" panose="020B0609020204030204" pitchFamily="49" charset="0"/>
-              </a:rPr>
-              <a:t>@</a:t>
-            </a:r>
-            <a:r>
-              <a:rPr lang="pl-PL" sz="1200" dirty="0">
-                <a:solidFill>
-                  <a:srgbClr val="BBBEBF"/>
-                </a:solidFill>
-                <a:latin typeface="Consolas" panose="020B0609020204030204" pitchFamily="49" charset="0"/>
-              </a:rPr>
-              <a:t> </a:t>
-            </a:r>
-            <a:r>
-              <a:rPr lang="pl-PL" sz="1200" dirty="0">
-                <a:solidFill>
-                  <a:srgbClr val="FFA657"/>
-                </a:solidFill>
-                <a:latin typeface="Consolas" panose="020B0609020204030204" pitchFamily="49" charset="0"/>
-              </a:rPr>
-              <a:t>P</a:t>
-            </a:r>
-            <a:r>
-              <a:rPr lang="pl-PL" sz="1200" dirty="0">
-                <a:solidFill>
-                  <a:srgbClr val="BBBEBF"/>
-                </a:solidFill>
-                <a:latin typeface="Consolas" panose="020B0609020204030204" pitchFamily="49" charset="0"/>
-              </a:rPr>
-              <a:t> </a:t>
-            </a:r>
-            <a:r>
-              <a:rPr lang="pl-PL" sz="1200" dirty="0">
-                <a:solidFill>
-                  <a:srgbClr val="DCDCAA"/>
-                </a:solidFill>
-                <a:latin typeface="Consolas" panose="020B0609020204030204" pitchFamily="49" charset="0"/>
-              </a:rPr>
-              <a:t>@</a:t>
-            </a:r>
-            <a:r>
-              <a:rPr lang="pl-PL" sz="1200" dirty="0">
-                <a:solidFill>
-                  <a:srgbClr val="BBBEBF"/>
-                </a:solidFill>
-                <a:latin typeface="Consolas" panose="020B0609020204030204" pitchFamily="49" charset="0"/>
-              </a:rPr>
-              <a:t> </a:t>
-            </a:r>
-            <a:r>
-              <a:rPr lang="pl-PL" sz="1200" dirty="0">
-                <a:solidFill>
-                  <a:srgbClr val="79C0FF"/>
-                </a:solidFill>
-                <a:latin typeface="Consolas" panose="020B0609020204030204" pitchFamily="49" charset="0"/>
-              </a:rPr>
-              <a:t>H</a:t>
-            </a:r>
-            <a:r>
-              <a:rPr lang="pl-PL" sz="1200" dirty="0">
-                <a:solidFill>
-                  <a:srgbClr val="BBBEBF"/>
-                </a:solidFill>
-                <a:latin typeface="Consolas" panose="020B0609020204030204" pitchFamily="49" charset="0"/>
-              </a:rPr>
-              <a:t>.</a:t>
-            </a:r>
-            <a:r>
-              <a:rPr lang="pl-PL" sz="1200" dirty="0">
-                <a:solidFill>
-                  <a:srgbClr val="C9D1D9"/>
-                </a:solidFill>
-                <a:latin typeface="Consolas" panose="020B0609020204030204" pitchFamily="49" charset="0"/>
-              </a:rPr>
-              <a:t>T</a:t>
-            </a:r>
-            <a:r>
-              <a:rPr lang="pl-PL" sz="1200" dirty="0">
-                <a:solidFill>
-                  <a:srgbClr val="BBBEBF"/>
-                </a:solidFill>
-                <a:latin typeface="Consolas" panose="020B0609020204030204" pitchFamily="49" charset="0"/>
-              </a:rPr>
-              <a:t> </a:t>
-            </a:r>
-            <a:r>
-              <a:rPr lang="pl-PL" sz="1200" dirty="0">
-                <a:solidFill>
-                  <a:srgbClr val="DCDCAA"/>
-                </a:solidFill>
-                <a:latin typeface="Consolas" panose="020B0609020204030204" pitchFamily="49" charset="0"/>
-              </a:rPr>
-              <a:t>+</a:t>
-            </a:r>
-            <a:r>
-              <a:rPr lang="pl-PL" sz="1200" dirty="0">
-                <a:solidFill>
-                  <a:srgbClr val="BBBEBF"/>
-                </a:solidFill>
-                <a:latin typeface="Consolas" panose="020B0609020204030204" pitchFamily="49" charset="0"/>
-              </a:rPr>
-              <a:t> </a:t>
-            </a:r>
-            <a:r>
               <a:rPr lang="pl-PL" sz="1200" dirty="0" err="1">
                 <a:solidFill>
-                  <a:srgbClr val="FFA657"/>
+                  <a:srgbClr val="CCCCCC"/>
                 </a:solidFill>
                 <a:latin typeface="Consolas" panose="020B0609020204030204" pitchFamily="49" charset="0"/>
               </a:rPr>
@@ -28453,7 +27265,7 @@
             </a:r>
             <a:endParaRPr lang="pl-PL" sz="1200" dirty="0">
               <a:solidFill>
-                <a:srgbClr val="BBBEBF"/>
+                <a:srgbClr val="CCCCCC"/>
               </a:solidFill>
               <a:latin typeface="Consolas" panose="020B0609020204030204" pitchFamily="49" charset="0"/>
             </a:endParaRPr>
@@ -28462,232 +27274,88 @@
             <a:r>
               <a:rPr lang="pl-PL" sz="1200" dirty="0">
                 <a:solidFill>
-                  <a:srgbClr val="BBBEBF"/>
-                </a:solidFill>
-                <a:latin typeface="Consolas" panose="020B0609020204030204" pitchFamily="49" charset="0"/>
-              </a:rPr>
-              <a:t>    </a:t>
-            </a:r>
-            <a:r>
-              <a:rPr lang="pl-PL" sz="1200" dirty="0">
-                <a:solidFill>
-                  <a:srgbClr val="79C0FF"/>
-                </a:solidFill>
-                <a:latin typeface="Consolas" panose="020B0609020204030204" pitchFamily="49" charset="0"/>
-              </a:rPr>
-              <a:t>K</a:t>
-            </a:r>
-            <a:r>
-              <a:rPr lang="pl-PL" sz="1200" dirty="0">
-                <a:solidFill>
-                  <a:srgbClr val="BBBEBF"/>
+                  <a:srgbClr val="CCCCCC"/>
+                </a:solidFill>
+                <a:latin typeface="Consolas" panose="020B0609020204030204" pitchFamily="49" charset="0"/>
+              </a:rPr>
+              <a:t>    K </a:t>
+            </a:r>
+            <a:r>
+              <a:rPr lang="pl-PL" sz="1200" dirty="0">
+                <a:solidFill>
+                  <a:srgbClr val="D4D4D4"/>
+                </a:solidFill>
+                <a:latin typeface="Consolas" panose="020B0609020204030204" pitchFamily="49" charset="0"/>
+              </a:rPr>
+              <a:t>=</a:t>
+            </a:r>
+            <a:r>
+              <a:rPr lang="pl-PL" sz="1200" dirty="0">
+                <a:solidFill>
+                  <a:srgbClr val="CCCCCC"/>
+                </a:solidFill>
+                <a:latin typeface="Consolas" panose="020B0609020204030204" pitchFamily="49" charset="0"/>
+              </a:rPr>
+              <a:t> P </a:t>
+            </a:r>
+            <a:r>
+              <a:rPr lang="pl-PL" sz="1200" dirty="0">
+                <a:solidFill>
+                  <a:srgbClr val="D4D4D4"/>
+                </a:solidFill>
+                <a:latin typeface="Consolas" panose="020B0609020204030204" pitchFamily="49" charset="0"/>
+              </a:rPr>
+              <a:t>@</a:t>
+            </a:r>
+            <a:r>
+              <a:rPr lang="pl-PL" sz="1200" dirty="0">
+                <a:solidFill>
+                  <a:srgbClr val="CCCCCC"/>
+                </a:solidFill>
+                <a:latin typeface="Consolas" panose="020B0609020204030204" pitchFamily="49" charset="0"/>
+              </a:rPr>
+              <a:t> H.T </a:t>
+            </a:r>
+            <a:r>
+              <a:rPr lang="pl-PL" sz="1200" dirty="0">
+                <a:solidFill>
+                  <a:srgbClr val="D4D4D4"/>
+                </a:solidFill>
+                <a:latin typeface="Consolas" panose="020B0609020204030204" pitchFamily="49" charset="0"/>
+              </a:rPr>
+              <a:t>@</a:t>
+            </a:r>
+            <a:r>
+              <a:rPr lang="pl-PL" sz="1200" dirty="0">
+                <a:solidFill>
+                  <a:srgbClr val="CCCCCC"/>
                 </a:solidFill>
                 <a:latin typeface="Consolas" panose="020B0609020204030204" pitchFamily="49" charset="0"/>
               </a:rPr>
               <a:t> </a:t>
             </a:r>
             <a:r>
-              <a:rPr lang="pl-PL" sz="1200" dirty="0">
-                <a:solidFill>
-                  <a:srgbClr val="D4D4D4"/>
-                </a:solidFill>
-                <a:latin typeface="Consolas" panose="020B0609020204030204" pitchFamily="49" charset="0"/>
-              </a:rPr>
-              <a:t>=</a:t>
-            </a:r>
-            <a:r>
-              <a:rPr lang="pl-PL" sz="1200" dirty="0">
-                <a:solidFill>
-                  <a:srgbClr val="BBBEBF"/>
-                </a:solidFill>
-                <a:latin typeface="Consolas" panose="020B0609020204030204" pitchFamily="49" charset="0"/>
-              </a:rPr>
-              <a:t> </a:t>
-            </a:r>
-            <a:r>
-              <a:rPr lang="pl-PL" sz="1200" dirty="0">
-                <a:solidFill>
-                  <a:srgbClr val="FFA657"/>
-                </a:solidFill>
-                <a:latin typeface="Consolas" panose="020B0609020204030204" pitchFamily="49" charset="0"/>
-              </a:rPr>
-              <a:t>P</a:t>
-            </a:r>
-            <a:r>
-              <a:rPr lang="pl-PL" sz="1200" dirty="0">
-                <a:solidFill>
-                  <a:srgbClr val="BBBEBF"/>
-                </a:solidFill>
-                <a:latin typeface="Consolas" panose="020B0609020204030204" pitchFamily="49" charset="0"/>
-              </a:rPr>
-              <a:t> </a:t>
-            </a:r>
-            <a:r>
-              <a:rPr lang="pl-PL" sz="1200" dirty="0">
-                <a:solidFill>
-                  <a:srgbClr val="DCDCAA"/>
-                </a:solidFill>
-                <a:latin typeface="Consolas" panose="020B0609020204030204" pitchFamily="49" charset="0"/>
-              </a:rPr>
-              <a:t>@</a:t>
-            </a:r>
-            <a:r>
-              <a:rPr lang="pl-PL" sz="1200" dirty="0">
-                <a:solidFill>
-                  <a:srgbClr val="BBBEBF"/>
-                </a:solidFill>
-                <a:latin typeface="Consolas" panose="020B0609020204030204" pitchFamily="49" charset="0"/>
-              </a:rPr>
-              <a:t> </a:t>
-            </a:r>
-            <a:r>
-              <a:rPr lang="pl-PL" sz="1200" dirty="0">
-                <a:solidFill>
-                  <a:srgbClr val="79C0FF"/>
-                </a:solidFill>
-                <a:latin typeface="Consolas" panose="020B0609020204030204" pitchFamily="49" charset="0"/>
-              </a:rPr>
-              <a:t>H</a:t>
-            </a:r>
-            <a:r>
-              <a:rPr lang="pl-PL" sz="1200" dirty="0">
-                <a:solidFill>
-                  <a:srgbClr val="BBBEBF"/>
-                </a:solidFill>
-                <a:latin typeface="Consolas" panose="020B0609020204030204" pitchFamily="49" charset="0"/>
-              </a:rPr>
-              <a:t>.</a:t>
-            </a:r>
-            <a:r>
-              <a:rPr lang="pl-PL" sz="1200" dirty="0">
-                <a:solidFill>
-                  <a:srgbClr val="C9D1D9"/>
-                </a:solidFill>
-                <a:latin typeface="Consolas" panose="020B0609020204030204" pitchFamily="49" charset="0"/>
-              </a:rPr>
-              <a:t>T</a:t>
-            </a:r>
-            <a:r>
-              <a:rPr lang="pl-PL" sz="1200" dirty="0">
-                <a:solidFill>
-                  <a:srgbClr val="BBBEBF"/>
-                </a:solidFill>
-                <a:latin typeface="Consolas" panose="020B0609020204030204" pitchFamily="49" charset="0"/>
-              </a:rPr>
-              <a:t> </a:t>
-            </a:r>
-            <a:r>
-              <a:rPr lang="pl-PL" sz="1200" dirty="0">
-                <a:solidFill>
-                  <a:srgbClr val="DCDCAA"/>
-                </a:solidFill>
-                <a:latin typeface="Consolas" panose="020B0609020204030204" pitchFamily="49" charset="0"/>
-              </a:rPr>
-              <a:t>@</a:t>
-            </a:r>
-            <a:r>
-              <a:rPr lang="pl-PL" sz="1200" dirty="0">
-                <a:solidFill>
-                  <a:srgbClr val="BBBEBF"/>
-                </a:solidFill>
-                <a:latin typeface="Consolas" panose="020B0609020204030204" pitchFamily="49" charset="0"/>
-              </a:rPr>
-              <a:t> </a:t>
-            </a:r>
-            <a:r>
               <a:rPr lang="pl-PL" sz="1200" dirty="0" err="1">
                 <a:solidFill>
-                  <a:srgbClr val="4EC9B0"/>
-                </a:solidFill>
-                <a:latin typeface="Consolas" panose="020B0609020204030204" pitchFamily="49" charset="0"/>
-              </a:rPr>
-              <a:t>np</a:t>
-            </a:r>
-            <a:r>
-              <a:rPr lang="pl-PL" sz="1200" dirty="0" err="1">
-                <a:solidFill>
-                  <a:srgbClr val="BBBEBF"/>
-                </a:solidFill>
-                <a:latin typeface="Consolas" panose="020B0609020204030204" pitchFamily="49" charset="0"/>
-              </a:rPr>
-              <a:t>.</a:t>
-            </a:r>
-            <a:r>
-              <a:rPr lang="pl-PL" sz="1200" dirty="0" err="1">
-                <a:solidFill>
-                  <a:srgbClr val="4EC9B0"/>
-                </a:solidFill>
-                <a:latin typeface="Consolas" panose="020B0609020204030204" pitchFamily="49" charset="0"/>
-              </a:rPr>
-              <a:t>linalg</a:t>
-            </a:r>
-            <a:r>
-              <a:rPr lang="pl-PL" sz="1200" dirty="0" err="1">
-                <a:solidFill>
-                  <a:srgbClr val="BBBEBF"/>
-                </a:solidFill>
-                <a:latin typeface="Consolas" panose="020B0609020204030204" pitchFamily="49" charset="0"/>
-              </a:rPr>
-              <a:t>.</a:t>
-            </a:r>
-            <a:r>
-              <a:rPr lang="pl-PL" sz="1200" dirty="0" err="1">
-                <a:solidFill>
-                  <a:srgbClr val="D2A8FF"/>
-                </a:solidFill>
-                <a:latin typeface="Consolas" panose="020B0609020204030204" pitchFamily="49" charset="0"/>
-              </a:rPr>
-              <a:t>inv</a:t>
-            </a:r>
-            <a:r>
-              <a:rPr lang="pl-PL" sz="1200" dirty="0">
-                <a:solidFill>
-                  <a:srgbClr val="BBBEBF"/>
-                </a:solidFill>
-                <a:latin typeface="Consolas" panose="020B0609020204030204" pitchFamily="49" charset="0"/>
-              </a:rPr>
-              <a:t>(</a:t>
-            </a:r>
-            <a:r>
-              <a:rPr lang="pl-PL" sz="1200" dirty="0">
-                <a:solidFill>
-                  <a:srgbClr val="79C0FF"/>
-                </a:solidFill>
-                <a:latin typeface="Consolas" panose="020B0609020204030204" pitchFamily="49" charset="0"/>
-              </a:rPr>
-              <a:t>S</a:t>
-            </a:r>
-            <a:r>
-              <a:rPr lang="pl-PL" sz="1200" dirty="0">
-                <a:solidFill>
-                  <a:srgbClr val="BBBEBF"/>
-                </a:solidFill>
-                <a:latin typeface="Consolas" panose="020B0609020204030204" pitchFamily="49" charset="0"/>
-              </a:rPr>
-              <a:t>) </a:t>
-            </a:r>
-            <a:r>
-              <a:rPr lang="pl-PL" sz="1200" dirty="0" smtClean="0">
-                <a:solidFill>
-                  <a:srgbClr val="BBBEBF"/>
-                </a:solidFill>
-                <a:latin typeface="Consolas" panose="020B0609020204030204" pitchFamily="49" charset="0"/>
-              </a:rPr>
-              <a:t>                     </a:t>
-            </a:r>
-            <a:r>
-              <a:rPr lang="pl-PL" sz="1200" dirty="0">
-                <a:solidFill>
-                  <a:srgbClr val="BBBEBF"/>
-                </a:solidFill>
-                <a:latin typeface="Consolas" panose="020B0609020204030204" pitchFamily="49" charset="0"/>
-              </a:rPr>
-              <a:t> </a:t>
-            </a:r>
-            <a:r>
-              <a:rPr lang="pl-PL" sz="1200" dirty="0">
-                <a:solidFill>
-                  <a:srgbClr val="8B949E"/>
+                  <a:srgbClr val="CCCCCC"/>
+                </a:solidFill>
+                <a:latin typeface="Consolas" panose="020B0609020204030204" pitchFamily="49" charset="0"/>
+              </a:rPr>
+              <a:t>np.linalg.inv</a:t>
+            </a:r>
+            <a:r>
+              <a:rPr lang="pl-PL" sz="1200" dirty="0">
+                <a:solidFill>
+                  <a:srgbClr val="CCCCCC"/>
+                </a:solidFill>
+                <a:latin typeface="Consolas" panose="020B0609020204030204" pitchFamily="49" charset="0"/>
+              </a:rPr>
+              <a:t>(S)                       </a:t>
+            </a:r>
+            <a:r>
+              <a:rPr lang="pl-PL" sz="1200" dirty="0">
+                <a:solidFill>
+                  <a:srgbClr val="6A9955"/>
                 </a:solidFill>
                 <a:latin typeface="Consolas" panose="020B0609020204030204" pitchFamily="49" charset="0"/>
               </a:rPr>
@@ -28695,7 +27363,7 @@
             </a:r>
             <a:endParaRPr lang="pl-PL" sz="1200" dirty="0">
               <a:solidFill>
-                <a:srgbClr val="BBBEBF"/>
+                <a:srgbClr val="CCCCCC"/>
               </a:solidFill>
               <a:latin typeface="Consolas" panose="020B0609020204030204" pitchFamily="49" charset="0"/>
             </a:endParaRPr>
@@ -28704,7 +27372,7 @@
             <a:r>
               <a:rPr lang="pl-PL" sz="1200" dirty="0">
                 <a:solidFill>
-                  <a:srgbClr val="BBBEBF"/>
+                  <a:srgbClr val="CCCCCC"/>
                 </a:solidFill>
                 <a:latin typeface="Consolas" panose="020B0609020204030204" pitchFamily="49" charset="0"/>
               </a:rPr>
@@ -28713,7 +27381,7 @@
             <a:r>
               <a:rPr lang="pl-PL" sz="1200" dirty="0" err="1">
                 <a:solidFill>
-                  <a:srgbClr val="C9D1D9"/>
+                  <a:srgbClr val="CCCCCC"/>
                 </a:solidFill>
                 <a:latin typeface="Consolas" panose="020B0609020204030204" pitchFamily="49" charset="0"/>
               </a:rPr>
@@ -28722,7 +27390,7 @@
             <a:r>
               <a:rPr lang="pl-PL" sz="1200" dirty="0">
                 <a:solidFill>
-                  <a:srgbClr val="BBBEBF"/>
+                  <a:srgbClr val="CCCCCC"/>
                 </a:solidFill>
                 <a:latin typeface="Consolas" panose="020B0609020204030204" pitchFamily="49" charset="0"/>
               </a:rPr>
@@ -28740,7 +27408,7 @@
             <a:r>
               <a:rPr lang="pl-PL" sz="1200" dirty="0">
                 <a:solidFill>
-                  <a:srgbClr val="BBBEBF"/>
+                  <a:srgbClr val="CCCCCC"/>
                 </a:solidFill>
                 <a:latin typeface="Consolas" panose="020B0609020204030204" pitchFamily="49" charset="0"/>
               </a:rPr>
@@ -28749,7 +27417,7 @@
             <a:r>
               <a:rPr lang="pl-PL" sz="1200" dirty="0" err="1">
                 <a:solidFill>
-                  <a:srgbClr val="FFA657"/>
+                  <a:srgbClr val="CCCCCC"/>
                 </a:solidFill>
                 <a:latin typeface="Consolas" panose="020B0609020204030204" pitchFamily="49" charset="0"/>
               </a:rPr>
@@ -28758,7 +27426,7 @@
             <a:r>
               <a:rPr lang="pl-PL" sz="1200" dirty="0">
                 <a:solidFill>
-                  <a:srgbClr val="BBBEBF"/>
+                  <a:srgbClr val="CCCCCC"/>
                 </a:solidFill>
                 <a:latin typeface="Consolas" panose="020B0609020204030204" pitchFamily="49" charset="0"/>
               </a:rPr>
@@ -28767,7 +27435,7 @@
             <a:r>
               <a:rPr lang="pl-PL" sz="1200" dirty="0">
                 <a:solidFill>
-                  <a:srgbClr val="DCDCAA"/>
+                  <a:srgbClr val="D4D4D4"/>
                 </a:solidFill>
                 <a:latin typeface="Consolas" panose="020B0609020204030204" pitchFamily="49" charset="0"/>
               </a:rPr>
@@ -28776,52 +27444,34 @@
             <a:r>
               <a:rPr lang="pl-PL" sz="1200" dirty="0">
                 <a:solidFill>
-                  <a:srgbClr val="BBBEBF"/>
+                  <a:srgbClr val="CCCCCC"/>
+                </a:solidFill>
+                <a:latin typeface="Consolas" panose="020B0609020204030204" pitchFamily="49" charset="0"/>
+              </a:rPr>
+              <a:t> K </a:t>
+            </a:r>
+            <a:r>
+              <a:rPr lang="pl-PL" sz="1200" dirty="0">
+                <a:solidFill>
+                  <a:srgbClr val="D4D4D4"/>
+                </a:solidFill>
+                <a:latin typeface="Consolas" panose="020B0609020204030204" pitchFamily="49" charset="0"/>
+              </a:rPr>
+              <a:t>@</a:t>
+            </a:r>
+            <a:r>
+              <a:rPr lang="pl-PL" sz="1200" dirty="0">
+                <a:solidFill>
+                  <a:srgbClr val="CCCCCC"/>
                 </a:solidFill>
                 <a:latin typeface="Consolas" panose="020B0609020204030204" pitchFamily="49" charset="0"/>
               </a:rPr>
               <a:t> </a:t>
             </a:r>
             <a:r>
-              <a:rPr lang="pl-PL" sz="1200" dirty="0">
-                <a:solidFill>
-                  <a:srgbClr val="79C0FF"/>
-                </a:solidFill>
-                <a:latin typeface="Consolas" panose="020B0609020204030204" pitchFamily="49" charset="0"/>
-              </a:rPr>
-              <a:t>K</a:t>
-            </a:r>
-            <a:r>
-              <a:rPr lang="pl-PL" sz="1200" dirty="0">
-                <a:solidFill>
-                  <a:srgbClr val="BBBEBF"/>
-                </a:solidFill>
-                <a:latin typeface="Consolas" panose="020B0609020204030204" pitchFamily="49" charset="0"/>
-              </a:rPr>
-              <a:t> </a:t>
-            </a:r>
-            <a:r>
-              <a:rPr lang="pl-PL" sz="1200" dirty="0">
-                <a:solidFill>
-                  <a:srgbClr val="DCDCAA"/>
-                </a:solidFill>
-                <a:latin typeface="Consolas" panose="020B0609020204030204" pitchFamily="49" charset="0"/>
-              </a:rPr>
-              <a:t>@</a:t>
-            </a:r>
-            <a:r>
-              <a:rPr lang="pl-PL" sz="1200" dirty="0">
-                <a:solidFill>
-                  <a:srgbClr val="BBBEBF"/>
-                </a:solidFill>
-                <a:latin typeface="Consolas" panose="020B0609020204030204" pitchFamily="49" charset="0"/>
-              </a:rPr>
-              <a:t> </a:t>
-            </a:r>
-            <a:r>
               <a:rPr lang="pl-PL" sz="1200" dirty="0" err="1">
                 <a:solidFill>
-                  <a:srgbClr val="C9D1D9"/>
+                  <a:srgbClr val="CCCCCC"/>
                 </a:solidFill>
                 <a:latin typeface="Consolas" panose="020B0609020204030204" pitchFamily="49" charset="0"/>
               </a:rPr>
@@ -28829,7 +27479,7 @@
             </a:r>
             <a:endParaRPr lang="pl-PL" sz="1200" dirty="0">
               <a:solidFill>
-                <a:srgbClr val="BBBEBF"/>
+                <a:srgbClr val="CCCCCC"/>
               </a:solidFill>
               <a:latin typeface="Consolas" panose="020B0609020204030204" pitchFamily="49" charset="0"/>
             </a:endParaRPr>
@@ -28838,7 +27488,7 @@
             <a:r>
               <a:rPr lang="pl-PL" sz="1200" dirty="0">
                 <a:solidFill>
-                  <a:srgbClr val="BBBEBF"/>
+                  <a:srgbClr val="CCCCCC"/>
                 </a:solidFill>
                 <a:latin typeface="Consolas" panose="020B0609020204030204" pitchFamily="49" charset="0"/>
               </a:rPr>
@@ -28847,7 +27497,7 @@
             <a:r>
               <a:rPr lang="pl-PL" sz="1200" dirty="0" err="1">
                 <a:solidFill>
-                  <a:srgbClr val="C9D1D9"/>
+                  <a:srgbClr val="CCCCCC"/>
                 </a:solidFill>
                 <a:latin typeface="Consolas" panose="020B0609020204030204" pitchFamily="49" charset="0"/>
               </a:rPr>
@@ -28856,7 +27506,7 @@
             <a:r>
               <a:rPr lang="pl-PL" sz="1200" dirty="0">
                 <a:solidFill>
-                  <a:srgbClr val="BBBEBF"/>
+                  <a:srgbClr val="CCCCCC"/>
                 </a:solidFill>
                 <a:latin typeface="Consolas" panose="020B0609020204030204" pitchFamily="49" charset="0"/>
               </a:rPr>
@@ -28874,7 +27524,7 @@
             <a:r>
               <a:rPr lang="pl-PL" sz="1200" dirty="0">
                 <a:solidFill>
-                  <a:srgbClr val="BBBEBF"/>
+                  <a:srgbClr val="CCCCCC"/>
                 </a:solidFill>
                 <a:latin typeface="Consolas" panose="020B0609020204030204" pitchFamily="49" charset="0"/>
               </a:rPr>
@@ -28883,221 +27533,152 @@
             <a:r>
               <a:rPr lang="pl-PL" sz="1200" dirty="0" err="1">
                 <a:solidFill>
-                  <a:srgbClr val="4EC9B0"/>
-                </a:solidFill>
-                <a:latin typeface="Consolas" panose="020B0609020204030204" pitchFamily="49" charset="0"/>
-              </a:rPr>
-              <a:t>np</a:t>
+                  <a:srgbClr val="CCCCCC"/>
+                </a:solidFill>
+                <a:latin typeface="Consolas" panose="020B0609020204030204" pitchFamily="49" charset="0"/>
+              </a:rPr>
+              <a:t>np.eye</a:t>
+            </a:r>
+            <a:r>
+              <a:rPr lang="pl-PL" sz="1200" dirty="0">
+                <a:solidFill>
+                  <a:srgbClr val="CCCCCC"/>
+                </a:solidFill>
+                <a:latin typeface="Consolas" panose="020B0609020204030204" pitchFamily="49" charset="0"/>
+              </a:rPr>
+              <a:t>(</a:t>
+            </a:r>
+            <a:r>
+              <a:rPr lang="pl-PL" sz="1200" dirty="0">
+                <a:solidFill>
+                  <a:srgbClr val="B5CEA8"/>
+                </a:solidFill>
+                <a:latin typeface="Consolas" panose="020B0609020204030204" pitchFamily="49" charset="0"/>
+              </a:rPr>
+              <a:t>3</a:t>
+            </a:r>
+            <a:r>
+              <a:rPr lang="pl-PL" sz="1200" dirty="0">
+                <a:solidFill>
+                  <a:srgbClr val="CCCCCC"/>
+                </a:solidFill>
+                <a:latin typeface="Consolas" panose="020B0609020204030204" pitchFamily="49" charset="0"/>
+              </a:rPr>
+              <a:t>) </a:t>
+            </a:r>
+            <a:r>
+              <a:rPr lang="pl-PL" sz="1200" dirty="0">
+                <a:solidFill>
+                  <a:srgbClr val="D4D4D4"/>
+                </a:solidFill>
+                <a:latin typeface="Consolas" panose="020B0609020204030204" pitchFamily="49" charset="0"/>
+              </a:rPr>
+              <a:t>-</a:t>
+            </a:r>
+            <a:r>
+              <a:rPr lang="pl-PL" sz="1200" dirty="0">
+                <a:solidFill>
+                  <a:srgbClr val="CCCCCC"/>
+                </a:solidFill>
+                <a:latin typeface="Consolas" panose="020B0609020204030204" pitchFamily="49" charset="0"/>
+              </a:rPr>
+              <a:t> K </a:t>
+            </a:r>
+            <a:r>
+              <a:rPr lang="pl-PL" sz="1200" dirty="0">
+                <a:solidFill>
+                  <a:srgbClr val="D4D4D4"/>
+                </a:solidFill>
+                <a:latin typeface="Consolas" panose="020B0609020204030204" pitchFamily="49" charset="0"/>
+              </a:rPr>
+              <a:t>@</a:t>
+            </a:r>
+            <a:r>
+              <a:rPr lang="pl-PL" sz="1200" dirty="0">
+                <a:solidFill>
+                  <a:srgbClr val="CCCCCC"/>
+                </a:solidFill>
+                <a:latin typeface="Consolas" panose="020B0609020204030204" pitchFamily="49" charset="0"/>
+              </a:rPr>
+              <a:t> H) </a:t>
+            </a:r>
+            <a:r>
+              <a:rPr lang="pl-PL" sz="1200" dirty="0">
+                <a:solidFill>
+                  <a:srgbClr val="D4D4D4"/>
+                </a:solidFill>
+                <a:latin typeface="Consolas" panose="020B0609020204030204" pitchFamily="49" charset="0"/>
+              </a:rPr>
+              <a:t>@</a:t>
+            </a:r>
+            <a:r>
+              <a:rPr lang="pl-PL" sz="1200" dirty="0">
+                <a:solidFill>
+                  <a:srgbClr val="CCCCCC"/>
+                </a:solidFill>
+                <a:latin typeface="Consolas" panose="020B0609020204030204" pitchFamily="49" charset="0"/>
+              </a:rPr>
+              <a:t> P</a:t>
+            </a:r>
+          </a:p>
+          <a:p>
+            <a:r>
+              <a:rPr lang="pl-PL" sz="1200" dirty="0">
+                <a:solidFill>
+                  <a:srgbClr val="CCCCCC"/>
+                </a:solidFill>
+                <a:latin typeface="Consolas" panose="020B0609020204030204" pitchFamily="49" charset="0"/>
+              </a:rPr>
+              <a:t>    </a:t>
+            </a:r>
+            <a:r>
+              <a:rPr lang="pl-PL" sz="1200" dirty="0">
+                <a:solidFill>
+                  <a:srgbClr val="C586C0"/>
+                </a:solidFill>
+                <a:latin typeface="Consolas" panose="020B0609020204030204" pitchFamily="49" charset="0"/>
+              </a:rPr>
+              <a:t>return</a:t>
+            </a:r>
+            <a:r>
+              <a:rPr lang="pl-PL" sz="1200" dirty="0">
+                <a:solidFill>
+                  <a:srgbClr val="CCCCCC"/>
+                </a:solidFill>
+                <a:latin typeface="Consolas" panose="020B0609020204030204" pitchFamily="49" charset="0"/>
+              </a:rPr>
+              <a:t> </a:t>
             </a:r>
             <a:r>
               <a:rPr lang="pl-PL" sz="1200" dirty="0" err="1">
                 <a:solidFill>
-                  <a:srgbClr val="BBBEBF"/>
-                </a:solidFill>
-                <a:latin typeface="Consolas" panose="020B0609020204030204" pitchFamily="49" charset="0"/>
-              </a:rPr>
-              <a:t>.</a:t>
-            </a:r>
-            <a:r>
-              <a:rPr lang="pl-PL" sz="1200" dirty="0" err="1">
-                <a:solidFill>
-                  <a:srgbClr val="D2A8FF"/>
-                </a:solidFill>
-                <a:latin typeface="Consolas" panose="020B0609020204030204" pitchFamily="49" charset="0"/>
-              </a:rPr>
-              <a:t>eye</a:t>
-            </a:r>
-            <a:r>
-              <a:rPr lang="pl-PL" sz="1200" dirty="0">
-                <a:solidFill>
-                  <a:srgbClr val="BBBEBF"/>
-                </a:solidFill>
-                <a:latin typeface="Consolas" panose="020B0609020204030204" pitchFamily="49" charset="0"/>
-              </a:rPr>
-              <a:t>(</a:t>
-            </a:r>
-            <a:r>
-              <a:rPr lang="pl-PL" sz="1200" dirty="0">
-                <a:solidFill>
-                  <a:srgbClr val="B5CEA8"/>
-                </a:solidFill>
-                <a:latin typeface="Consolas" panose="020B0609020204030204" pitchFamily="49" charset="0"/>
-              </a:rPr>
-              <a:t>3</a:t>
-            </a:r>
-            <a:r>
-              <a:rPr lang="pl-PL" sz="1200" dirty="0">
-                <a:solidFill>
-                  <a:srgbClr val="BBBEBF"/>
-                </a:solidFill>
-                <a:latin typeface="Consolas" panose="020B0609020204030204" pitchFamily="49" charset="0"/>
-              </a:rPr>
-              <a:t>) </a:t>
-            </a:r>
-            <a:r>
-              <a:rPr lang="pl-PL" sz="1200" dirty="0">
-                <a:solidFill>
-                  <a:srgbClr val="DCDCAA"/>
-                </a:solidFill>
-                <a:latin typeface="Consolas" panose="020B0609020204030204" pitchFamily="49" charset="0"/>
-              </a:rPr>
-              <a:t>-</a:t>
-            </a:r>
-            <a:r>
-              <a:rPr lang="pl-PL" sz="1200" dirty="0">
-                <a:solidFill>
-                  <a:srgbClr val="BBBEBF"/>
-                </a:solidFill>
-                <a:latin typeface="Consolas" panose="020B0609020204030204" pitchFamily="49" charset="0"/>
-              </a:rPr>
-              <a:t> </a:t>
-            </a:r>
-            <a:r>
-              <a:rPr lang="pl-PL" sz="1200" dirty="0">
-                <a:solidFill>
-                  <a:srgbClr val="79C0FF"/>
-                </a:solidFill>
-                <a:latin typeface="Consolas" panose="020B0609020204030204" pitchFamily="49" charset="0"/>
-              </a:rPr>
-              <a:t>K</a:t>
-            </a:r>
-            <a:r>
-              <a:rPr lang="pl-PL" sz="1200" dirty="0">
-                <a:solidFill>
-                  <a:srgbClr val="BBBEBF"/>
-                </a:solidFill>
-                <a:latin typeface="Consolas" panose="020B0609020204030204" pitchFamily="49" charset="0"/>
-              </a:rPr>
-              <a:t> </a:t>
-            </a:r>
-            <a:r>
-              <a:rPr lang="pl-PL" sz="1200" dirty="0">
-                <a:solidFill>
-                  <a:srgbClr val="DCDCAA"/>
-                </a:solidFill>
-                <a:latin typeface="Consolas" panose="020B0609020204030204" pitchFamily="49" charset="0"/>
-              </a:rPr>
-              <a:t>@</a:t>
-            </a:r>
-            <a:r>
-              <a:rPr lang="pl-PL" sz="1200" dirty="0">
-                <a:solidFill>
-                  <a:srgbClr val="BBBEBF"/>
-                </a:solidFill>
-                <a:latin typeface="Consolas" panose="020B0609020204030204" pitchFamily="49" charset="0"/>
-              </a:rPr>
-              <a:t> </a:t>
-            </a:r>
-            <a:r>
-              <a:rPr lang="pl-PL" sz="1200" dirty="0">
-                <a:solidFill>
-                  <a:srgbClr val="79C0FF"/>
-                </a:solidFill>
-                <a:latin typeface="Consolas" panose="020B0609020204030204" pitchFamily="49" charset="0"/>
-              </a:rPr>
-              <a:t>H</a:t>
-            </a:r>
-            <a:r>
-              <a:rPr lang="pl-PL" sz="1200" dirty="0">
-                <a:solidFill>
-                  <a:srgbClr val="BBBEBF"/>
-                </a:solidFill>
-                <a:latin typeface="Consolas" panose="020B0609020204030204" pitchFamily="49" charset="0"/>
-              </a:rPr>
-              <a:t>) </a:t>
-            </a:r>
-            <a:r>
-              <a:rPr lang="pl-PL" sz="1200" dirty="0">
-                <a:solidFill>
-                  <a:srgbClr val="DCDCAA"/>
-                </a:solidFill>
-                <a:latin typeface="Consolas" panose="020B0609020204030204" pitchFamily="49" charset="0"/>
-              </a:rPr>
-              <a:t>@</a:t>
-            </a:r>
-            <a:r>
-              <a:rPr lang="pl-PL" sz="1200" dirty="0">
-                <a:solidFill>
-                  <a:srgbClr val="BBBEBF"/>
-                </a:solidFill>
-                <a:latin typeface="Consolas" panose="020B0609020204030204" pitchFamily="49" charset="0"/>
-              </a:rPr>
-              <a:t> </a:t>
-            </a:r>
-            <a:r>
-              <a:rPr lang="pl-PL" sz="1200" dirty="0">
-                <a:solidFill>
-                  <a:srgbClr val="FFA657"/>
-                </a:solidFill>
-                <a:latin typeface="Consolas" panose="020B0609020204030204" pitchFamily="49" charset="0"/>
-              </a:rPr>
-              <a:t>P</a:t>
+                  <a:srgbClr val="CCCCCC"/>
+                </a:solidFill>
+                <a:latin typeface="Consolas" panose="020B0609020204030204" pitchFamily="49" charset="0"/>
+              </a:rPr>
+              <a:t>state_new</a:t>
+            </a:r>
+            <a:r>
+              <a:rPr lang="pl-PL" sz="1200" dirty="0">
+                <a:solidFill>
+                  <a:srgbClr val="CCCCCC"/>
+                </a:solidFill>
+                <a:latin typeface="Consolas" panose="020B0609020204030204" pitchFamily="49" charset="0"/>
+              </a:rPr>
+              <a:t>, </a:t>
+            </a:r>
+            <a:r>
+              <a:rPr lang="pl-PL" sz="1200" dirty="0" err="1" smtClean="0">
+                <a:solidFill>
+                  <a:srgbClr val="CCCCCC"/>
+                </a:solidFill>
+                <a:latin typeface="Consolas" panose="020B0609020204030204" pitchFamily="49" charset="0"/>
+              </a:rPr>
+              <a:t>P_new</a:t>
             </a:r>
             <a:endParaRPr lang="pl-PL" sz="1200" dirty="0">
               <a:solidFill>
-                <a:srgbClr val="BBBEBF"/>
-              </a:solidFill>
-              <a:latin typeface="Consolas" panose="020B0609020204030204" pitchFamily="49" charset="0"/>
-            </a:endParaRPr>
-          </a:p>
-          <a:p>
-            <a:r>
-              <a:rPr lang="pl-PL" sz="1200" dirty="0">
-                <a:solidFill>
-                  <a:srgbClr val="BBBEBF"/>
-                </a:solidFill>
-                <a:latin typeface="Consolas" panose="020B0609020204030204" pitchFamily="49" charset="0"/>
-              </a:rPr>
-              <a:t>    </a:t>
-            </a:r>
-            <a:r>
-              <a:rPr lang="pl-PL" sz="1200" dirty="0">
-                <a:solidFill>
-                  <a:srgbClr val="C586C0"/>
-                </a:solidFill>
-                <a:latin typeface="Consolas" panose="020B0609020204030204" pitchFamily="49" charset="0"/>
-              </a:rPr>
-              <a:t>return</a:t>
-            </a:r>
-            <a:r>
-              <a:rPr lang="pl-PL" sz="1200" dirty="0">
-                <a:solidFill>
-                  <a:srgbClr val="BBBEBF"/>
-                </a:solidFill>
-                <a:latin typeface="Consolas" panose="020B0609020204030204" pitchFamily="49" charset="0"/>
-              </a:rPr>
-              <a:t> </a:t>
-            </a:r>
-            <a:r>
-              <a:rPr lang="pl-PL" sz="1200" dirty="0" err="1">
-                <a:solidFill>
-                  <a:srgbClr val="C9D1D9"/>
-                </a:solidFill>
-                <a:latin typeface="Consolas" panose="020B0609020204030204" pitchFamily="49" charset="0"/>
-              </a:rPr>
-              <a:t>state_new</a:t>
-            </a:r>
-            <a:r>
-              <a:rPr lang="pl-PL" sz="1200" dirty="0">
-                <a:solidFill>
-                  <a:srgbClr val="BBBEBF"/>
-                </a:solidFill>
-                <a:latin typeface="Consolas" panose="020B0609020204030204" pitchFamily="49" charset="0"/>
-              </a:rPr>
-              <a:t>, </a:t>
-            </a:r>
-            <a:r>
-              <a:rPr lang="pl-PL" sz="1200" dirty="0" err="1" smtClean="0">
-                <a:solidFill>
-                  <a:srgbClr val="C9D1D9"/>
-                </a:solidFill>
-                <a:latin typeface="Consolas" panose="020B0609020204030204" pitchFamily="49" charset="0"/>
-              </a:rPr>
-              <a:t>P_new</a:t>
-            </a:r>
-            <a:endParaRPr lang="pl-PL" sz="1200" dirty="0">
-              <a:solidFill>
-                <a:srgbClr val="BBBEBF"/>
+                <a:srgbClr val="CCCCCC"/>
               </a:solidFill>
               <a:latin typeface="Consolas" panose="020B0609020204030204" pitchFamily="49" charset="0"/>
             </a:endParaRPr>
@@ -31313,6 +29894,50 @@
               <a:buNone/>
             </a:pPr>
             <a:r>
+              <a:rPr lang="en-US" sz="1600" b="1" spc="-50" dirty="0">
+                <a:solidFill>
+                  <a:srgbClr val="E2EBF3"/>
+                </a:solidFill>
+                <a:latin typeface="Calibri" pitchFamily="34" charset="0"/>
+                <a:ea typeface="Calibri" pitchFamily="34" charset="-122"/>
+                <a:cs typeface="Calibri" pitchFamily="34" charset="-120"/>
+              </a:rPr>
+              <a:t>Dryft odometrii jest </a:t>
+            </a:r>
+            <a:r>
+              <a:rPr lang="en-US" sz="1600" b="1" spc="-50" dirty="0" err="1" smtClean="0">
+                <a:solidFill>
+                  <a:srgbClr val="E2EBF3"/>
+                </a:solidFill>
+                <a:latin typeface="Calibri" pitchFamily="34" charset="0"/>
+                <a:ea typeface="Calibri" pitchFamily="34" charset="-122"/>
+                <a:cs typeface="Calibri" pitchFamily="34" charset="-120"/>
+              </a:rPr>
+              <a:t>nieunikniony</a:t>
+            </a:r>
+            <a:r>
+              <a:rPr lang="pl-PL" sz="1600" b="1" spc="-50" dirty="0" smtClean="0">
+                <a:solidFill>
+                  <a:srgbClr val="E2EBF3"/>
+                </a:solidFill>
+                <a:latin typeface="Calibri" pitchFamily="34" charset="0"/>
+                <a:ea typeface="Calibri" pitchFamily="34" charset="-122"/>
+                <a:cs typeface="Calibri" pitchFamily="34" charset="-120"/>
+              </a:rPr>
+              <a:t>:</a:t>
+            </a:r>
+            <a:r>
+              <a:rPr lang="en-US" sz="1600" spc="-50" dirty="0" smtClean="0">
+                <a:solidFill>
+                  <a:srgbClr val="E2EBF3"/>
+                </a:solidFill>
+                <a:latin typeface="Calibri" pitchFamily="34" charset="0"/>
+                <a:ea typeface="Calibri" pitchFamily="34" charset="-122"/>
+                <a:cs typeface="Calibri" pitchFamily="34" charset="-120"/>
+              </a:rPr>
+              <a:t> </a:t>
+            </a:r>
+            <a:r>
               <a:rPr lang="en-US" sz="1600" spc="-50" dirty="0">
                 <a:solidFill>
                   <a:srgbClr val="E2EBF3"/>
@@ -31321,7 +29946,7 @@
                 <a:ea typeface="Calibri" pitchFamily="34" charset="-122"/>
                 <a:cs typeface="Calibri" pitchFamily="34" charset="-120"/>
               </a:rPr>
-              <a:t>Dryft odometrii jest nieunikniony – konieczna jest korekta z zewnętrznych sensorów </a:t>
+              <a:t>konieczna jest korekta z zewnętrznych sensorów </a:t>
             </a:r>
             <a:r>
               <a:rPr lang="en-US" sz="1600" spc="-50" dirty="0" err="1">
@@ -31449,6 +30074,17 @@
               <a:buNone/>
             </a:pPr>
             <a:r>
+              <a:rPr lang="en-US" sz="1600" b="1" spc="-50" dirty="0">
+                <a:solidFill>
+                  <a:srgbClr val="E2EBF3"/>
+                </a:solidFill>
+                <a:latin typeface="Calibri" pitchFamily="34" charset="0"/>
+                <a:ea typeface="Calibri" pitchFamily="34" charset="-122"/>
+                <a:cs typeface="Calibri" pitchFamily="34" charset="-120"/>
+              </a:rPr>
+              <a:t>Filtr Kalmana </a:t>
+            </a:r>
+            <a:r>
               <a:rPr lang="en-US" sz="1600" spc="-50" dirty="0">
                 <a:solidFill>
                   <a:srgbClr val="E2EBF3"/>
@@ -31457,7 +30093,7 @@
                 <a:ea typeface="Calibri" pitchFamily="34" charset="-122"/>
                 <a:cs typeface="Calibri" pitchFamily="34" charset="-120"/>
               </a:rPr>
-              <a:t>Filtr Kalmana (EKF/UKF) to złoty standard fuzji IMU, enkoderów i </a:t>
+              <a:t>(EKF/UKF) to złoty standard fuzji IMU, enkoderów i </a:t>
             </a:r>
             <a:r>
               <a:rPr lang="en-US" sz="1600" spc="-50" dirty="0" err="1">
@@ -31585,6 +30221,17 @@
               <a:buNone/>
             </a:pPr>
             <a:r>
+              <a:rPr lang="en-US" sz="1600" b="1" spc="-50" dirty="0">
+                <a:solidFill>
+                  <a:srgbClr val="E2EBF3"/>
+                </a:solidFill>
+                <a:latin typeface="Calibri" pitchFamily="34" charset="0"/>
+                <a:ea typeface="Calibri" pitchFamily="34" charset="-122"/>
+                <a:cs typeface="Calibri" pitchFamily="34" charset="-120"/>
+              </a:rPr>
+              <a:t>Filtr cząsteczkowy </a:t>
+            </a:r>
+            <a:r>
               <a:rPr lang="en-US" sz="1600" spc="-50" dirty="0">
                 <a:solidFill>
                   <a:srgbClr val="E2EBF3"/>
@@ -31593,7 +30240,7 @@
                 <a:ea typeface="Calibri" pitchFamily="34" charset="-122"/>
                 <a:cs typeface="Calibri" pitchFamily="34" charset="-120"/>
               </a:rPr>
-              <a:t>Filtr cząsteczkowy radzi sobie z wielomodalnością, lecz wymaga większych </a:t>
+              <a:t>radzi sobie z wielomodalnością, lecz wymaga większych </a:t>
             </a:r>
             <a:r>
               <a:rPr lang="en-US" sz="1600" spc="-50" dirty="0" err="1">
@@ -31721,6 +30368,17 @@
               <a:buNone/>
             </a:pPr>
             <a:r>
+              <a:rPr lang="en-US" sz="1600" b="1" spc="-50" dirty="0">
+                <a:solidFill>
+                  <a:srgbClr val="E2EBF3"/>
+                </a:solidFill>
+                <a:latin typeface="Calibri" pitchFamily="34" charset="0"/>
+                <a:ea typeface="Calibri" pitchFamily="34" charset="-122"/>
+                <a:cs typeface="Calibri" pitchFamily="34" charset="-120"/>
+              </a:rPr>
+              <a:t>SLAM</a:t>
+            </a:r>
+            <a:r>
               <a:rPr lang="en-US" sz="1600" spc="-50" dirty="0">
                 <a:solidFill>
                   <a:srgbClr val="E2EBF3"/>
@@ -31729,7 +30387,7 @@
                 <a:ea typeface="Calibri" pitchFamily="34" charset="-122"/>
                 <a:cs typeface="Calibri" pitchFamily="34" charset="-120"/>
               </a:rPr>
-              <a:t>SLAM </a:t>
+              <a:t> </a:t>
             </a:r>
             <a:r>
               <a:rPr lang="pl-PL" sz="1600" spc="-50" dirty="0" smtClean="0">
@@ -31820,6 +30478,17 @@
               <a:t>)</a:t>
             </a:r>
             <a:r>
+              <a:rPr lang="pl-PL" sz="1600" spc="-50" dirty="0">
+                <a:solidFill>
+                  <a:srgbClr val="E2EBF3"/>
+                </a:solidFill>
+                <a:latin typeface="Calibri" pitchFamily="34" charset="0"/>
+                <a:ea typeface="Calibri" pitchFamily="34" charset="-122"/>
+                <a:cs typeface="Calibri" pitchFamily="34" charset="-120"/>
+              </a:rPr>
+              <a:t>:</a:t>
+            </a:r>
+            <a:r>
               <a:rPr lang="en-US" sz="1600" spc="-50" dirty="0" smtClean="0">
                 <a:solidFill>
                   <a:srgbClr val="E2EBF3"/>
@@ -31839,7 +30508,7 @@
                 <a:ea typeface="Calibri" pitchFamily="34" charset="-122"/>
                 <a:cs typeface="Calibri" pitchFamily="34" charset="-120"/>
               </a:rPr>
-              <a:t>– pozwala robotowi budować i korygować mapę w </a:t>
+              <a:t>pozwala robotowi budować i korygować mapę w </a:t>
             </a:r>
             <a:r>
               <a:rPr lang="en-US" sz="1600" spc="-50" dirty="0" err="1" smtClean="0">
@@ -31945,6 +30614,17 @@
               <a:buNone/>
             </a:pPr>
             <a:r>
+              <a:rPr lang="en-US" sz="1600" b="1" spc="-50" dirty="0">
+                <a:solidFill>
+                  <a:srgbClr val="E2EBF3"/>
+                </a:solidFill>
+                <a:latin typeface="Calibri" pitchFamily="34" charset="0"/>
+                <a:ea typeface="Calibri" pitchFamily="34" charset="-122"/>
+                <a:cs typeface="Calibri" pitchFamily="34" charset="-120"/>
+              </a:rPr>
+              <a:t>Domykanie pętli </a:t>
+            </a:r>
+            <a:r>
               <a:rPr lang="en-US" sz="1600" spc="-50" dirty="0">
                 <a:solidFill>
                   <a:srgbClr val="E2EBF3"/>
@@ -31953,7 +30633,7 @@
                 <a:ea typeface="Calibri" pitchFamily="34" charset="-122"/>
                 <a:cs typeface="Calibri" pitchFamily="34" charset="-120"/>
               </a:rPr>
-              <a:t>Domykanie pętli eliminuje skumulowany dryft; awarię sensora wykrywa się przez test </a:t>
+              <a:t>eliminuje skumulowany dryft; awarię sensora wykrywa się przez test </a:t>
             </a:r>
             <a:r>
               <a:rPr lang="en-US" sz="1600" spc="-50" dirty="0" err="1" smtClean="0">
@@ -32193,12 +30873,13 @@
           </a:bodyPr>
           <a:lstStyle/>
           <a:p>
-            <a:pPr marL="216000" indent="-216000">
+            <a:pPr marL="342900" indent="-342900">
               <a:spcAft>
                 <a:spcPts val="900"/>
               </a:spcAft>
               <a:buSzPct val="100000"/>
-              <a:buChar char="•"/>
+              <a:buFont typeface="+mj-lt"/>
+              <a:buAutoNum type="arabicPeriod"/>
             </a:pPr>
             <a:r>
               <a:rPr lang="en-US" sz="1600" spc="-40" dirty="0">
@@ -32214,12 +30895,13 @@
             <a:endParaRPr lang="en-US" sz="1600" spc="-40" dirty="0"/>
           </a:p>
           <a:p>
-            <a:pPr marL="216000" indent="-216000">
+            <a:pPr marL="342900" indent="-342900">
               <a:spcAft>
                 <a:spcPts val="900"/>
               </a:spcAft>
               <a:buSzPct val="100000"/>
-              <a:buChar char="•"/>
+              <a:buFont typeface="+mj-lt"/>
+              <a:buAutoNum type="arabicPeriod"/>
             </a:pPr>
             <a:r>
               <a:rPr lang="en-US" sz="1600" spc="-40" dirty="0">
@@ -32235,12 +30917,13 @@
             <a:endParaRPr lang="en-US" sz="1600" spc="-40" dirty="0"/>
           </a:p>
           <a:p>
-            <a:pPr marL="216000" indent="-216000">
+            <a:pPr marL="342900" indent="-342900">
               <a:spcAft>
                 <a:spcPts val="900"/>
               </a:spcAft>
               <a:buSzPct val="100000"/>
-              <a:buChar char="•"/>
+              <a:buFont typeface="+mj-lt"/>
+              <a:buAutoNum type="arabicPeriod"/>
             </a:pPr>
             <a:r>
               <a:rPr lang="en-US" sz="1600" spc="-40" dirty="0">
@@ -32256,12 +30939,13 @@
             <a:endParaRPr lang="en-US" sz="1600" spc="-40" dirty="0"/>
           </a:p>
           <a:p>
-            <a:pPr marL="216000" indent="-216000">
+            <a:pPr marL="342900" indent="-342900">
               <a:spcAft>
                 <a:spcPts val="900"/>
               </a:spcAft>
               <a:buSzPct val="100000"/>
-              <a:buChar char="•"/>
+              <a:buFont typeface="+mj-lt"/>
+              <a:buAutoNum type="arabicPeriod"/>
             </a:pPr>
             <a:r>
               <a:rPr lang="en-US" sz="1600" spc="-60" dirty="0" err="1" smtClean="0">

--- a/zajecia/robo/robo_w2.pptx
+++ b/zajecia/robo/robo_w2.pptx
@@ -4439,7 +4439,7 @@
               <a:r>
                 <a:rPr lang="en-US" sz="1400" b="1" dirty="0">
                   <a:solidFill>
-                    <a:srgbClr val="90E0EF"/>
+                    <a:schemeClr val="bg1"/>
                   </a:solidFill>
                   <a:latin typeface="Trebuchet MS" pitchFamily="34" charset="0"/>
                   <a:ea typeface="Trebuchet MS" pitchFamily="34" charset="-122"/>
@@ -4447,7 +4447,11 @@
                 </a:rPr>
                 <a:t>Estymacja stanu</a:t>
               </a:r>
-              <a:endParaRPr lang="en-US" sz="1400" dirty="0"/>
+              <a:endParaRPr lang="en-US" sz="1400" dirty="0">
+                <a:solidFill>
+                  <a:schemeClr val="bg1"/>
+                </a:solidFill>
+              </a:endParaRPr>
             </a:p>
           </p:txBody>
         </p:sp>
@@ -4503,7 +4507,7 @@
               <a:r>
                 <a:rPr lang="en-US" sz="1400" b="1" dirty="0">
                   <a:solidFill>
-                    <a:srgbClr val="90E0EF"/>
+                    <a:schemeClr val="bg1"/>
                   </a:solidFill>
                   <a:latin typeface="Trebuchet MS" pitchFamily="34" charset="0"/>
                   <a:ea typeface="Trebuchet MS" pitchFamily="34" charset="-122"/>
@@ -4511,7 +4515,11 @@
                 </a:rPr>
                 <a:t>Filtry EKF/UKF</a:t>
               </a:r>
-              <a:endParaRPr lang="en-US" sz="1400" dirty="0"/>
+              <a:endParaRPr lang="en-US" sz="1400" dirty="0">
+                <a:solidFill>
+                  <a:schemeClr val="bg1"/>
+                </a:solidFill>
+              </a:endParaRPr>
             </a:p>
           </p:txBody>
         </p:sp>
@@ -4567,7 +4575,7 @@
               <a:r>
                 <a:rPr lang="en-US" sz="1600" b="1" dirty="0">
                   <a:solidFill>
-                    <a:srgbClr val="90E0EF"/>
+                    <a:schemeClr val="bg1"/>
                   </a:solidFill>
                   <a:latin typeface="Trebuchet MS" pitchFamily="34" charset="0"/>
                   <a:ea typeface="Trebuchet MS" pitchFamily="34" charset="-122"/>
@@ -4575,7 +4583,11 @@
                 </a:rPr>
                 <a:t>Fuzja sensoryczna</a:t>
               </a:r>
-              <a:endParaRPr lang="en-US" sz="1600" dirty="0"/>
+              <a:endParaRPr lang="en-US" sz="1600" dirty="0">
+                <a:solidFill>
+                  <a:schemeClr val="bg1"/>
+                </a:solidFill>
+              </a:endParaRPr>
             </a:p>
           </p:txBody>
         </p:sp>
@@ -4631,7 +4643,7 @@
               <a:r>
                 <a:rPr lang="en-US" b="1" dirty="0">
                   <a:solidFill>
-                    <a:srgbClr val="90E0EF"/>
+                    <a:schemeClr val="bg1"/>
                   </a:solidFill>
                   <a:latin typeface="Trebuchet MS" pitchFamily="34" charset="0"/>
                   <a:ea typeface="Trebuchet MS" pitchFamily="34" charset="-122"/>
@@ -4639,7 +4651,11 @@
                 </a:rPr>
                 <a:t>SLAM</a:t>
               </a:r>
-              <a:endParaRPr lang="en-US" dirty="0"/>
+              <a:endParaRPr lang="en-US" dirty="0">
+                <a:solidFill>
+                  <a:schemeClr val="bg1"/>
+                </a:solidFill>
+              </a:endParaRPr>
             </a:p>
           </p:txBody>
         </p:sp>
@@ -28116,7 +28132,7 @@
         <p:spPr>
           <a:xfrm>
             <a:off x="2926080" y="2834640"/>
-            <a:ext cx="3931920" cy="822960"/>
+            <a:ext cx="3931920" cy="505565"/>
           </a:xfrm>
           <a:prstGeom prst="rect">
             <a:avLst/>
@@ -35034,17 +35050,32 @@
         <p:spPr>
           <a:xfrm>
             <a:off x="274320" y="4045074"/>
-            <a:ext cx="8595360" cy="992516"/>
+            <a:ext cx="8595360" cy="1043088"/>
           </a:xfrm>
           <a:prstGeom prst="rect">
             <a:avLst/>
           </a:prstGeom>
           <a:solidFill>
-            <a:srgbClr val="0D1B2A"/>
+            <a:schemeClr val="tx1">
+              <a:lumMod val="85000"/>
+              <a:lumOff val="15000"/>
+            </a:schemeClr>
           </a:solidFill>
+          <a:ln w="19050">
+            <a:solidFill>
+              <a:schemeClr val="tx1"/>
+            </a:solidFill>
+          </a:ln>
+          <a:effectLst>
+            <a:outerShdw blurRad="25400" dist="12700" dir="2700000" algn="tl" rotWithShape="0">
+              <a:prstClr val="black">
+                <a:alpha val="40000"/>
+              </a:prstClr>
+            </a:outerShdw>
+          </a:effectLst>
         </p:spPr>
         <p:txBody>
-          <a:bodyPr wrap="square">
+          <a:bodyPr wrap="square" tIns="72000" bIns="36000">
             <a:spAutoFit/>
           </a:bodyPr>
           <a:lstStyle/>
